--- a/slides/datasets-in-10-minutes-chid.pptx
+++ b/slides/datasets-in-10-minutes-chid.pptx
@@ -26,13 +26,11 @@
     <p:sldId id="274" r:id="rId24"/>
     <p:sldId id="275" r:id="rId25"/>
     <p:sldId id="276" r:id="rId26"/>
-    <p:sldId id="277" r:id="rId27"/>
     <p:sldId id="278" r:id="rId28"/>
     <p:sldId id="279" r:id="rId29"/>
     <p:sldId id="280" r:id="rId30"/>
     <p:sldId id="281" r:id="rId31"/>
     <p:sldId id="282" r:id="rId32"/>
-    <p:sldId id="283" r:id="rId33"/>
     <p:sldId id="284" r:id="rId34"/>
     <p:sldId id="285" r:id="rId35"/>
     <p:sldId id="286" r:id="rId36"/>
@@ -50,8 +48,6 @@
     <p:sldId id="298" r:id="rId48"/>
     <p:sldId id="299" r:id="rId49"/>
     <p:sldId id="300" r:id="rId50"/>
-    <p:sldId id="301" r:id="rId51"/>
-    <p:sldId id="302" r:id="rId52"/>
     <p:sldId id="303" r:id="rId53"/>
     <p:sldId id="304" r:id="rId54"/>
     <p:sldId id="305" r:id="rId55"/>
@@ -7472,7 +7468,7 @@
                 <a:ea typeface="Noto Sans CJK JP"/>
                 <a:cs typeface="Noto Sans"/>
               </a:rPr>
-              <a:t>文脈と近義語の違いから、中国語の成語を選ぶ</a:t>
+              <a:t>文脈と類義語の違いから、中国語の成語を選ぶ</a:t>
             </a:r>
           </a:p>
         </p:txBody>
@@ -7803,615 +7799,6 @@
       </p:sp>
       <p:sp>
         <p:nvSpPr>
-          <p:cNvPr id="4" name="Rounded Rectangle 3"/>
-          <p:cNvSpPr/>
-          <p:nvPr/>
-        </p:nvSpPr>
-        <p:spPr>
-          <a:xfrm>
-            <a:off x="548640" y="1691640"/>
-            <a:ext cx="1874519" cy="1234440"/>
-          </a:xfrm>
-          <a:prstGeom prst="roundRect">
-            <a:avLst/>
-          </a:prstGeom>
-          <a:solidFill>
-            <a:srgbClr val="EBEDEB"/>
-          </a:solidFill>
-          <a:ln>
-            <a:noFill/>
-          </a:ln>
-        </p:spPr>
-        <p:style>
-          <a:lnRef idx="1">
-            <a:schemeClr val="accent1"/>
-          </a:lnRef>
-          <a:fillRef idx="3">
-            <a:schemeClr val="accent1"/>
-          </a:fillRef>
-          <a:effectRef idx="2">
-            <a:schemeClr val="accent1"/>
-          </a:effectRef>
-          <a:fontRef idx="minor">
-            <a:schemeClr val="lt1"/>
-          </a:fontRef>
-        </p:style>
-        <p:txBody>
-          <a:bodyPr rtlCol="0" anchor="ctr"/>
-          <a:lstStyle/>
-          <a:p>
-            <a:pPr algn="ctr"/>
-          </a:p>
-        </p:txBody>
-      </p:sp>
-      <p:sp>
-        <p:nvSpPr>
-          <p:cNvPr id="5" name="TextBox 4"/>
-          <p:cNvSpPr txBox="1"/>
-          <p:nvPr/>
-        </p:nvSpPr>
-        <p:spPr>
-          <a:xfrm>
-            <a:off x="658368" y="1801368"/>
-            <a:ext cx="1655063" cy="1014984"/>
-          </a:xfrm>
-          <a:prstGeom prst="rect">
-            <a:avLst/>
-          </a:prstGeom>
-          <a:noFill/>
-        </p:spPr>
-        <p:txBody>
-          <a:bodyPr wrap="square" lIns="0" rIns="0" tIns="0" bIns="0">
-            <a:noAutofit/>
-          </a:bodyPr>
-          <a:lstStyle/>
-          <a:p>
-            <a:pPr algn="l">
-              <a:lnSpc>
-                <a:spcPts val="1989"/>
-              </a:lnSpc>
-              <a:spcBef>
-                <a:spcPts val="0"/>
-              </a:spcBef>
-              <a:spcAft>
-                <a:spcPts val="0"/>
-              </a:spcAft>
-              <a:buNone/>
-              <a:defRPr sz="1700" b="0">
-                <a:solidFill>
-                  <a:srgbClr val="303437"/>
-                </a:solidFill>
-                <a:latin typeface="Noto Sans"/>
-              </a:defRPr>
-            </a:pPr>
-            <a:r>
-              <a:rPr sz="1700" b="0" lang="ja-JP" altLang="en-US">
-                <a:solidFill>
-                  <a:srgbClr val="303437"/>
-                </a:solidFill>
-                <a:latin typeface="Noto Sans"/>
-                <a:ea typeface="Noto Sans CJK JP"/>
-                <a:cs typeface="Noto Sans"/>
-              </a:rPr>
-              <a:t>四字成語の選別
-語彙3,848種</a:t>
-            </a:r>
-          </a:p>
-        </p:txBody>
-      </p:sp>
-      <p:sp>
-        <p:nvSpPr>
-          <p:cNvPr id="6" name="TextBox 5"/>
-          <p:cNvSpPr txBox="1"/>
-          <p:nvPr/>
-        </p:nvSpPr>
-        <p:spPr>
-          <a:xfrm>
-            <a:off x="2432304" y="2157984"/>
-            <a:ext cx="182880" cy="320040"/>
-          </a:xfrm>
-          <a:prstGeom prst="rect">
-            <a:avLst/>
-          </a:prstGeom>
-          <a:noFill/>
-        </p:spPr>
-        <p:txBody>
-          <a:bodyPr wrap="square" lIns="0" rIns="0" tIns="0" bIns="0">
-            <a:noAutofit/>
-          </a:bodyPr>
-          <a:lstStyle/>
-          <a:p>
-            <a:pPr algn="l">
-              <a:lnSpc>
-                <a:spcPts val="2106"/>
-              </a:lnSpc>
-              <a:spcBef>
-                <a:spcPts val="0"/>
-              </a:spcBef>
-              <a:spcAft>
-                <a:spcPts val="0"/>
-              </a:spcAft>
-              <a:buNone/>
-              <a:defRPr sz="1800" b="0">
-                <a:solidFill>
-                  <a:srgbClr val="303437"/>
-                </a:solidFill>
-                <a:latin typeface="Noto Sans"/>
-              </a:defRPr>
-            </a:pPr>
-            <a:r>
-              <a:rPr sz="1800" b="0" lang="ja-JP" altLang="en-US">
-                <a:solidFill>
-                  <a:srgbClr val="303437"/>
-                </a:solidFill>
-                <a:latin typeface="Noto Sans"/>
-                <a:ea typeface="Noto Sans CJK JP"/>
-                <a:cs typeface="Noto Sans"/>
-              </a:rPr>
-              <a:t>→</a:t>
-            </a:r>
-          </a:p>
-        </p:txBody>
-      </p:sp>
-      <p:sp>
-        <p:nvSpPr>
-          <p:cNvPr id="7" name="Rounded Rectangle 6"/>
-          <p:cNvSpPr/>
-          <p:nvPr/>
-        </p:nvSpPr>
-        <p:spPr>
-          <a:xfrm>
-            <a:off x="2606040" y="1691640"/>
-            <a:ext cx="1874519" cy="1234440"/>
-          </a:xfrm>
-          <a:prstGeom prst="roundRect">
-            <a:avLst/>
-          </a:prstGeom>
-          <a:solidFill>
-            <a:srgbClr val="EBEDEB"/>
-          </a:solidFill>
-          <a:ln>
-            <a:noFill/>
-          </a:ln>
-        </p:spPr>
-        <p:style>
-          <a:lnRef idx="1">
-            <a:schemeClr val="accent1"/>
-          </a:lnRef>
-          <a:fillRef idx="3">
-            <a:schemeClr val="accent1"/>
-          </a:fillRef>
-          <a:effectRef idx="2">
-            <a:schemeClr val="accent1"/>
-          </a:effectRef>
-          <a:fontRef idx="minor">
-            <a:schemeClr val="lt1"/>
-          </a:fontRef>
-        </p:style>
-        <p:txBody>
-          <a:bodyPr rtlCol="0" anchor="ctr"/>
-          <a:lstStyle/>
-          <a:p>
-            <a:pPr algn="ctr"/>
-          </a:p>
-        </p:txBody>
-      </p:sp>
-      <p:sp>
-        <p:nvSpPr>
-          <p:cNvPr id="8" name="TextBox 7"/>
-          <p:cNvSpPr txBox="1"/>
-          <p:nvPr/>
-        </p:nvSpPr>
-        <p:spPr>
-          <a:xfrm>
-            <a:off x="2715768" y="1801368"/>
-            <a:ext cx="1655063" cy="1014984"/>
-          </a:xfrm>
-          <a:prstGeom prst="rect">
-            <a:avLst/>
-          </a:prstGeom>
-          <a:noFill/>
-        </p:spPr>
-        <p:txBody>
-          <a:bodyPr wrap="square" lIns="0" rIns="0" tIns="0" bIns="0">
-            <a:noAutofit/>
-          </a:bodyPr>
-          <a:lstStyle/>
-          <a:p>
-            <a:pPr algn="l">
-              <a:lnSpc>
-                <a:spcPts val="1989"/>
-              </a:lnSpc>
-              <a:spcBef>
-                <a:spcPts val="0"/>
-              </a:spcBef>
-              <a:spcAft>
-                <a:spcPts val="0"/>
-              </a:spcAft>
-              <a:buNone/>
-              <a:defRPr sz="1700" b="0">
-                <a:solidFill>
-                  <a:srgbClr val="303437"/>
-                </a:solidFill>
-                <a:latin typeface="Noto Sans"/>
-              </a:defRPr>
-            </a:pPr>
-            <a:r>
-              <a:rPr sz="1700" b="0" lang="ja-JP" altLang="en-US">
-                <a:solidFill>
-                  <a:srgbClr val="303437"/>
-                </a:solidFill>
-                <a:latin typeface="Noto Sans"/>
-                <a:ea typeface="Noto Sans CJK JP"/>
-                <a:cs typeface="Noto Sans"/>
-              </a:rPr>
-              <a:t>ニュース・小説
-エッセイの抽出</a:t>
-            </a:r>
-          </a:p>
-        </p:txBody>
-      </p:sp>
-      <p:sp>
-        <p:nvSpPr>
-          <p:cNvPr id="9" name="TextBox 8"/>
-          <p:cNvSpPr txBox="1"/>
-          <p:nvPr/>
-        </p:nvSpPr>
-        <p:spPr>
-          <a:xfrm>
-            <a:off x="4489704" y="2157984"/>
-            <a:ext cx="182880" cy="320040"/>
-          </a:xfrm>
-          <a:prstGeom prst="rect">
-            <a:avLst/>
-          </a:prstGeom>
-          <a:noFill/>
-        </p:spPr>
-        <p:txBody>
-          <a:bodyPr wrap="square" lIns="0" rIns="0" tIns="0" bIns="0">
-            <a:noAutofit/>
-          </a:bodyPr>
-          <a:lstStyle/>
-          <a:p>
-            <a:pPr algn="l">
-              <a:lnSpc>
-                <a:spcPts val="2106"/>
-              </a:lnSpc>
-              <a:spcBef>
-                <a:spcPts val="0"/>
-              </a:spcBef>
-              <a:spcAft>
-                <a:spcPts val="0"/>
-              </a:spcAft>
-              <a:buNone/>
-              <a:defRPr sz="1800" b="0">
-                <a:solidFill>
-                  <a:srgbClr val="303437"/>
-                </a:solidFill>
-                <a:latin typeface="Noto Sans"/>
-              </a:defRPr>
-            </a:pPr>
-            <a:r>
-              <a:rPr sz="1800" b="0" lang="ja-JP" altLang="en-US">
-                <a:solidFill>
-                  <a:srgbClr val="303437"/>
-                </a:solidFill>
-                <a:latin typeface="Noto Sans"/>
-                <a:ea typeface="Noto Sans CJK JP"/>
-                <a:cs typeface="Noto Sans"/>
-              </a:rPr>
-              <a:t>→</a:t>
-            </a:r>
-          </a:p>
-        </p:txBody>
-      </p:sp>
-      <p:sp>
-        <p:nvSpPr>
-          <p:cNvPr id="10" name="Rounded Rectangle 9"/>
-          <p:cNvSpPr/>
-          <p:nvPr/>
-        </p:nvSpPr>
-        <p:spPr>
-          <a:xfrm>
-            <a:off x="4663440" y="1691640"/>
-            <a:ext cx="1874519" cy="1234440"/>
-          </a:xfrm>
-          <a:prstGeom prst="roundRect">
-            <a:avLst/>
-          </a:prstGeom>
-          <a:solidFill>
-            <a:srgbClr val="EBEDEB"/>
-          </a:solidFill>
-          <a:ln>
-            <a:noFill/>
-          </a:ln>
-        </p:spPr>
-        <p:style>
-          <a:lnRef idx="1">
-            <a:schemeClr val="accent1"/>
-          </a:lnRef>
-          <a:fillRef idx="3">
-            <a:schemeClr val="accent1"/>
-          </a:fillRef>
-          <a:effectRef idx="2">
-            <a:schemeClr val="accent1"/>
-          </a:effectRef>
-          <a:fontRef idx="minor">
-            <a:schemeClr val="lt1"/>
-          </a:fontRef>
-        </p:style>
-        <p:txBody>
-          <a:bodyPr rtlCol="0" anchor="ctr"/>
-          <a:lstStyle/>
-          <a:p>
-            <a:pPr algn="ctr"/>
-          </a:p>
-        </p:txBody>
-      </p:sp>
-      <p:sp>
-        <p:nvSpPr>
-          <p:cNvPr id="11" name="TextBox 10"/>
-          <p:cNvSpPr txBox="1"/>
-          <p:nvPr/>
-        </p:nvSpPr>
-        <p:spPr>
-          <a:xfrm>
-            <a:off x="4773168" y="1801368"/>
-            <a:ext cx="1655063" cy="1014984"/>
-          </a:xfrm>
-          <a:prstGeom prst="rect">
-            <a:avLst/>
-          </a:prstGeom>
-          <a:noFill/>
-        </p:spPr>
-        <p:txBody>
-          <a:bodyPr wrap="square" lIns="0" rIns="0" tIns="0" bIns="0">
-            <a:noAutofit/>
-          </a:bodyPr>
-          <a:lstStyle/>
-          <a:p>
-            <a:pPr algn="l">
-              <a:lnSpc>
-                <a:spcPts val="1989"/>
-              </a:lnSpc>
-              <a:spcBef>
-                <a:spcPts val="0"/>
-              </a:spcBef>
-              <a:spcAft>
-                <a:spcPts val="0"/>
-              </a:spcAft>
-              <a:buNone/>
-              <a:defRPr sz="1700" b="0">
-                <a:solidFill>
-                  <a:srgbClr val="303437"/>
-                </a:solidFill>
-                <a:latin typeface="Noto Sans"/>
-              </a:defRPr>
-            </a:pPr>
-            <a:r>
-              <a:rPr sz="1700" b="0" lang="ja-JP" altLang="en-US">
-                <a:solidFill>
-                  <a:srgbClr val="303437"/>
-                </a:solidFill>
-                <a:latin typeface="Noto Sans"/>
-                <a:ea typeface="Noto Sans CJK JP"/>
-                <a:cs typeface="Noto Sans"/>
-              </a:rPr>
-              <a:t>成語の空欄化
-長さ・頻度調整</a:t>
-            </a:r>
-          </a:p>
-        </p:txBody>
-      </p:sp>
-      <p:sp>
-        <p:nvSpPr>
-          <p:cNvPr id="12" name="TextBox 11"/>
-          <p:cNvSpPr txBox="1"/>
-          <p:nvPr/>
-        </p:nvSpPr>
-        <p:spPr>
-          <a:xfrm>
-            <a:off x="6547104" y="2157984"/>
-            <a:ext cx="182880" cy="320040"/>
-          </a:xfrm>
-          <a:prstGeom prst="rect">
-            <a:avLst/>
-          </a:prstGeom>
-          <a:noFill/>
-        </p:spPr>
-        <p:txBody>
-          <a:bodyPr wrap="square" lIns="0" rIns="0" tIns="0" bIns="0">
-            <a:noAutofit/>
-          </a:bodyPr>
-          <a:lstStyle/>
-          <a:p>
-            <a:pPr algn="l">
-              <a:lnSpc>
-                <a:spcPts val="2106"/>
-              </a:lnSpc>
-              <a:spcBef>
-                <a:spcPts val="0"/>
-              </a:spcBef>
-              <a:spcAft>
-                <a:spcPts val="0"/>
-              </a:spcAft>
-              <a:buNone/>
-              <a:defRPr sz="1800" b="0">
-                <a:solidFill>
-                  <a:srgbClr val="303437"/>
-                </a:solidFill>
-                <a:latin typeface="Noto Sans"/>
-              </a:defRPr>
-            </a:pPr>
-            <a:r>
-              <a:rPr sz="1800" b="0" lang="ja-JP" altLang="en-US">
-                <a:solidFill>
-                  <a:srgbClr val="303437"/>
-                </a:solidFill>
-                <a:latin typeface="Noto Sans"/>
-                <a:ea typeface="Noto Sans CJK JP"/>
-                <a:cs typeface="Noto Sans"/>
-              </a:rPr>
-              <a:t>→</a:t>
-            </a:r>
-          </a:p>
-        </p:txBody>
-      </p:sp>
-      <p:sp>
-        <p:nvSpPr>
-          <p:cNvPr id="13" name="Rounded Rectangle 12"/>
-          <p:cNvSpPr/>
-          <p:nvPr/>
-        </p:nvSpPr>
-        <p:spPr>
-          <a:xfrm>
-            <a:off x="6720840" y="1691640"/>
-            <a:ext cx="1874519" cy="1234440"/>
-          </a:xfrm>
-          <a:prstGeom prst="roundRect">
-            <a:avLst/>
-          </a:prstGeom>
-          <a:solidFill>
-            <a:srgbClr val="EBEDEB"/>
-          </a:solidFill>
-          <a:ln>
-            <a:noFill/>
-          </a:ln>
-        </p:spPr>
-        <p:style>
-          <a:lnRef idx="1">
-            <a:schemeClr val="accent1"/>
-          </a:lnRef>
-          <a:fillRef idx="3">
-            <a:schemeClr val="accent1"/>
-          </a:fillRef>
-          <a:effectRef idx="2">
-            <a:schemeClr val="accent1"/>
-          </a:effectRef>
-          <a:fontRef idx="minor">
-            <a:schemeClr val="lt1"/>
-          </a:fontRef>
-        </p:style>
-        <p:txBody>
-          <a:bodyPr rtlCol="0" anchor="ctr"/>
-          <a:lstStyle/>
-          <a:p>
-            <a:pPr algn="ctr"/>
-          </a:p>
-        </p:txBody>
-      </p:sp>
-      <p:sp>
-        <p:nvSpPr>
-          <p:cNvPr id="14" name="TextBox 13"/>
-          <p:cNvSpPr txBox="1"/>
-          <p:nvPr/>
-        </p:nvSpPr>
-        <p:spPr>
-          <a:xfrm>
-            <a:off x="6830568" y="1801368"/>
-            <a:ext cx="1655063" cy="1014984"/>
-          </a:xfrm>
-          <a:prstGeom prst="rect">
-            <a:avLst/>
-          </a:prstGeom>
-          <a:noFill/>
-        </p:spPr>
-        <p:txBody>
-          <a:bodyPr wrap="square" lIns="0" rIns="0" tIns="0" bIns="0">
-            <a:noAutofit/>
-          </a:bodyPr>
-          <a:lstStyle/>
-          <a:p>
-            <a:pPr algn="l">
-              <a:lnSpc>
-                <a:spcPts val="1989"/>
-              </a:lnSpc>
-              <a:spcBef>
-                <a:spcPts val="0"/>
-              </a:spcBef>
-              <a:spcAft>
-                <a:spcPts val="0"/>
-              </a:spcAft>
-              <a:buNone/>
-              <a:defRPr sz="1700" b="0">
-                <a:solidFill>
-                  <a:srgbClr val="303437"/>
-                </a:solidFill>
-                <a:latin typeface="Noto Sans"/>
-              </a:defRPr>
-            </a:pPr>
-            <a:r>
-              <a:rPr sz="1700" b="0" lang="ja-JP" altLang="en-US">
-                <a:solidFill>
-                  <a:srgbClr val="303437"/>
-                </a:solidFill>
-                <a:latin typeface="Noto Sans"/>
-                <a:ea typeface="Noto Sans CJK JP"/>
-                <a:cs typeface="Noto Sans"/>
-              </a:rPr>
-              <a:t>正解・類似語と
-無作為の語で
-七候補を作成</a:t>
-            </a:r>
-          </a:p>
-        </p:txBody>
-      </p:sp>
-      <p:sp>
-        <p:nvSpPr>
-          <p:cNvPr id="15" name="TextBox 14"/>
-          <p:cNvSpPr txBox="1"/>
-          <p:nvPr/>
-        </p:nvSpPr>
-        <p:spPr>
-          <a:xfrm>
-            <a:off x="640080" y="3429000"/>
-            <a:ext cx="7863840" cy="822960"/>
-          </a:xfrm>
-          <a:prstGeom prst="rect">
-            <a:avLst/>
-          </a:prstGeom>
-          <a:noFill/>
-        </p:spPr>
-        <p:txBody>
-          <a:bodyPr wrap="square" lIns="0" rIns="0" tIns="0" bIns="0">
-            <a:noAutofit/>
-          </a:bodyPr>
-          <a:lstStyle/>
-          <a:p>
-            <a:pPr algn="l">
-              <a:lnSpc>
-                <a:spcPts val="2340"/>
-              </a:lnSpc>
-              <a:spcBef>
-                <a:spcPts val="0"/>
-              </a:spcBef>
-              <a:spcAft>
-                <a:spcPts val="0"/>
-              </a:spcAft>
-              <a:buNone/>
-              <a:defRPr sz="2000" b="0">
-                <a:solidFill>
-                  <a:srgbClr val="303437"/>
-                </a:solidFill>
-                <a:latin typeface="Noto Sans"/>
-              </a:defRPr>
-            </a:pPr>
-            <a:r>
-              <a:rPr sz="2000" b="0" lang="ja-JP" altLang="en-US">
-                <a:solidFill>
-                  <a:srgbClr val="303437"/>
-                </a:solidFill>
-                <a:latin typeface="Noto Sans"/>
-                <a:ea typeface="Noto Sans CJK JP"/>
-                <a:cs typeface="Noto Sans"/>
-              </a:rPr>
-              <a:t>自動的な語彙・文章の整備に、人手による成語の意味関係の調査を組み合わせた。文章の数と、そこから作る空欄の数は異なる。</a:t>
-            </a:r>
-          </a:p>
-        </p:txBody>
-      </p:sp>
-      <p:sp>
-        <p:nvSpPr>
           <p:cNvPr id="16" name="sources"/>
           <p:cNvSpPr txBox="1"/>
           <p:nvPr/>
@@ -8483,6 +7870,77 @@
                 <a:hlinkClick r:id="rId2"/>
               </a:rPr>
               <a:t>https://aclanthology.org/P19-1075/</a:t>
+            </a:r>
+          </a:p>
+        </p:txBody>
+      </p:sp>
+      <p:sp>
+        <p:nvSpPr>
+          <p:cNvPr id="17" name="TextBox 16"/>
+          <p:cNvSpPr txBox="1"/>
+          <p:nvPr/>
+        </p:nvSpPr>
+        <p:spPr>
+          <a:xfrm>
+            <a:off x="640080" y="1508760"/>
+            <a:ext cx="7863840" cy="2926080"/>
+          </a:xfrm>
+          <a:prstGeom prst="rect">
+            <a:avLst/>
+          </a:prstGeom>
+          <a:noFill/>
+        </p:spPr>
+        <p:txBody>
+          <a:bodyPr wrap="square">
+            <a:spAutoFit/>
+          </a:bodyPr>
+          <a:lstStyle/>
+          <a:p>
+            <a:pPr>
+              <a:lnSpc>
+                <a:spcPct val="119000"/>
+              </a:lnSpc>
+              <a:spcAft>
+                <a:spcPts val="1400"/>
+              </a:spcAft>
+              <a:defRPr sz="2100">
+                <a:latin typeface="Noto Sans CJK JP"/>
+              </a:defRPr>
+            </a:pPr>
+            <a:r>
+              <a:t>表記を整え、学習に十分な出現頻度のある四字成語3,848種類を選ぶ。</a:t>
+            </a:r>
+          </a:p>
+          <a:p>
+            <a:pPr>
+              <a:lnSpc>
+                <a:spcPct val="119000"/>
+              </a:lnSpc>
+              <a:spcAft>
+                <a:spcPts val="1400"/>
+              </a:spcAft>
+              <a:defRPr sz="2100">
+                <a:latin typeface="Noto Sans CJK JP"/>
+              </a:defRPr>
+            </a:pPr>
+            <a:r>
+              <a:t>ニュース・小説・エッセイから文章を集め、長さや成語の頻度を調整して空欄を作る。</a:t>
+            </a:r>
+          </a:p>
+          <a:p>
+            <a:pPr>
+              <a:lnSpc>
+                <a:spcPct val="119000"/>
+              </a:lnSpc>
+              <a:spcAft>
+                <a:spcPts val="1400"/>
+              </a:spcAft>
+              <a:defRPr sz="2100">
+                <a:latin typeface="Noto Sans CJK JP"/>
+              </a:defRPr>
+            </a:pPr>
+            <a:r>
+              <a:t>正解に、意味の似た成語三つと無作為の成語三つを加え、七択問題にする。候補選びには人手による意味関係の調査も用いた。</a:t>
             </a:r>
           </a:p>
         </p:txBody>
@@ -8631,7 +8089,7 @@
                 <a:ea typeface="Noto Sans CJK JP"/>
                 <a:cs typeface="Noto Sans"/>
               </a:rPr>
-              <a:t>コーパスで20回未満しか現れない語も除き、3,848成語の語彙を作った。これは候補に使う語彙の種類数で、文章数や問題数ではない。</a:t>
+              <a:t>コーパスで20回未満しか現れない語も除き、候補に使う3,848種類の成語を選んだ。</a:t>
             </a:r>
           </a:p>
         </p:txBody>
@@ -10692,7 +10150,7 @@
                 <a:ea typeface="Noto Sans CJK JP"/>
                 <a:cs typeface="Noto Sans"/>
               </a:rPr>
-              <a:t>作者が案内する配布全件と一致。RanとSimはTestと同じ文章の候補違いで、独立文章数へ加えない。</a:t>
+              <a:t>RanとSimは、Testと同じ文章で候補だけを変えた評価集合。Ranは無作為の候補、Simは似た候補が中心。</a:t>
             </a:r>
           </a:p>
         </p:txBody>
@@ -10746,7 +10204,7 @@
                 <a:ea typeface="Noto Sans CJK JP"/>
                 <a:cs typeface="Noto Sans"/>
               </a:rPr>
-              <a:t>[1] Zheng, Huang &amp; Sun (2019). ChID: A Large-scale Chinese IDiom Dataset for Cloze Test. ACL, pp.778–787.</a:t>
+              <a:t>[1] Zheng, Huang &amp; Sun (2019). ChID: A Large-scale Chinese IDiom Dataset for Cloze Test. ACL, pp.778–787.  </a:t>
             </a:r>
             <a:r>
               <a:rPr sz="810" b="0" lang="ja-JP" altLang="en-US">
@@ -10756,9 +10214,27 @@
                 <a:latin typeface="Noto Sans"/>
                 <a:ea typeface="Noto Sans CJK JP"/>
                 <a:cs typeface="Noto Sans"/>
-              </a:rPr>
-              <a:t>  </a:t>
-            </a:r>
+                <a:hlinkClick r:id="rId2"/>
+              </a:rPr>
+              <a:t>https://aclanthology.org/P19-1075/</a:t>
+            </a:r>
+          </a:p>
+          <a:p>
+            <a:pPr>
+              <a:lnSpc>
+                <a:spcPts val="940"/>
+              </a:lnSpc>
+              <a:spcAft>
+                <a:spcPts val="140"/>
+              </a:spcAft>
+              <a:buNone/>
+              <a:defRPr sz="810" b="0">
+                <a:solidFill>
+                  <a:srgbClr val="303437"/>
+                </a:solidFill>
+                <a:latin typeface="Noto Sans"/>
+              </a:defRPr>
+            </a:pPr>
             <a:r>
               <a:rPr sz="810" b="0" lang="ja-JP" altLang="en-US">
                 <a:solidFill>
@@ -10767,27 +10243,9 @@
                 <a:latin typeface="Noto Sans"/>
                 <a:ea typeface="Noto Sans CJK JP"/>
                 <a:cs typeface="Noto Sans"/>
-                <a:hlinkClick r:id="rId2"/>
-              </a:rPr>
-              <a:t>https://aclanthology.org/P19-1075/</a:t>
-            </a:r>
-          </a:p>
-          <a:p>
-            <a:pPr>
-              <a:lnSpc>
-                <a:spcPts val="940"/>
-              </a:lnSpc>
-              <a:spcAft>
-                <a:spcPts val="140"/>
-              </a:spcAft>
-              <a:buNone/>
-              <a:defRPr sz="810" b="0">
-                <a:solidFill>
-                  <a:srgbClr val="303437"/>
-                </a:solidFill>
-                <a:latin typeface="Noto Sans"/>
-              </a:defRPr>
-            </a:pPr>
+              </a:rPr>
+              <a:t>[2] Zheng, Huang &amp; Sun (2019). ChID — Original Data Distribution.  </a:t>
+            </a:r>
             <a:r>
               <a:rPr sz="810" b="0" lang="ja-JP" altLang="en-US">
                 <a:solidFill>
@@ -10796,34 +10254,9 @@
                 <a:latin typeface="Noto Sans"/>
                 <a:ea typeface="Noto Sans CJK JP"/>
                 <a:cs typeface="Noto Sans"/>
-              </a:rPr>
-              <a:t>[2] Zheng, Huang &amp; Sun (2019). ChID: A Large-scale Chinese IDiom Dataset for Cloze Test. 作者が案内する原版配布。</a:t>
-            </a:r>
-          </a:p>
-          <a:p>
-            <a:pPr>
-              <a:lnSpc>
-                <a:spcPts val="940"/>
-              </a:lnSpc>
-              <a:buNone/>
-              <a:defRPr sz="810" b="0">
-                <a:solidFill>
-                  <a:srgbClr val="303437"/>
-                </a:solidFill>
-                <a:latin typeface="Noto Sans"/>
-              </a:defRPr>
-            </a:pPr>
-            <a:r>
-              <a:rPr sz="810" b="0" lang="ja-JP" altLang="en-US">
-                <a:solidFill>
-                  <a:srgbClr val="626669"/>
-                </a:solidFill>
-                <a:latin typeface="Noto Sans"/>
-                <a:ea typeface="Noto Sans CJK JP"/>
-                <a:cs typeface="Noto Sans"/>
-                <a:hlinkClick r:id="rId3"/>
-              </a:rPr>
-              <a:t>https://huggingface.co/datasets/thu-coai/chid/tree/47ad8022d369233bea2f4a8112268f9a9a039a43/original</a:t>
+                <a:hlinkClick r:id="rId4"/>
+              </a:rPr>
+              <a:t>https://huggingface.co/datasets/thu-coai/chid/tree/main/original</a:t>
             </a:r>
           </a:p>
         </p:txBody>
@@ -11671,7 +11104,7 @@
                 <a:ea typeface="Noto Sans CJK JP"/>
                 <a:cs typeface="Noto Sans"/>
               </a:rPr>
-              <a:t>語数はJiebaによる分かち書きの集計。配布には集合間で同じcontentもあり、領域の区分だけで文章の完全非重複を意味しない。</a:t>
+              <a:t>語数は、Jiebaによる分かち書きで数えた値。Outの文章は、領域内の文章より長く、空欄も多い。</a:t>
             </a:r>
           </a:p>
         </p:txBody>
@@ -11981,7 +11414,7 @@
                 <a:ea typeface="Noto Sans CJK JP"/>
                 <a:cs typeface="Noto Sans"/>
               </a:rPr>
-              <a:t>空欄ごとに一つの候補を予測し、正解した空欄数を、評価した空欄数で割る。複数空欄の文章では、文章内のすべてが正しいかという指標とは異なる。</a:t>
+              <a:t>空欄ごとに一つの候補を予測し、正解した空欄数を、評価した空欄数で割る。複数の空欄がある文章も、一つずつ採点する。</a:t>
             </a:r>
           </a:p>
           <a:p>
@@ -12591,22 +12024,8 @@
                 <a:ea typeface="Noto Sans CJK JP"/>
                 <a:cs typeface="Noto Sans"/>
               </a:rPr>
-              <a:t>[1] Zheng, Huang &amp; Sun. ChID-Dataset、公式公開リポジトリ、固定commit 0836ebf72cbe7d2da832021b02ff08f627de885d。</a:t>
-            </a:r>
-          </a:p>
-          <a:p>
-            <a:pPr>
-              <a:lnSpc>
-                <a:spcPts val="940"/>
-              </a:lnSpc>
-              <a:buNone/>
-              <a:defRPr sz="810" b="0">
-                <a:solidFill>
-                  <a:srgbClr val="303437"/>
-                </a:solidFill>
-                <a:latin typeface="Noto Sans"/>
-              </a:defRPr>
-            </a:pPr>
+              <a:t>[1] Zheng, Huang &amp; Sun (2019). ChID-Dataset.  </a:t>
+            </a:r>
             <a:r>
               <a:rPr sz="810" b="0" lang="ja-JP" altLang="en-US">
                 <a:solidFill>
@@ -14245,911 +13664,6 @@
 </p:sld>
 </file>
 
-<file path=ppt/slides/slide22.xml><?xml version="1.0" encoding="utf-8"?>
-<p:sld xmlns:a="http://schemas.openxmlformats.org/drawingml/2006/main" xmlns:p="http://schemas.openxmlformats.org/presentationml/2006/main" xmlns:r="http://schemas.openxmlformats.org/officeDocument/2006/relationships">
-  <p:cSld>
-    <p:spTree>
-      <p:nvGrpSpPr>
-        <p:cNvPr id="1" name=""/>
-        <p:cNvGrpSpPr/>
-        <p:nvPr/>
-      </p:nvGrpSpPr>
-      <p:grpSpPr/>
-      <p:sp>
-        <p:nvSpPr>
-          <p:cNvPr id="2" name="Title 1"/>
-          <p:cNvSpPr>
-            <a:spLocks noGrp="1"/>
-          </p:cNvSpPr>
-          <p:nvPr>
-            <p:ph type="title"/>
-          </p:nvPr>
-        </p:nvSpPr>
-        <p:spPr>
-          <a:xfrm>
-            <a:off x="468172" y="650138"/>
-            <a:ext cx="8206740" cy="616305"/>
-          </a:xfrm>
-        </p:spPr>
-        <p:txBody>
-          <a:bodyPr wrap="square" lIns="0" rIns="0" tIns="0" bIns="0">
-            <a:noAutofit/>
-          </a:bodyPr>
-          <a:lstStyle/>
-          <a:p>
-            <a:pPr algn="l">
-              <a:lnSpc>
-                <a:spcPct val="110000"/>
-              </a:lnSpc>
-              <a:buNone/>
-              <a:defRPr sz="2800" b="0">
-                <a:solidFill>
-                  <a:srgbClr val="303437"/>
-                </a:solidFill>
-                <a:latin typeface="Noto Sans"/>
-              </a:defRPr>
-            </a:pPr>
-            <a:r>
-              <a:rPr sz="2800" b="1" lang="ja-JP" altLang="en-US">
-                <a:solidFill>
-                  <a:srgbClr val="303437"/>
-                </a:solidFill>
-                <a:latin typeface="Noto Sans"/>
-                <a:ea typeface="Noto Sans CJK JP"/>
-                <a:cs typeface="Noto Sans"/>
-              </a:rPr>
-              <a:t>学習は開発集合の改善が止まるまで続ける</a:t>
-            </a:r>
-          </a:p>
-        </p:txBody>
-      </p:sp>
-      <p:sp>
-        <p:nvSpPr>
-          <p:cNvPr id="3" name="Title 2"/>
-          <p:cNvSpPr>
-            <a:spLocks noGrp="1"/>
-          </p:cNvSpPr>
-          <p:nvPr>
-            <p:ph type="title" idx="2"/>
-          </p:nvPr>
-        </p:nvSpPr>
-        <p:spPr>
-          <a:xfrm>
-            <a:off x="75895" y="0"/>
-            <a:ext cx="8115300" cy="480060"/>
-          </a:xfrm>
-        </p:spPr>
-        <p:txBody>
-          <a:bodyPr wrap="square" lIns="0" rIns="0" tIns="0" bIns="0" anchor="ctr">
-            <a:noAutofit/>
-          </a:bodyPr>
-          <a:lstStyle/>
-          <a:p>
-            <a:pPr algn="l">
-              <a:lnSpc>
-                <a:spcPct val="110000"/>
-              </a:lnSpc>
-              <a:buNone/>
-              <a:defRPr sz="1400" b="0">
-                <a:solidFill>
-                  <a:srgbClr val="303437"/>
-                </a:solidFill>
-                <a:latin typeface="Noto Sans"/>
-              </a:defRPr>
-            </a:pPr>
-            <a:r>
-              <a:rPr sz="1400" b="1" lang="ja-JP" altLang="en-US">
-                <a:solidFill>
-                  <a:srgbClr val="FFFEF8"/>
-                </a:solidFill>
-                <a:latin typeface="Noto Sans"/>
-                <a:ea typeface="Noto Sans CJK JP"/>
-                <a:cs typeface="Noto Sans"/>
-              </a:rPr>
-              <a:t>3. 空欄ごとの正解率と候補の難しさ</a:t>
-            </a:r>
-          </a:p>
-        </p:txBody>
-      </p:sp>
-      <p:graphicFrame>
-        <p:nvGraphicFramePr>
-          <p:cNvPr id="4" name="Table 3"/>
-          <p:cNvGraphicFramePr>
-            <a:graphicFrameLocks noGrp="1"/>
-          </p:cNvGraphicFramePr>
-          <p:nvPr/>
-        </p:nvGraphicFramePr>
-        <p:xfrm>
-          <a:off x="548640" y="1508760"/>
-          <a:ext cx="8046720" cy="2304288"/>
-        </p:xfrm>
-        <a:graphic>
-          <a:graphicData uri="http://schemas.openxmlformats.org/drawingml/2006/table">
-            <a:tbl>
-              <a:tblPr firstRow="0" bandRow="0"/>
-              <a:tblGrid>
-                <a:gridCol w="3017520"/>
-                <a:gridCol w="5029200"/>
-              </a:tblGrid>
-              <a:tr h="384048">
-                <a:tc>
-                  <a:txBody>
-                    <a:bodyPr wrap="square">
-                      <a:noAutofit/>
-                    </a:bodyPr>
-                    <a:lstStyle/>
-                    <a:p>
-                      <a:pPr algn="l">
-                        <a:lnSpc>
-                          <a:spcPts val="2012"/>
-                        </a:lnSpc>
-                        <a:buNone/>
-                        <a:defRPr sz="1750" b="0">
-                          <a:solidFill>
-                            <a:srgbClr val="303437"/>
-                          </a:solidFill>
-                          <a:latin typeface="Noto Sans"/>
-                        </a:defRPr>
-                      </a:pPr>
-                      <a:r>
-                        <a:rPr sz="1750" b="0" lang="ja-JP" altLang="en-US">
-                          <a:solidFill>
-                            <a:srgbClr val="303437"/>
-                          </a:solidFill>
-                          <a:latin typeface="Noto Sans"/>
-                          <a:ea typeface="Noto Sans CJK JP"/>
-                          <a:cs typeface="Noto Sans"/>
-                        </a:rPr>
-                        <a:t>設定</a:t>
-                      </a:r>
-                    </a:p>
-                  </a:txBody>
-                  <a:tcPr marL="63500" marR="63500" marT="38100" marB="38100" anchor="ctr">
-                    <a:lnL w="7620">
-                      <a:noFill/>
-                    </a:lnL>
-                    <a:lnR w="7620">
-                      <a:noFill/>
-                    </a:lnR>
-                    <a:lnT w="15240">
-                      <a:solidFill>
-                        <a:srgbClr val="626669"/>
-                      </a:solidFill>
-                      <a:prstDash val="solid"/>
-                    </a:lnT>
-                    <a:lnB w="7620">
-                      <a:solidFill>
-                        <a:srgbClr val="626669"/>
-                      </a:solidFill>
-                      <a:prstDash val="solid"/>
-                    </a:lnB>
-                    <a:solidFill>
-                      <a:srgbClr val="FFFEF8"/>
-                    </a:solidFill>
-                  </a:tcPr>
-                </a:tc>
-                <a:tc>
-                  <a:txBody>
-                    <a:bodyPr wrap="square">
-                      <a:noAutofit/>
-                    </a:bodyPr>
-                    <a:lstStyle/>
-                    <a:p>
-                      <a:pPr algn="l">
-                        <a:lnSpc>
-                          <a:spcPts val="2012"/>
-                        </a:lnSpc>
-                        <a:buNone/>
-                        <a:defRPr sz="1750" b="0">
-                          <a:solidFill>
-                            <a:srgbClr val="303437"/>
-                          </a:solidFill>
-                          <a:latin typeface="Noto Sans"/>
-                        </a:defRPr>
-                      </a:pPr>
-                      <a:r>
-                        <a:rPr sz="1750" b="0" lang="ja-JP" altLang="en-US">
-                          <a:solidFill>
-                            <a:srgbClr val="303437"/>
-                          </a:solidFill>
-                          <a:latin typeface="Noto Sans"/>
-                          <a:ea typeface="Noto Sans CJK JP"/>
-                          <a:cs typeface="Noto Sans"/>
-                        </a:rPr>
-                        <a:t>2019年の実験条件</a:t>
-                      </a:r>
-                    </a:p>
-                  </a:txBody>
-                  <a:tcPr marL="63500" marR="63500" marT="38100" marB="38100" anchor="ctr">
-                    <a:lnL w="7620">
-                      <a:noFill/>
-                    </a:lnL>
-                    <a:lnR w="7620">
-                      <a:noFill/>
-                    </a:lnR>
-                    <a:lnT w="15240">
-                      <a:solidFill>
-                        <a:srgbClr val="626669"/>
-                      </a:solidFill>
-                      <a:prstDash val="solid"/>
-                    </a:lnT>
-                    <a:lnB w="7620">
-                      <a:solidFill>
-                        <a:srgbClr val="626669"/>
-                      </a:solidFill>
-                      <a:prstDash val="solid"/>
-                    </a:lnB>
-                    <a:solidFill>
-                      <a:srgbClr val="FFFEF8"/>
-                    </a:solidFill>
-                  </a:tcPr>
-                </a:tc>
-              </a:tr>
-              <a:tr h="384048">
-                <a:tc>
-                  <a:txBody>
-                    <a:bodyPr wrap="square">
-                      <a:noAutofit/>
-                    </a:bodyPr>
-                    <a:lstStyle/>
-                    <a:p>
-                      <a:pPr algn="l">
-                        <a:lnSpc>
-                          <a:spcPts val="2012"/>
-                        </a:lnSpc>
-                        <a:buNone/>
-                        <a:defRPr sz="1750" b="0">
-                          <a:solidFill>
-                            <a:srgbClr val="303437"/>
-                          </a:solidFill>
-                          <a:latin typeface="Noto Sans"/>
-                        </a:defRPr>
-                      </a:pPr>
-                      <a:r>
-                        <a:rPr sz="1750" b="0" lang="ja-JP" altLang="en-US">
-                          <a:solidFill>
-                            <a:srgbClr val="303437"/>
-                          </a:solidFill>
-                          <a:latin typeface="Noto Sans"/>
-                          <a:ea typeface="Noto Sans CJK JP"/>
-                          <a:cs typeface="Noto Sans"/>
-                        </a:rPr>
-                        <a:t>分かち書き・語彙</a:t>
-                      </a:r>
-                    </a:p>
-                  </a:txBody>
-                  <a:tcPr marL="63500" marR="63500" marT="38100" marB="38100" anchor="ctr">
-                    <a:lnL w="7620">
-                      <a:noFill/>
-                    </a:lnL>
-                    <a:lnR w="7620">
-                      <a:noFill/>
-                    </a:lnR>
-                    <a:lnT w="7620">
-                      <a:solidFill>
-                        <a:srgbClr val="626669"/>
-                      </a:solidFill>
-                      <a:prstDash val="solid"/>
-                    </a:lnT>
-                    <a:lnB w="7620">
-                      <a:noFill/>
-                    </a:lnB>
-                    <a:solidFill>
-                      <a:srgbClr val="FFFEF8"/>
-                    </a:solidFill>
-                  </a:tcPr>
-                </a:tc>
-                <a:tc>
-                  <a:txBody>
-                    <a:bodyPr wrap="square">
-                      <a:noAutofit/>
-                    </a:bodyPr>
-                    <a:lstStyle/>
-                    <a:p>
-                      <a:pPr algn="l">
-                        <a:lnSpc>
-                          <a:spcPts val="2012"/>
-                        </a:lnSpc>
-                        <a:buNone/>
-                        <a:defRPr sz="1750" b="0">
-                          <a:solidFill>
-                            <a:srgbClr val="303437"/>
-                          </a:solidFill>
-                          <a:latin typeface="Noto Sans"/>
-                        </a:defRPr>
-                      </a:pPr>
-                      <a:r>
-                        <a:rPr sz="1750" b="0" lang="ja-JP" altLang="en-US">
-                          <a:solidFill>
-                            <a:srgbClr val="303437"/>
-                          </a:solidFill>
-                          <a:latin typeface="Noto Sans"/>
-                          <a:ea typeface="Noto Sans CJK JP"/>
-                          <a:cs typeface="Noto Sans"/>
-                        </a:rPr>
-                        <a:t>Jieba、単語語彙100,000</a:t>
-                      </a:r>
-                    </a:p>
-                  </a:txBody>
-                  <a:tcPr marL="63500" marR="63500" marT="38100" marB="38100" anchor="ctr">
-                    <a:lnL w="7620">
-                      <a:noFill/>
-                    </a:lnL>
-                    <a:lnR w="7620">
-                      <a:noFill/>
-                    </a:lnR>
-                    <a:lnT w="7620">
-                      <a:solidFill>
-                        <a:srgbClr val="626669"/>
-                      </a:solidFill>
-                      <a:prstDash val="solid"/>
-                    </a:lnT>
-                    <a:lnB w="7620">
-                      <a:noFill/>
-                    </a:lnB>
-                    <a:solidFill>
-                      <a:srgbClr val="FFFEF8"/>
-                    </a:solidFill>
-                  </a:tcPr>
-                </a:tc>
-              </a:tr>
-              <a:tr h="384048">
-                <a:tc>
-                  <a:txBody>
-                    <a:bodyPr wrap="square">
-                      <a:noAutofit/>
-                    </a:bodyPr>
-                    <a:lstStyle/>
-                    <a:p>
-                      <a:pPr algn="l">
-                        <a:lnSpc>
-                          <a:spcPts val="2012"/>
-                        </a:lnSpc>
-                        <a:buNone/>
-                        <a:defRPr sz="1750" b="0">
-                          <a:solidFill>
-                            <a:srgbClr val="303437"/>
-                          </a:solidFill>
-                          <a:latin typeface="Noto Sans"/>
-                        </a:defRPr>
-                      </a:pPr>
-                      <a:r>
-                        <a:rPr sz="1750" b="0" lang="ja-JP" altLang="en-US">
-                          <a:solidFill>
-                            <a:srgbClr val="303437"/>
-                          </a:solidFill>
-                          <a:latin typeface="Noto Sans"/>
-                          <a:ea typeface="Noto Sans CJK JP"/>
-                          <a:cs typeface="Noto Sans"/>
-                        </a:rPr>
-                        <a:t>単語・成語ベクトル</a:t>
-                      </a:r>
-                    </a:p>
-                  </a:txBody>
-                  <a:tcPr marL="63500" marR="63500" marT="38100" marB="38100" anchor="ctr">
-                    <a:lnL w="7620">
-                      <a:noFill/>
-                    </a:lnL>
-                    <a:lnR w="7620">
-                      <a:noFill/>
-                    </a:lnR>
-                    <a:lnT w="7620">
-                      <a:noFill/>
-                    </a:lnT>
-                    <a:lnB w="7620">
-                      <a:noFill/>
-                    </a:lnB>
-                    <a:solidFill>
-                      <a:srgbClr val="FFFEF8"/>
-                    </a:solidFill>
-                  </a:tcPr>
-                </a:tc>
-                <a:tc>
-                  <a:txBody>
-                    <a:bodyPr wrap="square">
-                      <a:noAutofit/>
-                    </a:bodyPr>
-                    <a:lstStyle/>
-                    <a:p>
-                      <a:pPr algn="l">
-                        <a:lnSpc>
-                          <a:spcPts val="2012"/>
-                        </a:lnSpc>
-                        <a:buNone/>
-                        <a:defRPr sz="1750" b="0">
-                          <a:solidFill>
-                            <a:srgbClr val="303437"/>
-                          </a:solidFill>
-                          <a:latin typeface="Noto Sans"/>
-                        </a:defRPr>
-                      </a:pPr>
-                      <a:r>
-                        <a:rPr sz="1750" b="0" lang="ja-JP" altLang="en-US">
-                          <a:solidFill>
-                            <a:srgbClr val="303437"/>
-                          </a:solidFill>
-                          <a:latin typeface="Noto Sans"/>
-                          <a:ea typeface="Noto Sans CJK JP"/>
-                          <a:cs typeface="Noto Sans"/>
-                        </a:rPr>
-                        <a:t>200次元、事前学習済み表現で初期化</a:t>
-                      </a:r>
-                    </a:p>
-                  </a:txBody>
-                  <a:tcPr marL="63500" marR="63500" marT="38100" marB="38100" anchor="ctr">
-                    <a:lnL w="7620">
-                      <a:noFill/>
-                    </a:lnL>
-                    <a:lnR w="7620">
-                      <a:noFill/>
-                    </a:lnR>
-                    <a:lnT w="7620">
-                      <a:noFill/>
-                    </a:lnT>
-                    <a:lnB w="7620">
-                      <a:noFill/>
-                    </a:lnB>
-                    <a:solidFill>
-                      <a:srgbClr val="FFFEF8"/>
-                    </a:solidFill>
-                  </a:tcPr>
-                </a:tc>
-              </a:tr>
-              <a:tr h="384048">
-                <a:tc>
-                  <a:txBody>
-                    <a:bodyPr wrap="square">
-                      <a:noAutofit/>
-                    </a:bodyPr>
-                    <a:lstStyle/>
-                    <a:p>
-                      <a:pPr algn="l">
-                        <a:lnSpc>
-                          <a:spcPts val="2012"/>
-                        </a:lnSpc>
-                        <a:buNone/>
-                        <a:defRPr sz="1750" b="0">
-                          <a:solidFill>
-                            <a:srgbClr val="303437"/>
-                          </a:solidFill>
-                          <a:latin typeface="Noto Sans"/>
-                        </a:defRPr>
-                      </a:pPr>
-                      <a:r>
-                        <a:rPr sz="1750" b="0" lang="ja-JP" altLang="en-US">
-                          <a:solidFill>
-                            <a:srgbClr val="303437"/>
-                          </a:solidFill>
-                          <a:latin typeface="Noto Sans"/>
-                          <a:ea typeface="Noto Sans CJK JP"/>
-                          <a:cs typeface="Noto Sans"/>
-                        </a:rPr>
-                        <a:t>RNNの隠れユニット</a:t>
-                      </a:r>
-                    </a:p>
-                  </a:txBody>
-                  <a:tcPr marL="63500" marR="63500" marT="38100" marB="38100" anchor="ctr">
-                    <a:lnL w="7620">
-                      <a:noFill/>
-                    </a:lnL>
-                    <a:lnR w="7620">
-                      <a:noFill/>
-                    </a:lnR>
-                    <a:lnT w="7620">
-                      <a:noFill/>
-                    </a:lnT>
-                    <a:lnB w="7620">
-                      <a:noFill/>
-                    </a:lnB>
-                    <a:solidFill>
-                      <a:srgbClr val="FFFEF8"/>
-                    </a:solidFill>
-                  </a:tcPr>
-                </a:tc>
-                <a:tc>
-                  <a:txBody>
-                    <a:bodyPr wrap="square">
-                      <a:noAutofit/>
-                    </a:bodyPr>
-                    <a:lstStyle/>
-                    <a:p>
-                      <a:pPr algn="l">
-                        <a:lnSpc>
-                          <a:spcPts val="2012"/>
-                        </a:lnSpc>
-                        <a:buNone/>
-                        <a:defRPr sz="1750" b="0">
-                          <a:solidFill>
-                            <a:srgbClr val="303437"/>
-                          </a:solidFill>
-                          <a:latin typeface="Noto Sans"/>
-                        </a:defRPr>
-                      </a:pPr>
-                      <a:r>
-                        <a:rPr sz="1750" b="0" lang="ja-JP" altLang="en-US">
-                          <a:solidFill>
-                            <a:srgbClr val="303437"/>
-                          </a:solidFill>
-                          <a:latin typeface="Noto Sans"/>
-                          <a:ea typeface="Noto Sans CJK JP"/>
-                          <a:cs typeface="Noto Sans"/>
-                        </a:rPr>
-                        <a:t>100</a:t>
-                      </a:r>
-                    </a:p>
-                  </a:txBody>
-                  <a:tcPr marL="63500" marR="63500" marT="38100" marB="38100" anchor="ctr">
-                    <a:lnL w="7620">
-                      <a:noFill/>
-                    </a:lnL>
-                    <a:lnR w="7620">
-                      <a:noFill/>
-                    </a:lnR>
-                    <a:lnT w="7620">
-                      <a:noFill/>
-                    </a:lnT>
-                    <a:lnB w="7620">
-                      <a:noFill/>
-                    </a:lnB>
-                    <a:solidFill>
-                      <a:srgbClr val="FFFEF8"/>
-                    </a:solidFill>
-                  </a:tcPr>
-                </a:tc>
-              </a:tr>
-              <a:tr h="384048">
-                <a:tc>
-                  <a:txBody>
-                    <a:bodyPr wrap="square">
-                      <a:noAutofit/>
-                    </a:bodyPr>
-                    <a:lstStyle/>
-                    <a:p>
-                      <a:pPr algn="l">
-                        <a:lnSpc>
-                          <a:spcPts val="2012"/>
-                        </a:lnSpc>
-                        <a:buNone/>
-                        <a:defRPr sz="1750" b="0">
-                          <a:solidFill>
-                            <a:srgbClr val="303437"/>
-                          </a:solidFill>
-                          <a:latin typeface="Noto Sans"/>
-                        </a:defRPr>
-                      </a:pPr>
-                      <a:r>
-                        <a:rPr sz="1750" b="0" lang="ja-JP" altLang="en-US">
-                          <a:solidFill>
-                            <a:srgbClr val="303437"/>
-                          </a:solidFill>
-                          <a:latin typeface="Noto Sans"/>
-                          <a:ea typeface="Noto Sans CJK JP"/>
-                          <a:cs typeface="Noto Sans"/>
-                        </a:rPr>
-                        <a:t>最適化・バッチ</a:t>
-                      </a:r>
-                    </a:p>
-                  </a:txBody>
-                  <a:tcPr marL="63500" marR="63500" marT="38100" marB="38100" anchor="ctr">
-                    <a:lnL w="7620">
-                      <a:noFill/>
-                    </a:lnL>
-                    <a:lnR w="7620">
-                      <a:noFill/>
-                    </a:lnR>
-                    <a:lnT w="7620">
-                      <a:noFill/>
-                    </a:lnT>
-                    <a:lnB w="7620">
-                      <a:noFill/>
-                    </a:lnB>
-                    <a:solidFill>
-                      <a:srgbClr val="FFFEF8"/>
-                    </a:solidFill>
-                  </a:tcPr>
-                </a:tc>
-                <a:tc>
-                  <a:txBody>
-                    <a:bodyPr wrap="square">
-                      <a:noAutofit/>
-                    </a:bodyPr>
-                    <a:lstStyle/>
-                    <a:p>
-                      <a:pPr algn="l">
-                        <a:lnSpc>
-                          <a:spcPts val="2012"/>
-                        </a:lnSpc>
-                        <a:buNone/>
-                        <a:defRPr sz="1750" b="0">
-                          <a:solidFill>
-                            <a:srgbClr val="303437"/>
-                          </a:solidFill>
-                          <a:latin typeface="Noto Sans"/>
-                        </a:defRPr>
-                      </a:pPr>
-                      <a:r>
-                        <a:rPr sz="1750" b="0" lang="ja-JP" altLang="en-US">
-                          <a:solidFill>
-                            <a:srgbClr val="303437"/>
-                          </a:solidFill>
-                          <a:latin typeface="Noto Sans"/>
-                          <a:ea typeface="Noto Sans CJK JP"/>
-                          <a:cs typeface="Noto Sans"/>
-                        </a:rPr>
-                        <a:t>Adam、学習率0.001、32例</a:t>
-                      </a:r>
-                    </a:p>
-                  </a:txBody>
-                  <a:tcPr marL="63500" marR="63500" marT="38100" marB="38100" anchor="ctr">
-                    <a:lnL w="7620">
-                      <a:noFill/>
-                    </a:lnL>
-                    <a:lnR w="7620">
-                      <a:noFill/>
-                    </a:lnR>
-                    <a:lnT w="7620">
-                      <a:noFill/>
-                    </a:lnT>
-                    <a:lnB w="7620">
-                      <a:noFill/>
-                    </a:lnB>
-                    <a:solidFill>
-                      <a:srgbClr val="FFFEF8"/>
-                    </a:solidFill>
-                  </a:tcPr>
-                </a:tc>
-              </a:tr>
-              <a:tr h="384048">
-                <a:tc>
-                  <a:txBody>
-                    <a:bodyPr wrap="square">
-                      <a:noAutofit/>
-                    </a:bodyPr>
-                    <a:lstStyle/>
-                    <a:p>
-                      <a:pPr algn="l">
-                        <a:lnSpc>
-                          <a:spcPts val="2012"/>
-                        </a:lnSpc>
-                        <a:buNone/>
-                        <a:defRPr sz="1750" b="0">
-                          <a:solidFill>
-                            <a:srgbClr val="303437"/>
-                          </a:solidFill>
-                          <a:latin typeface="Noto Sans"/>
-                        </a:defRPr>
-                      </a:pPr>
-                      <a:r>
-                        <a:rPr sz="1750" b="0" lang="ja-JP" altLang="en-US">
-                          <a:solidFill>
-                            <a:srgbClr val="303437"/>
-                          </a:solidFill>
-                          <a:latin typeface="Noto Sans"/>
-                          <a:ea typeface="Noto Sans CJK JP"/>
-                          <a:cs typeface="Noto Sans"/>
-                        </a:rPr>
-                        <a:t>停止条件</a:t>
-                      </a:r>
-                    </a:p>
-                  </a:txBody>
-                  <a:tcPr marL="63500" marR="63500" marT="38100" marB="38100" anchor="ctr">
-                    <a:lnL w="7620">
-                      <a:noFill/>
-                    </a:lnL>
-                    <a:lnR w="7620">
-                      <a:noFill/>
-                    </a:lnR>
-                    <a:lnT w="7620">
-                      <a:noFill/>
-                    </a:lnT>
-                    <a:lnB w="15240">
-                      <a:solidFill>
-                        <a:srgbClr val="626669"/>
-                      </a:solidFill>
-                      <a:prstDash val="solid"/>
-                    </a:lnB>
-                    <a:solidFill>
-                      <a:srgbClr val="FFFEF8"/>
-                    </a:solidFill>
-                  </a:tcPr>
-                </a:tc>
-                <a:tc>
-                  <a:txBody>
-                    <a:bodyPr wrap="square">
-                      <a:noAutofit/>
-                    </a:bodyPr>
-                    <a:lstStyle/>
-                    <a:p>
-                      <a:pPr algn="l">
-                        <a:lnSpc>
-                          <a:spcPts val="2012"/>
-                        </a:lnSpc>
-                        <a:buNone/>
-                        <a:defRPr sz="1750" b="0">
-                          <a:solidFill>
-                            <a:srgbClr val="303437"/>
-                          </a:solidFill>
-                          <a:latin typeface="Noto Sans"/>
-                        </a:defRPr>
-                      </a:pPr>
-                      <a:r>
-                        <a:rPr sz="1750" b="0" lang="ja-JP" altLang="en-US">
-                          <a:solidFill>
-                            <a:srgbClr val="303437"/>
-                          </a:solidFill>
-                          <a:latin typeface="Noto Sans"/>
-                          <a:ea typeface="Noto Sans CJK JP"/>
-                          <a:cs typeface="Noto Sans"/>
-                        </a:rPr>
-                        <a:t>Devの正解率が1 epoch改善しなければ停止</a:t>
-                      </a:r>
-                    </a:p>
-                  </a:txBody>
-                  <a:tcPr marL="63500" marR="63500" marT="38100" marB="38100" anchor="ctr">
-                    <a:lnL w="7620">
-                      <a:noFill/>
-                    </a:lnL>
-                    <a:lnR w="7620">
-                      <a:noFill/>
-                    </a:lnR>
-                    <a:lnT w="7620">
-                      <a:noFill/>
-                    </a:lnT>
-                    <a:lnB w="15240">
-                      <a:solidFill>
-                        <a:srgbClr val="626669"/>
-                      </a:solidFill>
-                      <a:prstDash val="solid"/>
-                    </a:lnB>
-                    <a:solidFill>
-                      <a:srgbClr val="FFFEF8"/>
-                    </a:solidFill>
-                  </a:tcPr>
-                </a:tc>
-              </a:tr>
-            </a:tbl>
-          </a:graphicData>
-        </a:graphic>
-      </p:graphicFrame>
-      <p:sp>
-        <p:nvSpPr>
-          <p:cNvPr id="5" name="TextBox 4"/>
-          <p:cNvSpPr txBox="1"/>
-          <p:nvPr/>
-        </p:nvSpPr>
-        <p:spPr>
-          <a:xfrm>
-            <a:off x="594360" y="3941063"/>
-            <a:ext cx="7955279" cy="658368"/>
-          </a:xfrm>
-          <a:prstGeom prst="rect">
-            <a:avLst/>
-          </a:prstGeom>
-          <a:noFill/>
-        </p:spPr>
-        <p:txBody>
-          <a:bodyPr wrap="square" lIns="0" rIns="0" tIns="0" bIns="0">
-            <a:noAutofit/>
-          </a:bodyPr>
-          <a:lstStyle/>
-          <a:p>
-            <a:pPr algn="l">
-              <a:lnSpc>
-                <a:spcPts val="1813"/>
-              </a:lnSpc>
-              <a:spcBef>
-                <a:spcPts val="0"/>
-              </a:spcBef>
-              <a:spcAft>
-                <a:spcPts val="0"/>
-              </a:spcAft>
-              <a:buNone/>
-              <a:defRPr sz="1550" b="0">
-                <a:solidFill>
-                  <a:srgbClr val="303437"/>
-                </a:solidFill>
-                <a:latin typeface="Noto Sans"/>
-              </a:defRPr>
-            </a:pPr>
-            <a:r>
-              <a:rPr sz="1550" b="0" lang="ja-JP" altLang="en-US">
-                <a:solidFill>
-                  <a:srgbClr val="303437"/>
-                </a:solidFill>
-                <a:latin typeface="Noto Sans"/>
-                <a:ea typeface="Noto Sans CJK JP"/>
-                <a:cs typeface="Noto Sans"/>
-              </a:rPr>
-              <a:t>単語ベクトルのdropoutは0.5、勾配ノルムは5でクリップ。生成モデルへの少数例提示とは別の学習条件。</a:t>
-            </a:r>
-          </a:p>
-        </p:txBody>
-      </p:sp>
-      <p:sp>
-        <p:nvSpPr>
-          <p:cNvPr id="6" name="sources"/>
-          <p:cNvSpPr txBox="1"/>
-          <p:nvPr/>
-        </p:nvSpPr>
-        <p:spPr>
-          <a:xfrm>
-            <a:off x="502920" y="4700016"/>
-            <a:ext cx="8183879" cy="530352"/>
-          </a:xfrm>
-          <a:prstGeom prst="rect">
-            <a:avLst/>
-          </a:prstGeom>
-          <a:noFill/>
-        </p:spPr>
-        <p:txBody>
-          <a:bodyPr wrap="square" lIns="0" rIns="0" tIns="0" bIns="0">
-            <a:noAutofit/>
-          </a:bodyPr>
-          <a:lstStyle/>
-          <a:p>
-            <a:pPr algn="l">
-              <a:lnSpc>
-                <a:spcPts val="940"/>
-              </a:lnSpc>
-              <a:spcBef>
-                <a:spcPts val="0"/>
-              </a:spcBef>
-              <a:spcAft>
-                <a:spcPts val="140"/>
-              </a:spcAft>
-              <a:buNone/>
-              <a:defRPr sz="810" b="0">
-                <a:solidFill>
-                  <a:srgbClr val="303437"/>
-                </a:solidFill>
-                <a:latin typeface="Noto Sans"/>
-              </a:defRPr>
-            </a:pPr>
-            <a:r>
-              <a:rPr sz="810" b="0" lang="ja-JP" altLang="en-US">
-                <a:solidFill>
-                  <a:srgbClr val="626669"/>
-                </a:solidFill>
-                <a:latin typeface="Noto Sans"/>
-                <a:ea typeface="Noto Sans CJK JP"/>
-                <a:cs typeface="Noto Sans"/>
-              </a:rPr>
-              <a:t>[1] Zheng, Huang &amp; Sun (2019). ChID: A Large-scale Chinese IDiom Dataset for Cloze Test. ACL, pp.778–787.</a:t>
-            </a:r>
-            <a:r>
-              <a:rPr sz="810" b="0" lang="ja-JP" altLang="en-US">
-                <a:solidFill>
-                  <a:srgbClr val="626669"/>
-                </a:solidFill>
-                <a:latin typeface="Noto Sans"/>
-                <a:ea typeface="Noto Sans CJK JP"/>
-                <a:cs typeface="Noto Sans"/>
-              </a:rPr>
-              <a:t>  </a:t>
-            </a:r>
-            <a:r>
-              <a:rPr sz="810" b="0" lang="ja-JP" altLang="en-US">
-                <a:solidFill>
-                  <a:srgbClr val="626669"/>
-                </a:solidFill>
-                <a:latin typeface="Noto Sans"/>
-                <a:ea typeface="Noto Sans CJK JP"/>
-                <a:cs typeface="Noto Sans"/>
-                <a:hlinkClick r:id="rId2"/>
-              </a:rPr>
-              <a:t>https://aclanthology.org/P19-1075/</a:t>
-            </a:r>
-          </a:p>
-        </p:txBody>
-      </p:sp>
-    </p:spTree>
-  </p:cSld>
-  <p:clrMapOvr>
-    <a:masterClrMapping/>
-  </p:clrMapOvr>
-</p:sld>
-</file>
-
 <file path=ppt/slides/slide23.xml><?xml version="1.0" encoding="utf-8"?>
 <p:sld xmlns:a="http://schemas.openxmlformats.org/drawingml/2006/main" xmlns:p="http://schemas.openxmlformats.org/presentationml/2006/main" xmlns:r="http://schemas.openxmlformats.org/officeDocument/2006/relationships">
   <p:cSld>
@@ -15203,7 +13717,7 @@
                 <a:ea typeface="Noto Sans CJK JP"/>
                 <a:cs typeface="Noto Sans"/>
               </a:rPr>
-              <a:t>原版と後利用の形式・範囲</a:t>
+              <a:t>配布形式の違いとCLEVAでの利用</a:t>
             </a:r>
           </a:p>
         </p:txBody>
@@ -15251,7 +13765,7 @@
                 <a:ea typeface="Noto Sans CJK JP"/>
                 <a:cs typeface="Noto Sans"/>
               </a:rPr>
-              <a:t>4. 原版と後利用の形式・範囲</a:t>
+              <a:t>4. 配布形式の違いとCLEVAでの利用</a:t>
             </a:r>
           </a:p>
         </p:txBody>
@@ -15365,7 +13879,7 @@
                 <a:ea typeface="Noto Sans CJK JP"/>
                 <a:cs typeface="Noto Sans"/>
               </a:rPr>
-              <a:t>4. 原版と後利用の形式・範囲</a:t>
+              <a:t>4. 配布形式の違いとCLEVAでの利用</a:t>
             </a:r>
           </a:p>
         </p:txBody>
@@ -15930,60 +14444,6 @@
       </p:graphicFrame>
       <p:sp>
         <p:nvSpPr>
-          <p:cNvPr id="5" name="TextBox 4"/>
-          <p:cNvSpPr txBox="1"/>
-          <p:nvPr/>
-        </p:nvSpPr>
-        <p:spPr>
-          <a:xfrm>
-            <a:off x="594360" y="3557016"/>
-            <a:ext cx="7955279" cy="658368"/>
-          </a:xfrm>
-          <a:prstGeom prst="rect">
-            <a:avLst/>
-          </a:prstGeom>
-          <a:noFill/>
-        </p:spPr>
-        <p:txBody>
-          <a:bodyPr wrap="square" lIns="0" rIns="0" tIns="0" bIns="0">
-            <a:noAutofit/>
-          </a:bodyPr>
-          <a:lstStyle/>
-          <a:p>
-            <a:pPr algn="l">
-              <a:lnSpc>
-                <a:spcPts val="1813"/>
-              </a:lnSpc>
-              <a:spcBef>
-                <a:spcPts val="0"/>
-              </a:spcBef>
-              <a:spcAft>
-                <a:spcPts val="0"/>
-              </a:spcAft>
-              <a:buNone/>
-              <a:defRPr sz="1550" b="0">
-                <a:solidFill>
-                  <a:srgbClr val="303437"/>
-                </a:solidFill>
-                <a:latin typeface="Noto Sans"/>
-              </a:defRPr>
-            </a:pPr>
-            <a:r>
-              <a:rPr sz="1550" b="0" lang="ja-JP" altLang="en-US">
-                <a:solidFill>
-                  <a:srgbClr val="303437"/>
-                </a:solidFill>
-                <a:latin typeface="Noto Sans"/>
-                <a:ea typeface="Noto Sans CJK JP"/>
-                <a:cs typeface="Noto Sans"/>
-              </a:rPr>
-              <a:t>後利用の掲載例が元のどの版と一致するかを確認し、各配布の件数や評価条件をそのまま引き継がない。</a:t>
-            </a:r>
-          </a:p>
-        </p:txBody>
-      </p:sp>
-      <p:sp>
-        <p:nvSpPr>
           <p:cNvPr id="6" name="sources"/>
           <p:cNvSpPr txBox="1"/>
           <p:nvPr/>
@@ -16031,7 +14491,19 @@
                 <a:ea typeface="Noto Sans CJK JP"/>
                 <a:cs typeface="Noto Sans"/>
               </a:rPr>
-              <a:t>[1] Zheng, Huang &amp; Sun. ChID-Adapt、コンテスト向けの問題形式と公式配布。</a:t>
+              <a:t>[1] Zheng, Huang &amp; Sun (2019). ChID-Adapt.  </a:t>
+            </a:r>
+            <a:r>
+              <a:rPr sz="810" b="0" lang="ja-JP" altLang="en-US">
+                <a:solidFill>
+                  <a:srgbClr val="626669"/>
+                </a:solidFill>
+                <a:latin typeface="Noto Sans"/>
+                <a:ea typeface="Noto Sans CJK JP"/>
+                <a:cs typeface="Noto Sans"/>
+                <a:hlinkClick r:id="rId4"/>
+              </a:rPr>
+              <a:t>https://github.com/chujiezheng/ChID-Dataset/blob/master/Competition/README.md</a:t>
             </a:r>
           </a:p>
           <a:p>
@@ -16055,48 +14527,8 @@
                 <a:latin typeface="Noto Sans"/>
                 <a:ea typeface="Noto Sans CJK JP"/>
                 <a:cs typeface="Noto Sans"/>
-                <a:hlinkClick r:id="rId2"/>
-              </a:rPr>
-              <a:t>https://github.com/chujiezheng/ChID-Dataset/blob/0836ebf72cbe7d2da832021b02ff08f627de885d/Competition/README.md</a:t>
-            </a:r>
-          </a:p>
-          <a:p>
-            <a:pPr>
-              <a:lnSpc>
-                <a:spcPts val="940"/>
-              </a:lnSpc>
-              <a:spcAft>
-                <a:spcPts val="140"/>
-              </a:spcAft>
-              <a:buNone/>
-              <a:defRPr sz="810" b="0">
-                <a:solidFill>
-                  <a:srgbClr val="303437"/>
-                </a:solidFill>
-                <a:latin typeface="Noto Sans"/>
-              </a:defRPr>
-            </a:pPr>
-            <a:r>
-              <a:rPr sz="810" b="0" lang="ja-JP" altLang="en-US">
-                <a:solidFill>
-                  <a:srgbClr val="626669"/>
-                </a:solidFill>
-                <a:latin typeface="Noto Sans"/>
-                <a:ea typeface="Noto Sans CJK JP"/>
-                <a:cs typeface="Noto Sans"/>
-              </a:rPr>
-              <a:t>[2] Li et al. (2023). CLEVA: Chinese Language Models EVAluation Platform. EMNLP: System Demonstrations.</a:t>
-            </a:r>
-            <a:r>
-              <a:rPr sz="810" b="0" lang="ja-JP" altLang="en-US">
-                <a:solidFill>
-                  <a:srgbClr val="626669"/>
-                </a:solidFill>
-                <a:latin typeface="Noto Sans"/>
-                <a:ea typeface="Noto Sans CJK JP"/>
-                <a:cs typeface="Noto Sans"/>
-              </a:rPr>
-              <a:t>  </a:t>
+              </a:rPr>
+              <a:t>[2] Li et al. (2023). CLEVA: Chinese Language Models EVAluation Platform. EMNLP: System Demonstrations.  </a:t>
             </a:r>
             <a:r>
               <a:rPr sz="810" b="0" lang="ja-JP" altLang="en-US">
@@ -16174,7 +14606,7 @@
                 <a:ea typeface="Noto Sans CJK JP"/>
                 <a:cs typeface="Noto Sans"/>
               </a:rPr>
-              <a:t>CLUE版は、群・文章・空欄を分けて数える</a:t>
+              <a:t>CLUE版では、複数の文章が十候補を共有する</a:t>
             </a:r>
           </a:p>
         </p:txBody>
@@ -16222,7 +14654,7 @@
                 <a:ea typeface="Noto Sans CJK JP"/>
                 <a:cs typeface="Noto Sans"/>
               </a:rPr>
-              <a:t>4. 原版と後利用の形式・範囲</a:t>
+              <a:t>4. 配布形式の違いとCLEVAでの利用</a:t>
             </a:r>
           </a:p>
         </p:txBody>
@@ -17360,7 +15792,7 @@
                 <a:ea typeface="Noto Sans CJK JP"/>
                 <a:cs typeface="Noto Sans"/>
               </a:rPr>
-              <a:t>公開ZIP全件。train/devの正解は別JSON、両testの正解は同ZIPにない。devは作者案内のコンテスト版と入力・正解が一致。</a:t>
+              <a:t>学習・開発の正解は別のJSONに入っている。公開ZIPには、test 1.0とtest 1.1の正解は含まれない。</a:t>
             </a:r>
           </a:p>
         </p:txBody>
@@ -17551,7 +15983,7 @@
                 <a:ea typeface="Noto Sans CJK JP"/>
                 <a:cs typeface="Noto Sans"/>
               </a:rPr>
-              <a:t>4. 原版と後利用の形式・範囲</a:t>
+              <a:t>4. 配布形式の違いとCLEVAでの利用</a:t>
             </a:r>
           </a:p>
         </p:txBody>
@@ -18426,7 +16858,7 @@
                 <a:ea typeface="Noto Sans CJK JP"/>
                 <a:cs typeface="Noto Sans"/>
               </a:rPr>
-              <a:t>各allは五つの小集合の質問をまとめた202種類で、42×5の210行ではない。全問は一空欄・七候補。</a:t>
+              <a:t>学習・開発の集約版は、五つの小集合を合わせ、重複を除いた各202問。一つの空欄と七候補を持つ。</a:t>
             </a:r>
           </a:p>
         </p:txBody>
@@ -18480,7 +16912,7 @@
                 <a:ea typeface="Noto Sans CJK JP"/>
                 <a:cs typeface="Noto Sans"/>
               </a:rPr>
-              <a:t>[1] Xu et al. (2021). FewCLUE: A Chinese Few-shot Learning Evaluation Benchmark. arXiv:2107.07498v2.</a:t>
+              <a:t>[1] Xu et al. (2021). FewCLUE: A Chinese Few-shot Learning Evaluation Benchmark. arXiv:2107.07498v2.  </a:t>
             </a:r>
             <a:r>
               <a:rPr sz="810" b="0" lang="ja-JP" altLang="en-US">
@@ -18490,9 +16922,27 @@
                 <a:latin typeface="Noto Sans"/>
                 <a:ea typeface="Noto Sans CJK JP"/>
                 <a:cs typeface="Noto Sans"/>
-              </a:rPr>
-              <a:t>  </a:t>
-            </a:r>
+                <a:hlinkClick r:id="rId2"/>
+              </a:rPr>
+              <a:t>https://arxiv.org/abs/2107.07498</a:t>
+            </a:r>
+          </a:p>
+          <a:p>
+            <a:pPr>
+              <a:lnSpc>
+                <a:spcPts val="940"/>
+              </a:lnSpc>
+              <a:spcAft>
+                <a:spcPts val="140"/>
+              </a:spcAft>
+              <a:buNone/>
+              <a:defRPr sz="810" b="0">
+                <a:solidFill>
+                  <a:srgbClr val="303437"/>
+                </a:solidFill>
+                <a:latin typeface="Noto Sans"/>
+              </a:defRPr>
+            </a:pPr>
             <a:r>
               <a:rPr sz="810" b="0" lang="ja-JP" altLang="en-US">
                 <a:solidFill>
@@ -18501,27 +16951,9 @@
                 <a:latin typeface="Noto Sans"/>
                 <a:ea typeface="Noto Sans CJK JP"/>
                 <a:cs typeface="Noto Sans"/>
-                <a:hlinkClick r:id="rId2"/>
-              </a:rPr>
-              <a:t>https://arxiv.org/abs/2107.07498</a:t>
-            </a:r>
-          </a:p>
-          <a:p>
-            <a:pPr>
-              <a:lnSpc>
-                <a:spcPts val="940"/>
-              </a:lnSpc>
-              <a:spcAft>
-                <a:spcPts val="140"/>
-              </a:spcAft>
-              <a:buNone/>
-              <a:defRPr sz="810" b="0">
-                <a:solidFill>
-                  <a:srgbClr val="303437"/>
-                </a:solidFill>
-                <a:latin typeface="Noto Sans"/>
-              </a:defRPr>
-            </a:pPr>
+              </a:rPr>
+              <a:t>[2] CLUE team (2021). FewCLUE — ChID.  </a:t>
+            </a:r>
             <a:r>
               <a:rPr sz="810" b="0" lang="ja-JP" altLang="en-US">
                 <a:solidFill>
@@ -18530,34 +16962,9 @@
                 <a:latin typeface="Noto Sans"/>
                 <a:ea typeface="Noto Sans CJK JP"/>
                 <a:cs typeface="Noto Sans"/>
-              </a:rPr>
-              <a:t>[2] CLUE team. FewCLUE / ChID、固定commit 62a02c6f31cf32814cfe522f78ef088228840f8d。</a:t>
-            </a:r>
-          </a:p>
-          <a:p>
-            <a:pPr>
-              <a:lnSpc>
-                <a:spcPts val="940"/>
-              </a:lnSpc>
-              <a:buNone/>
-              <a:defRPr sz="810" b="0">
-                <a:solidFill>
-                  <a:srgbClr val="303437"/>
-                </a:solidFill>
-                <a:latin typeface="Noto Sans"/>
-              </a:defRPr>
-            </a:pPr>
-            <a:r>
-              <a:rPr sz="810" b="0" lang="ja-JP" altLang="en-US">
-                <a:solidFill>
-                  <a:srgbClr val="626669"/>
-                </a:solidFill>
-                <a:latin typeface="Noto Sans"/>
-                <a:ea typeface="Noto Sans CJK JP"/>
-                <a:cs typeface="Noto Sans"/>
-                <a:hlinkClick r:id="rId3"/>
-              </a:rPr>
-              <a:t>https://github.com/CLUEbenchmark/FewCLUE/tree/62a02c6f31cf32814cfe522f78ef088228840f8d/datasets/chid</a:t>
+                <a:hlinkClick r:id="rId4"/>
+              </a:rPr>
+              <a:t>https://github.com/CLUEbenchmark/FewCLUE/tree/main/datasets/chid</a:t>
             </a:r>
           </a:p>
         </p:txBody>
@@ -18623,7 +17030,7 @@
                 <a:ea typeface="Noto Sans CJK JP"/>
                 <a:cs typeface="Noto Sans"/>
               </a:rPr>
-              <a:t>CLEVA掲載例は、FewCLUE配布と一致する</a:t>
+              <a:t>CLEVAは、成語の穴埋めで文化知識を評価する</a:t>
             </a:r>
           </a:p>
         </p:txBody>
@@ -18676,7 +17083,7 @@
                 <a:ea typeface="Noto Sans CJK JP"/>
                 <a:cs typeface="Noto Sans"/>
               </a:rPr>
-              <a:t>実例2は、FewCLUE train_2の20行と本文・七候補・正解が対応する。CLEVA紙面は、その候補から「足智多谋」「语无伦次」「绣花枕头」の三つを載せ、正解Aを示す。</a:t>
+              <a:t>CLEVAは、中国語モデルの文化知識を調べる課題として、ChIDの成語の穴埋めを用いる。公開論文の例は実例2と同じ文章で、「足智多谋」「语无伦次」「绣花枕头」の三候補から正解Aを選ぶ。</a:t>
             </a:r>
           </a:p>
           <a:p>
@@ -18706,7 +17113,37 @@
                 <a:ea typeface="Noto Sans CJK JP"/>
                 <a:cs typeface="Noto Sans"/>
               </a:rPr>
-              <a:t>実例3は、HELMのCLEVACulturalKnowledgeScenarioにある映画の例と七候補・正解Dが一致する。FewCLUE train_3の21行にあり、原論文版の同一行への対応は確認できていない。</a:t>
+              <a:t>HELMにも同課題の実装があり、実例3の映画の文章を七候補で示している。いずれの例もFewCLUEの公開問題に含まれる。</a:t>
+            </a:r>
+          </a:p>
+          <a:p>
+            <a:pPr marL="457200" indent="-355600">
+              <a:lnSpc>
+                <a:spcPts val="2379"/>
+              </a:lnSpc>
+              <a:spcAft>
+                <a:spcPts val="0"/>
+              </a:spcAft>
+              <a:buSzPct val="66500"/>
+              <a:buFont typeface="Noto Sans CJK JP"/>
+              <a:buChar char="●"/>
+              <a:defRPr sz="2000" b="0">
+                <a:solidFill>
+                  <a:srgbClr val="303437"/>
+                </a:solidFill>
+                <a:latin typeface="Noto Sans"/>
+              </a:defRPr>
+            </a:pPr>
+            <a:r>
+              <a:rPr sz="2000" b="0" lang="ja-JP" altLang="en-US">
+                <a:solidFill>
+                  <a:srgbClr val="303437"/>
+                </a:solidFill>
+                <a:latin typeface="Noto Sans"/>
+                <a:ea typeface="Noto Sans CJK JP"/>
+                <a:cs typeface="Noto Sans"/>
+              </a:rPr>
+              <a:t>CLEVAで評価に使った問題の総数は、公開説明には記されていない。</a:t>
             </a:r>
           </a:p>
         </p:txBody>
@@ -18754,7 +17191,7 @@
                 <a:ea typeface="Noto Sans CJK JP"/>
                 <a:cs typeface="Noto Sans"/>
               </a:rPr>
-              <a:t>4. 原版と後利用の形式・範囲</a:t>
+              <a:t>4. 配布形式の違いとCLEVAでの利用</a:t>
             </a:r>
           </a:p>
         </p:txBody>
@@ -18886,337 +17323,6 @@
                 <a:hlinkClick r:id="rId3"/>
               </a:rPr>
               <a:t>https://github.com/stanford-crfm/helm/blob/v0.4.0/src/helm/benchmark/scenarios/cleva_scenario.py</a:t>
-            </a:r>
-          </a:p>
-        </p:txBody>
-      </p:sp>
-    </p:spTree>
-  </p:cSld>
-  <p:clrMapOvr>
-    <a:masterClrMapping/>
-  </p:clrMapOvr>
-</p:sld>
-</file>
-
-<file path=ppt/slides/slide28.xml><?xml version="1.0" encoding="utf-8"?>
-<p:sld xmlns:a="http://schemas.openxmlformats.org/drawingml/2006/main" xmlns:p="http://schemas.openxmlformats.org/presentationml/2006/main" xmlns:r="http://schemas.openxmlformats.org/officeDocument/2006/relationships">
-  <p:cSld>
-    <p:spTree>
-      <p:nvGrpSpPr>
-        <p:cNvPr id="1" name=""/>
-        <p:cNvGrpSpPr/>
-        <p:nvPr/>
-      </p:nvGrpSpPr>
-      <p:grpSpPr/>
-      <p:sp>
-        <p:nvSpPr>
-          <p:cNvPr id="2" name="Title 1"/>
-          <p:cNvSpPr>
-            <a:spLocks noGrp="1"/>
-          </p:cNvSpPr>
-          <p:nvPr>
-            <p:ph type="title"/>
-          </p:nvPr>
-        </p:nvSpPr>
-        <p:spPr>
-          <a:xfrm>
-            <a:off x="468172" y="650138"/>
-            <a:ext cx="8206740" cy="616305"/>
-          </a:xfrm>
-        </p:spPr>
-        <p:txBody>
-          <a:bodyPr wrap="square" lIns="0" rIns="0" tIns="0" bIns="0">
-            <a:noAutofit/>
-          </a:bodyPr>
-          <a:lstStyle/>
-          <a:p>
-            <a:pPr algn="l">
-              <a:lnSpc>
-                <a:spcPct val="110000"/>
-              </a:lnSpc>
-              <a:buNone/>
-              <a:defRPr sz="2800" b="0">
-                <a:solidFill>
-                  <a:srgbClr val="303437"/>
-                </a:solidFill>
-                <a:latin typeface="Noto Sans"/>
-              </a:defRPr>
-            </a:pPr>
-            <a:r>
-              <a:rPr sz="2800" b="1" lang="ja-JP" altLang="en-US">
-                <a:solidFill>
-                  <a:srgbClr val="303437"/>
-                </a:solidFill>
-                <a:latin typeface="Noto Sans"/>
-                <a:ea typeface="Noto Sans CJK JP"/>
-                <a:cs typeface="Noto Sans"/>
-              </a:rPr>
-              <a:t>六つの設定はあるが、CLEVAの公開実行は0件</a:t>
-            </a:r>
-          </a:p>
-        </p:txBody>
-      </p:sp>
-      <p:sp>
-        <p:nvSpPr>
-          <p:cNvPr id="3" name="Text Placeholder 2"/>
-          <p:cNvSpPr>
-            <a:spLocks noGrp="1"/>
-          </p:cNvSpPr>
-          <p:nvPr>
-            <p:ph type="body" idx="1"/>
-          </p:nvPr>
-        </p:nvSpPr>
-        <p:spPr>
-          <a:xfrm>
-            <a:off x="594360" y="1463040"/>
-            <a:ext cx="7955279" cy="3044952"/>
-          </a:xfrm>
-        </p:spPr>
-        <p:txBody>
-          <a:bodyPr wrap="square" tIns="91440" bIns="91440">
-            <a:noAutofit/>
-          </a:bodyPr>
-          <a:lstStyle/>
-          <a:p>
-            <a:pPr marL="457200" indent="-355600">
-              <a:lnSpc>
-                <a:spcPts val="2379"/>
-              </a:lnSpc>
-              <a:spcAft>
-                <a:spcPts val="700"/>
-              </a:spcAft>
-              <a:buSzPct val="66500"/>
-              <a:buFont typeface="Noto Sans CJK JP"/>
-              <a:buChar char="●"/>
-              <a:defRPr sz="2000" b="0">
-                <a:solidFill>
-                  <a:srgbClr val="303437"/>
-                </a:solidFill>
-                <a:latin typeface="Noto Sans"/>
-              </a:defRPr>
-            </a:pPr>
-            <a:r>
-              <a:rPr sz="2000" b="0" lang="ja-JP" altLang="en-US">
-                <a:solidFill>
-                  <a:srgbClr val="303437"/>
-                </a:solidFill>
-                <a:latin typeface="Noto Sans"/>
-                <a:ea typeface="Noto Sans CJK JP"/>
-                <a:cs typeface="Noto Sans"/>
-              </a:rPr>
-              <a:t>HELM v0.4.0のcultural_knowledge / idiomにはprompt_id 0〜5がある。外部のデータとテンプレートから入力・候補・正解参照を作る実装が用意されている。</a:t>
-            </a:r>
-          </a:p>
-          <a:p>
-            <a:pPr marL="457200" indent="-355600">
-              <a:lnSpc>
-                <a:spcPts val="2379"/>
-              </a:lnSpc>
-              <a:spcAft>
-                <a:spcPts val="0"/>
-              </a:spcAft>
-              <a:buSzPct val="66500"/>
-              <a:buFont typeface="Noto Sans CJK JP"/>
-              <a:buChar char="●"/>
-              <a:defRPr sz="2000" b="0">
-                <a:solidFill>
-                  <a:srgbClr val="303437"/>
-                </a:solidFill>
-                <a:latin typeface="Noto Sans"/>
-              </a:defRPr>
-            </a:pPr>
-            <a:r>
-              <a:rPr sz="2000" b="0" lang="ja-JP" altLang="en-US">
-                <a:solidFill>
-                  <a:srgbClr val="303437"/>
-                </a:solidFill>
-                <a:latin typeface="Noto Sans"/>
-                <a:ea typeface="Noto Sans CJK JP"/>
-                <a:cs typeface="Noto Sans"/>
-              </a:rPr>
-              <a:t>Classic v0.4.0の公開run_specs 8,526件にはCLEVA実行がない。全採用集合・テンプレート・推論パラメータは未取得で、実際の得点や提示例数は元データの条件から補わない。</a:t>
-            </a:r>
-          </a:p>
-        </p:txBody>
-      </p:sp>
-      <p:sp>
-        <p:nvSpPr>
-          <p:cNvPr id="4" name="Title 3"/>
-          <p:cNvSpPr>
-            <a:spLocks noGrp="1"/>
-          </p:cNvSpPr>
-          <p:nvPr>
-            <p:ph type="title" idx="2"/>
-          </p:nvPr>
-        </p:nvSpPr>
-        <p:spPr>
-          <a:xfrm>
-            <a:off x="75895" y="0"/>
-            <a:ext cx="8115300" cy="480060"/>
-          </a:xfrm>
-        </p:spPr>
-        <p:txBody>
-          <a:bodyPr wrap="square" lIns="0" rIns="0" tIns="0" bIns="0" anchor="ctr">
-            <a:noAutofit/>
-          </a:bodyPr>
-          <a:lstStyle/>
-          <a:p>
-            <a:pPr algn="l">
-              <a:lnSpc>
-                <a:spcPct val="110000"/>
-              </a:lnSpc>
-              <a:buNone/>
-              <a:defRPr sz="1400" b="0">
-                <a:solidFill>
-                  <a:srgbClr val="303437"/>
-                </a:solidFill>
-                <a:latin typeface="Noto Sans"/>
-              </a:defRPr>
-            </a:pPr>
-            <a:r>
-              <a:rPr sz="1400" b="1" lang="ja-JP" altLang="en-US">
-                <a:solidFill>
-                  <a:srgbClr val="FFFEF8"/>
-                </a:solidFill>
-                <a:latin typeface="Noto Sans"/>
-                <a:ea typeface="Noto Sans CJK JP"/>
-                <a:cs typeface="Noto Sans"/>
-              </a:rPr>
-              <a:t>4. 原版と後利用の形式・範囲</a:t>
-            </a:r>
-          </a:p>
-        </p:txBody>
-      </p:sp>
-      <p:sp>
-        <p:nvSpPr>
-          <p:cNvPr id="5" name="sources"/>
-          <p:cNvSpPr txBox="1"/>
-          <p:nvPr/>
-        </p:nvSpPr>
-        <p:spPr>
-          <a:xfrm>
-            <a:off x="502920" y="4517136"/>
-            <a:ext cx="8183879" cy="530352"/>
-          </a:xfrm>
-          <a:prstGeom prst="rect">
-            <a:avLst/>
-          </a:prstGeom>
-          <a:noFill/>
-        </p:spPr>
-        <p:txBody>
-          <a:bodyPr wrap="square" lIns="0" rIns="0" tIns="0" bIns="0">
-            <a:noAutofit/>
-          </a:bodyPr>
-          <a:lstStyle/>
-          <a:p>
-            <a:pPr algn="l">
-              <a:lnSpc>
-                <a:spcPts val="940"/>
-              </a:lnSpc>
-              <a:spcBef>
-                <a:spcPts val="0"/>
-              </a:spcBef>
-              <a:spcAft>
-                <a:spcPts val="140"/>
-              </a:spcAft>
-              <a:buNone/>
-              <a:defRPr sz="810" b="0">
-                <a:solidFill>
-                  <a:srgbClr val="303437"/>
-                </a:solidFill>
-                <a:latin typeface="Noto Sans"/>
-              </a:defRPr>
-            </a:pPr>
-            <a:r>
-              <a:rPr sz="810" b="0" lang="ja-JP" altLang="en-US">
-                <a:solidFill>
-                  <a:srgbClr val="626669"/>
-                </a:solidFill>
-                <a:latin typeface="Noto Sans"/>
-                <a:ea typeface="Noto Sans CJK JP"/>
-                <a:cs typeface="Noto Sans"/>
-              </a:rPr>
-              <a:t>[1] Stanford CRFM. CLEVACulturalKnowledgeScenario / Converter. HELM v0.4.0.</a:t>
-            </a:r>
-          </a:p>
-          <a:p>
-            <a:pPr>
-              <a:lnSpc>
-                <a:spcPts val="940"/>
-              </a:lnSpc>
-              <a:buNone/>
-              <a:defRPr sz="810" b="0">
-                <a:solidFill>
-                  <a:srgbClr val="303437"/>
-                </a:solidFill>
-                <a:latin typeface="Noto Sans"/>
-              </a:defRPr>
-            </a:pPr>
-            <a:r>
-              <a:rPr sz="810" b="0" lang="ja-JP" altLang="en-US">
-                <a:solidFill>
-                  <a:srgbClr val="626669"/>
-                </a:solidFill>
-                <a:latin typeface="Noto Sans"/>
-                <a:ea typeface="Noto Sans CJK JP"/>
-                <a:cs typeface="Noto Sans"/>
-                <a:hlinkClick r:id="rId2"/>
-              </a:rPr>
-              <a:t>https://github.com/stanford-crfm/helm/blob/v0.4.0/src/helm/benchmark/scenarios/cleva_scenario.py</a:t>
-            </a:r>
-          </a:p>
-          <a:p>
-            <a:pPr>
-              <a:lnSpc>
-                <a:spcPts val="940"/>
-              </a:lnSpc>
-              <a:spcAft>
-                <a:spcPts val="140"/>
-              </a:spcAft>
-              <a:buNone/>
-              <a:defRPr sz="810" b="0">
-                <a:solidFill>
-                  <a:srgbClr val="303437"/>
-                </a:solidFill>
-                <a:latin typeface="Noto Sans"/>
-              </a:defRPr>
-            </a:pPr>
-            <a:r>
-              <a:rPr sz="810" b="0" lang="ja-JP" altLang="en-US">
-                <a:solidFill>
-                  <a:srgbClr val="626669"/>
-                </a:solidFill>
-                <a:latin typeface="Noto Sans"/>
-                <a:ea typeface="Noto Sans CJK JP"/>
-                <a:cs typeface="Noto Sans"/>
-              </a:rPr>
-              <a:t>[2] Stanford CRFM. run_specs_cleva_v1.conf. HELM v0.4.0、cultural_knowledge / idiom設定。</a:t>
-            </a:r>
-          </a:p>
-          <a:p>
-            <a:pPr>
-              <a:lnSpc>
-                <a:spcPts val="940"/>
-              </a:lnSpc>
-              <a:buNone/>
-              <a:defRPr sz="810" b="0">
-                <a:solidFill>
-                  <a:srgbClr val="303437"/>
-                </a:solidFill>
-                <a:latin typeface="Noto Sans"/>
-              </a:defRPr>
-            </a:pPr>
-            <a:r>
-              <a:rPr sz="810" b="0" lang="ja-JP" altLang="en-US">
-                <a:solidFill>
-                  <a:srgbClr val="626669"/>
-                </a:solidFill>
-                <a:latin typeface="Noto Sans"/>
-                <a:ea typeface="Noto Sans CJK JP"/>
-                <a:cs typeface="Noto Sans"/>
-                <a:hlinkClick r:id="rId3"/>
-              </a:rPr>
-              <a:t>https://github.com/stanford-crfm/helm/blob/v0.4.0/src/helm/benchmark/presentation/run_specs_cleva_v1.conf</a:t>
             </a:r>
           </a:p>
         </p:txBody>
@@ -19282,7 +17388,7 @@
                 <a:ea typeface="Noto Sans CJK JP"/>
                 <a:cs typeface="Noto Sans"/>
               </a:rPr>
-              <a:t>作者の配布を引用し、元文章の出所も区別する</a:t>
+              <a:t>公式配布を入手し、ChID論文を引用して利用する</a:t>
             </a:r>
           </a:p>
         </p:txBody>
@@ -19335,7 +17441,7 @@
                 <a:ea typeface="Noto Sans CJK JP"/>
                 <a:cs typeface="Noto Sans"/>
               </a:rPr>
-              <a:t>作者の公式GitHubは、原論文版とコンテスト版の配布を案内し、利用時にChID論文の引用を求める。固定リポジトリにはApache License 2.0がある。</a:t>
+              <a:t>作者の公式GitHubは、原論文版とコンテスト版の配布を案内し、利用時にChID論文の引用を求める。リポジトリのライセンスはApache License 2.0。</a:t>
             </a:r>
           </a:p>
           <a:p>
@@ -19365,7 +17471,7 @@
                 <a:ea typeface="Noto Sans CJK JP"/>
                 <a:cs typeface="Noto Sans"/>
               </a:rPr>
-              <a:t>素材にはニュースや文学作品が含まれる。リポジトリのライセンスと元文章の出所・権利を区別し、引用する文章・候補・版を特定して利用する。</a:t>
+              <a:t>素材にはニュースや文学作品が含まれる。元文章の権利や引用条件は、作品・配布元の情報を確認する。</a:t>
             </a:r>
           </a:p>
         </p:txBody>
@@ -19413,7 +17519,7 @@
                 <a:ea typeface="Noto Sans CJK JP"/>
                 <a:cs typeface="Noto Sans"/>
               </a:rPr>
-              <a:t>4. 原版と後利用の形式・範囲</a:t>
+              <a:t>4. 配布形式の違いとCLEVAでの利用</a:t>
             </a:r>
           </a:p>
         </p:txBody>
@@ -19467,7 +17573,19 @@
                 <a:ea typeface="Noto Sans CJK JP"/>
                 <a:cs typeface="Noto Sans"/>
               </a:rPr>
-              <a:t>[1] Zheng, Huang &amp; Sun. ChID-Dataset、公式公開リポジトリ、固定commit 0836ebf72cbe7d2da832021b02ff08f627de885d。</a:t>
+              <a:t>[1] Zheng, Huang &amp; Sun (2019). ChID-Dataset.  </a:t>
+            </a:r>
+            <a:r>
+              <a:rPr sz="810" b="0" lang="ja-JP" altLang="en-US">
+                <a:solidFill>
+                  <a:srgbClr val="626669"/>
+                </a:solidFill>
+                <a:latin typeface="Noto Sans"/>
+                <a:ea typeface="Noto Sans CJK JP"/>
+                <a:cs typeface="Noto Sans"/>
+                <a:hlinkClick r:id="rId2"/>
+              </a:rPr>
+              <a:t>https://github.com/chujiezheng/ChID-Dataset</a:t>
             </a:r>
           </a:p>
           <a:p>
@@ -19491,27 +17609,9 @@
                 <a:latin typeface="Noto Sans"/>
                 <a:ea typeface="Noto Sans CJK JP"/>
                 <a:cs typeface="Noto Sans"/>
-                <a:hlinkClick r:id="rId2"/>
-              </a:rPr>
-              <a:t>https://github.com/chujiezheng/ChID-Dataset</a:t>
-            </a:r>
-          </a:p>
-          <a:p>
-            <a:pPr>
-              <a:lnSpc>
-                <a:spcPts val="940"/>
-              </a:lnSpc>
-              <a:spcAft>
-                <a:spcPts val="140"/>
-              </a:spcAft>
-              <a:buNone/>
-              <a:defRPr sz="810" b="0">
-                <a:solidFill>
-                  <a:srgbClr val="303437"/>
-                </a:solidFill>
-                <a:latin typeface="Noto Sans"/>
-              </a:defRPr>
-            </a:pPr>
+              </a:rPr>
+              <a:t>[2] ChID-Dataset. Apache License 2.0.  </a:t>
+            </a:r>
             <a:r>
               <a:rPr sz="810" b="0" lang="ja-JP" altLang="en-US">
                 <a:solidFill>
@@ -19520,34 +17620,9 @@
                 <a:latin typeface="Noto Sans"/>
                 <a:ea typeface="Noto Sans CJK JP"/>
                 <a:cs typeface="Noto Sans"/>
-              </a:rPr>
-              <a:t>[2] ChID-Dataset. Apache License 2.0、固定リポジトリのLICENSE。</a:t>
-            </a:r>
-          </a:p>
-          <a:p>
-            <a:pPr>
-              <a:lnSpc>
-                <a:spcPts val="940"/>
-              </a:lnSpc>
-              <a:buNone/>
-              <a:defRPr sz="810" b="0">
-                <a:solidFill>
-                  <a:srgbClr val="303437"/>
-                </a:solidFill>
-                <a:latin typeface="Noto Sans"/>
-              </a:defRPr>
-            </a:pPr>
-            <a:r>
-              <a:rPr sz="810" b="0" lang="ja-JP" altLang="en-US">
-                <a:solidFill>
-                  <a:srgbClr val="626669"/>
-                </a:solidFill>
-                <a:latin typeface="Noto Sans"/>
-                <a:ea typeface="Noto Sans CJK JP"/>
-                <a:cs typeface="Noto Sans"/>
-                <a:hlinkClick r:id="rId3"/>
-              </a:rPr>
-              <a:t>https://github.com/chujiezheng/ChID-Dataset/blob/0836ebf72cbe7d2da832021b02ff08f627de885d/LICENSE</a:t>
+                <a:hlinkClick r:id="rId4"/>
+              </a:rPr>
+              <a:t>https://github.com/chujiezheng/ChID-Dataset/blob/master/LICENSE</a:t>
             </a:r>
           </a:p>
         </p:txBody>
@@ -19756,7 +17831,7 @@
                 <a:ea typeface="Noto Sans CJK JP"/>
                 <a:cs typeface="Noto Sans"/>
               </a:rPr>
-              <a:t>原版と後利用の形式・範囲</a:t>
+              <a:t>配布形式の違いとCLEVAでの利用</a:t>
             </a:r>
           </a:p>
         </p:txBody>
@@ -19870,7 +17945,7 @@
                 <a:ea typeface="Noto Sans CJK JP"/>
                 <a:cs typeface="Noto Sans"/>
               </a:rPr>
-              <a:t>まとめ：成語の意味を、文脈へ対応させる</a:t>
+              <a:t>まとめ：文脈に合う成語を選ぶ</a:t>
             </a:r>
           </a:p>
         </p:txBody>
@@ -19923,7 +17998,7 @@
                 <a:ea typeface="Noto Sans CJK JP"/>
                 <a:cs typeface="Noto Sans"/>
               </a:rPr>
-              <a:t>ChID原論文版は580,807文章・728,713空欄で、正解に似た候補を含む七択を作る。成語全体の意味と、近義語の使い分けを測る読解課題。</a:t>
+              <a:t>ChID原論文版は580,807文章・728,713空欄で、正解に似た候補を含む七択を作る。成語全体の意味と、類義語の使い分けを測る読解課題。</a:t>
             </a:r>
           </a:p>
           <a:p>
@@ -19953,7 +18028,7 @@
                 <a:ea typeface="Noto Sans CJK JP"/>
                 <a:cs typeface="Noto Sans"/>
               </a:rPr>
-              <a:t>ARはTestで72.4%、候補を似た語に寄せたSimで66.2%。後利用では候補の共有単位や数が変わり、原版、CLUE、FewCLUE、CLEVAの条件を対応させる必要がある。</a:t>
+              <a:t>2019年のARの正解率はTestで72.4%、似た候補が中心のSimで66.2%。後に、十候補を共有するCLUE版や少数例学習のFewCLUE版が公開され、CLEVAの文化知識の評価にも用いられた。</a:t>
             </a:r>
           </a:p>
         </p:txBody>
@@ -20001,7 +18076,7 @@
                 <a:ea typeface="Noto Sans CJK JP"/>
                 <a:cs typeface="Noto Sans"/>
               </a:rPr>
-              <a:t>4. 原版と後利用の形式・範囲</a:t>
+              <a:t>4. 配布形式の違いとCLEVAでの利用</a:t>
             </a:r>
           </a:p>
         </p:txBody>
@@ -20392,7 +18467,7 @@
                 <a:ea typeface="Noto Sans CJK JP"/>
                 <a:cs typeface="Noto Sans"/>
               </a:rPr>
-              <a:t>分割・入力・候補選びの補足</a:t>
+              <a:t>入力の読み方と候補選び</a:t>
             </a:r>
           </a:p>
           <a:p>
@@ -21100,22 +19175,8 @@
                 <a:ea typeface="Noto Sans CJK JP"/>
                 <a:cs typeface="Noto Sans"/>
               </a:rPr>
-              <a:t>[1] Zheng, Huang &amp; Sun (2019). ChID: A Large-scale Chinese IDiom Dataset for Cloze Test. 作者が案内する原版配布。 dev_data.txt:903行</a:t>
-            </a:r>
-          </a:p>
-          <a:p>
-            <a:pPr>
-              <a:lnSpc>
-                <a:spcPts val="940"/>
-              </a:lnSpc>
-              <a:buNone/>
-              <a:defRPr sz="810" b="0">
-                <a:solidFill>
-                  <a:srgbClr val="303437"/>
-                </a:solidFill>
-                <a:latin typeface="Noto Sans"/>
-              </a:defRPr>
-            </a:pPr>
+              <a:t>[1] Zheng, Huang &amp; Sun (2019). ChID — Original Data Distribution.  </a:t>
+            </a:r>
             <a:r>
               <a:rPr sz="810" b="0" lang="ja-JP" altLang="en-US">
                 <a:solidFill>
@@ -21124,9 +19185,9 @@
                 <a:latin typeface="Noto Sans"/>
                 <a:ea typeface="Noto Sans CJK JP"/>
                 <a:cs typeface="Noto Sans"/>
-                <a:hlinkClick r:id="rId2"/>
-              </a:rPr>
-              <a:t>https://huggingface.co/datasets/thu-coai/chid/tree/47ad8022d369233bea2f4a8112268f9a9a039a43/original</a:t>
+                <a:hlinkClick r:id="rId3"/>
+              </a:rPr>
+              <a:t>https://huggingface.co/datasets/thu-coai/chid/tree/main/original</a:t>
             </a:r>
           </a:p>
         </p:txBody>
@@ -21756,22 +19817,8 @@
                 <a:ea typeface="Noto Sans CJK JP"/>
                 <a:cs typeface="Noto Sans"/>
               </a:rPr>
-              <a:t>[1] Zheng, Huang &amp; Sun (2019). ChID: A Large-scale Chinese IDiom Dataset for Cloze Test. 作者が案内する原版配布。 dev_data.txt:1046行</a:t>
-            </a:r>
-          </a:p>
-          <a:p>
-            <a:pPr>
-              <a:lnSpc>
-                <a:spcPts val="940"/>
-              </a:lnSpc>
-              <a:buNone/>
-              <a:defRPr sz="810" b="0">
-                <a:solidFill>
-                  <a:srgbClr val="303437"/>
-                </a:solidFill>
-                <a:latin typeface="Noto Sans"/>
-              </a:defRPr>
-            </a:pPr>
+              <a:t>[1] Zheng, Huang &amp; Sun (2019). ChID — Original Data Distribution.  </a:t>
+            </a:r>
             <a:r>
               <a:rPr sz="810" b="0" lang="ja-JP" altLang="en-US">
                 <a:solidFill>
@@ -21780,9 +19827,9 @@
                 <a:latin typeface="Noto Sans"/>
                 <a:ea typeface="Noto Sans CJK JP"/>
                 <a:cs typeface="Noto Sans"/>
-                <a:hlinkClick r:id="rId2"/>
-              </a:rPr>
-              <a:t>https://huggingface.co/datasets/thu-coai/chid/tree/47ad8022d369233bea2f4a8112268f9a9a039a43/original</a:t>
+                <a:hlinkClick r:id="rId3"/>
+              </a:rPr>
+              <a:t>https://huggingface.co/datasets/thu-coai/chid/tree/main/original</a:t>
             </a:r>
           </a:p>
         </p:txBody>
@@ -22412,22 +20459,8 @@
                 <a:ea typeface="Noto Sans CJK JP"/>
                 <a:cs typeface="Noto Sans"/>
               </a:rPr>
-              <a:t>[1] Zheng, Huang &amp; Sun (2019). ChID: A Large-scale Chinese IDiom Dataset for Cloze Test. 作者が案内する原版配布。 test_data.txt:231行</a:t>
-            </a:r>
-          </a:p>
-          <a:p>
-            <a:pPr>
-              <a:lnSpc>
-                <a:spcPts val="940"/>
-              </a:lnSpc>
-              <a:buNone/>
-              <a:defRPr sz="810" b="0">
-                <a:solidFill>
-                  <a:srgbClr val="303437"/>
-                </a:solidFill>
-                <a:latin typeface="Noto Sans"/>
-              </a:defRPr>
-            </a:pPr>
+              <a:t>[1] Zheng, Huang &amp; Sun (2019). ChID — Original Data Distribution.  </a:t>
+            </a:r>
             <a:r>
               <a:rPr sz="810" b="0" lang="ja-JP" altLang="en-US">
                 <a:solidFill>
@@ -22436,9 +20469,9 @@
                 <a:latin typeface="Noto Sans"/>
                 <a:ea typeface="Noto Sans CJK JP"/>
                 <a:cs typeface="Noto Sans"/>
-                <a:hlinkClick r:id="rId2"/>
-              </a:rPr>
-              <a:t>https://huggingface.co/datasets/thu-coai/chid/tree/47ad8022d369233bea2f4a8112268f9a9a039a43/original</a:t>
+                <a:hlinkClick r:id="rId3"/>
+              </a:rPr>
+              <a:t>https://huggingface.co/datasets/thu-coai/chid/tree/main/original</a:t>
             </a:r>
           </a:p>
         </p:txBody>
@@ -23068,22 +21101,8 @@
                 <a:ea typeface="Noto Sans CJK JP"/>
                 <a:cs typeface="Noto Sans"/>
               </a:rPr>
-              <a:t>[1] Zheng, Huang &amp; Sun (2019). ChID: A Large-scale Chinese IDiom Dataset for Cloze Test. 作者が案内する原版配布。 test_data.txt:239行</a:t>
-            </a:r>
-          </a:p>
-          <a:p>
-            <a:pPr>
-              <a:lnSpc>
-                <a:spcPts val="940"/>
-              </a:lnSpc>
-              <a:buNone/>
-              <a:defRPr sz="810" b="0">
-                <a:solidFill>
-                  <a:srgbClr val="303437"/>
-                </a:solidFill>
-                <a:latin typeface="Noto Sans"/>
-              </a:defRPr>
-            </a:pPr>
+              <a:t>[1] Zheng, Huang &amp; Sun (2019). ChID — Original Data Distribution.  </a:t>
+            </a:r>
             <a:r>
               <a:rPr sz="810" b="0" lang="ja-JP" altLang="en-US">
                 <a:solidFill>
@@ -23092,9 +21111,9 @@
                 <a:latin typeface="Noto Sans"/>
                 <a:ea typeface="Noto Sans CJK JP"/>
                 <a:cs typeface="Noto Sans"/>
-                <a:hlinkClick r:id="rId2"/>
-              </a:rPr>
-              <a:t>https://huggingface.co/datasets/thu-coai/chid/tree/47ad8022d369233bea2f4a8112268f9a9a039a43/original</a:t>
+                <a:hlinkClick r:id="rId3"/>
+              </a:rPr>
+              <a:t>https://huggingface.co/datasets/thu-coai/chid/tree/main/original</a:t>
             </a:r>
           </a:p>
         </p:txBody>
@@ -23724,22 +21743,8 @@
                 <a:ea typeface="Noto Sans CJK JP"/>
                 <a:cs typeface="Noto Sans"/>
               </a:rPr>
-              <a:t>[1] Zheng, Huang &amp; Sun (2019). ChID: A Large-scale Chinese IDiom Dataset for Cloze Test. 作者が案内する原版配布。 test_data.txt:249行</a:t>
-            </a:r>
-          </a:p>
-          <a:p>
-            <a:pPr>
-              <a:lnSpc>
-                <a:spcPts val="940"/>
-              </a:lnSpc>
-              <a:buNone/>
-              <a:defRPr sz="810" b="0">
-                <a:solidFill>
-                  <a:srgbClr val="303437"/>
-                </a:solidFill>
-                <a:latin typeface="Noto Sans"/>
-              </a:defRPr>
-            </a:pPr>
+              <a:t>[1] Zheng, Huang &amp; Sun (2019). ChID — Original Data Distribution.  </a:t>
+            </a:r>
             <a:r>
               <a:rPr sz="810" b="0" lang="ja-JP" altLang="en-US">
                 <a:solidFill>
@@ -23748,9 +21753,9 @@
                 <a:latin typeface="Noto Sans"/>
                 <a:ea typeface="Noto Sans CJK JP"/>
                 <a:cs typeface="Noto Sans"/>
-                <a:hlinkClick r:id="rId2"/>
-              </a:rPr>
-              <a:t>https://huggingface.co/datasets/thu-coai/chid/tree/47ad8022d369233bea2f4a8112268f9a9a039a43/original</a:t>
+                <a:hlinkClick r:id="rId3"/>
+              </a:rPr>
+              <a:t>https://huggingface.co/datasets/thu-coai/chid/tree/main/original</a:t>
             </a:r>
           </a:p>
         </p:txBody>
@@ -23816,7 +21821,7 @@
                 <a:ea typeface="Noto Sans CJK JP"/>
                 <a:cs typeface="Noto Sans"/>
               </a:rPr>
-              <a:t>実例9：無線通信の問題を根本から解く</a:t>
+              <a:t>実例9：無線通信の問題を一度で解決する</a:t>
             </a:r>
           </a:p>
         </p:txBody>
@@ -24380,22 +22385,8 @@
                 <a:ea typeface="Noto Sans CJK JP"/>
                 <a:cs typeface="Noto Sans"/>
               </a:rPr>
-              <a:t>[1] Zheng, Huang &amp; Sun (2019). ChID: A Large-scale Chinese IDiom Dataset for Cloze Test. 作者が案内する原版配布。 test_data.txt:380行</a:t>
-            </a:r>
-          </a:p>
-          <a:p>
-            <a:pPr>
-              <a:lnSpc>
-                <a:spcPts val="940"/>
-              </a:lnSpc>
-              <a:buNone/>
-              <a:defRPr sz="810" b="0">
-                <a:solidFill>
-                  <a:srgbClr val="303437"/>
-                </a:solidFill>
-                <a:latin typeface="Noto Sans"/>
-              </a:defRPr>
-            </a:pPr>
+              <a:t>[1] Zheng, Huang &amp; Sun (2019). ChID — Original Data Distribution.  </a:t>
+            </a:r>
             <a:r>
               <a:rPr sz="810" b="0" lang="ja-JP" altLang="en-US">
                 <a:solidFill>
@@ -24404,9 +22395,9 @@
                 <a:latin typeface="Noto Sans"/>
                 <a:ea typeface="Noto Sans CJK JP"/>
                 <a:cs typeface="Noto Sans"/>
-                <a:hlinkClick r:id="rId2"/>
-              </a:rPr>
-              <a:t>https://huggingface.co/datasets/thu-coai/chid/tree/47ad8022d369233bea2f4a8112268f9a9a039a43/original</a:t>
+                <a:hlinkClick r:id="rId3"/>
+              </a:rPr>
+              <a:t>https://huggingface.co/datasets/thu-coai/chid/tree/main/original</a:t>
             </a:r>
           </a:p>
         </p:txBody>
@@ -25284,22 +23275,8 @@
                 <a:ea typeface="Noto Sans CJK JP"/>
                 <a:cs typeface="Noto Sans"/>
               </a:rPr>
-              <a:t>[1] Zheng, Huang &amp; Sun (2019). ChID: A Large-scale Chinese IDiom Dataset for Cloze Test. 作者が案内する原版配布。 dev_data.txt:3707行</a:t>
-            </a:r>
-          </a:p>
-          <a:p>
-            <a:pPr>
-              <a:lnSpc>
-                <a:spcPts val="940"/>
-              </a:lnSpc>
-              <a:buNone/>
-              <a:defRPr sz="810" b="0">
-                <a:solidFill>
-                  <a:srgbClr val="303437"/>
-                </a:solidFill>
-                <a:latin typeface="Noto Sans"/>
-              </a:defRPr>
-            </a:pPr>
+              <a:t>[1] Zheng, Huang &amp; Sun (2019). ChID — Original Data Distribution.  </a:t>
+            </a:r>
             <a:r>
               <a:rPr sz="810" b="0" lang="ja-JP" altLang="en-US">
                 <a:solidFill>
@@ -25308,9 +23285,9 @@
                 <a:latin typeface="Noto Sans"/>
                 <a:ea typeface="Noto Sans CJK JP"/>
                 <a:cs typeface="Noto Sans"/>
-                <a:hlinkClick r:id="rId2"/>
-              </a:rPr>
-              <a:t>https://huggingface.co/datasets/thu-coai/chid/tree/47ad8022d369233bea2f4a8112268f9a9a039a43/original</a:t>
+                <a:hlinkClick r:id="rId3"/>
+              </a:rPr>
+              <a:t>https://huggingface.co/datasets/thu-coai/chid/tree/main/original</a:t>
             </a:r>
           </a:p>
         </p:txBody>
@@ -26302,22 +24279,8 @@
                 <a:ea typeface="Noto Sans CJK JP"/>
                 <a:cs typeface="Noto Sans"/>
               </a:rPr>
-              <a:t>[1] Zheng, Huang &amp; Sun (2019). ChID: A Large-scale Chinese IDiom Dataset for Cloze Test. 作者が案内する原版配布。 dev_data.txt:3707行</a:t>
-            </a:r>
-          </a:p>
-          <a:p>
-            <a:pPr>
-              <a:lnSpc>
-                <a:spcPts val="940"/>
-              </a:lnSpc>
-              <a:buNone/>
-              <a:defRPr sz="810" b="0">
-                <a:solidFill>
-                  <a:srgbClr val="303437"/>
-                </a:solidFill>
-                <a:latin typeface="Noto Sans"/>
-              </a:defRPr>
-            </a:pPr>
+              <a:t>[1] Zheng, Huang &amp; Sun (2019). ChID — Original Data Distribution.  </a:t>
+            </a:r>
             <a:r>
               <a:rPr sz="810" b="0" lang="ja-JP" altLang="en-US">
                 <a:solidFill>
@@ -26326,9 +24289,9 @@
                 <a:latin typeface="Noto Sans"/>
                 <a:ea typeface="Noto Sans CJK JP"/>
                 <a:cs typeface="Noto Sans"/>
-                <a:hlinkClick r:id="rId2"/>
-              </a:rPr>
-              <a:t>https://huggingface.co/datasets/thu-coai/chid/tree/47ad8022d369233bea2f4a8112268f9a9a039a43/original</a:t>
+                <a:hlinkClick r:id="rId3"/>
+              </a:rPr>
+              <a:t>https://huggingface.co/datasets/thu-coai/chid/tree/main/original</a:t>
             </a:r>
           </a:p>
         </p:txBody>
@@ -26958,22 +24921,8 @@
                 <a:ea typeface="Noto Sans CJK JP"/>
                 <a:cs typeface="Noto Sans"/>
               </a:rPr>
-              <a:t>[1] Zheng, Huang &amp; Sun (2019). ChID: A Large-scale Chinese IDiom Dataset for Cloze Test. 作者が案内する原版配布。 test_out_data.txt:4288行</a:t>
-            </a:r>
-          </a:p>
-          <a:p>
-            <a:pPr>
-              <a:lnSpc>
-                <a:spcPts val="940"/>
-              </a:lnSpc>
-              <a:buNone/>
-              <a:defRPr sz="810" b="0">
-                <a:solidFill>
-                  <a:srgbClr val="303437"/>
-                </a:solidFill>
-                <a:latin typeface="Noto Sans"/>
-              </a:defRPr>
-            </a:pPr>
+              <a:t>[1] Zheng, Huang &amp; Sun (2019). ChID — Original Data Distribution.  </a:t>
+            </a:r>
             <a:r>
               <a:rPr sz="810" b="0" lang="ja-JP" altLang="en-US">
                 <a:solidFill>
@@ -26982,9 +24931,9 @@
                 <a:latin typeface="Noto Sans"/>
                 <a:ea typeface="Noto Sans CJK JP"/>
                 <a:cs typeface="Noto Sans"/>
-                <a:hlinkClick r:id="rId2"/>
-              </a:rPr>
-              <a:t>https://huggingface.co/datasets/thu-coai/chid/tree/47ad8022d369233bea2f4a8112268f9a9a039a43/original</a:t>
+                <a:hlinkClick r:id="rId3"/>
+              </a:rPr>
+              <a:t>https://huggingface.co/datasets/thu-coai/chid/tree/main/original</a:t>
             </a:r>
           </a:p>
         </p:txBody>
@@ -27614,22 +25563,8 @@
                 <a:ea typeface="Noto Sans CJK JP"/>
                 <a:cs typeface="Noto Sans"/>
               </a:rPr>
-              <a:t>[1] Zheng, Huang &amp; Sun (2019). ChID: A Large-scale Chinese IDiom Dataset for Cloze Test. 作者が案内する原版配布。 test_out_data.txt:3060行</a:t>
-            </a:r>
-          </a:p>
-          <a:p>
-            <a:pPr>
-              <a:lnSpc>
-                <a:spcPts val="940"/>
-              </a:lnSpc>
-              <a:buNone/>
-              <a:defRPr sz="810" b="0">
-                <a:solidFill>
-                  <a:srgbClr val="303437"/>
-                </a:solidFill>
-                <a:latin typeface="Noto Sans"/>
-              </a:defRPr>
-            </a:pPr>
+              <a:t>[1] Zheng, Huang &amp; Sun (2019). ChID — Original Data Distribution.  </a:t>
+            </a:r>
             <a:r>
               <a:rPr sz="810" b="0" lang="ja-JP" altLang="en-US">
                 <a:solidFill>
@@ -27638,9 +25573,9 @@
                 <a:latin typeface="Noto Sans"/>
                 <a:ea typeface="Noto Sans CJK JP"/>
                 <a:cs typeface="Noto Sans"/>
-                <a:hlinkClick r:id="rId2"/>
-              </a:rPr>
-              <a:t>https://huggingface.co/datasets/thu-coai/chid/tree/47ad8022d369233bea2f4a8112268f9a9a039a43/original</a:t>
+                <a:hlinkClick r:id="rId3"/>
+              </a:rPr>
+              <a:t>https://huggingface.co/datasets/thu-coai/chid/tree/main/original</a:t>
             </a:r>
           </a:p>
         </p:txBody>
@@ -28518,22 +26453,8 @@
                 <a:ea typeface="Noto Sans CJK JP"/>
                 <a:cs typeface="Noto Sans"/>
               </a:rPr>
-              <a:t>[1] Zheng, Huang &amp; Sun (2019). ChID: A Large-scale Chinese IDiom Dataset for Cloze Test. 作者が案内する原版配布。 test_out_data.txt:1900行</a:t>
-            </a:r>
-          </a:p>
-          <a:p>
-            <a:pPr>
-              <a:lnSpc>
-                <a:spcPts val="940"/>
-              </a:lnSpc>
-              <a:buNone/>
-              <a:defRPr sz="810" b="0">
-                <a:solidFill>
-                  <a:srgbClr val="303437"/>
-                </a:solidFill>
-                <a:latin typeface="Noto Sans"/>
-              </a:defRPr>
-            </a:pPr>
+              <a:t>[1] Zheng, Huang &amp; Sun (2019). ChID — Original Data Distribution.  </a:t>
+            </a:r>
             <a:r>
               <a:rPr sz="810" b="0" lang="ja-JP" altLang="en-US">
                 <a:solidFill>
@@ -28542,9 +26463,9 @@
                 <a:latin typeface="Noto Sans"/>
                 <a:ea typeface="Noto Sans CJK JP"/>
                 <a:cs typeface="Noto Sans"/>
-                <a:hlinkClick r:id="rId2"/>
-              </a:rPr>
-              <a:t>https://huggingface.co/datasets/thu-coai/chid/tree/47ad8022d369233bea2f4a8112268f9a9a039a43/original</a:t>
+                <a:hlinkClick r:id="rId3"/>
+              </a:rPr>
+              <a:t>https://huggingface.co/datasets/thu-coai/chid/tree/main/original</a:t>
             </a:r>
           </a:p>
         </p:txBody>
@@ -29422,22 +27343,8 @@
                 <a:ea typeface="Noto Sans CJK JP"/>
                 <a:cs typeface="Noto Sans"/>
               </a:rPr>
-              <a:t>[1] Zheng, Huang &amp; Sun (2019). ChID: A Large-scale Chinese IDiom Dataset for Cloze Test. 作者が案内する原版配布。 test_out_data.txt:1900行</a:t>
-            </a:r>
-          </a:p>
-          <a:p>
-            <a:pPr>
-              <a:lnSpc>
-                <a:spcPts val="940"/>
-              </a:lnSpc>
-              <a:buNone/>
-              <a:defRPr sz="810" b="0">
-                <a:solidFill>
-                  <a:srgbClr val="303437"/>
-                </a:solidFill>
-                <a:latin typeface="Noto Sans"/>
-              </a:defRPr>
-            </a:pPr>
+              <a:t>[1] Zheng, Huang &amp; Sun (2019). ChID — Original Data Distribution.  </a:t>
+            </a:r>
             <a:r>
               <a:rPr sz="810" b="0" lang="ja-JP" altLang="en-US">
                 <a:solidFill>
@@ -29446,9 +27353,9 @@
                 <a:latin typeface="Noto Sans"/>
                 <a:ea typeface="Noto Sans CJK JP"/>
                 <a:cs typeface="Noto Sans"/>
-                <a:hlinkClick r:id="rId2"/>
-              </a:rPr>
-              <a:t>https://huggingface.co/datasets/thu-coai/chid/tree/47ad8022d369233bea2f4a8112268f9a9a039a43/original</a:t>
+                <a:hlinkClick r:id="rId3"/>
+              </a:rPr>
+              <a:t>https://huggingface.co/datasets/thu-coai/chid/tree/main/original</a:t>
             </a:r>
           </a:p>
         </p:txBody>
@@ -29514,7 +27421,7 @@
                 <a:ea typeface="Noto Sans CJK JP"/>
                 <a:cs typeface="Noto Sans"/>
               </a:rPr>
-              <a:t>分割・入力・候補選びの補足</a:t>
+              <a:t>入力の読み方と候補選び</a:t>
             </a:r>
           </a:p>
         </p:txBody>
@@ -29562,2349 +27469,7 @@
                 <a:ea typeface="Noto Sans CJK JP"/>
                 <a:cs typeface="Noto Sans"/>
               </a:rPr>
-              <a:t>Appendix: 2. 分割・入力・候補選びの補足</a:t>
-            </a:r>
-          </a:p>
-        </p:txBody>
-      </p:sp>
-    </p:spTree>
-  </p:cSld>
-  <p:clrMapOvr>
-    <a:masterClrMapping/>
-  </p:clrMapOvr>
-</p:sld>
-</file>
-
-<file path=ppt/slides/slide46.xml><?xml version="1.0" encoding="utf-8"?>
-<p:sld xmlns:a="http://schemas.openxmlformats.org/drawingml/2006/main" xmlns:p="http://schemas.openxmlformats.org/presentationml/2006/main" xmlns:r="http://schemas.openxmlformats.org/officeDocument/2006/relationships">
-  <p:cSld>
-    <p:spTree>
-      <p:nvGrpSpPr>
-        <p:cNvPr id="1" name=""/>
-        <p:cNvGrpSpPr/>
-        <p:nvPr/>
-      </p:nvGrpSpPr>
-      <p:grpSpPr/>
-      <p:sp>
-        <p:nvSpPr>
-          <p:cNvPr id="2" name="Title 1"/>
-          <p:cNvSpPr>
-            <a:spLocks noGrp="1"/>
-          </p:cNvSpPr>
-          <p:nvPr>
-            <p:ph type="title"/>
-          </p:nvPr>
-        </p:nvSpPr>
-        <p:spPr>
-          <a:xfrm>
-            <a:off x="468172" y="650138"/>
-            <a:ext cx="8206740" cy="616305"/>
-          </a:xfrm>
-        </p:spPr>
-        <p:txBody>
-          <a:bodyPr wrap="square" lIns="0" rIns="0" tIns="0" bIns="0">
-            <a:noAutofit/>
-          </a:bodyPr>
-          <a:lstStyle/>
-          <a:p>
-            <a:pPr algn="l">
-              <a:lnSpc>
-                <a:spcPct val="110000"/>
-              </a:lnSpc>
-              <a:buNone/>
-              <a:defRPr sz="2800" b="0">
-                <a:solidFill>
-                  <a:srgbClr val="303437"/>
-                </a:solidFill>
-                <a:latin typeface="Noto Sans"/>
-              </a:defRPr>
-            </a:pPr>
-            <a:r>
-              <a:rPr sz="2800" b="1" lang="ja-JP" altLang="en-US">
-                <a:solidFill>
-                  <a:srgbClr val="303437"/>
-                </a:solidFill>
-                <a:latin typeface="Noto Sans"/>
-                <a:ea typeface="Noto Sans CJK JP"/>
-                <a:cs typeface="Noto Sans"/>
-              </a:rPr>
-              <a:t>文章あたり一つの空欄が、全体の約8割</a:t>
-            </a:r>
-          </a:p>
-        </p:txBody>
-      </p:sp>
-      <p:sp>
-        <p:nvSpPr>
-          <p:cNvPr id="3" name="Title 2"/>
-          <p:cNvSpPr>
-            <a:spLocks noGrp="1"/>
-          </p:cNvSpPr>
-          <p:nvPr>
-            <p:ph type="title" idx="2"/>
-          </p:nvPr>
-        </p:nvSpPr>
-        <p:spPr>
-          <a:xfrm>
-            <a:off x="75895" y="0"/>
-            <a:ext cx="8115300" cy="480060"/>
-          </a:xfrm>
-        </p:spPr>
-        <p:txBody>
-          <a:bodyPr wrap="square" lIns="0" rIns="0" tIns="0" bIns="0" anchor="ctr">
-            <a:noAutofit/>
-          </a:bodyPr>
-          <a:lstStyle/>
-          <a:p>
-            <a:pPr algn="l">
-              <a:lnSpc>
-                <a:spcPct val="110000"/>
-              </a:lnSpc>
-              <a:buNone/>
-              <a:defRPr sz="1400" b="0">
-                <a:solidFill>
-                  <a:srgbClr val="303437"/>
-                </a:solidFill>
-                <a:latin typeface="Noto Sans"/>
-              </a:defRPr>
-            </a:pPr>
-            <a:r>
-              <a:rPr sz="1400" b="1" lang="ja-JP" altLang="en-US">
-                <a:solidFill>
-                  <a:srgbClr val="FFFEF8"/>
-                </a:solidFill>
-                <a:latin typeface="Noto Sans"/>
-                <a:ea typeface="Noto Sans CJK JP"/>
-                <a:cs typeface="Noto Sans"/>
-              </a:rPr>
-              <a:t>Appendix: 2. 分割・入力・候補選びの補足</a:t>
-            </a:r>
-          </a:p>
-        </p:txBody>
-      </p:sp>
-      <p:graphicFrame>
-        <p:nvGraphicFramePr>
-          <p:cNvPr id="4" name="Table 3"/>
-          <p:cNvGraphicFramePr>
-            <a:graphicFrameLocks noGrp="1"/>
-          </p:cNvGraphicFramePr>
-          <p:nvPr/>
-        </p:nvGraphicFramePr>
-        <p:xfrm>
-          <a:off x="548640" y="1508760"/>
-          <a:ext cx="8046720" cy="1920240"/>
-        </p:xfrm>
-        <a:graphic>
-          <a:graphicData uri="http://schemas.openxmlformats.org/drawingml/2006/table">
-            <a:tbl>
-              <a:tblPr firstRow="0" bandRow="0"/>
-              <a:tblGrid>
-                <a:gridCol w="1371600"/>
-                <a:gridCol w="2286000"/>
-                <a:gridCol w="2560320"/>
-                <a:gridCol w="1828800"/>
-              </a:tblGrid>
-              <a:tr h="384048">
-                <a:tc>
-                  <a:txBody>
-                    <a:bodyPr wrap="square">
-                      <a:noAutofit/>
-                    </a:bodyPr>
-                    <a:lstStyle/>
-                    <a:p>
-                      <a:pPr algn="l">
-                        <a:lnSpc>
-                          <a:spcPts val="2070"/>
-                        </a:lnSpc>
-                        <a:buNone/>
-                        <a:defRPr sz="1800" b="0">
-                          <a:solidFill>
-                            <a:srgbClr val="303437"/>
-                          </a:solidFill>
-                          <a:latin typeface="Noto Sans"/>
-                        </a:defRPr>
-                      </a:pPr>
-                      <a:r>
-                        <a:rPr sz="1800" b="0" lang="ja-JP" altLang="en-US">
-                          <a:solidFill>
-                            <a:srgbClr val="303437"/>
-                          </a:solidFill>
-                          <a:latin typeface="Noto Sans"/>
-                          <a:ea typeface="Noto Sans CJK JP"/>
-                          <a:cs typeface="Noto Sans"/>
-                        </a:rPr>
-                        <a:t>集合</a:t>
-                      </a:r>
-                    </a:p>
-                  </a:txBody>
-                  <a:tcPr marL="63500" marR="63500" marT="38100" marB="38100" anchor="ctr">
-                    <a:lnL w="7620">
-                      <a:noFill/>
-                    </a:lnL>
-                    <a:lnR w="7620">
-                      <a:noFill/>
-                    </a:lnR>
-                    <a:lnT w="15240">
-                      <a:solidFill>
-                        <a:srgbClr val="626669"/>
-                      </a:solidFill>
-                      <a:prstDash val="solid"/>
-                    </a:lnT>
-                    <a:lnB w="7620">
-                      <a:solidFill>
-                        <a:srgbClr val="626669"/>
-                      </a:solidFill>
-                      <a:prstDash val="solid"/>
-                    </a:lnB>
-                    <a:solidFill>
-                      <a:srgbClr val="FFFEF8"/>
-                    </a:solidFill>
-                  </a:tcPr>
-                </a:tc>
-                <a:tc>
-                  <a:txBody>
-                    <a:bodyPr wrap="square">
-                      <a:noAutofit/>
-                    </a:bodyPr>
-                    <a:lstStyle/>
-                    <a:p>
-                      <a:pPr algn="r">
-                        <a:lnSpc>
-                          <a:spcPts val="2070"/>
-                        </a:lnSpc>
-                        <a:buNone/>
-                        <a:defRPr sz="1800" b="0">
-                          <a:solidFill>
-                            <a:srgbClr val="303437"/>
-                          </a:solidFill>
-                          <a:latin typeface="Noto Sans"/>
-                        </a:defRPr>
-                      </a:pPr>
-                      <a:r>
-                        <a:rPr sz="1800" b="0" lang="ja-JP" altLang="en-US">
-                          <a:solidFill>
-                            <a:srgbClr val="303437"/>
-                          </a:solidFill>
-                          <a:latin typeface="Noto Sans"/>
-                          <a:ea typeface="Noto Sans CJK JP"/>
-                          <a:cs typeface="Noto Sans"/>
-                        </a:rPr>
-                        <a:t>一空欄の文章</a:t>
-                      </a:r>
-                    </a:p>
-                  </a:txBody>
-                  <a:tcPr marL="63500" marR="63500" marT="38100" marB="38100" anchor="ctr">
-                    <a:lnL w="7620">
-                      <a:noFill/>
-                    </a:lnL>
-                    <a:lnR w="7620">
-                      <a:noFill/>
-                    </a:lnR>
-                    <a:lnT w="15240">
-                      <a:solidFill>
-                        <a:srgbClr val="626669"/>
-                      </a:solidFill>
-                      <a:prstDash val="solid"/>
-                    </a:lnT>
-                    <a:lnB w="7620">
-                      <a:solidFill>
-                        <a:srgbClr val="626669"/>
-                      </a:solidFill>
-                      <a:prstDash val="solid"/>
-                    </a:lnB>
-                    <a:solidFill>
-                      <a:srgbClr val="FFFEF8"/>
-                    </a:solidFill>
-                  </a:tcPr>
-                </a:tc>
-                <a:tc>
-                  <a:txBody>
-                    <a:bodyPr wrap="square">
-                      <a:noAutofit/>
-                    </a:bodyPr>
-                    <a:lstStyle/>
-                    <a:p>
-                      <a:pPr algn="r">
-                        <a:lnSpc>
-                          <a:spcPts val="2070"/>
-                        </a:lnSpc>
-                        <a:buNone/>
-                        <a:defRPr sz="1800" b="0">
-                          <a:solidFill>
-                            <a:srgbClr val="303437"/>
-                          </a:solidFill>
-                          <a:latin typeface="Noto Sans"/>
-                        </a:defRPr>
-                      </a:pPr>
-                      <a:r>
-                        <a:rPr sz="1800" b="0" lang="ja-JP" altLang="en-US">
-                          <a:solidFill>
-                            <a:srgbClr val="303437"/>
-                          </a:solidFill>
-                          <a:latin typeface="Noto Sans"/>
-                          <a:ea typeface="Noto Sans CJK JP"/>
-                          <a:cs typeface="Noto Sans"/>
-                        </a:rPr>
-                        <a:t>複数空欄の文章</a:t>
-                      </a:r>
-                    </a:p>
-                  </a:txBody>
-                  <a:tcPr marL="63500" marR="63500" marT="38100" marB="38100" anchor="ctr">
-                    <a:lnL w="7620">
-                      <a:noFill/>
-                    </a:lnL>
-                    <a:lnR w="7620">
-                      <a:noFill/>
-                    </a:lnR>
-                    <a:lnT w="15240">
-                      <a:solidFill>
-                        <a:srgbClr val="626669"/>
-                      </a:solidFill>
-                      <a:prstDash val="solid"/>
-                    </a:lnT>
-                    <a:lnB w="7620">
-                      <a:solidFill>
-                        <a:srgbClr val="626669"/>
-                      </a:solidFill>
-                      <a:prstDash val="solid"/>
-                    </a:lnB>
-                    <a:solidFill>
-                      <a:srgbClr val="FFFEF8"/>
-                    </a:solidFill>
-                  </a:tcPr>
-                </a:tc>
-                <a:tc>
-                  <a:txBody>
-                    <a:bodyPr wrap="square">
-                      <a:noAutofit/>
-                    </a:bodyPr>
-                    <a:lstStyle/>
-                    <a:p>
-                      <a:pPr algn="r">
-                        <a:lnSpc>
-                          <a:spcPts val="2070"/>
-                        </a:lnSpc>
-                        <a:buNone/>
-                        <a:defRPr sz="1800" b="0">
-                          <a:solidFill>
-                            <a:srgbClr val="303437"/>
-                          </a:solidFill>
-                          <a:latin typeface="Noto Sans"/>
-                        </a:defRPr>
-                      </a:pPr>
-                      <a:r>
-                        <a:rPr sz="1800" b="0" lang="ja-JP" altLang="en-US">
-                          <a:solidFill>
-                            <a:srgbClr val="303437"/>
-                          </a:solidFill>
-                          <a:latin typeface="Noto Sans"/>
-                          <a:ea typeface="Noto Sans CJK JP"/>
-                          <a:cs typeface="Noto Sans"/>
-                        </a:rPr>
-                        <a:t>成語の種類</a:t>
-                      </a:r>
-                    </a:p>
-                  </a:txBody>
-                  <a:tcPr marL="63500" marR="63500" marT="38100" marB="38100" anchor="ctr">
-                    <a:lnL w="7620">
-                      <a:noFill/>
-                    </a:lnL>
-                    <a:lnR w="7620">
-                      <a:noFill/>
-                    </a:lnR>
-                    <a:lnT w="15240">
-                      <a:solidFill>
-                        <a:srgbClr val="626669"/>
-                      </a:solidFill>
-                      <a:prstDash val="solid"/>
-                    </a:lnT>
-                    <a:lnB w="7620">
-                      <a:solidFill>
-                        <a:srgbClr val="626669"/>
-                      </a:solidFill>
-                      <a:prstDash val="solid"/>
-                    </a:lnB>
-                    <a:solidFill>
-                      <a:srgbClr val="FFFEF8"/>
-                    </a:solidFill>
-                  </a:tcPr>
-                </a:tc>
-              </a:tr>
-              <a:tr h="384048">
-                <a:tc>
-                  <a:txBody>
-                    <a:bodyPr wrap="square">
-                      <a:noAutofit/>
-                    </a:bodyPr>
-                    <a:lstStyle/>
-                    <a:p>
-                      <a:pPr algn="l">
-                        <a:lnSpc>
-                          <a:spcPts val="2070"/>
-                        </a:lnSpc>
-                        <a:buNone/>
-                        <a:defRPr sz="1800" b="0">
-                          <a:solidFill>
-                            <a:srgbClr val="303437"/>
-                          </a:solidFill>
-                          <a:latin typeface="Noto Sans"/>
-                        </a:defRPr>
-                      </a:pPr>
-                      <a:r>
-                        <a:rPr sz="1800" b="0" lang="ja-JP" altLang="en-US">
-                          <a:solidFill>
-                            <a:srgbClr val="303437"/>
-                          </a:solidFill>
-                          <a:latin typeface="Noto Sans"/>
-                          <a:ea typeface="Noto Sans CJK JP"/>
-                          <a:cs typeface="Noto Sans"/>
-                        </a:rPr>
-                        <a:t>Train</a:t>
-                      </a:r>
-                    </a:p>
-                  </a:txBody>
-                  <a:tcPr marL="63500" marR="63500" marT="38100" marB="38100" anchor="ctr">
-                    <a:lnL w="7620">
-                      <a:noFill/>
-                    </a:lnL>
-                    <a:lnR w="7620">
-                      <a:noFill/>
-                    </a:lnR>
-                    <a:lnT w="7620">
-                      <a:solidFill>
-                        <a:srgbClr val="626669"/>
-                      </a:solidFill>
-                      <a:prstDash val="solid"/>
-                    </a:lnT>
-                    <a:lnB w="7620">
-                      <a:noFill/>
-                    </a:lnB>
-                    <a:solidFill>
-                      <a:srgbClr val="FFFEF8"/>
-                    </a:solidFill>
-                  </a:tcPr>
-                </a:tc>
-                <a:tc>
-                  <a:txBody>
-                    <a:bodyPr wrap="square">
-                      <a:noAutofit/>
-                    </a:bodyPr>
-                    <a:lstStyle/>
-                    <a:p>
-                      <a:pPr algn="r">
-                        <a:lnSpc>
-                          <a:spcPts val="2070"/>
-                        </a:lnSpc>
-                        <a:buNone/>
-                        <a:defRPr sz="1800" b="0">
-                          <a:solidFill>
-                            <a:srgbClr val="303437"/>
-                          </a:solidFill>
-                          <a:latin typeface="Noto Sans"/>
-                        </a:defRPr>
-                      </a:pPr>
-                      <a:r>
-                        <a:rPr sz="1800" b="0" lang="ja-JP" altLang="en-US">
-                          <a:solidFill>
-                            <a:srgbClr val="303437"/>
-                          </a:solidFill>
-                          <a:latin typeface="Noto Sans"/>
-                          <a:ea typeface="Noto Sans CJK JP"/>
-                          <a:cs typeface="Noto Sans"/>
-                        </a:rPr>
-                        <a:t>418,838</a:t>
-                      </a:r>
-                    </a:p>
-                  </a:txBody>
-                  <a:tcPr marL="63500" marR="63500" marT="38100" marB="38100" anchor="ctr">
-                    <a:lnL w="7620">
-                      <a:noFill/>
-                    </a:lnL>
-                    <a:lnR w="7620">
-                      <a:noFill/>
-                    </a:lnR>
-                    <a:lnT w="7620">
-                      <a:solidFill>
-                        <a:srgbClr val="626669"/>
-                      </a:solidFill>
-                      <a:prstDash val="solid"/>
-                    </a:lnT>
-                    <a:lnB w="7620">
-                      <a:noFill/>
-                    </a:lnB>
-                    <a:solidFill>
-                      <a:srgbClr val="FFFEF8"/>
-                    </a:solidFill>
-                  </a:tcPr>
-                </a:tc>
-                <a:tc>
-                  <a:txBody>
-                    <a:bodyPr wrap="square">
-                      <a:noAutofit/>
-                    </a:bodyPr>
-                    <a:lstStyle/>
-                    <a:p>
-                      <a:pPr algn="r">
-                        <a:lnSpc>
-                          <a:spcPts val="2070"/>
-                        </a:lnSpc>
-                        <a:buNone/>
-                        <a:defRPr sz="1800" b="0">
-                          <a:solidFill>
-                            <a:srgbClr val="303437"/>
-                          </a:solidFill>
-                          <a:latin typeface="Noto Sans"/>
-                        </a:defRPr>
-                      </a:pPr>
-                      <a:r>
-                        <a:rPr sz="1800" b="0" lang="ja-JP" altLang="en-US">
-                          <a:solidFill>
-                            <a:srgbClr val="303437"/>
-                          </a:solidFill>
-                          <a:latin typeface="Noto Sans"/>
-                          <a:ea typeface="Noto Sans CJK JP"/>
-                          <a:cs typeface="Noto Sans"/>
-                        </a:rPr>
-                        <a:t>101,873</a:t>
-                      </a:r>
-                    </a:p>
-                  </a:txBody>
-                  <a:tcPr marL="63500" marR="63500" marT="38100" marB="38100" anchor="ctr">
-                    <a:lnL w="7620">
-                      <a:noFill/>
-                    </a:lnL>
-                    <a:lnR w="7620">
-                      <a:noFill/>
-                    </a:lnR>
-                    <a:lnT w="7620">
-                      <a:solidFill>
-                        <a:srgbClr val="626669"/>
-                      </a:solidFill>
-                      <a:prstDash val="solid"/>
-                    </a:lnT>
-                    <a:lnB w="7620">
-                      <a:noFill/>
-                    </a:lnB>
-                    <a:solidFill>
-                      <a:srgbClr val="FFFEF8"/>
-                    </a:solidFill>
-                  </a:tcPr>
-                </a:tc>
-                <a:tc>
-                  <a:txBody>
-                    <a:bodyPr wrap="square">
-                      <a:noAutofit/>
-                    </a:bodyPr>
-                    <a:lstStyle/>
-                    <a:p>
-                      <a:pPr algn="r">
-                        <a:lnSpc>
-                          <a:spcPts val="2070"/>
-                        </a:lnSpc>
-                        <a:buNone/>
-                        <a:defRPr sz="1800" b="0">
-                          <a:solidFill>
-                            <a:srgbClr val="303437"/>
-                          </a:solidFill>
-                          <a:latin typeface="Noto Sans"/>
-                        </a:defRPr>
-                      </a:pPr>
-                      <a:r>
-                        <a:rPr sz="1800" b="0" lang="ja-JP" altLang="en-US">
-                          <a:solidFill>
-                            <a:srgbClr val="303437"/>
-                          </a:solidFill>
-                          <a:latin typeface="Noto Sans"/>
-                          <a:ea typeface="Noto Sans CJK JP"/>
-                          <a:cs typeface="Noto Sans"/>
-                        </a:rPr>
-                        <a:t>3,848</a:t>
-                      </a:r>
-                    </a:p>
-                  </a:txBody>
-                  <a:tcPr marL="63500" marR="63500" marT="38100" marB="38100" anchor="ctr">
-                    <a:lnL w="7620">
-                      <a:noFill/>
-                    </a:lnL>
-                    <a:lnR w="7620">
-                      <a:noFill/>
-                    </a:lnR>
-                    <a:lnT w="7620">
-                      <a:solidFill>
-                        <a:srgbClr val="626669"/>
-                      </a:solidFill>
-                      <a:prstDash val="solid"/>
-                    </a:lnT>
-                    <a:lnB w="7620">
-                      <a:noFill/>
-                    </a:lnB>
-                    <a:solidFill>
-                      <a:srgbClr val="FFFEF8"/>
-                    </a:solidFill>
-                  </a:tcPr>
-                </a:tc>
-              </a:tr>
-              <a:tr h="384048">
-                <a:tc>
-                  <a:txBody>
-                    <a:bodyPr wrap="square">
-                      <a:noAutofit/>
-                    </a:bodyPr>
-                    <a:lstStyle/>
-                    <a:p>
-                      <a:pPr algn="l">
-                        <a:lnSpc>
-                          <a:spcPts val="2070"/>
-                        </a:lnSpc>
-                        <a:buNone/>
-                        <a:defRPr sz="1800" b="0">
-                          <a:solidFill>
-                            <a:srgbClr val="303437"/>
-                          </a:solidFill>
-                          <a:latin typeface="Noto Sans"/>
-                        </a:defRPr>
-                      </a:pPr>
-                      <a:r>
-                        <a:rPr sz="1800" b="0" lang="ja-JP" altLang="en-US">
-                          <a:solidFill>
-                            <a:srgbClr val="303437"/>
-                          </a:solidFill>
-                          <a:latin typeface="Noto Sans"/>
-                          <a:ea typeface="Noto Sans CJK JP"/>
-                          <a:cs typeface="Noto Sans"/>
-                        </a:rPr>
-                        <a:t>Dev</a:t>
-                      </a:r>
-                    </a:p>
-                  </a:txBody>
-                  <a:tcPr marL="63500" marR="63500" marT="38100" marB="38100" anchor="ctr">
-                    <a:lnL w="7620">
-                      <a:noFill/>
-                    </a:lnL>
-                    <a:lnR w="7620">
-                      <a:noFill/>
-                    </a:lnR>
-                    <a:lnT w="7620">
-                      <a:noFill/>
-                    </a:lnT>
-                    <a:lnB w="7620">
-                      <a:noFill/>
-                    </a:lnB>
-                    <a:solidFill>
-                      <a:srgbClr val="FFFEF8"/>
-                    </a:solidFill>
-                  </a:tcPr>
-                </a:tc>
-                <a:tc>
-                  <a:txBody>
-                    <a:bodyPr wrap="square">
-                      <a:noAutofit/>
-                    </a:bodyPr>
-                    <a:lstStyle/>
-                    <a:p>
-                      <a:pPr algn="r">
-                        <a:lnSpc>
-                          <a:spcPts val="2070"/>
-                        </a:lnSpc>
-                        <a:buNone/>
-                        <a:defRPr sz="1800" b="0">
-                          <a:solidFill>
-                            <a:srgbClr val="303437"/>
-                          </a:solidFill>
-                          <a:latin typeface="Noto Sans"/>
-                        </a:defRPr>
-                      </a:pPr>
-                      <a:r>
-                        <a:rPr sz="1800" b="0" lang="ja-JP" altLang="en-US">
-                          <a:solidFill>
-                            <a:srgbClr val="303437"/>
-                          </a:solidFill>
-                          <a:latin typeface="Noto Sans"/>
-                          <a:ea typeface="Noto Sans CJK JP"/>
-                          <a:cs typeface="Noto Sans"/>
-                        </a:rPr>
-                        <a:t>16,130</a:t>
-                      </a:r>
-                    </a:p>
-                  </a:txBody>
-                  <a:tcPr marL="63500" marR="63500" marT="38100" marB="38100" anchor="ctr">
-                    <a:lnL w="7620">
-                      <a:noFill/>
-                    </a:lnL>
-                    <a:lnR w="7620">
-                      <a:noFill/>
-                    </a:lnR>
-                    <a:lnT w="7620">
-                      <a:noFill/>
-                    </a:lnT>
-                    <a:lnB w="7620">
-                      <a:noFill/>
-                    </a:lnB>
-                    <a:solidFill>
-                      <a:srgbClr val="FFFEF8"/>
-                    </a:solidFill>
-                  </a:tcPr>
-                </a:tc>
-                <a:tc>
-                  <a:txBody>
-                    <a:bodyPr wrap="square">
-                      <a:noAutofit/>
-                    </a:bodyPr>
-                    <a:lstStyle/>
-                    <a:p>
-                      <a:pPr algn="r">
-                        <a:lnSpc>
-                          <a:spcPts val="2070"/>
-                        </a:lnSpc>
-                        <a:buNone/>
-                        <a:defRPr sz="1800" b="0">
-                          <a:solidFill>
-                            <a:srgbClr val="303437"/>
-                          </a:solidFill>
-                          <a:latin typeface="Noto Sans"/>
-                        </a:defRPr>
-                      </a:pPr>
-                      <a:r>
-                        <a:rPr sz="1800" b="0" lang="ja-JP" altLang="en-US">
-                          <a:solidFill>
-                            <a:srgbClr val="303437"/>
-                          </a:solidFill>
-                          <a:latin typeface="Noto Sans"/>
-                          <a:ea typeface="Noto Sans CJK JP"/>
-                          <a:cs typeface="Noto Sans"/>
-                        </a:rPr>
-                        <a:t>3,870</a:t>
-                      </a:r>
-                    </a:p>
-                  </a:txBody>
-                  <a:tcPr marL="63500" marR="63500" marT="38100" marB="38100" anchor="ctr">
-                    <a:lnL w="7620">
-                      <a:noFill/>
-                    </a:lnL>
-                    <a:lnR w="7620">
-                      <a:noFill/>
-                    </a:lnR>
-                    <a:lnT w="7620">
-                      <a:noFill/>
-                    </a:lnT>
-                    <a:lnB w="7620">
-                      <a:noFill/>
-                    </a:lnB>
-                    <a:solidFill>
-                      <a:srgbClr val="FFFEF8"/>
-                    </a:solidFill>
-                  </a:tcPr>
-                </a:tc>
-                <a:tc>
-                  <a:txBody>
-                    <a:bodyPr wrap="square">
-                      <a:noAutofit/>
-                    </a:bodyPr>
-                    <a:lstStyle/>
-                    <a:p>
-                      <a:pPr algn="r">
-                        <a:lnSpc>
-                          <a:spcPts val="2070"/>
-                        </a:lnSpc>
-                        <a:buNone/>
-                        <a:defRPr sz="1800" b="0">
-                          <a:solidFill>
-                            <a:srgbClr val="303437"/>
-                          </a:solidFill>
-                          <a:latin typeface="Noto Sans"/>
-                        </a:defRPr>
-                      </a:pPr>
-                      <a:r>
-                        <a:rPr sz="1800" b="0" lang="ja-JP" altLang="en-US">
-                          <a:solidFill>
-                            <a:srgbClr val="303437"/>
-                          </a:solidFill>
-                          <a:latin typeface="Noto Sans"/>
-                          <a:ea typeface="Noto Sans CJK JP"/>
-                          <a:cs typeface="Noto Sans"/>
-                        </a:rPr>
-                        <a:t>3,458</a:t>
-                      </a:r>
-                    </a:p>
-                  </a:txBody>
-                  <a:tcPr marL="63500" marR="63500" marT="38100" marB="38100" anchor="ctr">
-                    <a:lnL w="7620">
-                      <a:noFill/>
-                    </a:lnL>
-                    <a:lnR w="7620">
-                      <a:noFill/>
-                    </a:lnR>
-                    <a:lnT w="7620">
-                      <a:noFill/>
-                    </a:lnT>
-                    <a:lnB w="7620">
-                      <a:noFill/>
-                    </a:lnB>
-                    <a:solidFill>
-                      <a:srgbClr val="FFFEF8"/>
-                    </a:solidFill>
-                  </a:tcPr>
-                </a:tc>
-              </a:tr>
-              <a:tr h="384048">
-                <a:tc>
-                  <a:txBody>
-                    <a:bodyPr wrap="square">
-                      <a:noAutofit/>
-                    </a:bodyPr>
-                    <a:lstStyle/>
-                    <a:p>
-                      <a:pPr algn="l">
-                        <a:lnSpc>
-                          <a:spcPts val="2070"/>
-                        </a:lnSpc>
-                        <a:buNone/>
-                        <a:defRPr sz="1800" b="0">
-                          <a:solidFill>
-                            <a:srgbClr val="303437"/>
-                          </a:solidFill>
-                          <a:latin typeface="Noto Sans"/>
-                        </a:defRPr>
-                      </a:pPr>
-                      <a:r>
-                        <a:rPr sz="1800" b="0" lang="ja-JP" altLang="en-US">
-                          <a:solidFill>
-                            <a:srgbClr val="303437"/>
-                          </a:solidFill>
-                          <a:latin typeface="Noto Sans"/>
-                          <a:ea typeface="Noto Sans CJK JP"/>
-                          <a:cs typeface="Noto Sans"/>
-                        </a:rPr>
-                        <a:t>Test</a:t>
-                      </a:r>
-                    </a:p>
-                  </a:txBody>
-                  <a:tcPr marL="63500" marR="63500" marT="38100" marB="38100" anchor="ctr">
-                    <a:lnL w="7620">
-                      <a:noFill/>
-                    </a:lnL>
-                    <a:lnR w="7620">
-                      <a:noFill/>
-                    </a:lnR>
-                    <a:lnT w="7620">
-                      <a:noFill/>
-                    </a:lnT>
-                    <a:lnB w="7620">
-                      <a:noFill/>
-                    </a:lnB>
-                    <a:solidFill>
-                      <a:srgbClr val="FFFEF8"/>
-                    </a:solidFill>
-                  </a:tcPr>
-                </a:tc>
-                <a:tc>
-                  <a:txBody>
-                    <a:bodyPr wrap="square">
-                      <a:noAutofit/>
-                    </a:bodyPr>
-                    <a:lstStyle/>
-                    <a:p>
-                      <a:pPr algn="r">
-                        <a:lnSpc>
-                          <a:spcPts val="2070"/>
-                        </a:lnSpc>
-                        <a:buNone/>
-                        <a:defRPr sz="1800" b="0">
-                          <a:solidFill>
-                            <a:srgbClr val="303437"/>
-                          </a:solidFill>
-                          <a:latin typeface="Noto Sans"/>
-                        </a:defRPr>
-                      </a:pPr>
-                      <a:r>
-                        <a:rPr sz="1800" b="0" lang="ja-JP" altLang="en-US">
-                          <a:solidFill>
-                            <a:srgbClr val="303437"/>
-                          </a:solidFill>
-                          <a:latin typeface="Noto Sans"/>
-                          <a:ea typeface="Noto Sans CJK JP"/>
-                          <a:cs typeface="Noto Sans"/>
-                        </a:rPr>
-                        <a:t>16,163</a:t>
-                      </a:r>
-                    </a:p>
-                  </a:txBody>
-                  <a:tcPr marL="63500" marR="63500" marT="38100" marB="38100" anchor="ctr">
-                    <a:lnL w="7620">
-                      <a:noFill/>
-                    </a:lnL>
-                    <a:lnR w="7620">
-                      <a:noFill/>
-                    </a:lnR>
-                    <a:lnT w="7620">
-                      <a:noFill/>
-                    </a:lnT>
-                    <a:lnB w="7620">
-                      <a:noFill/>
-                    </a:lnB>
-                    <a:solidFill>
-                      <a:srgbClr val="FFFEF8"/>
-                    </a:solidFill>
-                  </a:tcPr>
-                </a:tc>
-                <a:tc>
-                  <a:txBody>
-                    <a:bodyPr wrap="square">
-                      <a:noAutofit/>
-                    </a:bodyPr>
-                    <a:lstStyle/>
-                    <a:p>
-                      <a:pPr algn="r">
-                        <a:lnSpc>
-                          <a:spcPts val="2070"/>
-                        </a:lnSpc>
-                        <a:buNone/>
-                        <a:defRPr sz="1800" b="0">
-                          <a:solidFill>
-                            <a:srgbClr val="303437"/>
-                          </a:solidFill>
-                          <a:latin typeface="Noto Sans"/>
-                        </a:defRPr>
-                      </a:pPr>
-                      <a:r>
-                        <a:rPr sz="1800" b="0" lang="ja-JP" altLang="en-US">
-                          <a:solidFill>
-                            <a:srgbClr val="303437"/>
-                          </a:solidFill>
-                          <a:latin typeface="Noto Sans"/>
-                          <a:ea typeface="Noto Sans CJK JP"/>
-                          <a:cs typeface="Noto Sans"/>
-                        </a:rPr>
-                        <a:t>3,837</a:t>
-                      </a:r>
-                    </a:p>
-                  </a:txBody>
-                  <a:tcPr marL="63500" marR="63500" marT="38100" marB="38100" anchor="ctr">
-                    <a:lnL w="7620">
-                      <a:noFill/>
-                    </a:lnL>
-                    <a:lnR w="7620">
-                      <a:noFill/>
-                    </a:lnR>
-                    <a:lnT w="7620">
-                      <a:noFill/>
-                    </a:lnT>
-                    <a:lnB w="7620">
-                      <a:noFill/>
-                    </a:lnB>
-                    <a:solidFill>
-                      <a:srgbClr val="FFFEF8"/>
-                    </a:solidFill>
-                  </a:tcPr>
-                </a:tc>
-                <a:tc>
-                  <a:txBody>
-                    <a:bodyPr wrap="square">
-                      <a:noAutofit/>
-                    </a:bodyPr>
-                    <a:lstStyle/>
-                    <a:p>
-                      <a:pPr algn="r">
-                        <a:lnSpc>
-                          <a:spcPts val="2070"/>
-                        </a:lnSpc>
-                        <a:buNone/>
-                        <a:defRPr sz="1800" b="0">
-                          <a:solidFill>
-                            <a:srgbClr val="303437"/>
-                          </a:solidFill>
-                          <a:latin typeface="Noto Sans"/>
-                        </a:defRPr>
-                      </a:pPr>
-                      <a:r>
-                        <a:rPr sz="1800" b="0" lang="ja-JP" altLang="en-US">
-                          <a:solidFill>
-                            <a:srgbClr val="303437"/>
-                          </a:solidFill>
-                          <a:latin typeface="Noto Sans"/>
-                          <a:ea typeface="Noto Sans CJK JP"/>
-                          <a:cs typeface="Noto Sans"/>
-                        </a:rPr>
-                        <a:t>3,502</a:t>
-                      </a:r>
-                    </a:p>
-                  </a:txBody>
-                  <a:tcPr marL="63500" marR="63500" marT="38100" marB="38100" anchor="ctr">
-                    <a:lnL w="7620">
-                      <a:noFill/>
-                    </a:lnL>
-                    <a:lnR w="7620">
-                      <a:noFill/>
-                    </a:lnR>
-                    <a:lnT w="7620">
-                      <a:noFill/>
-                    </a:lnT>
-                    <a:lnB w="7620">
-                      <a:noFill/>
-                    </a:lnB>
-                    <a:solidFill>
-                      <a:srgbClr val="FFFEF8"/>
-                    </a:solidFill>
-                  </a:tcPr>
-                </a:tc>
-              </a:tr>
-              <a:tr h="384048">
-                <a:tc>
-                  <a:txBody>
-                    <a:bodyPr wrap="square">
-                      <a:noAutofit/>
-                    </a:bodyPr>
-                    <a:lstStyle/>
-                    <a:p>
-                      <a:pPr algn="l">
-                        <a:lnSpc>
-                          <a:spcPts val="2070"/>
-                        </a:lnSpc>
-                        <a:buNone/>
-                        <a:defRPr sz="1800" b="0">
-                          <a:solidFill>
-                            <a:srgbClr val="303437"/>
-                          </a:solidFill>
-                          <a:latin typeface="Noto Sans"/>
-                        </a:defRPr>
-                      </a:pPr>
-                      <a:r>
-                        <a:rPr sz="1800" b="0" lang="ja-JP" altLang="en-US">
-                          <a:solidFill>
-                            <a:srgbClr val="303437"/>
-                          </a:solidFill>
-                          <a:latin typeface="Noto Sans"/>
-                          <a:ea typeface="Noto Sans CJK JP"/>
-                          <a:cs typeface="Noto Sans"/>
-                        </a:rPr>
-                        <a:t>Out</a:t>
-                      </a:r>
-                    </a:p>
-                  </a:txBody>
-                  <a:tcPr marL="63500" marR="63500" marT="38100" marB="38100" anchor="ctr">
-                    <a:lnL w="7620">
-                      <a:noFill/>
-                    </a:lnL>
-                    <a:lnR w="7620">
-                      <a:noFill/>
-                    </a:lnR>
-                    <a:lnT w="7620">
-                      <a:noFill/>
-                    </a:lnT>
-                    <a:lnB w="15240">
-                      <a:solidFill>
-                        <a:srgbClr val="626669"/>
-                      </a:solidFill>
-                      <a:prstDash val="solid"/>
-                    </a:lnB>
-                    <a:solidFill>
-                      <a:srgbClr val="FFFEF8"/>
-                    </a:solidFill>
-                  </a:tcPr>
-                </a:tc>
-                <a:tc>
-                  <a:txBody>
-                    <a:bodyPr wrap="square">
-                      <a:noAutofit/>
-                    </a:bodyPr>
-                    <a:lstStyle/>
-                    <a:p>
-                      <a:pPr algn="r">
-                        <a:lnSpc>
-                          <a:spcPts val="2070"/>
-                        </a:lnSpc>
-                        <a:buNone/>
-                        <a:defRPr sz="1800" b="0">
-                          <a:solidFill>
-                            <a:srgbClr val="303437"/>
-                          </a:solidFill>
-                          <a:latin typeface="Noto Sans"/>
-                        </a:defRPr>
-                      </a:pPr>
-                      <a:r>
-                        <a:rPr sz="1800" b="0" lang="ja-JP" altLang="en-US">
-                          <a:solidFill>
-                            <a:srgbClr val="303437"/>
-                          </a:solidFill>
-                          <a:latin typeface="Noto Sans"/>
-                          <a:ea typeface="Noto Sans CJK JP"/>
-                          <a:cs typeface="Noto Sans"/>
-                        </a:rPr>
-                        <a:t>13,001</a:t>
-                      </a:r>
-                    </a:p>
-                  </a:txBody>
-                  <a:tcPr marL="63500" marR="63500" marT="38100" marB="38100" anchor="ctr">
-                    <a:lnL w="7620">
-                      <a:noFill/>
-                    </a:lnL>
-                    <a:lnR w="7620">
-                      <a:noFill/>
-                    </a:lnR>
-                    <a:lnT w="7620">
-                      <a:noFill/>
-                    </a:lnT>
-                    <a:lnB w="15240">
-                      <a:solidFill>
-                        <a:srgbClr val="626669"/>
-                      </a:solidFill>
-                      <a:prstDash val="solid"/>
-                    </a:lnB>
-                    <a:solidFill>
-                      <a:srgbClr val="FFFEF8"/>
-                    </a:solidFill>
-                  </a:tcPr>
-                </a:tc>
-                <a:tc>
-                  <a:txBody>
-                    <a:bodyPr wrap="square">
-                      <a:noAutofit/>
-                    </a:bodyPr>
-                    <a:lstStyle/>
-                    <a:p>
-                      <a:pPr algn="r">
-                        <a:lnSpc>
-                          <a:spcPts val="2070"/>
-                        </a:lnSpc>
-                        <a:buNone/>
-                        <a:defRPr sz="1800" b="0">
-                          <a:solidFill>
-                            <a:srgbClr val="303437"/>
-                          </a:solidFill>
-                          <a:latin typeface="Noto Sans"/>
-                        </a:defRPr>
-                      </a:pPr>
-                      <a:r>
-                        <a:rPr sz="1800" b="0" lang="ja-JP" altLang="en-US">
-                          <a:solidFill>
-                            <a:srgbClr val="303437"/>
-                          </a:solidFill>
-                          <a:latin typeface="Noto Sans"/>
-                          <a:ea typeface="Noto Sans CJK JP"/>
-                          <a:cs typeface="Noto Sans"/>
-                        </a:rPr>
-                        <a:t>7,095</a:t>
-                      </a:r>
-                    </a:p>
-                  </a:txBody>
-                  <a:tcPr marL="63500" marR="63500" marT="38100" marB="38100" anchor="ctr">
-                    <a:lnL w="7620">
-                      <a:noFill/>
-                    </a:lnL>
-                    <a:lnR w="7620">
-                      <a:noFill/>
-                    </a:lnR>
-                    <a:lnT w="7620">
-                      <a:noFill/>
-                    </a:lnT>
-                    <a:lnB w="15240">
-                      <a:solidFill>
-                        <a:srgbClr val="626669"/>
-                      </a:solidFill>
-                      <a:prstDash val="solid"/>
-                    </a:lnB>
-                    <a:solidFill>
-                      <a:srgbClr val="FFFEF8"/>
-                    </a:solidFill>
-                  </a:tcPr>
-                </a:tc>
-                <a:tc>
-                  <a:txBody>
-                    <a:bodyPr wrap="square">
-                      <a:noAutofit/>
-                    </a:bodyPr>
-                    <a:lstStyle/>
-                    <a:p>
-                      <a:pPr algn="r">
-                        <a:lnSpc>
-                          <a:spcPts val="2070"/>
-                        </a:lnSpc>
-                        <a:buNone/>
-                        <a:defRPr sz="1800" b="0">
-                          <a:solidFill>
-                            <a:srgbClr val="303437"/>
-                          </a:solidFill>
-                          <a:latin typeface="Noto Sans"/>
-                        </a:defRPr>
-                      </a:pPr>
-                      <a:r>
-                        <a:rPr sz="1800" b="0" lang="ja-JP" altLang="en-US">
-                          <a:solidFill>
-                            <a:srgbClr val="303437"/>
-                          </a:solidFill>
-                          <a:latin typeface="Noto Sans"/>
-                          <a:ea typeface="Noto Sans CJK JP"/>
-                          <a:cs typeface="Noto Sans"/>
-                        </a:rPr>
-                        <a:t>3,626</a:t>
-                      </a:r>
-                    </a:p>
-                  </a:txBody>
-                  <a:tcPr marL="63500" marR="63500" marT="38100" marB="38100" anchor="ctr">
-                    <a:lnL w="7620">
-                      <a:noFill/>
-                    </a:lnL>
-                    <a:lnR w="7620">
-                      <a:noFill/>
-                    </a:lnR>
-                    <a:lnT w="7620">
-                      <a:noFill/>
-                    </a:lnT>
-                    <a:lnB w="15240">
-                      <a:solidFill>
-                        <a:srgbClr val="626669"/>
-                      </a:solidFill>
-                      <a:prstDash val="solid"/>
-                    </a:lnB>
-                    <a:solidFill>
-                      <a:srgbClr val="FFFEF8"/>
-                    </a:solidFill>
-                  </a:tcPr>
-                </a:tc>
-              </a:tr>
-            </a:tbl>
-          </a:graphicData>
-        </a:graphic>
-      </p:graphicFrame>
-      <p:sp>
-        <p:nvSpPr>
-          <p:cNvPr id="5" name="TextBox 4"/>
-          <p:cNvSpPr txBox="1"/>
-          <p:nvPr/>
-        </p:nvSpPr>
-        <p:spPr>
-          <a:xfrm>
-            <a:off x="594360" y="3557016"/>
-            <a:ext cx="7955279" cy="658368"/>
-          </a:xfrm>
-          <a:prstGeom prst="rect">
-            <a:avLst/>
-          </a:prstGeom>
-          <a:noFill/>
-        </p:spPr>
-        <p:txBody>
-          <a:bodyPr wrap="square" lIns="0" rIns="0" tIns="0" bIns="0">
-            <a:noAutofit/>
-          </a:bodyPr>
-          <a:lstStyle/>
-          <a:p>
-            <a:pPr algn="l">
-              <a:lnSpc>
-                <a:spcPts val="1813"/>
-              </a:lnSpc>
-              <a:spcBef>
-                <a:spcPts val="0"/>
-              </a:spcBef>
-              <a:spcAft>
-                <a:spcPts val="0"/>
-              </a:spcAft>
-              <a:buNone/>
-              <a:defRPr sz="1550" b="0">
-                <a:solidFill>
-                  <a:srgbClr val="303437"/>
-                </a:solidFill>
-                <a:latin typeface="Noto Sans"/>
-              </a:defRPr>
-            </a:pPr>
-            <a:r>
-              <a:rPr sz="1550" b="0" lang="ja-JP" altLang="en-US">
-                <a:solidFill>
-                  <a:srgbClr val="303437"/>
-                </a:solidFill>
-                <a:latin typeface="Noto Sans"/>
-                <a:ea typeface="Noto Sans CJK JP"/>
-                <a:cs typeface="Noto Sans"/>
-              </a:rPr>
-              <a:t>配布全行を集計。一空欄・複数空欄は文章数の内訳、最後の列は正解に現れる成語の種類数。</a:t>
-            </a:r>
-          </a:p>
-        </p:txBody>
-      </p:sp>
-      <p:sp>
-        <p:nvSpPr>
-          <p:cNvPr id="6" name="sources"/>
-          <p:cNvSpPr txBox="1"/>
-          <p:nvPr/>
-        </p:nvSpPr>
-        <p:spPr>
-          <a:xfrm>
-            <a:off x="502920" y="4700016"/>
-            <a:ext cx="8183879" cy="530352"/>
-          </a:xfrm>
-          <a:prstGeom prst="rect">
-            <a:avLst/>
-          </a:prstGeom>
-          <a:noFill/>
-        </p:spPr>
-        <p:txBody>
-          <a:bodyPr wrap="square" lIns="0" rIns="0" tIns="0" bIns="0">
-            <a:noAutofit/>
-          </a:bodyPr>
-          <a:lstStyle/>
-          <a:p>
-            <a:pPr algn="l">
-              <a:lnSpc>
-                <a:spcPts val="940"/>
-              </a:lnSpc>
-              <a:spcBef>
-                <a:spcPts val="0"/>
-              </a:spcBef>
-              <a:spcAft>
-                <a:spcPts val="140"/>
-              </a:spcAft>
-              <a:buNone/>
-              <a:defRPr sz="810" b="0">
-                <a:solidFill>
-                  <a:srgbClr val="303437"/>
-                </a:solidFill>
-                <a:latin typeface="Noto Sans"/>
-              </a:defRPr>
-            </a:pPr>
-            <a:r>
-              <a:rPr sz="810" b="0" lang="ja-JP" altLang="en-US">
-                <a:solidFill>
-                  <a:srgbClr val="626669"/>
-                </a:solidFill>
-                <a:latin typeface="Noto Sans"/>
-                <a:ea typeface="Noto Sans CJK JP"/>
-                <a:cs typeface="Noto Sans"/>
-              </a:rPr>
-              <a:t>[1] Zheng, Huang &amp; Sun (2019). ChID: A Large-scale Chinese IDiom Dataset for Cloze Test. 作者が案内する原版配布。</a:t>
-            </a:r>
-          </a:p>
-          <a:p>
-            <a:pPr>
-              <a:lnSpc>
-                <a:spcPts val="940"/>
-              </a:lnSpc>
-              <a:buNone/>
-              <a:defRPr sz="810" b="0">
-                <a:solidFill>
-                  <a:srgbClr val="303437"/>
-                </a:solidFill>
-                <a:latin typeface="Noto Sans"/>
-              </a:defRPr>
-            </a:pPr>
-            <a:r>
-              <a:rPr sz="810" b="0" lang="ja-JP" altLang="en-US">
-                <a:solidFill>
-                  <a:srgbClr val="626669"/>
-                </a:solidFill>
-                <a:latin typeface="Noto Sans"/>
-                <a:ea typeface="Noto Sans CJK JP"/>
-                <a:cs typeface="Noto Sans"/>
-                <a:hlinkClick r:id="rId2"/>
-              </a:rPr>
-              <a:t>https://huggingface.co/datasets/thu-coai/chid/tree/47ad8022d369233bea2f4a8112268f9a9a039a43/original</a:t>
-            </a:r>
-          </a:p>
-        </p:txBody>
-      </p:sp>
-    </p:spTree>
-  </p:cSld>
-  <p:clrMapOvr>
-    <a:masterClrMapping/>
-  </p:clrMapOvr>
-</p:sld>
-</file>
-
-<file path=ppt/slides/slide47.xml><?xml version="1.0" encoding="utf-8"?>
-<p:sld xmlns:a="http://schemas.openxmlformats.org/drawingml/2006/main" xmlns:p="http://schemas.openxmlformats.org/presentationml/2006/main" xmlns:r="http://schemas.openxmlformats.org/officeDocument/2006/relationships">
-  <p:cSld>
-    <p:spTree>
-      <p:nvGrpSpPr>
-        <p:cNvPr id="1" name=""/>
-        <p:cNvGrpSpPr/>
-        <p:nvPr/>
-      </p:nvGrpSpPr>
-      <p:grpSpPr/>
-      <p:sp>
-        <p:nvSpPr>
-          <p:cNvPr id="2" name="Title 1"/>
-          <p:cNvSpPr>
-            <a:spLocks noGrp="1"/>
-          </p:cNvSpPr>
-          <p:nvPr>
-            <p:ph type="title"/>
-          </p:nvPr>
-        </p:nvSpPr>
-        <p:spPr>
-          <a:xfrm>
-            <a:off x="468172" y="650138"/>
-            <a:ext cx="8206740" cy="616305"/>
-          </a:xfrm>
-        </p:spPr>
-        <p:txBody>
-          <a:bodyPr wrap="square" lIns="0" rIns="0" tIns="0" bIns="0">
-            <a:noAutofit/>
-          </a:bodyPr>
-          <a:lstStyle/>
-          <a:p>
-            <a:pPr algn="l">
-              <a:lnSpc>
-                <a:spcPct val="110000"/>
-              </a:lnSpc>
-              <a:buNone/>
-              <a:defRPr sz="2800" b="0">
-                <a:solidFill>
-                  <a:srgbClr val="303437"/>
-                </a:solidFill>
-                <a:latin typeface="Noto Sans"/>
-              </a:defRPr>
-            </a:pPr>
-            <a:r>
-              <a:rPr sz="2800" b="1" lang="ja-JP" altLang="en-US">
-                <a:solidFill>
-                  <a:srgbClr val="303437"/>
-                </a:solidFill>
-                <a:latin typeface="Noto Sans"/>
-                <a:ea typeface="Noto Sans CJK JP"/>
-                <a:cs typeface="Noto Sans"/>
-              </a:rPr>
-              <a:t>同じcontentが、集合間に含まれる</a:t>
-            </a:r>
-          </a:p>
-        </p:txBody>
-      </p:sp>
-      <p:sp>
-        <p:nvSpPr>
-          <p:cNvPr id="3" name="Title 2"/>
-          <p:cNvSpPr>
-            <a:spLocks noGrp="1"/>
-          </p:cNvSpPr>
-          <p:nvPr>
-            <p:ph type="title" idx="2"/>
-          </p:nvPr>
-        </p:nvSpPr>
-        <p:spPr>
-          <a:xfrm>
-            <a:off x="75895" y="0"/>
-            <a:ext cx="8115300" cy="480060"/>
-          </a:xfrm>
-        </p:spPr>
-        <p:txBody>
-          <a:bodyPr wrap="square" lIns="0" rIns="0" tIns="0" bIns="0" anchor="ctr">
-            <a:noAutofit/>
-          </a:bodyPr>
-          <a:lstStyle/>
-          <a:p>
-            <a:pPr algn="l">
-              <a:lnSpc>
-                <a:spcPct val="110000"/>
-              </a:lnSpc>
-              <a:buNone/>
-              <a:defRPr sz="1400" b="0">
-                <a:solidFill>
-                  <a:srgbClr val="303437"/>
-                </a:solidFill>
-                <a:latin typeface="Noto Sans"/>
-              </a:defRPr>
-            </a:pPr>
-            <a:r>
-              <a:rPr sz="1400" b="1" lang="ja-JP" altLang="en-US">
-                <a:solidFill>
-                  <a:srgbClr val="FFFEF8"/>
-                </a:solidFill>
-                <a:latin typeface="Noto Sans"/>
-                <a:ea typeface="Noto Sans CJK JP"/>
-                <a:cs typeface="Noto Sans"/>
-              </a:rPr>
-              <a:t>Appendix: 2. 分割・入力・候補選びの補足</a:t>
-            </a:r>
-          </a:p>
-        </p:txBody>
-      </p:sp>
-      <p:graphicFrame>
-        <p:nvGraphicFramePr>
-          <p:cNvPr id="4" name="Table 3"/>
-          <p:cNvGraphicFramePr>
-            <a:graphicFrameLocks noGrp="1"/>
-          </p:cNvGraphicFramePr>
-          <p:nvPr/>
-        </p:nvGraphicFramePr>
-        <p:xfrm>
-          <a:off x="548640" y="1508760"/>
-          <a:ext cx="8046720" cy="2592324"/>
-        </p:xfrm>
-        <a:graphic>
-          <a:graphicData uri="http://schemas.openxmlformats.org/drawingml/2006/table">
-            <a:tbl>
-              <a:tblPr firstRow="0" bandRow="0"/>
-              <a:tblGrid>
-                <a:gridCol w="5212080"/>
-                <a:gridCol w="2834640"/>
-              </a:tblGrid>
-              <a:tr h="370332">
-                <a:tc>
-                  <a:txBody>
-                    <a:bodyPr wrap="square">
-                      <a:noAutofit/>
-                    </a:bodyPr>
-                    <a:lstStyle/>
-                    <a:p>
-                      <a:pPr algn="l">
-                        <a:lnSpc>
-                          <a:spcPts val="2012"/>
-                        </a:lnSpc>
-                        <a:buNone/>
-                        <a:defRPr sz="1750" b="0">
-                          <a:solidFill>
-                            <a:srgbClr val="303437"/>
-                          </a:solidFill>
-                          <a:latin typeface="Noto Sans"/>
-                        </a:defRPr>
-                      </a:pPr>
-                      <a:r>
-                        <a:rPr sz="1750" b="0" lang="ja-JP" altLang="en-US">
-                          <a:solidFill>
-                            <a:srgbClr val="303437"/>
-                          </a:solidFill>
-                          <a:latin typeface="Noto Sans"/>
-                          <a:ea typeface="Noto Sans CJK JP"/>
-                          <a:cs typeface="Noto Sans"/>
-                        </a:rPr>
-                        <a:t>組み合わせ</a:t>
-                      </a:r>
-                    </a:p>
-                  </a:txBody>
-                  <a:tcPr marL="63500" marR="63500" marT="38100" marB="38100" anchor="ctr">
-                    <a:lnL w="7620">
-                      <a:noFill/>
-                    </a:lnL>
-                    <a:lnR w="7620">
-                      <a:noFill/>
-                    </a:lnR>
-                    <a:lnT w="15240">
-                      <a:solidFill>
-                        <a:srgbClr val="626669"/>
-                      </a:solidFill>
-                      <a:prstDash val="solid"/>
-                    </a:lnT>
-                    <a:lnB w="7620">
-                      <a:solidFill>
-                        <a:srgbClr val="626669"/>
-                      </a:solidFill>
-                      <a:prstDash val="solid"/>
-                    </a:lnB>
-                    <a:solidFill>
-                      <a:srgbClr val="FFFEF8"/>
-                    </a:solidFill>
-                  </a:tcPr>
-                </a:tc>
-                <a:tc>
-                  <a:txBody>
-                    <a:bodyPr wrap="square">
-                      <a:noAutofit/>
-                    </a:bodyPr>
-                    <a:lstStyle/>
-                    <a:p>
-                      <a:pPr algn="r">
-                        <a:lnSpc>
-                          <a:spcPts val="2012"/>
-                        </a:lnSpc>
-                        <a:buNone/>
-                        <a:defRPr sz="1750" b="0">
-                          <a:solidFill>
-                            <a:srgbClr val="303437"/>
-                          </a:solidFill>
-                          <a:latin typeface="Noto Sans"/>
-                        </a:defRPr>
-                      </a:pPr>
-                      <a:r>
-                        <a:rPr sz="1750" b="0" lang="ja-JP" altLang="en-US">
-                          <a:solidFill>
-                            <a:srgbClr val="303437"/>
-                          </a:solidFill>
-                          <a:latin typeface="Noto Sans"/>
-                          <a:ea typeface="Noto Sans CJK JP"/>
-                          <a:cs typeface="Noto Sans"/>
-                        </a:rPr>
-                        <a:t>共通するcontentの種類</a:t>
-                      </a:r>
-                    </a:p>
-                  </a:txBody>
-                  <a:tcPr marL="63500" marR="63500" marT="38100" marB="38100" anchor="ctr">
-                    <a:lnL w="7620">
-                      <a:noFill/>
-                    </a:lnL>
-                    <a:lnR w="7620">
-                      <a:noFill/>
-                    </a:lnR>
-                    <a:lnT w="15240">
-                      <a:solidFill>
-                        <a:srgbClr val="626669"/>
-                      </a:solidFill>
-                      <a:prstDash val="solid"/>
-                    </a:lnT>
-                    <a:lnB w="7620">
-                      <a:solidFill>
-                        <a:srgbClr val="626669"/>
-                      </a:solidFill>
-                      <a:prstDash val="solid"/>
-                    </a:lnB>
-                    <a:solidFill>
-                      <a:srgbClr val="FFFEF8"/>
-                    </a:solidFill>
-                  </a:tcPr>
-                </a:tc>
-              </a:tr>
-              <a:tr h="370332">
-                <a:tc>
-                  <a:txBody>
-                    <a:bodyPr wrap="square">
-                      <a:noAutofit/>
-                    </a:bodyPr>
-                    <a:lstStyle/>
-                    <a:p>
-                      <a:pPr algn="l">
-                        <a:lnSpc>
-                          <a:spcPts val="2012"/>
-                        </a:lnSpc>
-                        <a:buNone/>
-                        <a:defRPr sz="1750" b="0">
-                          <a:solidFill>
-                            <a:srgbClr val="303437"/>
-                          </a:solidFill>
-                          <a:latin typeface="Noto Sans"/>
-                        </a:defRPr>
-                      </a:pPr>
-                      <a:r>
-                        <a:rPr sz="1750" b="0" lang="ja-JP" altLang="en-US">
-                          <a:solidFill>
-                            <a:srgbClr val="303437"/>
-                          </a:solidFill>
-                          <a:latin typeface="Noto Sans"/>
-                          <a:ea typeface="Noto Sans CJK JP"/>
-                          <a:cs typeface="Noto Sans"/>
-                        </a:rPr>
-                        <a:t>Train × Dev</a:t>
-                      </a:r>
-                    </a:p>
-                  </a:txBody>
-                  <a:tcPr marL="63500" marR="63500" marT="38100" marB="38100" anchor="ctr">
-                    <a:lnL w="7620">
-                      <a:noFill/>
-                    </a:lnL>
-                    <a:lnR w="7620">
-                      <a:noFill/>
-                    </a:lnR>
-                    <a:lnT w="7620">
-                      <a:solidFill>
-                        <a:srgbClr val="626669"/>
-                      </a:solidFill>
-                      <a:prstDash val="solid"/>
-                    </a:lnT>
-                    <a:lnB w="7620">
-                      <a:noFill/>
-                    </a:lnB>
-                    <a:solidFill>
-                      <a:srgbClr val="FFFEF8"/>
-                    </a:solidFill>
-                  </a:tcPr>
-                </a:tc>
-                <a:tc>
-                  <a:txBody>
-                    <a:bodyPr wrap="square">
-                      <a:noAutofit/>
-                    </a:bodyPr>
-                    <a:lstStyle/>
-                    <a:p>
-                      <a:pPr algn="r">
-                        <a:lnSpc>
-                          <a:spcPts val="2012"/>
-                        </a:lnSpc>
-                        <a:buNone/>
-                        <a:defRPr sz="1750" b="0">
-                          <a:solidFill>
-                            <a:srgbClr val="303437"/>
-                          </a:solidFill>
-                          <a:latin typeface="Noto Sans"/>
-                        </a:defRPr>
-                      </a:pPr>
-                      <a:r>
-                        <a:rPr sz="1750" b="0" lang="ja-JP" altLang="en-US">
-                          <a:solidFill>
-                            <a:srgbClr val="303437"/>
-                          </a:solidFill>
-                          <a:latin typeface="Noto Sans"/>
-                          <a:ea typeface="Noto Sans CJK JP"/>
-                          <a:cs typeface="Noto Sans"/>
-                        </a:rPr>
-                        <a:t>106</a:t>
-                      </a:r>
-                    </a:p>
-                  </a:txBody>
-                  <a:tcPr marL="63500" marR="63500" marT="38100" marB="38100" anchor="ctr">
-                    <a:lnL w="7620">
-                      <a:noFill/>
-                    </a:lnL>
-                    <a:lnR w="7620">
-                      <a:noFill/>
-                    </a:lnR>
-                    <a:lnT w="7620">
-                      <a:solidFill>
-                        <a:srgbClr val="626669"/>
-                      </a:solidFill>
-                      <a:prstDash val="solid"/>
-                    </a:lnT>
-                    <a:lnB w="7620">
-                      <a:noFill/>
-                    </a:lnB>
-                    <a:solidFill>
-                      <a:srgbClr val="FFFEF8"/>
-                    </a:solidFill>
-                  </a:tcPr>
-                </a:tc>
-              </a:tr>
-              <a:tr h="370332">
-                <a:tc>
-                  <a:txBody>
-                    <a:bodyPr wrap="square">
-                      <a:noAutofit/>
-                    </a:bodyPr>
-                    <a:lstStyle/>
-                    <a:p>
-                      <a:pPr algn="l">
-                        <a:lnSpc>
-                          <a:spcPts val="2012"/>
-                        </a:lnSpc>
-                        <a:buNone/>
-                        <a:defRPr sz="1750" b="0">
-                          <a:solidFill>
-                            <a:srgbClr val="303437"/>
-                          </a:solidFill>
-                          <a:latin typeface="Noto Sans"/>
-                        </a:defRPr>
-                      </a:pPr>
-                      <a:r>
-                        <a:rPr sz="1750" b="0" lang="ja-JP" altLang="en-US">
-                          <a:solidFill>
-                            <a:srgbClr val="303437"/>
-                          </a:solidFill>
-                          <a:latin typeface="Noto Sans"/>
-                          <a:ea typeface="Noto Sans CJK JP"/>
-                          <a:cs typeface="Noto Sans"/>
-                        </a:rPr>
-                        <a:t>Train × Test</a:t>
-                      </a:r>
-                    </a:p>
-                  </a:txBody>
-                  <a:tcPr marL="63500" marR="63500" marT="38100" marB="38100" anchor="ctr">
-                    <a:lnL w="7620">
-                      <a:noFill/>
-                    </a:lnL>
-                    <a:lnR w="7620">
-                      <a:noFill/>
-                    </a:lnR>
-                    <a:lnT w="7620">
-                      <a:noFill/>
-                    </a:lnT>
-                    <a:lnB w="7620">
-                      <a:noFill/>
-                    </a:lnB>
-                    <a:solidFill>
-                      <a:srgbClr val="FFFEF8"/>
-                    </a:solidFill>
-                  </a:tcPr>
-                </a:tc>
-                <a:tc>
-                  <a:txBody>
-                    <a:bodyPr wrap="square">
-                      <a:noAutofit/>
-                    </a:bodyPr>
-                    <a:lstStyle/>
-                    <a:p>
-                      <a:pPr algn="r">
-                        <a:lnSpc>
-                          <a:spcPts val="2012"/>
-                        </a:lnSpc>
-                        <a:buNone/>
-                        <a:defRPr sz="1750" b="0">
-                          <a:solidFill>
-                            <a:srgbClr val="303437"/>
-                          </a:solidFill>
-                          <a:latin typeface="Noto Sans"/>
-                        </a:defRPr>
-                      </a:pPr>
-                      <a:r>
-                        <a:rPr sz="1750" b="0" lang="ja-JP" altLang="en-US">
-                          <a:solidFill>
-                            <a:srgbClr val="303437"/>
-                          </a:solidFill>
-                          <a:latin typeface="Noto Sans"/>
-                          <a:ea typeface="Noto Sans CJK JP"/>
-                          <a:cs typeface="Noto Sans"/>
-                        </a:rPr>
-                        <a:t>110</a:t>
-                      </a:r>
-                    </a:p>
-                  </a:txBody>
-                  <a:tcPr marL="63500" marR="63500" marT="38100" marB="38100" anchor="ctr">
-                    <a:lnL w="7620">
-                      <a:noFill/>
-                    </a:lnL>
-                    <a:lnR w="7620">
-                      <a:noFill/>
-                    </a:lnR>
-                    <a:lnT w="7620">
-                      <a:noFill/>
-                    </a:lnT>
-                    <a:lnB w="7620">
-                      <a:noFill/>
-                    </a:lnB>
-                    <a:solidFill>
-                      <a:srgbClr val="FFFEF8"/>
-                    </a:solidFill>
-                  </a:tcPr>
-                </a:tc>
-              </a:tr>
-              <a:tr h="370332">
-                <a:tc>
-                  <a:txBody>
-                    <a:bodyPr wrap="square">
-                      <a:noAutofit/>
-                    </a:bodyPr>
-                    <a:lstStyle/>
-                    <a:p>
-                      <a:pPr algn="l">
-                        <a:lnSpc>
-                          <a:spcPts val="2012"/>
-                        </a:lnSpc>
-                        <a:buNone/>
-                        <a:defRPr sz="1750" b="0">
-                          <a:solidFill>
-                            <a:srgbClr val="303437"/>
-                          </a:solidFill>
-                          <a:latin typeface="Noto Sans"/>
-                        </a:defRPr>
-                      </a:pPr>
-                      <a:r>
-                        <a:rPr sz="1750" b="0" lang="ja-JP" altLang="en-US">
-                          <a:solidFill>
-                            <a:srgbClr val="303437"/>
-                          </a:solidFill>
-                          <a:latin typeface="Noto Sans"/>
-                          <a:ea typeface="Noto Sans CJK JP"/>
-                          <a:cs typeface="Noto Sans"/>
-                        </a:rPr>
-                        <a:t>Train × Out</a:t>
-                      </a:r>
-                    </a:p>
-                  </a:txBody>
-                  <a:tcPr marL="63500" marR="63500" marT="38100" marB="38100" anchor="ctr">
-                    <a:lnL w="7620">
-                      <a:noFill/>
-                    </a:lnL>
-                    <a:lnR w="7620">
-                      <a:noFill/>
-                    </a:lnR>
-                    <a:lnT w="7620">
-                      <a:noFill/>
-                    </a:lnT>
-                    <a:lnB w="7620">
-                      <a:noFill/>
-                    </a:lnB>
-                    <a:solidFill>
-                      <a:srgbClr val="FFFEF8"/>
-                    </a:solidFill>
-                  </a:tcPr>
-                </a:tc>
-                <a:tc>
-                  <a:txBody>
-                    <a:bodyPr wrap="square">
-                      <a:noAutofit/>
-                    </a:bodyPr>
-                    <a:lstStyle/>
-                    <a:p>
-                      <a:pPr algn="r">
-                        <a:lnSpc>
-                          <a:spcPts val="2012"/>
-                        </a:lnSpc>
-                        <a:buNone/>
-                        <a:defRPr sz="1750" b="0">
-                          <a:solidFill>
-                            <a:srgbClr val="303437"/>
-                          </a:solidFill>
-                          <a:latin typeface="Noto Sans"/>
-                        </a:defRPr>
-                      </a:pPr>
-                      <a:r>
-                        <a:rPr sz="1750" b="0" lang="ja-JP" altLang="en-US">
-                          <a:solidFill>
-                            <a:srgbClr val="303437"/>
-                          </a:solidFill>
-                          <a:latin typeface="Noto Sans"/>
-                          <a:ea typeface="Noto Sans CJK JP"/>
-                          <a:cs typeface="Noto Sans"/>
-                        </a:rPr>
-                        <a:t>1,829</a:t>
-                      </a:r>
-                    </a:p>
-                  </a:txBody>
-                  <a:tcPr marL="63500" marR="63500" marT="38100" marB="38100" anchor="ctr">
-                    <a:lnL w="7620">
-                      <a:noFill/>
-                    </a:lnL>
-                    <a:lnR w="7620">
-                      <a:noFill/>
-                    </a:lnR>
-                    <a:lnT w="7620">
-                      <a:noFill/>
-                    </a:lnT>
-                    <a:lnB w="7620">
-                      <a:noFill/>
-                    </a:lnB>
-                    <a:solidFill>
-                      <a:srgbClr val="FFFEF8"/>
-                    </a:solidFill>
-                  </a:tcPr>
-                </a:tc>
-              </a:tr>
-              <a:tr h="370332">
-                <a:tc>
-                  <a:txBody>
-                    <a:bodyPr wrap="square">
-                      <a:noAutofit/>
-                    </a:bodyPr>
-                    <a:lstStyle/>
-                    <a:p>
-                      <a:pPr algn="l">
-                        <a:lnSpc>
-                          <a:spcPts val="2012"/>
-                        </a:lnSpc>
-                        <a:buNone/>
-                        <a:defRPr sz="1750" b="0">
-                          <a:solidFill>
-                            <a:srgbClr val="303437"/>
-                          </a:solidFill>
-                          <a:latin typeface="Noto Sans"/>
-                        </a:defRPr>
-                      </a:pPr>
-                      <a:r>
-                        <a:rPr sz="1750" b="0" lang="ja-JP" altLang="en-US">
-                          <a:solidFill>
-                            <a:srgbClr val="303437"/>
-                          </a:solidFill>
-                          <a:latin typeface="Noto Sans"/>
-                          <a:ea typeface="Noto Sans CJK JP"/>
-                          <a:cs typeface="Noto Sans"/>
-                        </a:rPr>
-                        <a:t>Dev × Test</a:t>
-                      </a:r>
-                    </a:p>
-                  </a:txBody>
-                  <a:tcPr marL="63500" marR="63500" marT="38100" marB="38100" anchor="ctr">
-                    <a:lnL w="7620">
-                      <a:noFill/>
-                    </a:lnL>
-                    <a:lnR w="7620">
-                      <a:noFill/>
-                    </a:lnR>
-                    <a:lnT w="7620">
-                      <a:noFill/>
-                    </a:lnT>
-                    <a:lnB w="7620">
-                      <a:noFill/>
-                    </a:lnB>
-                    <a:solidFill>
-                      <a:srgbClr val="FFFEF8"/>
-                    </a:solidFill>
-                  </a:tcPr>
-                </a:tc>
-                <a:tc>
-                  <a:txBody>
-                    <a:bodyPr wrap="square">
-                      <a:noAutofit/>
-                    </a:bodyPr>
-                    <a:lstStyle/>
-                    <a:p>
-                      <a:pPr algn="r">
-                        <a:lnSpc>
-                          <a:spcPts val="2012"/>
-                        </a:lnSpc>
-                        <a:buNone/>
-                        <a:defRPr sz="1750" b="0">
-                          <a:solidFill>
-                            <a:srgbClr val="303437"/>
-                          </a:solidFill>
-                          <a:latin typeface="Noto Sans"/>
-                        </a:defRPr>
-                      </a:pPr>
-                      <a:r>
-                        <a:rPr sz="1750" b="0" lang="ja-JP" altLang="en-US">
-                          <a:solidFill>
-                            <a:srgbClr val="303437"/>
-                          </a:solidFill>
-                          <a:latin typeface="Noto Sans"/>
-                          <a:ea typeface="Noto Sans CJK JP"/>
-                          <a:cs typeface="Noto Sans"/>
-                        </a:rPr>
-                        <a:t>1</a:t>
-                      </a:r>
-                    </a:p>
-                  </a:txBody>
-                  <a:tcPr marL="63500" marR="63500" marT="38100" marB="38100" anchor="ctr">
-                    <a:lnL w="7620">
-                      <a:noFill/>
-                    </a:lnL>
-                    <a:lnR w="7620">
-                      <a:noFill/>
-                    </a:lnR>
-                    <a:lnT w="7620">
-                      <a:noFill/>
-                    </a:lnT>
-                    <a:lnB w="7620">
-                      <a:noFill/>
-                    </a:lnB>
-                    <a:solidFill>
-                      <a:srgbClr val="FFFEF8"/>
-                    </a:solidFill>
-                  </a:tcPr>
-                </a:tc>
-              </a:tr>
-              <a:tr h="370332">
-                <a:tc>
-                  <a:txBody>
-                    <a:bodyPr wrap="square">
-                      <a:noAutofit/>
-                    </a:bodyPr>
-                    <a:lstStyle/>
-                    <a:p>
-                      <a:pPr algn="l">
-                        <a:lnSpc>
-                          <a:spcPts val="2012"/>
-                        </a:lnSpc>
-                        <a:buNone/>
-                        <a:defRPr sz="1750" b="0">
-                          <a:solidFill>
-                            <a:srgbClr val="303437"/>
-                          </a:solidFill>
-                          <a:latin typeface="Noto Sans"/>
-                        </a:defRPr>
-                      </a:pPr>
-                      <a:r>
-                        <a:rPr sz="1750" b="0" lang="ja-JP" altLang="en-US">
-                          <a:solidFill>
-                            <a:srgbClr val="303437"/>
-                          </a:solidFill>
-                          <a:latin typeface="Noto Sans"/>
-                          <a:ea typeface="Noto Sans CJK JP"/>
-                          <a:cs typeface="Noto Sans"/>
-                        </a:rPr>
-                        <a:t>Dev × Out</a:t>
-                      </a:r>
-                    </a:p>
-                  </a:txBody>
-                  <a:tcPr marL="63500" marR="63500" marT="38100" marB="38100" anchor="ctr">
-                    <a:lnL w="7620">
-                      <a:noFill/>
-                    </a:lnL>
-                    <a:lnR w="7620">
-                      <a:noFill/>
-                    </a:lnR>
-                    <a:lnT w="7620">
-                      <a:noFill/>
-                    </a:lnT>
-                    <a:lnB w="7620">
-                      <a:noFill/>
-                    </a:lnB>
-                    <a:solidFill>
-                      <a:srgbClr val="FFFEF8"/>
-                    </a:solidFill>
-                  </a:tcPr>
-                </a:tc>
-                <a:tc>
-                  <a:txBody>
-                    <a:bodyPr wrap="square">
-                      <a:noAutofit/>
-                    </a:bodyPr>
-                    <a:lstStyle/>
-                    <a:p>
-                      <a:pPr algn="r">
-                        <a:lnSpc>
-                          <a:spcPts val="2012"/>
-                        </a:lnSpc>
-                        <a:buNone/>
-                        <a:defRPr sz="1750" b="0">
-                          <a:solidFill>
-                            <a:srgbClr val="303437"/>
-                          </a:solidFill>
-                          <a:latin typeface="Noto Sans"/>
-                        </a:defRPr>
-                      </a:pPr>
-                      <a:r>
-                        <a:rPr sz="1750" b="0" lang="ja-JP" altLang="en-US">
-                          <a:solidFill>
-                            <a:srgbClr val="303437"/>
-                          </a:solidFill>
-                          <a:latin typeface="Noto Sans"/>
-                          <a:ea typeface="Noto Sans CJK JP"/>
-                          <a:cs typeface="Noto Sans"/>
-                        </a:rPr>
-                        <a:t>60</a:t>
-                      </a:r>
-                    </a:p>
-                  </a:txBody>
-                  <a:tcPr marL="63500" marR="63500" marT="38100" marB="38100" anchor="ctr">
-                    <a:lnL w="7620">
-                      <a:noFill/>
-                    </a:lnL>
-                    <a:lnR w="7620">
-                      <a:noFill/>
-                    </a:lnR>
-                    <a:lnT w="7620">
-                      <a:noFill/>
-                    </a:lnT>
-                    <a:lnB w="7620">
-                      <a:noFill/>
-                    </a:lnB>
-                    <a:solidFill>
-                      <a:srgbClr val="FFFEF8"/>
-                    </a:solidFill>
-                  </a:tcPr>
-                </a:tc>
-              </a:tr>
-              <a:tr h="370332">
-                <a:tc>
-                  <a:txBody>
-                    <a:bodyPr wrap="square">
-                      <a:noAutofit/>
-                    </a:bodyPr>
-                    <a:lstStyle/>
-                    <a:p>
-                      <a:pPr algn="l">
-                        <a:lnSpc>
-                          <a:spcPts val="2012"/>
-                        </a:lnSpc>
-                        <a:buNone/>
-                        <a:defRPr sz="1750" b="0">
-                          <a:solidFill>
-                            <a:srgbClr val="303437"/>
-                          </a:solidFill>
-                          <a:latin typeface="Noto Sans"/>
-                        </a:defRPr>
-                      </a:pPr>
-                      <a:r>
-                        <a:rPr sz="1750" b="0" lang="ja-JP" altLang="en-US">
-                          <a:solidFill>
-                            <a:srgbClr val="303437"/>
-                          </a:solidFill>
-                          <a:latin typeface="Noto Sans"/>
-                          <a:ea typeface="Noto Sans CJK JP"/>
-                          <a:cs typeface="Noto Sans"/>
-                        </a:rPr>
-                        <a:t>Test × Out</a:t>
-                      </a:r>
-                    </a:p>
-                  </a:txBody>
-                  <a:tcPr marL="63500" marR="63500" marT="38100" marB="38100" anchor="ctr">
-                    <a:lnL w="7620">
-                      <a:noFill/>
-                    </a:lnL>
-                    <a:lnR w="7620">
-                      <a:noFill/>
-                    </a:lnR>
-                    <a:lnT w="7620">
-                      <a:noFill/>
-                    </a:lnT>
-                    <a:lnB w="15240">
-                      <a:solidFill>
-                        <a:srgbClr val="626669"/>
-                      </a:solidFill>
-                      <a:prstDash val="solid"/>
-                    </a:lnB>
-                    <a:solidFill>
-                      <a:srgbClr val="FFFEF8"/>
-                    </a:solidFill>
-                  </a:tcPr>
-                </a:tc>
-                <a:tc>
-                  <a:txBody>
-                    <a:bodyPr wrap="square">
-                      <a:noAutofit/>
-                    </a:bodyPr>
-                    <a:lstStyle/>
-                    <a:p>
-                      <a:pPr algn="r">
-                        <a:lnSpc>
-                          <a:spcPts val="2012"/>
-                        </a:lnSpc>
-                        <a:buNone/>
-                        <a:defRPr sz="1750" b="0">
-                          <a:solidFill>
-                            <a:srgbClr val="303437"/>
-                          </a:solidFill>
-                          <a:latin typeface="Noto Sans"/>
-                        </a:defRPr>
-                      </a:pPr>
-                      <a:r>
-                        <a:rPr sz="1750" b="0" lang="ja-JP" altLang="en-US">
-                          <a:solidFill>
-                            <a:srgbClr val="303437"/>
-                          </a:solidFill>
-                          <a:latin typeface="Noto Sans"/>
-                          <a:ea typeface="Noto Sans CJK JP"/>
-                          <a:cs typeface="Noto Sans"/>
-                        </a:rPr>
-                        <a:t>85</a:t>
-                      </a:r>
-                    </a:p>
-                  </a:txBody>
-                  <a:tcPr marL="63500" marR="63500" marT="38100" marB="38100" anchor="ctr">
-                    <a:lnL w="7620">
-                      <a:noFill/>
-                    </a:lnL>
-                    <a:lnR w="7620">
-                      <a:noFill/>
-                    </a:lnR>
-                    <a:lnT w="7620">
-                      <a:noFill/>
-                    </a:lnT>
-                    <a:lnB w="15240">
-                      <a:solidFill>
-                        <a:srgbClr val="626669"/>
-                      </a:solidFill>
-                      <a:prstDash val="solid"/>
-                    </a:lnB>
-                    <a:solidFill>
-                      <a:srgbClr val="FFFEF8"/>
-                    </a:solidFill>
-                  </a:tcPr>
-                </a:tc>
-              </a:tr>
-            </a:tbl>
-          </a:graphicData>
-        </a:graphic>
-      </p:graphicFrame>
-      <p:sp>
-        <p:nvSpPr>
-          <p:cNvPr id="5" name="TextBox 4"/>
-          <p:cNvSpPr txBox="1"/>
-          <p:nvPr/>
-        </p:nvSpPr>
-        <p:spPr>
-          <a:xfrm>
-            <a:off x="594360" y="4229099"/>
-            <a:ext cx="7955279" cy="658368"/>
-          </a:xfrm>
-          <a:prstGeom prst="rect">
-            <a:avLst/>
-          </a:prstGeom>
-          <a:noFill/>
-        </p:spPr>
-        <p:txBody>
-          <a:bodyPr wrap="square" lIns="0" rIns="0" tIns="0" bIns="0">
-            <a:noAutofit/>
-          </a:bodyPr>
-          <a:lstStyle/>
-          <a:p>
-            <a:pPr algn="l">
-              <a:lnSpc>
-                <a:spcPts val="1813"/>
-              </a:lnSpc>
-              <a:spcBef>
-                <a:spcPts val="0"/>
-              </a:spcBef>
-              <a:spcAft>
-                <a:spcPts val="0"/>
-              </a:spcAft>
-              <a:buNone/>
-              <a:defRPr sz="1550" b="0">
-                <a:solidFill>
-                  <a:srgbClr val="303437"/>
-                </a:solidFill>
-                <a:latin typeface="Noto Sans"/>
-              </a:defRPr>
-            </a:pPr>
-            <a:r>
-              <a:rPr sz="1550" b="0" lang="ja-JP" altLang="en-US">
-                <a:solidFill>
-                  <a:srgbClr val="303437"/>
-                </a:solidFill>
-                <a:latin typeface="Noto Sans"/>
-                <a:ea typeface="Noto Sans CJK JP"/>
-                <a:cs typeface="Noto Sans"/>
-              </a:rPr>
-              <a:t>文章を表記どおり比較。候補まで同一の問題数ではなく、作品・作者の共有を網羅する検査でもない。</a:t>
-            </a:r>
-          </a:p>
-        </p:txBody>
-      </p:sp>
-      <p:sp>
-        <p:nvSpPr>
-          <p:cNvPr id="6" name="sources"/>
-          <p:cNvSpPr txBox="1"/>
-          <p:nvPr/>
-        </p:nvSpPr>
-        <p:spPr>
-          <a:xfrm>
-            <a:off x="502920" y="4700016"/>
-            <a:ext cx="8183879" cy="530352"/>
-          </a:xfrm>
-          <a:prstGeom prst="rect">
-            <a:avLst/>
-          </a:prstGeom>
-          <a:noFill/>
-        </p:spPr>
-        <p:txBody>
-          <a:bodyPr wrap="square" lIns="0" rIns="0" tIns="0" bIns="0">
-            <a:noAutofit/>
-          </a:bodyPr>
-          <a:lstStyle/>
-          <a:p>
-            <a:pPr algn="l">
-              <a:lnSpc>
-                <a:spcPts val="940"/>
-              </a:lnSpc>
-              <a:spcBef>
-                <a:spcPts val="0"/>
-              </a:spcBef>
-              <a:spcAft>
-                <a:spcPts val="140"/>
-              </a:spcAft>
-              <a:buNone/>
-              <a:defRPr sz="810" b="0">
-                <a:solidFill>
-                  <a:srgbClr val="303437"/>
-                </a:solidFill>
-                <a:latin typeface="Noto Sans"/>
-              </a:defRPr>
-            </a:pPr>
-            <a:r>
-              <a:rPr sz="810" b="0" lang="ja-JP" altLang="en-US">
-                <a:solidFill>
-                  <a:srgbClr val="626669"/>
-                </a:solidFill>
-                <a:latin typeface="Noto Sans"/>
-                <a:ea typeface="Noto Sans CJK JP"/>
-                <a:cs typeface="Noto Sans"/>
-              </a:rPr>
-              <a:t>[1] Zheng, Huang &amp; Sun (2019). ChID: A Large-scale Chinese IDiom Dataset for Cloze Test. 作者が案内する原版配布。</a:t>
-            </a:r>
-          </a:p>
-          <a:p>
-            <a:pPr>
-              <a:lnSpc>
-                <a:spcPts val="940"/>
-              </a:lnSpc>
-              <a:buNone/>
-              <a:defRPr sz="810" b="0">
-                <a:solidFill>
-                  <a:srgbClr val="303437"/>
-                </a:solidFill>
-                <a:latin typeface="Noto Sans"/>
-              </a:defRPr>
-            </a:pPr>
-            <a:r>
-              <a:rPr sz="810" b="0" lang="ja-JP" altLang="en-US">
-                <a:solidFill>
-                  <a:srgbClr val="626669"/>
-                </a:solidFill>
-                <a:latin typeface="Noto Sans"/>
-                <a:ea typeface="Noto Sans CJK JP"/>
-                <a:cs typeface="Noto Sans"/>
-                <a:hlinkClick r:id="rId2"/>
-              </a:rPr>
-              <a:t>https://huggingface.co/datasets/thu-coai/chid/tree/47ad8022d369233bea2f4a8112268f9a9a039a43/original</a:t>
+              <a:t>Appendix: 2. 入力の読み方と候補選び</a:t>
             </a:r>
           </a:p>
         </p:txBody>
@@ -31970,7 +27535,7 @@
                 <a:ea typeface="Noto Sans CJK JP"/>
                 <a:cs typeface="Noto Sans"/>
               </a:rPr>
-              <a:t>分割内にも同文があり、短い文脈の例も残る</a:t>
+              <a:t>一部の文章は重複し、文脈が欠ける例もある</a:t>
             </a:r>
           </a:p>
         </p:txBody>
@@ -32023,7 +27588,7 @@
                 <a:ea typeface="Noto Sans CJK JP"/>
                 <a:cs typeface="Noto Sans"/>
               </a:rPr>
-              <a:t>Trainは520,711行に対し、異なるcontentは519,218種類。Devは20,000行に19,997種類、Outは20,096行に20,085種類ある。行数をすべて独立文章の種類数とは扱わない。</a:t>
+              <a:t>学習とTestには、同じ文章が110種類含まれる。学習とOutにも1,829種類が共通する。候補の組は異なる場合がある。</a:t>
             </a:r>
           </a:p>
           <a:p>
@@ -32053,7 +27618,7 @@
                 <a:ea typeface="Noto Sans CJK JP"/>
                 <a:cs typeface="Noto Sans"/>
               </a:rPr>
-              <a:t>Devにはcontentが空欄記号だけの行が一つある。配布の正解を保持することと、表示された文脈だけで一意に解けることは異なる。文章の長さや候補を確認して読む。</a:t>
+              <a:t>開発集合には、文章が空欄記号だけになっている問題が1問ある。候補は付いているが、選ぶ手掛かりとなる文脈が欠けている。</a:t>
             </a:r>
           </a:p>
         </p:txBody>
@@ -32101,7 +27666,7 @@
                 <a:ea typeface="Noto Sans CJK JP"/>
                 <a:cs typeface="Noto Sans"/>
               </a:rPr>
-              <a:t>Appendix: 2. 分割・入力・候補選びの補足</a:t>
+              <a:t>Appendix: 2. 入力の読み方と候補選び</a:t>
             </a:r>
           </a:p>
         </p:txBody>
@@ -32155,22 +27720,8 @@
                 <a:ea typeface="Noto Sans CJK JP"/>
                 <a:cs typeface="Noto Sans"/>
               </a:rPr>
-              <a:t>[1] Zheng, Huang &amp; Sun (2019). ChID: A Large-scale Chinese IDiom Dataset for Cloze Test. 作者が案内する原版配布。</a:t>
-            </a:r>
-          </a:p>
-          <a:p>
-            <a:pPr>
-              <a:lnSpc>
-                <a:spcPts val="940"/>
-              </a:lnSpc>
-              <a:buNone/>
-              <a:defRPr sz="810" b="0">
-                <a:solidFill>
-                  <a:srgbClr val="303437"/>
-                </a:solidFill>
-                <a:latin typeface="Noto Sans"/>
-              </a:defRPr>
-            </a:pPr>
+              <a:t>[1] Zheng, Huang &amp; Sun (2019). ChID — Original Data Distribution.  </a:t>
+            </a:r>
             <a:r>
               <a:rPr sz="810" b="0" lang="ja-JP" altLang="en-US">
                 <a:solidFill>
@@ -32179,9 +27730,9 @@
                 <a:latin typeface="Noto Sans"/>
                 <a:ea typeface="Noto Sans CJK JP"/>
                 <a:cs typeface="Noto Sans"/>
-                <a:hlinkClick r:id="rId2"/>
-              </a:rPr>
-              <a:t>https://huggingface.co/datasets/thu-coai/chid/tree/47ad8022d369233bea2f4a8112268f9a9a039a43/original</a:t>
+                <a:hlinkClick r:id="rId3"/>
+              </a:rPr>
+              <a:t>https://huggingface.co/datasets/thu-coai/chid/tree/main/original</a:t>
             </a:r>
           </a:p>
         </p:txBody>
@@ -32378,7 +27929,7 @@
                 <a:ea typeface="Noto Sans CJK JP"/>
                 <a:cs typeface="Noto Sans"/>
               </a:rPr>
-              <a:t>Appendix: 2. 分割・入力・候補選びの補足</a:t>
+              <a:t>Appendix: 2. 入力の読み方と候補選び</a:t>
             </a:r>
           </a:p>
         </p:txBody>
@@ -32604,7 +28155,7 @@
                 <a:ea typeface="Noto Sans CJK JP"/>
                 <a:cs typeface="Noto Sans"/>
               </a:rPr>
-              <a:t>文章内の成語を空欄記号に置き換え、各空欄の七候補から、もとの成語を選ぶ。原論文版の例に加え、後にFewCLUEやCLEVAで使われた公開例も示す。</a:t>
+              <a:t>文章内の成語を空欄記号に置き換え、もとの成語を選ぶ。原論文版では、各空欄に七つの候補が付く。</a:t>
             </a:r>
           </a:p>
         </p:txBody>
@@ -32795,7 +28346,7 @@
                 <a:ea typeface="Noto Sans CJK JP"/>
                 <a:cs typeface="Noto Sans"/>
               </a:rPr>
-              <a:t>原行から、空欄ごとの正解位置を復元する</a:t>
+              <a:t>JSONLから文章・候補・正解の成語を読み出す</a:t>
             </a:r>
           </a:p>
         </p:txBody>
@@ -32843,7 +28394,7 @@
                 <a:ea typeface="Noto Sans CJK JP"/>
                 <a:cs typeface="Noto Sans"/>
               </a:rPr>
-              <a:t>Appendix: 2. 分割・入力・候補選びの補足</a:t>
+              <a:t>Appendix: 2. 入力の読み方と候補選び</a:t>
             </a:r>
           </a:p>
         </p:txBody>
@@ -32857,7 +28408,7 @@
         <p:spPr>
           <a:xfrm>
             <a:off x="548640" y="1508760"/>
-            <a:ext cx="8046720" cy="2092325"/>
+            <a:ext cx="8046720" cy="2093976"/>
           </a:xfrm>
           <a:prstGeom prst="rect">
             <a:avLst/>
@@ -32977,7 +28528,7 @@
                 <a:ea typeface="Noto Sans CJK JP"/>
                 <a:cs typeface="Liberation Mono"/>
               </a:rPr>
-              <a:t>    row = json.loads(f.readlines()[9275])</a:t>
+              <a:t>    example = json.loads(next(f))</a:t>
             </a:r>
           </a:p>
           <a:p>
@@ -33008,7 +28559,7 @@
                 <a:ea typeface="Noto Sans CJK JP"/>
                 <a:cs typeface="Liberation Mono"/>
               </a:rPr>
-              <a:t>positions = [choices.index(gold)</a:t>
+              <a:t>print(example["content"])</a:t>
             </a:r>
           </a:p>
           <a:p>
@@ -33039,7 +28590,7 @@
                 <a:ea typeface="Noto Sans CJK JP"/>
                 <a:cs typeface="Liberation Mono"/>
               </a:rPr>
-              <a:t>             for choices, gold in zip(row["candidates"],</a:t>
+              <a:t>for choices, gold in zip(example["candidates"],</a:t>
             </a:r>
           </a:p>
           <a:p>
@@ -33070,7 +28621,7 @@
                 <a:ea typeface="Noto Sans CJK JP"/>
                 <a:cs typeface="Liberation Mono"/>
               </a:rPr>
-              <a:t>                                      row["groundTruth"])]</a:t>
+              <a:t>                         example["groundTruth"]):</a:t>
             </a:r>
           </a:p>
           <a:p>
@@ -33101,7 +28652,7 @@
                 <a:ea typeface="Noto Sans CJK JP"/>
                 <a:cs typeface="Liberation Mono"/>
               </a:rPr>
-              <a:t>assert positions == [1]</a:t>
+              <a:t>    print("候補:", choices, "正解:", gold)</a:t>
             </a:r>
           </a:p>
         </p:txBody>
@@ -33114,8 +28665,8 @@
         </p:nvSpPr>
         <p:spPr>
           <a:xfrm>
-            <a:off x="594360" y="3853053"/>
-            <a:ext cx="7955279" cy="777240"/>
+            <a:off x="594360" y="3886200"/>
+            <a:ext cx="7955279" cy="640080"/>
           </a:xfrm>
           <a:prstGeom prst="rect">
             <a:avLst/>
@@ -33155,7 +28706,7 @@
                 <a:ea typeface="Noto Sans CJK JP"/>
                 <a:cs typeface="Noto Sans"/>
               </a:rPr>
-              <a:t>実例1の原版Dev 9,276行。位置1は0起算で、表示上のBに対応する。rawには問題IDの欄がない。</a:t>
+              <a:t>原論文版は1行に1文章のJSONを収める。candidatesとgroundTruthは、文章中の空欄の順に並ぶ。</a:t>
             </a:r>
           </a:p>
         </p:txBody>
@@ -33209,22 +28760,8 @@
                 <a:ea typeface="Noto Sans CJK JP"/>
                 <a:cs typeface="Noto Sans"/>
               </a:rPr>
-              <a:t>[1] Zheng, Huang &amp; Sun (2019). ChID: A Large-scale Chinese IDiom Dataset for Cloze Test. 作者が案内する原版配布。</a:t>
-            </a:r>
-          </a:p>
-          <a:p>
-            <a:pPr>
-              <a:lnSpc>
-                <a:spcPts val="940"/>
-              </a:lnSpc>
-              <a:buNone/>
-              <a:defRPr sz="810" b="0">
-                <a:solidFill>
-                  <a:srgbClr val="303437"/>
-                </a:solidFill>
-                <a:latin typeface="Noto Sans"/>
-              </a:defRPr>
-            </a:pPr>
+              <a:t>[1] Zheng, Huang &amp; Sun (2019). ChID — Original Data Distribution.  </a:t>
+            </a:r>
             <a:r>
               <a:rPr sz="810" b="0" lang="ja-JP" altLang="en-US">
                 <a:solidFill>
@@ -33233,9 +28770,9 @@
                 <a:latin typeface="Noto Sans"/>
                 <a:ea typeface="Noto Sans CJK JP"/>
                 <a:cs typeface="Noto Sans"/>
-                <a:hlinkClick r:id="rId2"/>
-              </a:rPr>
-              <a:t>https://huggingface.co/datasets/thu-coai/chid/tree/47ad8022d369233bea2f4a8112268f9a9a039a43/original</a:t>
+                <a:hlinkClick r:id="rId3"/>
+              </a:rPr>
+              <a:t>https://huggingface.co/datasets/thu-coai/chid/tree/main/original</a:t>
             </a:r>
           </a:p>
         </p:txBody>
@@ -33349,7 +28886,7 @@
                 <a:ea typeface="Noto Sans CJK JP"/>
                 <a:cs typeface="Noto Sans"/>
               </a:rPr>
-              <a:t>Appendix: 2. 分割・入力・候補選びの補足</a:t>
+              <a:t>Appendix: 2. 入力の読み方と候補選び</a:t>
             </a:r>
           </a:p>
         </p:txBody>
@@ -34072,7 +29609,7 @@
                 <a:ea typeface="Noto Sans CJK JP"/>
                 <a:cs typeface="Noto Sans"/>
               </a:rPr>
-              <a:t>0起算の番号と表示A〜Jを対応させる。公開テストの正解の有無も各配布で異なる。</a:t>
+              <a:t>候補の番号は0から始まる。原版は正解の成語そのものを、CLUEとFewCLUEは候補の番号を保存する。</a:t>
             </a:r>
           </a:p>
         </p:txBody>
@@ -34126,7 +29663,19 @@
                 <a:ea typeface="Noto Sans CJK JP"/>
                 <a:cs typeface="Noto Sans"/>
               </a:rPr>
-              <a:t>[1] Zheng, Huang &amp; Sun (2019). ChID: A Large-scale Chinese IDiom Dataset for Cloze Test. 作者が案内する原版配布。</a:t>
+              <a:t>[1] Zheng, Huang &amp; Sun (2019). ChID — Original Data Distribution.  </a:t>
+            </a:r>
+            <a:r>
+              <a:rPr sz="810" b="0" lang="ja-JP" altLang="en-US">
+                <a:solidFill>
+                  <a:srgbClr val="626669"/>
+                </a:solidFill>
+                <a:latin typeface="Noto Sans"/>
+                <a:ea typeface="Noto Sans CJK JP"/>
+                <a:cs typeface="Noto Sans"/>
+                <a:hlinkClick r:id="rId4"/>
+              </a:rPr>
+              <a:t>https://huggingface.co/datasets/thu-coai/chid/tree/main/original</a:t>
             </a:r>
           </a:p>
           <a:p>
@@ -34150,48 +29699,8 @@
                 <a:latin typeface="Noto Sans"/>
                 <a:ea typeface="Noto Sans CJK JP"/>
                 <a:cs typeface="Noto Sans"/>
-                <a:hlinkClick r:id="rId2"/>
-              </a:rPr>
-              <a:t>https://huggingface.co/datasets/thu-coai/chid/tree/47ad8022d369233bea2f4a8112268f9a9a039a43/original</a:t>
-            </a:r>
-          </a:p>
-          <a:p>
-            <a:pPr>
-              <a:lnSpc>
-                <a:spcPts val="940"/>
-              </a:lnSpc>
-              <a:spcAft>
-                <a:spcPts val="140"/>
-              </a:spcAft>
-              <a:buNone/>
-              <a:defRPr sz="810" b="0">
-                <a:solidFill>
-                  <a:srgbClr val="303437"/>
-                </a:solidFill>
-                <a:latin typeface="Noto Sans"/>
-              </a:defRPr>
-            </a:pPr>
-            <a:r>
-              <a:rPr sz="810" b="0" lang="ja-JP" altLang="en-US">
-                <a:solidFill>
-                  <a:srgbClr val="626669"/>
-                </a:solidFill>
-                <a:latin typeface="Noto Sans"/>
-                <a:ea typeface="Noto Sans CJK JP"/>
-                <a:cs typeface="Noto Sans"/>
-              </a:rPr>
-              <a:t>[2] CLUE team. ChID公式公開ZIP、原配布READMEのCLUE 1.0 / 1.1。</a:t>
-            </a:r>
-            <a:r>
-              <a:rPr sz="810" b="0" lang="ja-JP" altLang="en-US">
-                <a:solidFill>
-                  <a:srgbClr val="626669"/>
-                </a:solidFill>
-                <a:latin typeface="Noto Sans"/>
-                <a:ea typeface="Noto Sans CJK JP"/>
-                <a:cs typeface="Noto Sans"/>
-              </a:rPr>
-              <a:t>  </a:t>
+              </a:rPr>
+              <a:t>[2] CLUE team. ChID公式公開ZIP、原配布READMEのCLUE 1.0 / 1.1。  </a:t>
             </a:r>
             <a:r>
               <a:rPr sz="810" b="0" lang="ja-JP" altLang="en-US">
@@ -34445,7 +29954,7 @@
         <p:spPr>
           <a:xfrm>
             <a:off x="548640" y="1463040"/>
-            <a:ext cx="8046720" cy="1345819"/>
+            <a:ext cx="8046720" cy="1574419"/>
           </a:xfrm>
           <a:prstGeom prst="rect">
             <a:avLst/>
@@ -34664,7 +30173,7 @@
                 <a:ea typeface="Noto Sans CJK JP"/>
                 <a:cs typeface="Noto Sans"/>
               </a:rPr>
-              <a:t>Chujie Zheng, Minlie Huang, Aixin Sun · 公式リポジトリ · fixed 0836ebf72cbe7d2da832021b02ff08f627de885d</a:t>
+              <a:t>Chujie Zheng, Minlie Huang, Aixin Sun · 公式リポジトリ</a:t>
             </a:r>
           </a:p>
           <a:p>
@@ -34855,7 +30364,7 @@
         <p:spPr>
           <a:xfrm>
             <a:off x="548640" y="1463040"/>
-            <a:ext cx="8046720" cy="1345819"/>
+            <a:ext cx="8046720" cy="1574419"/>
           </a:xfrm>
           <a:prstGeom prst="rect">
             <a:avLst/>
@@ -34926,7 +30435,7 @@
                 <a:ea typeface="Noto Sans CJK JP"/>
                 <a:cs typeface="Noto Sans"/>
               </a:rPr>
-              <a:t>thu-coai · 作者が案内する配布 · fixed 47ad8022d369233bea2f4a8112268f9a9a039a43</a:t>
+              <a:t>thu-coai · 作者が案内する配布</a:t>
             </a:r>
           </a:p>
           <a:p>
@@ -34989,7 +30498,7 @@
                 <a:cs typeface="Noto Sans"/>
                 <a:hlinkClick r:id="rId2"/>
               </a:rPr>
-              <a:t>https://huggingface.co/datasets/thu-coai/chid/tree/47ad8022d369233bea2f4a8112268f9a9a039a43/original</a:t>
+              <a:t>https://huggingface.co/datasets/thu-coai/chid/tree/main/original</a:t>
             </a:r>
           </a:p>
         </p:txBody>
@@ -35137,7 +30646,7 @@
                 <a:cs typeface="Noto Sans"/>
                 <a:hlinkClick r:id="rId3"/>
               </a:rPr>
-              <a:t>https://github.com/chujiezheng/ChID-Dataset/blob/0836ebf72cbe7d2da832021b02ff08f627de885d/Competition/README.md</a:t>
+              <a:t>https://github.com/chujiezheng/ChID-Dataset/blob/master/Competition/README.md</a:t>
             </a:r>
           </a:p>
         </p:txBody>
@@ -35265,7 +30774,7 @@
         <p:spPr>
           <a:xfrm>
             <a:off x="548640" y="1463040"/>
-            <a:ext cx="8046720" cy="1345819"/>
+            <a:ext cx="8046720" cy="1574419"/>
           </a:xfrm>
           <a:prstGeom prst="rect">
             <a:avLst/>
@@ -35413,7 +30922,7 @@
         <p:spPr>
           <a:xfrm>
             <a:off x="548640" y="3040507"/>
-            <a:ext cx="8046720" cy="1345819"/>
+            <a:ext cx="8046720" cy="1574419"/>
           </a:xfrm>
           <a:prstGeom prst="rect">
             <a:avLst/>
@@ -35675,7 +31184,7 @@
         <p:spPr>
           <a:xfrm>
             <a:off x="548640" y="1463040"/>
-            <a:ext cx="8046720" cy="1345819"/>
+            <a:ext cx="8046720" cy="1574419"/>
           </a:xfrm>
           <a:prstGeom prst="rect">
             <a:avLst/>
@@ -35823,7 +31332,7 @@
         <p:spPr>
           <a:xfrm>
             <a:off x="548640" y="3040507"/>
-            <a:ext cx="8046720" cy="1345819"/>
+            <a:ext cx="8046720" cy="1574419"/>
           </a:xfrm>
           <a:prstGeom prst="rect">
             <a:avLst/>
@@ -35894,7 +31403,7 @@
                 <a:ea typeface="Noto Sans CJK JP"/>
                 <a:cs typeface="Noto Sans"/>
               </a:rPr>
-              <a:t>CLUE team · fixed 62a02c6f31cf32814cfe522f78ef088228840f8d</a:t>
+              <a:t>CLUE team</a:t>
             </a:r>
           </a:p>
           <a:p>
@@ -35957,7 +31466,7 @@
                 <a:cs typeface="Noto Sans"/>
                 <a:hlinkClick r:id="rId3"/>
               </a:rPr>
-              <a:t>https://github.com/CLUEbenchmark/FewCLUE/tree/62a02c6f31cf32814cfe522f78ef088228840f8d/datasets/chid</a:t>
+              <a:t>https://github.com/CLUEbenchmark/FewCLUE/tree/main/datasets/chid</a:t>
             </a:r>
           </a:p>
         </p:txBody>
@@ -36085,7 +31594,7 @@
         <p:spPr>
           <a:xfrm>
             <a:off x="548640" y="1463040"/>
-            <a:ext cx="8046720" cy="1345819"/>
+            <a:ext cx="8046720" cy="1574419"/>
           </a:xfrm>
           <a:prstGeom prst="rect">
             <a:avLst/>
@@ -36233,7 +31742,7 @@
         <p:spPr>
           <a:xfrm>
             <a:off x="548640" y="3040507"/>
-            <a:ext cx="8046720" cy="1345819"/>
+            <a:ext cx="8046720" cy="1574419"/>
           </a:xfrm>
           <a:prstGeom prst="rect">
             <a:avLst/>
@@ -36488,161 +31997,13 @@
       </p:sp>
       <p:sp>
         <p:nvSpPr>
-          <p:cNvPr id="4" name="文献 1: run_specs_cleva_v1.conf"/>
-          <p:cNvSpPr txBox="1"/>
-          <p:nvPr/>
-        </p:nvSpPr>
-        <p:spPr>
-          <a:xfrm>
-            <a:off x="548640" y="1463040"/>
-            <a:ext cx="8046720" cy="1092454"/>
-          </a:xfrm>
-          <a:prstGeom prst="rect">
-            <a:avLst/>
-          </a:prstGeom>
-          <a:noFill/>
-        </p:spPr>
-        <p:txBody>
-          <a:bodyPr wrap="square" lIns="0" rIns="0" tIns="0" bIns="0">
-            <a:noAutofit/>
-          </a:bodyPr>
-          <a:lstStyle/>
-          <a:p>
-            <a:pPr algn="l">
-              <a:lnSpc>
-                <a:spcPct val="114000"/>
-              </a:lnSpc>
-              <a:spcBef>
-                <a:spcPts val="0"/>
-              </a:spcBef>
-              <a:spcAft>
-                <a:spcPts val="400"/>
-              </a:spcAft>
-              <a:buNone/>
-              <a:defRPr sz="1850" b="0">
-                <a:solidFill>
-                  <a:srgbClr val="303437"/>
-                </a:solidFill>
-                <a:latin typeface="Noto Sans"/>
-              </a:defRPr>
-            </a:pPr>
-            <a:r>
-              <a:rPr sz="1850" b="1" lang="ja-JP" altLang="en-US">
-                <a:solidFill>
-                  <a:srgbClr val="303437"/>
-                </a:solidFill>
-                <a:latin typeface="Noto Sans"/>
-                <a:ea typeface="Noto Sans CJK JP"/>
-                <a:cs typeface="Noto Sans"/>
-              </a:rPr>
-              <a:t>run_specs_cleva_v1.conf</a:t>
-            </a:r>
-          </a:p>
-          <a:p>
-            <a:pPr algn="l">
-              <a:lnSpc>
-                <a:spcPct val="114000"/>
-              </a:lnSpc>
-              <a:spcBef>
-                <a:spcPts val="0"/>
-              </a:spcBef>
-              <a:spcAft>
-                <a:spcPts val="500"/>
-              </a:spcAft>
-              <a:buNone/>
-              <a:defRPr sz="1250" b="0">
-                <a:solidFill>
-                  <a:srgbClr val="303437"/>
-                </a:solidFill>
-                <a:latin typeface="Noto Sans"/>
-              </a:defRPr>
-            </a:pPr>
-            <a:r>
-              <a:rPr sz="1250" b="0" lang="ja-JP" altLang="en-US">
-                <a:solidFill>
-                  <a:srgbClr val="626669"/>
-                </a:solidFill>
-                <a:latin typeface="Noto Sans"/>
-                <a:ea typeface="Noto Sans CJK JP"/>
-                <a:cs typeface="Noto Sans"/>
-              </a:rPr>
-              <a:t>Stanford CRFM · HELM v0.4.0 · CLEVA設定</a:t>
-            </a:r>
-          </a:p>
-          <a:p>
-            <a:pPr algn="l">
-              <a:lnSpc>
-                <a:spcPct val="114000"/>
-              </a:lnSpc>
-              <a:spcBef>
-                <a:spcPts val="0"/>
-              </a:spcBef>
-              <a:spcAft>
-                <a:spcPts val="400"/>
-              </a:spcAft>
-              <a:buNone/>
-              <a:defRPr sz="1750" b="0">
-                <a:solidFill>
-                  <a:srgbClr val="303437"/>
-                </a:solidFill>
-                <a:latin typeface="Noto Sans"/>
-              </a:defRPr>
-            </a:pPr>
-            <a:r>
-              <a:rPr sz="1750" b="0" lang="ja-JP" altLang="en-US">
-                <a:solidFill>
-                  <a:srgbClr val="303437"/>
-                </a:solidFill>
-                <a:latin typeface="Noto Sans"/>
-                <a:ea typeface="Noto Sans CJK JP"/>
-                <a:cs typeface="Noto Sans"/>
-              </a:rPr>
-              <a:t>cultural_knowledge / idiomに対し、0〜5の六つのprompt IDを登録する。</a:t>
-            </a:r>
-          </a:p>
-          <a:p>
-            <a:pPr algn="l">
-              <a:lnSpc>
-                <a:spcPct val="114000"/>
-              </a:lnSpc>
-              <a:spcBef>
-                <a:spcPts val="0"/>
-              </a:spcBef>
-              <a:spcAft>
-                <a:spcPts val="0"/>
-              </a:spcAft>
-              <a:buNone/>
-              <a:defRPr sz="1050" b="0">
-                <a:solidFill>
-                  <a:srgbClr val="303437"/>
-                </a:solidFill>
-                <a:latin typeface="Noto Sans"/>
-              </a:defRPr>
-            </a:pPr>
-            <a:r>
-              <a:rPr sz="1050" b="0" lang="ja-JP" altLang="en-US">
-                <a:solidFill>
-                  <a:srgbClr val="626669"/>
-                </a:solidFill>
-                <a:latin typeface="Noto Sans"/>
-                <a:ea typeface="Noto Sans CJK JP"/>
-                <a:cs typeface="Noto Sans"/>
-                <a:hlinkClick r:id="rId2"/>
-              </a:rPr>
-              <a:t>https://github.com/stanford-crfm/helm/blob/v0.4.0/src/helm/benchmark/presentation/run_specs_cleva_v1.conf</a:t>
-            </a:r>
-          </a:p>
-        </p:txBody>
-      </p:sp>
-      <p:sp>
-        <p:nvSpPr>
           <p:cNvPr id="5" name="文献 2: Apache License, Version 2.0"/>
           <p:cNvSpPr txBox="1"/>
           <p:nvPr/>
         </p:nvSpPr>
         <p:spPr>
           <a:xfrm>
-            <a:off x="548640" y="2787142"/>
+            <a:off x="548640" y="1508760"/>
             <a:ext cx="8046720" cy="1345819"/>
           </a:xfrm>
           <a:prstGeom prst="rect">
@@ -36714,7 +32075,7 @@
                 <a:ea typeface="Noto Sans CJK JP"/>
                 <a:cs typeface="Noto Sans"/>
               </a:rPr>
-              <a:t>ChID-Dataset · 固定リポジトリのLICENSE</a:t>
+              <a:t>ChID-Dataset · LICENSE</a:t>
             </a:r>
           </a:p>
           <a:p>
@@ -36745,7 +32106,7 @@
                 <a:ea typeface="Noto Sans CJK JP"/>
                 <a:cs typeface="Noto Sans"/>
               </a:rPr>
-              <a:t>リポジトリに含まれる利用許諾条件。素材となったニュース・文学文章の出所と、引用する配布版も区別する。</a:t>
+              <a:t>リポジトリの利用許諾条件を示す。</a:t>
             </a:r>
           </a:p>
           <a:p>
@@ -36777,7 +32138,7 @@
                 <a:cs typeface="Noto Sans"/>
                 <a:hlinkClick r:id="rId3"/>
               </a:rPr>
-              <a:t>https://github.com/chujiezheng/ChID-Dataset/blob/0836ebf72cbe7d2da832021b02ff08f627de885d/LICENSE</a:t>
+              <a:t>https://github.com/chujiezheng/ChID-Dataset/blob/master/LICENSE</a:t>
             </a:r>
           </a:p>
         </p:txBody>
@@ -37407,22 +32768,8 @@
                 <a:ea typeface="Noto Sans CJK JP"/>
                 <a:cs typeface="Noto Sans"/>
               </a:rPr>
-              <a:t>[1] Zheng, Huang &amp; Sun (2019). ChID: A Large-scale Chinese IDiom Dataset for Cloze Test. 作者が案内する原版配布。 dev_data.txt:9276行</a:t>
-            </a:r>
-          </a:p>
-          <a:p>
-            <a:pPr>
-              <a:lnSpc>
-                <a:spcPts val="940"/>
-              </a:lnSpc>
-              <a:buNone/>
-              <a:defRPr sz="810" b="0">
-                <a:solidFill>
-                  <a:srgbClr val="303437"/>
-                </a:solidFill>
-                <a:latin typeface="Noto Sans"/>
-              </a:defRPr>
-            </a:pPr>
+              <a:t>[1] Zheng, Huang &amp; Sun (2019). ChID — Original Data Distribution.  </a:t>
+            </a:r>
             <a:r>
               <a:rPr sz="810" b="0" lang="ja-JP" altLang="en-US">
                 <a:solidFill>
@@ -37431,9 +32778,9 @@
                 <a:latin typeface="Noto Sans"/>
                 <a:ea typeface="Noto Sans CJK JP"/>
                 <a:cs typeface="Noto Sans"/>
-                <a:hlinkClick r:id="rId2"/>
-              </a:rPr>
-              <a:t>https://huggingface.co/datasets/thu-coai/chid/tree/47ad8022d369233bea2f4a8112268f9a9a039a43/original</a:t>
+                <a:hlinkClick r:id="rId3"/>
+              </a:rPr>
+              <a:t>https://huggingface.co/datasets/thu-coai/chid/tree/main/original</a:t>
             </a:r>
           </a:p>
         </p:txBody>
@@ -38063,22 +33410,8 @@
                 <a:ea typeface="Noto Sans CJK JP"/>
                 <a:cs typeface="Noto Sans"/>
               </a:rPr>
-              <a:t>[1] CLUE team. FewCLUE / ChID、固定commit 62a02c6f31cf32814cfe522f78ef088228840f8d。 train_2.json:20行</a:t>
-            </a:r>
-          </a:p>
-          <a:p>
-            <a:pPr>
-              <a:lnSpc>
-                <a:spcPts val="940"/>
-              </a:lnSpc>
-              <a:buNone/>
-              <a:defRPr sz="810" b="0">
-                <a:solidFill>
-                  <a:srgbClr val="303437"/>
-                </a:solidFill>
-                <a:latin typeface="Noto Sans"/>
-              </a:defRPr>
-            </a:pPr>
+              <a:t>[1] CLUE team (2021). FewCLUE — ChID.  </a:t>
+            </a:r>
             <a:r>
               <a:rPr sz="810" b="0" lang="ja-JP" altLang="en-US">
                 <a:solidFill>
@@ -38087,9 +33420,9 @@
                 <a:latin typeface="Noto Sans"/>
                 <a:ea typeface="Noto Sans CJK JP"/>
                 <a:cs typeface="Noto Sans"/>
-                <a:hlinkClick r:id="rId2"/>
-              </a:rPr>
-              <a:t>https://github.com/CLUEbenchmark/FewCLUE/tree/62a02c6f31cf32814cfe522f78ef088228840f8d/datasets/chid</a:t>
+                <a:hlinkClick r:id="rId3"/>
+              </a:rPr>
+              <a:t>https://github.com/CLUEbenchmark/FewCLUE/tree/main/datasets/chid</a:t>
             </a:r>
           </a:p>
         </p:txBody>
@@ -38719,22 +34052,8 @@
                 <a:ea typeface="Noto Sans CJK JP"/>
                 <a:cs typeface="Noto Sans"/>
               </a:rPr>
-              <a:t>[1] CLUE team. FewCLUE / ChID、固定commit 62a02c6f31cf32814cfe522f78ef088228840f8d。 train_3.json:21行</a:t>
-            </a:r>
-          </a:p>
-          <a:p>
-            <a:pPr>
-              <a:lnSpc>
-                <a:spcPts val="940"/>
-              </a:lnSpc>
-              <a:buNone/>
-              <a:defRPr sz="810" b="0">
-                <a:solidFill>
-                  <a:srgbClr val="303437"/>
-                </a:solidFill>
-                <a:latin typeface="Noto Sans"/>
-              </a:defRPr>
-            </a:pPr>
+              <a:t>[1] CLUE team (2021). FewCLUE — ChID.  </a:t>
+            </a:r>
             <a:r>
               <a:rPr sz="810" b="0" lang="ja-JP" altLang="en-US">
                 <a:solidFill>
@@ -38743,9 +34062,9 @@
                 <a:latin typeface="Noto Sans"/>
                 <a:ea typeface="Noto Sans CJK JP"/>
                 <a:cs typeface="Noto Sans"/>
-                <a:hlinkClick r:id="rId2"/>
-              </a:rPr>
-              <a:t>https://github.com/CLUEbenchmark/FewCLUE/tree/62a02c6f31cf32814cfe522f78ef088228840f8d/datasets/chid</a:t>
+                <a:hlinkClick r:id="rId3"/>
+              </a:rPr>
+              <a:t>https://github.com/CLUEbenchmark/FewCLUE/tree/main/datasets/chid</a:t>
             </a:r>
           </a:p>
         </p:txBody>

--- a/slides/datasets-in-10-minutes-chid.pptx
+++ b/slides/datasets-in-10-minutes-chid.pptx
@@ -30,7 +30,6 @@
     <p:sldId id="279" r:id="rId29"/>
     <p:sldId id="280" r:id="rId30"/>
     <p:sldId id="281" r:id="rId31"/>
-    <p:sldId id="282" r:id="rId32"/>
     <p:sldId id="284" r:id="rId34"/>
     <p:sldId id="285" r:id="rId35"/>
     <p:sldId id="286" r:id="rId36"/>
@@ -57,7 +56,6 @@
     <p:sldId id="309" r:id="rId59"/>
     <p:sldId id="310" r:id="rId60"/>
     <p:sldId id="311" r:id="rId61"/>
-    <p:sldId id="312" r:id="rId62"/>
     <p:sldId id="313" r:id="rId63"/>
   </p:sldIdLst>
   <p:sldSz cx="9144000" cy="5143500" type="screen16x9"/>
@@ -13664,7 +13662,7 @@
 </p:sld>
 </file>
 
-<file path=ppt/slides/slide23.xml><?xml version="1.0" encoding="utf-8"?>
+<file path=ppt/slides/slide22.xml><?xml version="1.0" encoding="utf-8"?>
 <p:sld xmlns:a="http://schemas.openxmlformats.org/drawingml/2006/main" xmlns:p="http://schemas.openxmlformats.org/presentationml/2006/main" xmlns:r="http://schemas.openxmlformats.org/officeDocument/2006/relationships">
   <p:cSld>
     <p:spTree>
@@ -13717,7 +13715,7 @@
                 <a:ea typeface="Noto Sans CJK JP"/>
                 <a:cs typeface="Noto Sans"/>
               </a:rPr>
-              <a:t>配布形式の違いとCLEVAでの利用</a:t>
+              <a:t>配布形式の違いと入手</a:t>
             </a:r>
           </a:p>
         </p:txBody>
@@ -13765,7 +13763,7 @@
                 <a:ea typeface="Noto Sans CJK JP"/>
                 <a:cs typeface="Noto Sans"/>
               </a:rPr>
-              <a:t>4. 配布形式の違いとCLEVAでの利用</a:t>
+              <a:t>4. 配布形式の違いと入手</a:t>
             </a:r>
           </a:p>
         </p:txBody>
@@ -13778,7 +13776,7 @@
 </p:sld>
 </file>
 
-<file path=ppt/slides/slide24.xml><?xml version="1.0" encoding="utf-8"?>
+<file path=ppt/slides/slide23.xml><?xml version="1.0" encoding="utf-8"?>
 <p:sld xmlns:a="http://schemas.openxmlformats.org/drawingml/2006/main" xmlns:p="http://schemas.openxmlformats.org/presentationml/2006/main" xmlns:r="http://schemas.openxmlformats.org/officeDocument/2006/relationships">
   <p:cSld>
     <p:spTree>
@@ -13879,7 +13877,7 @@
                 <a:ea typeface="Noto Sans CJK JP"/>
                 <a:cs typeface="Noto Sans"/>
               </a:rPr>
-              <a:t>4. 配布形式の違いとCLEVAでの利用</a:t>
+              <a:t>4. 配布形式の違いと入手</a:t>
             </a:r>
           </a:p>
         </p:txBody>
@@ -14271,108 +14269,6 @@
                     <a:lnT w="7620">
                       <a:noFill/>
                     </a:lnT>
-                    <a:lnB w="7620">
-                      <a:noFill/>
-                    </a:lnB>
-                    <a:solidFill>
-                      <a:srgbClr val="FFFEF8"/>
-                    </a:solidFill>
-                  </a:tcPr>
-                </a:tc>
-                <a:tc>
-                  <a:txBody>
-                    <a:bodyPr wrap="square">
-                      <a:noAutofit/>
-                    </a:bodyPr>
-                    <a:lstStyle/>
-                    <a:p>
-                      <a:pPr algn="l">
-                        <a:lnSpc>
-                          <a:spcPts val="2070"/>
-                        </a:lnSpc>
-                        <a:buNone/>
-                        <a:defRPr sz="1800" b="0">
-                          <a:solidFill>
-                            <a:srgbClr val="303437"/>
-                          </a:solidFill>
-                          <a:latin typeface="Noto Sans"/>
-                        </a:defRPr>
-                      </a:pPr>
-                      <a:r>
-                        <a:rPr sz="1800" b="0" lang="ja-JP" altLang="en-US">
-                          <a:solidFill>
-                            <a:srgbClr val="303437"/>
-                          </a:solidFill>
-                          <a:latin typeface="Noto Sans"/>
-                          <a:ea typeface="Noto Sans CJK JP"/>
-                          <a:cs typeface="Noto Sans"/>
-                        </a:rPr>
-                        <a:t>一つの空欄と七候補、少数例学習</a:t>
-                      </a:r>
-                    </a:p>
-                  </a:txBody>
-                  <a:tcPr marL="63500" marR="63500" marT="38100" marB="38100" anchor="ctr">
-                    <a:lnL w="7620">
-                      <a:noFill/>
-                    </a:lnL>
-                    <a:lnR w="7620">
-                      <a:noFill/>
-                    </a:lnR>
-                    <a:lnT w="7620">
-                      <a:noFill/>
-                    </a:lnT>
-                    <a:lnB w="7620">
-                      <a:noFill/>
-                    </a:lnB>
-                    <a:solidFill>
-                      <a:srgbClr val="FFFEF8"/>
-                    </a:solidFill>
-                  </a:tcPr>
-                </a:tc>
-              </a:tr>
-              <a:tr h="384048">
-                <a:tc>
-                  <a:txBody>
-                    <a:bodyPr wrap="square">
-                      <a:noAutofit/>
-                    </a:bodyPr>
-                    <a:lstStyle/>
-                    <a:p>
-                      <a:pPr algn="l">
-                        <a:lnSpc>
-                          <a:spcPts val="2070"/>
-                        </a:lnSpc>
-                        <a:buNone/>
-                        <a:defRPr sz="1800" b="0">
-                          <a:solidFill>
-                            <a:srgbClr val="303437"/>
-                          </a:solidFill>
-                          <a:latin typeface="Noto Sans"/>
-                        </a:defRPr>
-                      </a:pPr>
-                      <a:r>
-                        <a:rPr sz="1800" b="0" lang="ja-JP" altLang="en-US">
-                          <a:solidFill>
-                            <a:srgbClr val="303437"/>
-                          </a:solidFill>
-                          <a:latin typeface="Noto Sans"/>
-                          <a:ea typeface="Noto Sans CJK JP"/>
-                          <a:cs typeface="Noto Sans"/>
-                        </a:rPr>
-                        <a:t>CLEVAの公開紙面</a:t>
-                      </a:r>
-                    </a:p>
-                  </a:txBody>
-                  <a:tcPr marL="63500" marR="63500" marT="38100" marB="38100" anchor="ctr">
-                    <a:lnL w="7620">
-                      <a:noFill/>
-                    </a:lnL>
-                    <a:lnR w="7620">
-                      <a:noFill/>
-                    </a:lnR>
-                    <a:lnT w="7620">
-                      <a:noFill/>
-                    </a:lnT>
                     <a:lnB w="15240">
                       <a:solidFill>
                         <a:srgbClr val="626669"/>
@@ -14412,7 +14308,7 @@
                           <a:ea typeface="Noto Sans CJK JP"/>
                           <a:cs typeface="Noto Sans"/>
                         </a:rPr>
-                        <a:t>文化知識の成語問題、掲載例では三候補</a:t>
+                        <a:t>一つの空欄と七候補、少数例学習</a:t>
                       </a:r>
                     </a:p>
                   </a:txBody>
@@ -14506,43 +14402,6 @@
               <a:t>https://github.com/chujiezheng/ChID-Dataset/blob/master/Competition/README.md</a:t>
             </a:r>
           </a:p>
-          <a:p>
-            <a:pPr>
-              <a:lnSpc>
-                <a:spcPts val="940"/>
-              </a:lnSpc>
-              <a:buNone/>
-              <a:defRPr sz="810" b="0">
-                <a:solidFill>
-                  <a:srgbClr val="303437"/>
-                </a:solidFill>
-                <a:latin typeface="Noto Sans"/>
-              </a:defRPr>
-            </a:pPr>
-            <a:r>
-              <a:rPr sz="810" b="0" lang="ja-JP" altLang="en-US">
-                <a:solidFill>
-                  <a:srgbClr val="626669"/>
-                </a:solidFill>
-                <a:latin typeface="Noto Sans"/>
-                <a:ea typeface="Noto Sans CJK JP"/>
-                <a:cs typeface="Noto Sans"/>
-              </a:rPr>
-              <a:t>[2] Li et al. (2023). CLEVA: Chinese Language Models EVAluation Platform. EMNLP: System Demonstrations.  </a:t>
-            </a:r>
-            <a:r>
-              <a:rPr sz="810" b="0" lang="ja-JP" altLang="en-US">
-                <a:solidFill>
-                  <a:srgbClr val="626669"/>
-                </a:solidFill>
-                <a:latin typeface="Noto Sans"/>
-                <a:ea typeface="Noto Sans CJK JP"/>
-                <a:cs typeface="Noto Sans"/>
-                <a:hlinkClick r:id="rId3"/>
-              </a:rPr>
-              <a:t>https://aclanthology.org/2023.emnlp-demo.17/</a:t>
-            </a:r>
-          </a:p>
         </p:txBody>
       </p:sp>
     </p:spTree>
@@ -14553,7 +14412,7 @@
 </p:sld>
 </file>
 
-<file path=ppt/slides/slide25.xml><?xml version="1.0" encoding="utf-8"?>
+<file path=ppt/slides/slide24.xml><?xml version="1.0" encoding="utf-8"?>
 <p:sld xmlns:a="http://schemas.openxmlformats.org/drawingml/2006/main" xmlns:p="http://schemas.openxmlformats.org/presentationml/2006/main" xmlns:r="http://schemas.openxmlformats.org/officeDocument/2006/relationships">
   <p:cSld>
     <p:spTree>
@@ -14654,7 +14513,7 @@
                 <a:ea typeface="Noto Sans CJK JP"/>
                 <a:cs typeface="Noto Sans"/>
               </a:rPr>
-              <a:t>4. 配布形式の違いとCLEVAでの利用</a:t>
+              <a:t>4. 配布形式の違いと入手</a:t>
             </a:r>
           </a:p>
         </p:txBody>
@@ -15882,7 +15741,7 @@
 </p:sld>
 </file>
 
-<file path=ppt/slides/slide26.xml><?xml version="1.0" encoding="utf-8"?>
+<file path=ppt/slides/slide25.xml><?xml version="1.0" encoding="utf-8"?>
 <p:sld xmlns:a="http://schemas.openxmlformats.org/drawingml/2006/main" xmlns:p="http://schemas.openxmlformats.org/presentationml/2006/main" xmlns:r="http://schemas.openxmlformats.org/officeDocument/2006/relationships">
   <p:cSld>
     <p:spTree>
@@ -15983,7 +15842,7 @@
                 <a:ea typeface="Noto Sans CJK JP"/>
                 <a:cs typeface="Noto Sans"/>
               </a:rPr>
-              <a:t>4. 配布形式の違いとCLEVAでの利用</a:t>
+              <a:t>4. 配布形式の違いと入手</a:t>
             </a:r>
           </a:p>
         </p:txBody>
@@ -17030,7 +16889,7 @@
                 <a:ea typeface="Noto Sans CJK JP"/>
                 <a:cs typeface="Noto Sans"/>
               </a:rPr>
-              <a:t>CLEVAは、成語の穴埋めで文化知識を評価する</a:t>
+              <a:t>公式配布を入手し、ChID論文を引用して利用する</a:t>
             </a:r>
           </a:p>
         </p:txBody>
@@ -17083,7 +16942,7 @@
                 <a:ea typeface="Noto Sans CJK JP"/>
                 <a:cs typeface="Noto Sans"/>
               </a:rPr>
-              <a:t>CLEVAは、中国語モデルの文化知識を調べる課題として、ChIDの成語の穴埋めを用いる。公開論文の例は実例2と同じ文章で、「足智多谋」「语无伦次」「绣花枕头」の三候補から正解Aを選ぶ。</a:t>
+              <a:t>作者の公式GitHubは、原論文版とコンテスト版の配布を案内し、利用時にChID論文の引用を求める。リポジトリのライセンスはApache License 2.0。</a:t>
             </a:r>
           </a:p>
           <a:p>
@@ -17113,37 +16972,7 @@
                 <a:ea typeface="Noto Sans CJK JP"/>
                 <a:cs typeface="Noto Sans"/>
               </a:rPr>
-              <a:t>HELMにも同課題の実装があり、実例3の映画の文章を七候補で示している。いずれの例もFewCLUEの公開問題に含まれる。</a:t>
-            </a:r>
-          </a:p>
-          <a:p>
-            <a:pPr marL="457200" indent="-355600">
-              <a:lnSpc>
-                <a:spcPts val="2379"/>
-              </a:lnSpc>
-              <a:spcAft>
-                <a:spcPts val="0"/>
-              </a:spcAft>
-              <a:buSzPct val="66500"/>
-              <a:buFont typeface="Noto Sans CJK JP"/>
-              <a:buChar char="●"/>
-              <a:defRPr sz="2000" b="0">
-                <a:solidFill>
-                  <a:srgbClr val="303437"/>
-                </a:solidFill>
-                <a:latin typeface="Noto Sans"/>
-              </a:defRPr>
-            </a:pPr>
-            <a:r>
-              <a:rPr sz="2000" b="0" lang="ja-JP" altLang="en-US">
-                <a:solidFill>
-                  <a:srgbClr val="303437"/>
-                </a:solidFill>
-                <a:latin typeface="Noto Sans"/>
-                <a:ea typeface="Noto Sans CJK JP"/>
-                <a:cs typeface="Noto Sans"/>
-              </a:rPr>
-              <a:t>CLEVAで評価に使った問題の総数は、公開説明には記されていない。</a:t>
+              <a:t>素材にはニュースや文学作品が含まれる。元文章の権利や引用条件は、作品・配布元の情報を確認する。</a:t>
             </a:r>
           </a:p>
         </p:txBody>
@@ -17191,7 +17020,7 @@
                 <a:ea typeface="Noto Sans CJK JP"/>
                 <a:cs typeface="Noto Sans"/>
               </a:rPr>
-              <a:t>4. 配布形式の違いとCLEVAでの利用</a:t>
+              <a:t>4. 配布形式の違いと入手</a:t>
             </a:r>
           </a:p>
         </p:txBody>
@@ -17245,7 +17074,7 @@
                 <a:ea typeface="Noto Sans CJK JP"/>
                 <a:cs typeface="Noto Sans"/>
               </a:rPr>
-              <a:t>[1] Li et al. (2023). CLEVA: Chinese Language Models EVAluation Platform. EMNLP: System Demonstrations.</a:t>
+              <a:t>[1] Zheng, Huang &amp; Sun (2019). ChID-Dataset.  </a:t>
             </a:r>
             <a:r>
               <a:rPr sz="810" b="0" lang="ja-JP" altLang="en-US">
@@ -17255,9 +17084,24 @@
                 <a:latin typeface="Noto Sans"/>
                 <a:ea typeface="Noto Sans CJK JP"/>
                 <a:cs typeface="Noto Sans"/>
-              </a:rPr>
-              <a:t>  </a:t>
-            </a:r>
+                <a:hlinkClick r:id="rId2"/>
+              </a:rPr>
+              <a:t>https://github.com/chujiezheng/ChID-Dataset</a:t>
+            </a:r>
+          </a:p>
+          <a:p>
+            <a:pPr>
+              <a:lnSpc>
+                <a:spcPts val="940"/>
+              </a:lnSpc>
+              <a:buNone/>
+              <a:defRPr sz="810" b="0">
+                <a:solidFill>
+                  <a:srgbClr val="303437"/>
+                </a:solidFill>
+                <a:latin typeface="Noto Sans"/>
+              </a:defRPr>
+            </a:pPr>
             <a:r>
               <a:rPr sz="810" b="0" lang="ja-JP" altLang="en-US">
                 <a:solidFill>
@@ -17266,63 +17110,283 @@
                 <a:latin typeface="Noto Sans"/>
                 <a:ea typeface="Noto Sans CJK JP"/>
                 <a:cs typeface="Noto Sans"/>
+              </a:rPr>
+              <a:t>[2] ChID-Dataset. Apache License 2.0.  </a:t>
+            </a:r>
+            <a:r>
+              <a:rPr sz="810" b="0" lang="ja-JP" altLang="en-US">
+                <a:solidFill>
+                  <a:srgbClr val="626669"/>
+                </a:solidFill>
+                <a:latin typeface="Noto Sans"/>
+                <a:ea typeface="Noto Sans CJK JP"/>
+                <a:cs typeface="Noto Sans"/>
+                <a:hlinkClick r:id="rId4"/>
+              </a:rPr>
+              <a:t>https://github.com/chujiezheng/ChID-Dataset/blob/master/LICENSE</a:t>
+            </a:r>
+          </a:p>
+        </p:txBody>
+      </p:sp>
+    </p:spTree>
+  </p:cSld>
+  <p:clrMapOvr>
+    <a:masterClrMapping/>
+  </p:clrMapOvr>
+</p:sld>
+</file>
+
+<file path=ppt/slides/slide28.xml><?xml version="1.0" encoding="utf-8"?>
+<p:sld xmlns:a="http://schemas.openxmlformats.org/drawingml/2006/main" xmlns:p="http://schemas.openxmlformats.org/presentationml/2006/main" xmlns:r="http://schemas.openxmlformats.org/officeDocument/2006/relationships">
+  <p:cSld>
+    <p:spTree>
+      <p:nvGrpSpPr>
+        <p:cNvPr id="1" name=""/>
+        <p:cNvGrpSpPr/>
+        <p:nvPr/>
+      </p:nvGrpSpPr>
+      <p:grpSpPr/>
+      <p:sp>
+        <p:nvSpPr>
+          <p:cNvPr id="2" name="Title 1"/>
+          <p:cNvSpPr>
+            <a:spLocks noGrp="1"/>
+          </p:cNvSpPr>
+          <p:nvPr>
+            <p:ph type="title"/>
+          </p:nvPr>
+        </p:nvSpPr>
+        <p:spPr>
+          <a:xfrm>
+            <a:off x="468172" y="650138"/>
+            <a:ext cx="8206740" cy="616305"/>
+          </a:xfrm>
+        </p:spPr>
+        <p:txBody>
+          <a:bodyPr wrap="square" lIns="0" rIns="0" tIns="0" bIns="0">
+            <a:noAutofit/>
+          </a:bodyPr>
+          <a:lstStyle/>
+          <a:p>
+            <a:pPr algn="l">
+              <a:lnSpc>
+                <a:spcPct val="110000"/>
+              </a:lnSpc>
+              <a:buNone/>
+              <a:defRPr sz="2800" b="0">
+                <a:solidFill>
+                  <a:srgbClr val="303437"/>
+                </a:solidFill>
+                <a:latin typeface="Noto Sans"/>
+              </a:defRPr>
+            </a:pPr>
+            <a:r>
+              <a:rPr sz="2800" b="1" lang="ja-JP" altLang="en-US">
+                <a:solidFill>
+                  <a:srgbClr val="303437"/>
+                </a:solidFill>
+                <a:latin typeface="Noto Sans"/>
+                <a:ea typeface="Noto Sans CJK JP"/>
+                <a:cs typeface="Noto Sans"/>
+              </a:rPr>
+              <a:t>まとめ：文脈に合う成語を選ぶ</a:t>
+            </a:r>
+          </a:p>
+        </p:txBody>
+      </p:sp>
+      <p:sp>
+        <p:nvSpPr>
+          <p:cNvPr id="3" name="Text Placeholder 2"/>
+          <p:cNvSpPr>
+            <a:spLocks noGrp="1"/>
+          </p:cNvSpPr>
+          <p:nvPr>
+            <p:ph type="body" idx="1"/>
+          </p:nvPr>
+        </p:nvSpPr>
+        <p:spPr>
+          <a:xfrm>
+            <a:off x="594360" y="1463040"/>
+            <a:ext cx="7955279" cy="3044952"/>
+          </a:xfrm>
+        </p:spPr>
+        <p:txBody>
+          <a:bodyPr wrap="square" tIns="91440" bIns="91440">
+            <a:noAutofit/>
+          </a:bodyPr>
+          <a:lstStyle/>
+          <a:p>
+            <a:pPr marL="457200" indent="-355600">
+              <a:lnSpc>
+                <a:spcPts val="2379"/>
+              </a:lnSpc>
+              <a:spcAft>
+                <a:spcPts val="700"/>
+              </a:spcAft>
+              <a:buSzPct val="66500"/>
+              <a:buFont typeface="Noto Sans CJK JP"/>
+              <a:buChar char="●"/>
+              <a:defRPr sz="2000" b="0">
+                <a:solidFill>
+                  <a:srgbClr val="303437"/>
+                </a:solidFill>
+                <a:latin typeface="Noto Sans"/>
+              </a:defRPr>
+            </a:pPr>
+            <a:r>
+              <a:rPr sz="2000" b="0" lang="ja-JP" altLang="en-US">
+                <a:solidFill>
+                  <a:srgbClr val="303437"/>
+                </a:solidFill>
+                <a:latin typeface="Noto Sans"/>
+                <a:ea typeface="Noto Sans CJK JP"/>
+                <a:cs typeface="Noto Sans"/>
+              </a:rPr>
+              <a:t>ChID原論文版は580,807文章・728,713空欄で、正解に似た候補を含む七択を作る。成語全体の意味と、類義語の使い分けを測る読解課題。</a:t>
+            </a:r>
+          </a:p>
+          <a:p>
+            <a:pPr marL="457200" indent="-355600">
+              <a:lnSpc>
+                <a:spcPts val="2379"/>
+              </a:lnSpc>
+              <a:spcAft>
+                <a:spcPts val="0"/>
+              </a:spcAft>
+              <a:buSzPct val="66500"/>
+              <a:buFont typeface="Noto Sans CJK JP"/>
+              <a:buChar char="●"/>
+              <a:defRPr sz="2000" b="0">
+                <a:solidFill>
+                  <a:srgbClr val="303437"/>
+                </a:solidFill>
+                <a:latin typeface="Noto Sans"/>
+              </a:defRPr>
+            </a:pPr>
+            <a:r>
+              <a:rPr sz="2000" b="0" lang="ja-JP" altLang="en-US">
+                <a:solidFill>
+                  <a:srgbClr val="303437"/>
+                </a:solidFill>
+                <a:latin typeface="Noto Sans"/>
+                <a:ea typeface="Noto Sans CJK JP"/>
+                <a:cs typeface="Noto Sans"/>
+              </a:rPr>
+              <a:t>2019年のARの正解率はTestで72.4%、似た候補が中心のSimで66.2%。十候補を共有するCLUE版や、少数例学習のFewCLUE版も公開されている。</a:t>
+            </a:r>
+          </a:p>
+        </p:txBody>
+      </p:sp>
+      <p:sp>
+        <p:nvSpPr>
+          <p:cNvPr id="4" name="Title 3"/>
+          <p:cNvSpPr>
+            <a:spLocks noGrp="1"/>
+          </p:cNvSpPr>
+          <p:nvPr>
+            <p:ph type="title" idx="2"/>
+          </p:nvPr>
+        </p:nvSpPr>
+        <p:spPr>
+          <a:xfrm>
+            <a:off x="75895" y="0"/>
+            <a:ext cx="8115300" cy="480060"/>
+          </a:xfrm>
+        </p:spPr>
+        <p:txBody>
+          <a:bodyPr wrap="square" lIns="0" rIns="0" tIns="0" bIns="0" anchor="ctr">
+            <a:noAutofit/>
+          </a:bodyPr>
+          <a:lstStyle/>
+          <a:p>
+            <a:pPr algn="l">
+              <a:lnSpc>
+                <a:spcPct val="110000"/>
+              </a:lnSpc>
+              <a:buNone/>
+              <a:defRPr sz="1400" b="0">
+                <a:solidFill>
+                  <a:srgbClr val="303437"/>
+                </a:solidFill>
+                <a:latin typeface="Noto Sans"/>
+              </a:defRPr>
+            </a:pPr>
+            <a:r>
+              <a:rPr sz="1400" b="1" lang="ja-JP" altLang="en-US">
+                <a:solidFill>
+                  <a:srgbClr val="FFFEF8"/>
+                </a:solidFill>
+                <a:latin typeface="Noto Sans"/>
+                <a:ea typeface="Noto Sans CJK JP"/>
+                <a:cs typeface="Noto Sans"/>
+              </a:rPr>
+              <a:t>4. 配布形式の違いと入手</a:t>
+            </a:r>
+          </a:p>
+        </p:txBody>
+      </p:sp>
+      <p:sp>
+        <p:nvSpPr>
+          <p:cNvPr id="5" name="sources"/>
+          <p:cNvSpPr txBox="1"/>
+          <p:nvPr/>
+        </p:nvSpPr>
+        <p:spPr>
+          <a:xfrm>
+            <a:off x="502920" y="4700016"/>
+            <a:ext cx="8183879" cy="530352"/>
+          </a:xfrm>
+          <a:prstGeom prst="rect">
+            <a:avLst/>
+          </a:prstGeom>
+          <a:noFill/>
+        </p:spPr>
+        <p:txBody>
+          <a:bodyPr wrap="square" lIns="0" rIns="0" tIns="0" bIns="0">
+            <a:noAutofit/>
+          </a:bodyPr>
+          <a:lstStyle/>
+          <a:p>
+            <a:pPr algn="l">
+              <a:lnSpc>
+                <a:spcPts val="940"/>
+              </a:lnSpc>
+              <a:spcBef>
+                <a:spcPts val="0"/>
+              </a:spcBef>
+              <a:spcAft>
+                <a:spcPts val="140"/>
+              </a:spcAft>
+              <a:buNone/>
+              <a:defRPr sz="810" b="0">
+                <a:solidFill>
+                  <a:srgbClr val="303437"/>
+                </a:solidFill>
+                <a:latin typeface="Noto Sans"/>
+              </a:defRPr>
+            </a:pPr>
+            <a:r>
+              <a:rPr sz="810" b="0" lang="ja-JP" altLang="en-US">
+                <a:solidFill>
+                  <a:srgbClr val="626669"/>
+                </a:solidFill>
+                <a:latin typeface="Noto Sans"/>
+                <a:ea typeface="Noto Sans CJK JP"/>
+                <a:cs typeface="Noto Sans"/>
+              </a:rPr>
+              <a:t>[1] Zheng, Huang &amp; Sun (2019). ChID: A Large-scale Chinese IDiom Dataset for Cloze Test. ACL, pp.778–787. </a:t>
+            </a:r>
+            <a:r>
+              <a:rPr sz="810" b="0" lang="ja-JP" altLang="en-US">
+                <a:solidFill>
+                  <a:srgbClr val="626669"/>
+                </a:solidFill>
+                <a:latin typeface="Noto Sans"/>
+                <a:ea typeface="Noto Sans CJK JP"/>
+                <a:cs typeface="Noto Sans"/>
                 <a:hlinkClick r:id="rId2"/>
               </a:rPr>
-              <a:t>https://aclanthology.org/2023.emnlp-demo.17/</a:t>
-            </a:r>
-          </a:p>
-          <a:p>
-            <a:pPr>
-              <a:lnSpc>
-                <a:spcPts val="940"/>
-              </a:lnSpc>
-              <a:spcAft>
-                <a:spcPts val="140"/>
-              </a:spcAft>
-              <a:buNone/>
-              <a:defRPr sz="810" b="0">
-                <a:solidFill>
-                  <a:srgbClr val="303437"/>
-                </a:solidFill>
-                <a:latin typeface="Noto Sans"/>
-              </a:defRPr>
-            </a:pPr>
-            <a:r>
-              <a:rPr sz="810" b="0" lang="ja-JP" altLang="en-US">
-                <a:solidFill>
-                  <a:srgbClr val="626669"/>
-                </a:solidFill>
-                <a:latin typeface="Noto Sans"/>
-                <a:ea typeface="Noto Sans CJK JP"/>
-                <a:cs typeface="Noto Sans"/>
-              </a:rPr>
-              <a:t>[2] Stanford CRFM. CLEVACulturalKnowledgeScenario / Converter. HELM v0.4.0.</a:t>
-            </a:r>
-          </a:p>
-          <a:p>
-            <a:pPr>
-              <a:lnSpc>
-                <a:spcPts val="940"/>
-              </a:lnSpc>
-              <a:buNone/>
-              <a:defRPr sz="810" b="0">
-                <a:solidFill>
-                  <a:srgbClr val="303437"/>
-                </a:solidFill>
-                <a:latin typeface="Noto Sans"/>
-              </a:defRPr>
-            </a:pPr>
-            <a:r>
-              <a:rPr sz="810" b="0" lang="ja-JP" altLang="en-US">
-                <a:solidFill>
-                  <a:srgbClr val="626669"/>
-                </a:solidFill>
-                <a:latin typeface="Noto Sans"/>
-                <a:ea typeface="Noto Sans CJK JP"/>
-                <a:cs typeface="Noto Sans"/>
-                <a:hlinkClick r:id="rId3"/>
-              </a:rPr>
-              <a:t>https://github.com/stanford-crfm/helm/blob/v0.4.0/src/helm/benchmark/scenarios/cleva_scenario.py</a:t>
+              <a:t>https://aclanthology.org/P19-1075/</a:t>
             </a:r>
           </a:p>
         </p:txBody>
@@ -17357,128 +17421,45 @@
         </p:nvSpPr>
         <p:spPr>
           <a:xfrm>
-            <a:off x="468172" y="650138"/>
-            <a:ext cx="8206740" cy="616305"/>
+            <a:off x="548640" y="2484835"/>
+            <a:ext cx="8046720" cy="585216"/>
           </a:xfrm>
         </p:spPr>
         <p:txBody>
-          <a:bodyPr wrap="square" lIns="0" rIns="0" tIns="0" bIns="0">
+          <a:bodyPr wrap="square" lIns="0" rIns="0" tIns="0" bIns="0" anchor="ctr">
             <a:noAutofit/>
           </a:bodyPr>
           <a:lstStyle/>
           <a:p>
-            <a:pPr algn="l">
+            <a:pPr algn="ctr">
               <a:lnSpc>
                 <a:spcPct val="110000"/>
               </a:lnSpc>
               <a:buNone/>
-              <a:defRPr sz="2800" b="0">
-                <a:solidFill>
-                  <a:srgbClr val="303437"/>
-                </a:solidFill>
-                <a:latin typeface="Noto Sans"/>
-              </a:defRPr>
-            </a:pPr>
-            <a:r>
-              <a:rPr sz="2800" b="1" lang="ja-JP" altLang="en-US">
-                <a:solidFill>
-                  <a:srgbClr val="303437"/>
-                </a:solidFill>
-                <a:latin typeface="Noto Sans"/>
-                <a:ea typeface="Noto Sans CJK JP"/>
-                <a:cs typeface="Noto Sans"/>
-              </a:rPr>
-              <a:t>公式配布を入手し、ChID論文を引用して利用する</a:t>
+              <a:defRPr sz="3600" b="0">
+                <a:solidFill>
+                  <a:srgbClr val="303437"/>
+                </a:solidFill>
+                <a:latin typeface="Noto Sans"/>
+              </a:defRPr>
+            </a:pPr>
+            <a:r>
+              <a:rPr sz="3600" b="1" lang="ja-JP" altLang="en-US">
+                <a:solidFill>
+                  <a:srgbClr val="303437"/>
+                </a:solidFill>
+                <a:latin typeface="Noto Sans"/>
+                <a:ea typeface="Noto Sans CJK JP"/>
+                <a:cs typeface="Noto Sans"/>
+              </a:rPr>
+              <a:t>Appendix</a:t>
             </a:r>
           </a:p>
         </p:txBody>
       </p:sp>
       <p:sp>
         <p:nvSpPr>
-          <p:cNvPr id="3" name="Text Placeholder 2"/>
-          <p:cNvSpPr>
-            <a:spLocks noGrp="1"/>
-          </p:cNvSpPr>
-          <p:nvPr>
-            <p:ph type="body" idx="1"/>
-          </p:nvPr>
-        </p:nvSpPr>
-        <p:spPr>
-          <a:xfrm>
-            <a:off x="594360" y="1463040"/>
-            <a:ext cx="7955279" cy="3044952"/>
-          </a:xfrm>
-        </p:spPr>
-        <p:txBody>
-          <a:bodyPr wrap="square" tIns="91440" bIns="91440">
-            <a:noAutofit/>
-          </a:bodyPr>
-          <a:lstStyle/>
-          <a:p>
-            <a:pPr marL="457200" indent="-355600">
-              <a:lnSpc>
-                <a:spcPts val="2379"/>
-              </a:lnSpc>
-              <a:spcAft>
-                <a:spcPts val="700"/>
-              </a:spcAft>
-              <a:buSzPct val="66500"/>
-              <a:buFont typeface="Noto Sans CJK JP"/>
-              <a:buChar char="●"/>
-              <a:defRPr sz="2000" b="0">
-                <a:solidFill>
-                  <a:srgbClr val="303437"/>
-                </a:solidFill>
-                <a:latin typeface="Noto Sans"/>
-              </a:defRPr>
-            </a:pPr>
-            <a:r>
-              <a:rPr sz="2000" b="0" lang="ja-JP" altLang="en-US">
-                <a:solidFill>
-                  <a:srgbClr val="303437"/>
-                </a:solidFill>
-                <a:latin typeface="Noto Sans"/>
-                <a:ea typeface="Noto Sans CJK JP"/>
-                <a:cs typeface="Noto Sans"/>
-              </a:rPr>
-              <a:t>作者の公式GitHubは、原論文版とコンテスト版の配布を案内し、利用時にChID論文の引用を求める。リポジトリのライセンスはApache License 2.0。</a:t>
-            </a:r>
-          </a:p>
-          <a:p>
-            <a:pPr marL="457200" indent="-355600">
-              <a:lnSpc>
-                <a:spcPts val="2379"/>
-              </a:lnSpc>
-              <a:spcAft>
-                <a:spcPts val="0"/>
-              </a:spcAft>
-              <a:buSzPct val="66500"/>
-              <a:buFont typeface="Noto Sans CJK JP"/>
-              <a:buChar char="●"/>
-              <a:defRPr sz="2000" b="0">
-                <a:solidFill>
-                  <a:srgbClr val="303437"/>
-                </a:solidFill>
-                <a:latin typeface="Noto Sans"/>
-              </a:defRPr>
-            </a:pPr>
-            <a:r>
-              <a:rPr sz="2000" b="0" lang="ja-JP" altLang="en-US">
-                <a:solidFill>
-                  <a:srgbClr val="303437"/>
-                </a:solidFill>
-                <a:latin typeface="Noto Sans"/>
-                <a:ea typeface="Noto Sans CJK JP"/>
-                <a:cs typeface="Noto Sans"/>
-              </a:rPr>
-              <a:t>素材にはニュースや文学作品が含まれる。元文章の権利や引用条件は、作品・配布元の情報を確認する。</a:t>
-            </a:r>
-          </a:p>
-        </p:txBody>
-      </p:sp>
-      <p:sp>
-        <p:nvSpPr>
-          <p:cNvPr id="4" name="Title 3"/>
+          <p:cNvPr id="3" name="Title 2"/>
           <p:cNvSpPr>
             <a:spLocks noGrp="1"/>
           </p:cNvSpPr>
@@ -17519,110 +17500,7 @@
                 <a:ea typeface="Noto Sans CJK JP"/>
                 <a:cs typeface="Noto Sans"/>
               </a:rPr>
-              <a:t>4. 配布形式の違いとCLEVAでの利用</a:t>
-            </a:r>
-          </a:p>
-        </p:txBody>
-      </p:sp>
-      <p:sp>
-        <p:nvSpPr>
-          <p:cNvPr id="5" name="sources"/>
-          <p:cNvSpPr txBox="1"/>
-          <p:nvPr/>
-        </p:nvSpPr>
-        <p:spPr>
-          <a:xfrm>
-            <a:off x="502920" y="4517136"/>
-            <a:ext cx="8183879" cy="530352"/>
-          </a:xfrm>
-          <a:prstGeom prst="rect">
-            <a:avLst/>
-          </a:prstGeom>
-          <a:noFill/>
-        </p:spPr>
-        <p:txBody>
-          <a:bodyPr wrap="square" lIns="0" rIns="0" tIns="0" bIns="0">
-            <a:noAutofit/>
-          </a:bodyPr>
-          <a:lstStyle/>
-          <a:p>
-            <a:pPr algn="l">
-              <a:lnSpc>
-                <a:spcPts val="940"/>
-              </a:lnSpc>
-              <a:spcBef>
-                <a:spcPts val="0"/>
-              </a:spcBef>
-              <a:spcAft>
-                <a:spcPts val="140"/>
-              </a:spcAft>
-              <a:buNone/>
-              <a:defRPr sz="810" b="0">
-                <a:solidFill>
-                  <a:srgbClr val="303437"/>
-                </a:solidFill>
-                <a:latin typeface="Noto Sans"/>
-              </a:defRPr>
-            </a:pPr>
-            <a:r>
-              <a:rPr sz="810" b="0" lang="ja-JP" altLang="en-US">
-                <a:solidFill>
-                  <a:srgbClr val="626669"/>
-                </a:solidFill>
-                <a:latin typeface="Noto Sans"/>
-                <a:ea typeface="Noto Sans CJK JP"/>
-                <a:cs typeface="Noto Sans"/>
-              </a:rPr>
-              <a:t>[1] Zheng, Huang &amp; Sun (2019). ChID-Dataset.  </a:t>
-            </a:r>
-            <a:r>
-              <a:rPr sz="810" b="0" lang="ja-JP" altLang="en-US">
-                <a:solidFill>
-                  <a:srgbClr val="626669"/>
-                </a:solidFill>
-                <a:latin typeface="Noto Sans"/>
-                <a:ea typeface="Noto Sans CJK JP"/>
-                <a:cs typeface="Noto Sans"/>
-                <a:hlinkClick r:id="rId2"/>
-              </a:rPr>
-              <a:t>https://github.com/chujiezheng/ChID-Dataset</a:t>
-            </a:r>
-          </a:p>
-          <a:p>
-            <a:pPr>
-              <a:lnSpc>
-                <a:spcPts val="940"/>
-              </a:lnSpc>
-              <a:buNone/>
-              <a:defRPr sz="810" b="0">
-                <a:solidFill>
-                  <a:srgbClr val="303437"/>
-                </a:solidFill>
-                <a:latin typeface="Noto Sans"/>
-              </a:defRPr>
-            </a:pPr>
-            <a:r>
-              <a:rPr sz="810" b="0" lang="ja-JP" altLang="en-US">
-                <a:solidFill>
-                  <a:srgbClr val="626669"/>
-                </a:solidFill>
-                <a:latin typeface="Noto Sans"/>
-                <a:ea typeface="Noto Sans CJK JP"/>
-                <a:cs typeface="Noto Sans"/>
-              </a:rPr>
-              <a:t>[2] ChID-Dataset. Apache License 2.0.  </a:t>
-            </a:r>
-            <a:r>
-              <a:rPr sz="810" b="0" lang="ja-JP" altLang="en-US">
-                <a:solidFill>
-                  <a:srgbClr val="626669"/>
-                </a:solidFill>
-                <a:latin typeface="Noto Sans"/>
-                <a:ea typeface="Noto Sans CJK JP"/>
-                <a:cs typeface="Noto Sans"/>
-                <a:hlinkClick r:id="rId4"/>
-              </a:rPr>
-              <a:t>https://github.com/chujiezheng/ChID-Dataset/blob/master/LICENSE</a:t>
+              <a:t>Appendix</a:t>
             </a:r>
           </a:p>
         </p:txBody>
@@ -17831,7 +17709,7 @@
                 <a:ea typeface="Noto Sans CJK JP"/>
                 <a:cs typeface="Noto Sans"/>
               </a:rPr>
-              <a:t>配布形式の違いとCLEVAでの利用</a:t>
+              <a:t>配布形式の違いと入手</a:t>
             </a:r>
           </a:p>
         </p:txBody>
@@ -17945,7 +17823,7 @@
                 <a:ea typeface="Noto Sans CJK JP"/>
                 <a:cs typeface="Noto Sans"/>
               </a:rPr>
-              <a:t>まとめ：文脈に合う成語を選ぶ</a:t>
+              <a:t/>
             </a:r>
           </a:p>
         </p:txBody>
@@ -17962,73 +17840,103 @@
         </p:nvSpPr>
         <p:spPr>
           <a:xfrm>
-            <a:off x="594360" y="1463040"/>
-            <a:ext cx="7955279" cy="3044952"/>
+            <a:off x="640080" y="1972511"/>
+            <a:ext cx="7863840" cy="1744980"/>
           </a:xfrm>
         </p:spPr>
         <p:txBody>
-          <a:bodyPr wrap="square" tIns="91440" bIns="91440">
+          <a:bodyPr lIns="0" rIns="0" tIns="0" bIns="0">
             <a:noAutofit/>
           </a:bodyPr>
           <a:lstStyle/>
           <a:p>
-            <a:pPr marL="457200" indent="-355600">
-              <a:lnSpc>
-                <a:spcPts val="2379"/>
-              </a:lnSpc>
-              <a:spcAft>
-                <a:spcPts val="700"/>
-              </a:spcAft>
-              <a:buSzPct val="66500"/>
+            <a:pPr marL="457200" indent="-457200">
+              <a:lnSpc>
+                <a:spcPts val="3660"/>
+              </a:lnSpc>
+              <a:spcAft>
+                <a:spcPts val="1200"/>
+              </a:spcAft>
+              <a:buSzPct val="100000"/>
               <a:buFont typeface="Noto Sans CJK JP"/>
-              <a:buChar char="●"/>
-              <a:defRPr sz="2000" b="0">
-                <a:solidFill>
-                  <a:srgbClr val="303437"/>
-                </a:solidFill>
-                <a:latin typeface="Noto Sans"/>
-              </a:defRPr>
-            </a:pPr>
-            <a:r>
-              <a:rPr sz="2000" b="0" lang="ja-JP" altLang="en-US">
-                <a:solidFill>
-                  <a:srgbClr val="303437"/>
-                </a:solidFill>
-                <a:latin typeface="Noto Sans"/>
-                <a:ea typeface="Noto Sans CJK JP"/>
-                <a:cs typeface="Noto Sans"/>
-              </a:rPr>
-              <a:t>ChID原論文版は580,807文章・728,713空欄で、正解に似た候補を含む七択を作る。成語全体の意味と、類義語の使い分けを測る読解課題。</a:t>
-            </a:r>
-          </a:p>
-          <a:p>
-            <a:pPr marL="457200" indent="-355600">
-              <a:lnSpc>
-                <a:spcPts val="2379"/>
-              </a:lnSpc>
-              <a:spcAft>
-                <a:spcPts val="0"/>
-              </a:spcAft>
-              <a:buSzPct val="66500"/>
+              <a:buAutoNum type="arabicPeriod" startAt="1"/>
+              <a:defRPr sz="3000" b="1">
+                <a:solidFill>
+                  <a:srgbClr val="303437"/>
+                </a:solidFill>
+                <a:latin typeface="Noto Sans"/>
+              </a:defRPr>
+            </a:pPr>
+            <a:r>
+              <a:rPr sz="3000" b="1" lang="ja-JP" altLang="en-US">
+                <a:solidFill>
+                  <a:srgbClr val="303437"/>
+                </a:solidFill>
+                <a:latin typeface="Noto Sans"/>
+                <a:ea typeface="Noto Sans CJK JP"/>
+                <a:cs typeface="Noto Sans"/>
+              </a:rPr>
+              <a:t>追加10問の原文と日本語訳</a:t>
+            </a:r>
+          </a:p>
+          <a:p>
+            <a:pPr marL="457200" indent="-457200">
+              <a:lnSpc>
+                <a:spcPts val="3660"/>
+              </a:lnSpc>
+              <a:spcAft>
+                <a:spcPts val="1200"/>
+              </a:spcAft>
+              <a:buSzPct val="100000"/>
               <a:buFont typeface="Noto Sans CJK JP"/>
-              <a:buChar char="●"/>
-              <a:defRPr sz="2000" b="0">
-                <a:solidFill>
-                  <a:srgbClr val="303437"/>
-                </a:solidFill>
-                <a:latin typeface="Noto Sans"/>
-              </a:defRPr>
-            </a:pPr>
-            <a:r>
-              <a:rPr sz="2000" b="0" lang="ja-JP" altLang="en-US">
-                <a:solidFill>
-                  <a:srgbClr val="303437"/>
-                </a:solidFill>
-                <a:latin typeface="Noto Sans"/>
-                <a:ea typeface="Noto Sans CJK JP"/>
-                <a:cs typeface="Noto Sans"/>
-              </a:rPr>
-              <a:t>2019年のARの正解率はTestで72.4%、似た候補が中心のSimで66.2%。後に、十候補を共有するCLUE版や少数例学習のFewCLUE版が公開され、CLEVAの文化知識の評価にも用いられた。</a:t>
+              <a:buAutoNum type="arabicPeriod" startAt="2"/>
+              <a:defRPr sz="3000" b="1">
+                <a:solidFill>
+                  <a:srgbClr val="303437"/>
+                </a:solidFill>
+                <a:latin typeface="Noto Sans"/>
+              </a:defRPr>
+            </a:pPr>
+            <a:r>
+              <a:rPr sz="3000" b="1" lang="ja-JP" altLang="en-US">
+                <a:solidFill>
+                  <a:srgbClr val="303437"/>
+                </a:solidFill>
+                <a:latin typeface="Noto Sans"/>
+                <a:ea typeface="Noto Sans CJK JP"/>
+                <a:cs typeface="Noto Sans"/>
+              </a:rPr>
+              <a:t>入力の読み方と候補選び</a:t>
+            </a:r>
+          </a:p>
+          <a:p>
+            <a:pPr marL="457200" indent="-457200">
+              <a:lnSpc>
+                <a:spcPts val="3660"/>
+              </a:lnSpc>
+              <a:spcAft>
+                <a:spcPts val="0"/>
+              </a:spcAft>
+              <a:buSzPct val="100000"/>
+              <a:buFont typeface="Noto Sans CJK JP"/>
+              <a:buAutoNum type="arabicPeriod" startAt="3"/>
+              <a:defRPr sz="3000" b="1">
+                <a:solidFill>
+                  <a:srgbClr val="303437"/>
+                </a:solidFill>
+                <a:latin typeface="Noto Sans"/>
+              </a:defRPr>
+            </a:pPr>
+            <a:r>
+              <a:rPr sz="3000" b="1" lang="ja-JP" altLang="en-US">
+                <a:solidFill>
+                  <a:srgbClr val="303437"/>
+                </a:solidFill>
+                <a:latin typeface="Noto Sans"/>
+                <a:ea typeface="Noto Sans CJK JP"/>
+                <a:cs typeface="Noto Sans"/>
+              </a:rPr>
+              <a:t>参考文献</a:t>
             </a:r>
           </a:p>
         </p:txBody>
@@ -18076,135 +17984,7 @@
                 <a:ea typeface="Noto Sans CJK JP"/>
                 <a:cs typeface="Noto Sans"/>
               </a:rPr>
-              <a:t>4. 配布形式の違いとCLEVAでの利用</a:t>
-            </a:r>
-          </a:p>
-        </p:txBody>
-      </p:sp>
-      <p:sp>
-        <p:nvSpPr>
-          <p:cNvPr id="5" name="sources"/>
-          <p:cNvSpPr txBox="1"/>
-          <p:nvPr/>
-        </p:nvSpPr>
-        <p:spPr>
-          <a:xfrm>
-            <a:off x="502920" y="4700016"/>
-            <a:ext cx="8183879" cy="530352"/>
-          </a:xfrm>
-          <a:prstGeom prst="rect">
-            <a:avLst/>
-          </a:prstGeom>
-          <a:noFill/>
-        </p:spPr>
-        <p:txBody>
-          <a:bodyPr wrap="square" lIns="0" rIns="0" tIns="0" bIns="0">
-            <a:noAutofit/>
-          </a:bodyPr>
-          <a:lstStyle/>
-          <a:p>
-            <a:pPr algn="l">
-              <a:lnSpc>
-                <a:spcPts val="940"/>
-              </a:lnSpc>
-              <a:spcBef>
-                <a:spcPts val="0"/>
-              </a:spcBef>
-              <a:spcAft>
-                <a:spcPts val="140"/>
-              </a:spcAft>
-              <a:buNone/>
-              <a:defRPr sz="810" b="0">
-                <a:solidFill>
-                  <a:srgbClr val="303437"/>
-                </a:solidFill>
-                <a:latin typeface="Noto Sans"/>
-              </a:defRPr>
-            </a:pPr>
-            <a:r>
-              <a:rPr sz="810" b="0" lang="ja-JP" altLang="en-US">
-                <a:solidFill>
-                  <a:srgbClr val="626669"/>
-                </a:solidFill>
-                <a:latin typeface="Noto Sans"/>
-                <a:ea typeface="Noto Sans CJK JP"/>
-                <a:cs typeface="Noto Sans"/>
-              </a:rPr>
-              <a:t>[1] Zheng, Huang &amp; Sun (2019). ChID: A Large-scale Chinese IDiom Dataset for Cloze Test. ACL, pp.778–787.</a:t>
-            </a:r>
-            <a:r>
-              <a:rPr sz="810" b="0" lang="ja-JP" altLang="en-US">
-                <a:solidFill>
-                  <a:srgbClr val="626669"/>
-                </a:solidFill>
-                <a:latin typeface="Noto Sans"/>
-                <a:ea typeface="Noto Sans CJK JP"/>
-                <a:cs typeface="Noto Sans"/>
-              </a:rPr>
-              <a:t>  </a:t>
-            </a:r>
-            <a:r>
-              <a:rPr sz="810" b="0" lang="ja-JP" altLang="en-US">
-                <a:solidFill>
-                  <a:srgbClr val="626669"/>
-                </a:solidFill>
-                <a:latin typeface="Noto Sans"/>
-                <a:ea typeface="Noto Sans CJK JP"/>
-                <a:cs typeface="Noto Sans"/>
-                <a:hlinkClick r:id="rId2"/>
-              </a:rPr>
-              <a:t>https://aclanthology.org/P19-1075/</a:t>
-            </a:r>
-          </a:p>
-          <a:p>
-            <a:pPr>
-              <a:lnSpc>
-                <a:spcPts val="940"/>
-              </a:lnSpc>
-              <a:spcAft>
-                <a:spcPts val="140"/>
-              </a:spcAft>
-              <a:buNone/>
-              <a:defRPr sz="810" b="0">
-                <a:solidFill>
-                  <a:srgbClr val="303437"/>
-                </a:solidFill>
-                <a:latin typeface="Noto Sans"/>
-              </a:defRPr>
-            </a:pPr>
-            <a:r>
-              <a:rPr sz="810" b="0" lang="ja-JP" altLang="en-US">
-                <a:solidFill>
-                  <a:srgbClr val="626669"/>
-                </a:solidFill>
-                <a:latin typeface="Noto Sans"/>
-                <a:ea typeface="Noto Sans CJK JP"/>
-                <a:cs typeface="Noto Sans"/>
-              </a:rPr>
-              <a:t>[2] Li et al. (2023). CLEVA: Chinese Language Models EVAluation Platform. EMNLP: System Demonstrations.</a:t>
-            </a:r>
-            <a:r>
-              <a:rPr sz="810" b="0" lang="ja-JP" altLang="en-US">
-                <a:solidFill>
-                  <a:srgbClr val="626669"/>
-                </a:solidFill>
-                <a:latin typeface="Noto Sans"/>
-                <a:ea typeface="Noto Sans CJK JP"/>
-                <a:cs typeface="Noto Sans"/>
-              </a:rPr>
-              <a:t>  </a:t>
-            </a:r>
-            <a:r>
-              <a:rPr sz="810" b="0" lang="ja-JP" altLang="en-US">
-                <a:solidFill>
-                  <a:srgbClr val="626669"/>
-                </a:solidFill>
-                <a:latin typeface="Noto Sans"/>
-                <a:ea typeface="Noto Sans CJK JP"/>
-                <a:cs typeface="Noto Sans"/>
-                <a:hlinkClick r:id="rId3"/>
-              </a:rPr>
-              <a:t>https://aclanthology.org/2023.emnlp-demo.17/</a:t>
+              <a:t>Appendix: 目次</a:t>
             </a:r>
           </a:p>
         </p:txBody>
@@ -18218,347 +17998,6 @@
 </file>
 
 <file path=ppt/slides/slide31.xml><?xml version="1.0" encoding="utf-8"?>
-<p:sld xmlns:a="http://schemas.openxmlformats.org/drawingml/2006/main" xmlns:p="http://schemas.openxmlformats.org/presentationml/2006/main" xmlns:r="http://schemas.openxmlformats.org/officeDocument/2006/relationships">
-  <p:cSld>
-    <p:spTree>
-      <p:nvGrpSpPr>
-        <p:cNvPr id="1" name=""/>
-        <p:cNvGrpSpPr/>
-        <p:nvPr/>
-      </p:nvGrpSpPr>
-      <p:grpSpPr/>
-      <p:sp>
-        <p:nvSpPr>
-          <p:cNvPr id="2" name="Title 1"/>
-          <p:cNvSpPr>
-            <a:spLocks noGrp="1"/>
-          </p:cNvSpPr>
-          <p:nvPr>
-            <p:ph type="title"/>
-          </p:nvPr>
-        </p:nvSpPr>
-        <p:spPr>
-          <a:xfrm>
-            <a:off x="548640" y="2484835"/>
-            <a:ext cx="8046720" cy="585216"/>
-          </a:xfrm>
-        </p:spPr>
-        <p:txBody>
-          <a:bodyPr wrap="square" lIns="0" rIns="0" tIns="0" bIns="0" anchor="ctr">
-            <a:noAutofit/>
-          </a:bodyPr>
-          <a:lstStyle/>
-          <a:p>
-            <a:pPr algn="ctr">
-              <a:lnSpc>
-                <a:spcPct val="110000"/>
-              </a:lnSpc>
-              <a:buNone/>
-              <a:defRPr sz="3600" b="0">
-                <a:solidFill>
-                  <a:srgbClr val="303437"/>
-                </a:solidFill>
-                <a:latin typeface="Noto Sans"/>
-              </a:defRPr>
-            </a:pPr>
-            <a:r>
-              <a:rPr sz="3600" b="1" lang="ja-JP" altLang="en-US">
-                <a:solidFill>
-                  <a:srgbClr val="303437"/>
-                </a:solidFill>
-                <a:latin typeface="Noto Sans"/>
-                <a:ea typeface="Noto Sans CJK JP"/>
-                <a:cs typeface="Noto Sans"/>
-              </a:rPr>
-              <a:t>Appendix</a:t>
-            </a:r>
-          </a:p>
-        </p:txBody>
-      </p:sp>
-      <p:sp>
-        <p:nvSpPr>
-          <p:cNvPr id="3" name="Title 2"/>
-          <p:cNvSpPr>
-            <a:spLocks noGrp="1"/>
-          </p:cNvSpPr>
-          <p:nvPr>
-            <p:ph type="title" idx="2"/>
-          </p:nvPr>
-        </p:nvSpPr>
-        <p:spPr>
-          <a:xfrm>
-            <a:off x="75895" y="0"/>
-            <a:ext cx="8115300" cy="480060"/>
-          </a:xfrm>
-        </p:spPr>
-        <p:txBody>
-          <a:bodyPr wrap="square" lIns="0" rIns="0" tIns="0" bIns="0" anchor="ctr">
-            <a:noAutofit/>
-          </a:bodyPr>
-          <a:lstStyle/>
-          <a:p>
-            <a:pPr algn="l">
-              <a:lnSpc>
-                <a:spcPct val="110000"/>
-              </a:lnSpc>
-              <a:buNone/>
-              <a:defRPr sz="1400" b="0">
-                <a:solidFill>
-                  <a:srgbClr val="303437"/>
-                </a:solidFill>
-                <a:latin typeface="Noto Sans"/>
-              </a:defRPr>
-            </a:pPr>
-            <a:r>
-              <a:rPr sz="1400" b="1" lang="ja-JP" altLang="en-US">
-                <a:solidFill>
-                  <a:srgbClr val="FFFEF8"/>
-                </a:solidFill>
-                <a:latin typeface="Noto Sans"/>
-                <a:ea typeface="Noto Sans CJK JP"/>
-                <a:cs typeface="Noto Sans"/>
-              </a:rPr>
-              <a:t>Appendix</a:t>
-            </a:r>
-          </a:p>
-        </p:txBody>
-      </p:sp>
-    </p:spTree>
-  </p:cSld>
-  <p:clrMapOvr>
-    <a:masterClrMapping/>
-  </p:clrMapOvr>
-</p:sld>
-</file>
-
-<file path=ppt/slides/slide32.xml><?xml version="1.0" encoding="utf-8"?>
-<p:sld xmlns:a="http://schemas.openxmlformats.org/drawingml/2006/main" xmlns:p="http://schemas.openxmlformats.org/presentationml/2006/main" xmlns:r="http://schemas.openxmlformats.org/officeDocument/2006/relationships">
-  <p:cSld>
-    <p:spTree>
-      <p:nvGrpSpPr>
-        <p:cNvPr id="1" name=""/>
-        <p:cNvGrpSpPr/>
-        <p:nvPr/>
-      </p:nvGrpSpPr>
-      <p:grpSpPr/>
-      <p:sp>
-        <p:nvSpPr>
-          <p:cNvPr id="2" name="Title 1"/>
-          <p:cNvSpPr>
-            <a:spLocks noGrp="1"/>
-          </p:cNvSpPr>
-          <p:nvPr>
-            <p:ph type="title"/>
-          </p:nvPr>
-        </p:nvSpPr>
-        <p:spPr>
-          <a:xfrm>
-            <a:off x="468172" y="650138"/>
-            <a:ext cx="8206740" cy="616305"/>
-          </a:xfrm>
-        </p:spPr>
-        <p:txBody>
-          <a:bodyPr wrap="square" lIns="0" rIns="0" tIns="0" bIns="0">
-            <a:noAutofit/>
-          </a:bodyPr>
-          <a:lstStyle/>
-          <a:p>
-            <a:pPr algn="l">
-              <a:lnSpc>
-                <a:spcPct val="110000"/>
-              </a:lnSpc>
-              <a:buNone/>
-              <a:defRPr sz="2800" b="0">
-                <a:solidFill>
-                  <a:srgbClr val="303437"/>
-                </a:solidFill>
-                <a:latin typeface="Noto Sans"/>
-              </a:defRPr>
-            </a:pPr>
-            <a:r>
-              <a:rPr sz="2800" b="1" lang="ja-JP" altLang="en-US">
-                <a:solidFill>
-                  <a:srgbClr val="303437"/>
-                </a:solidFill>
-                <a:latin typeface="Noto Sans"/>
-                <a:ea typeface="Noto Sans CJK JP"/>
-                <a:cs typeface="Noto Sans"/>
-              </a:rPr>
-              <a:t/>
-            </a:r>
-          </a:p>
-        </p:txBody>
-      </p:sp>
-      <p:sp>
-        <p:nvSpPr>
-          <p:cNvPr id="3" name="Text Placeholder 2"/>
-          <p:cNvSpPr>
-            <a:spLocks noGrp="1"/>
-          </p:cNvSpPr>
-          <p:nvPr>
-            <p:ph type="body" idx="1"/>
-          </p:nvPr>
-        </p:nvSpPr>
-        <p:spPr>
-          <a:xfrm>
-            <a:off x="640080" y="1972511"/>
-            <a:ext cx="7863840" cy="1744980"/>
-          </a:xfrm>
-        </p:spPr>
-        <p:txBody>
-          <a:bodyPr lIns="0" rIns="0" tIns="0" bIns="0">
-            <a:noAutofit/>
-          </a:bodyPr>
-          <a:lstStyle/>
-          <a:p>
-            <a:pPr marL="457200" indent="-457200">
-              <a:lnSpc>
-                <a:spcPts val="3660"/>
-              </a:lnSpc>
-              <a:spcAft>
-                <a:spcPts val="1200"/>
-              </a:spcAft>
-              <a:buSzPct val="100000"/>
-              <a:buFont typeface="Noto Sans CJK JP"/>
-              <a:buAutoNum type="arabicPeriod" startAt="1"/>
-              <a:defRPr sz="3000" b="1">
-                <a:solidFill>
-                  <a:srgbClr val="303437"/>
-                </a:solidFill>
-                <a:latin typeface="Noto Sans"/>
-              </a:defRPr>
-            </a:pPr>
-            <a:r>
-              <a:rPr sz="3000" b="1" lang="ja-JP" altLang="en-US">
-                <a:solidFill>
-                  <a:srgbClr val="303437"/>
-                </a:solidFill>
-                <a:latin typeface="Noto Sans"/>
-                <a:ea typeface="Noto Sans CJK JP"/>
-                <a:cs typeface="Noto Sans"/>
-              </a:rPr>
-              <a:t>追加10問の原文と日本語訳</a:t>
-            </a:r>
-          </a:p>
-          <a:p>
-            <a:pPr marL="457200" indent="-457200">
-              <a:lnSpc>
-                <a:spcPts val="3660"/>
-              </a:lnSpc>
-              <a:spcAft>
-                <a:spcPts val="1200"/>
-              </a:spcAft>
-              <a:buSzPct val="100000"/>
-              <a:buFont typeface="Noto Sans CJK JP"/>
-              <a:buAutoNum type="arabicPeriod" startAt="2"/>
-              <a:defRPr sz="3000" b="1">
-                <a:solidFill>
-                  <a:srgbClr val="303437"/>
-                </a:solidFill>
-                <a:latin typeface="Noto Sans"/>
-              </a:defRPr>
-            </a:pPr>
-            <a:r>
-              <a:rPr sz="3000" b="1" lang="ja-JP" altLang="en-US">
-                <a:solidFill>
-                  <a:srgbClr val="303437"/>
-                </a:solidFill>
-                <a:latin typeface="Noto Sans"/>
-                <a:ea typeface="Noto Sans CJK JP"/>
-                <a:cs typeface="Noto Sans"/>
-              </a:rPr>
-              <a:t>入力の読み方と候補選び</a:t>
-            </a:r>
-          </a:p>
-          <a:p>
-            <a:pPr marL="457200" indent="-457200">
-              <a:lnSpc>
-                <a:spcPts val="3660"/>
-              </a:lnSpc>
-              <a:spcAft>
-                <a:spcPts val="0"/>
-              </a:spcAft>
-              <a:buSzPct val="100000"/>
-              <a:buFont typeface="Noto Sans CJK JP"/>
-              <a:buAutoNum type="arabicPeriod" startAt="3"/>
-              <a:defRPr sz="3000" b="1">
-                <a:solidFill>
-                  <a:srgbClr val="303437"/>
-                </a:solidFill>
-                <a:latin typeface="Noto Sans"/>
-              </a:defRPr>
-            </a:pPr>
-            <a:r>
-              <a:rPr sz="3000" b="1" lang="ja-JP" altLang="en-US">
-                <a:solidFill>
-                  <a:srgbClr val="303437"/>
-                </a:solidFill>
-                <a:latin typeface="Noto Sans"/>
-                <a:ea typeface="Noto Sans CJK JP"/>
-                <a:cs typeface="Noto Sans"/>
-              </a:rPr>
-              <a:t>参考文献</a:t>
-            </a:r>
-          </a:p>
-        </p:txBody>
-      </p:sp>
-      <p:sp>
-        <p:nvSpPr>
-          <p:cNvPr id="4" name="Title 3"/>
-          <p:cNvSpPr>
-            <a:spLocks noGrp="1"/>
-          </p:cNvSpPr>
-          <p:nvPr>
-            <p:ph type="title" idx="2"/>
-          </p:nvPr>
-        </p:nvSpPr>
-        <p:spPr>
-          <a:xfrm>
-            <a:off x="75895" y="0"/>
-            <a:ext cx="8115300" cy="480060"/>
-          </a:xfrm>
-        </p:spPr>
-        <p:txBody>
-          <a:bodyPr wrap="square" lIns="0" rIns="0" tIns="0" bIns="0" anchor="ctr">
-            <a:noAutofit/>
-          </a:bodyPr>
-          <a:lstStyle/>
-          <a:p>
-            <a:pPr algn="l">
-              <a:lnSpc>
-                <a:spcPct val="110000"/>
-              </a:lnSpc>
-              <a:buNone/>
-              <a:defRPr sz="1400" b="0">
-                <a:solidFill>
-                  <a:srgbClr val="303437"/>
-                </a:solidFill>
-                <a:latin typeface="Noto Sans"/>
-              </a:defRPr>
-            </a:pPr>
-            <a:r>
-              <a:rPr sz="1400" b="1" lang="ja-JP" altLang="en-US">
-                <a:solidFill>
-                  <a:srgbClr val="FFFEF8"/>
-                </a:solidFill>
-                <a:latin typeface="Noto Sans"/>
-                <a:ea typeface="Noto Sans CJK JP"/>
-                <a:cs typeface="Noto Sans"/>
-              </a:rPr>
-              <a:t>Appendix: 目次</a:t>
-            </a:r>
-          </a:p>
-        </p:txBody>
-      </p:sp>
-    </p:spTree>
-  </p:cSld>
-  <p:clrMapOvr>
-    <a:masterClrMapping/>
-  </p:clrMapOvr>
-</p:sld>
-</file>
-
-<file path=ppt/slides/slide33.xml><?xml version="1.0" encoding="utf-8"?>
 <p:sld xmlns:a="http://schemas.openxmlformats.org/drawingml/2006/main" xmlns:p="http://schemas.openxmlformats.org/presentationml/2006/main" xmlns:r="http://schemas.openxmlformats.org/officeDocument/2006/relationships">
   <p:cSld>
     <p:spTree>
@@ -19200,7 +18639,7 @@
 </p:sld>
 </file>
 
-<file path=ppt/slides/slide34.xml><?xml version="1.0" encoding="utf-8"?>
+<file path=ppt/slides/slide32.xml><?xml version="1.0" encoding="utf-8"?>
 <p:sld xmlns:a="http://schemas.openxmlformats.org/drawingml/2006/main" xmlns:p="http://schemas.openxmlformats.org/presentationml/2006/main" xmlns:r="http://schemas.openxmlformats.org/officeDocument/2006/relationships">
   <p:cSld>
     <p:spTree>
@@ -19842,7 +19281,7 @@
 </p:sld>
 </file>
 
-<file path=ppt/slides/slide35.xml><?xml version="1.0" encoding="utf-8"?>
+<file path=ppt/slides/slide33.xml><?xml version="1.0" encoding="utf-8"?>
 <p:sld xmlns:a="http://schemas.openxmlformats.org/drawingml/2006/main" xmlns:p="http://schemas.openxmlformats.org/presentationml/2006/main" xmlns:r="http://schemas.openxmlformats.org/officeDocument/2006/relationships">
   <p:cSld>
     <p:spTree>
@@ -20484,7 +19923,7 @@
 </p:sld>
 </file>
 
-<file path=ppt/slides/slide36.xml><?xml version="1.0" encoding="utf-8"?>
+<file path=ppt/slides/slide34.xml><?xml version="1.0" encoding="utf-8"?>
 <p:sld xmlns:a="http://schemas.openxmlformats.org/drawingml/2006/main" xmlns:p="http://schemas.openxmlformats.org/presentationml/2006/main" xmlns:r="http://schemas.openxmlformats.org/officeDocument/2006/relationships">
   <p:cSld>
     <p:spTree>
@@ -21126,7 +20565,7 @@
 </p:sld>
 </file>
 
-<file path=ppt/slides/slide37.xml><?xml version="1.0" encoding="utf-8"?>
+<file path=ppt/slides/slide35.xml><?xml version="1.0" encoding="utf-8"?>
 <p:sld xmlns:a="http://schemas.openxmlformats.org/drawingml/2006/main" xmlns:p="http://schemas.openxmlformats.org/presentationml/2006/main" xmlns:r="http://schemas.openxmlformats.org/officeDocument/2006/relationships">
   <p:cSld>
     <p:spTree>
@@ -21768,7 +21207,7 @@
 </p:sld>
 </file>
 
-<file path=ppt/slides/slide38.xml><?xml version="1.0" encoding="utf-8"?>
+<file path=ppt/slides/slide36.xml><?xml version="1.0" encoding="utf-8"?>
 <p:sld xmlns:a="http://schemas.openxmlformats.org/drawingml/2006/main" xmlns:p="http://schemas.openxmlformats.org/presentationml/2006/main" xmlns:r="http://schemas.openxmlformats.org/officeDocument/2006/relationships">
   <p:cSld>
     <p:spTree>
@@ -22410,7 +21849,7 @@
 </p:sld>
 </file>
 
-<file path=ppt/slides/slide39.xml><?xml version="1.0" encoding="utf-8"?>
+<file path=ppt/slides/slide37.xml><?xml version="1.0" encoding="utf-8"?>
 <p:sld xmlns:a="http://schemas.openxmlformats.org/drawingml/2006/main" xmlns:p="http://schemas.openxmlformats.org/presentationml/2006/main" xmlns:r="http://schemas.openxmlformats.org/officeDocument/2006/relationships">
   <p:cSld>
     <p:spTree>
@@ -23300,121 +22739,7 @@
 </p:sld>
 </file>
 
-<file path=ppt/slides/slide4.xml><?xml version="1.0" encoding="utf-8"?>
-<p:sld xmlns:a="http://schemas.openxmlformats.org/drawingml/2006/main" xmlns:p="http://schemas.openxmlformats.org/presentationml/2006/main" xmlns:r="http://schemas.openxmlformats.org/officeDocument/2006/relationships">
-  <p:cSld>
-    <p:spTree>
-      <p:nvGrpSpPr>
-        <p:cNvPr id="1" name=""/>
-        <p:cNvGrpSpPr/>
-        <p:nvPr/>
-      </p:nvGrpSpPr>
-      <p:grpSpPr/>
-      <p:sp>
-        <p:nvSpPr>
-          <p:cNvPr id="2" name="Title 1"/>
-          <p:cNvSpPr>
-            <a:spLocks noGrp="1"/>
-          </p:cNvSpPr>
-          <p:nvPr>
-            <p:ph type="title"/>
-          </p:nvPr>
-        </p:nvSpPr>
-        <p:spPr>
-          <a:xfrm>
-            <a:off x="548640" y="2506875"/>
-            <a:ext cx="8046720" cy="585216"/>
-          </a:xfrm>
-        </p:spPr>
-        <p:txBody>
-          <a:bodyPr wrap="square" lIns="0" rIns="0" tIns="0" bIns="0" anchor="ctr">
-            <a:noAutofit/>
-          </a:bodyPr>
-          <a:lstStyle/>
-          <a:p>
-            <a:pPr algn="ctr">
-              <a:lnSpc>
-                <a:spcPct val="110000"/>
-              </a:lnSpc>
-              <a:buNone/>
-              <a:defRPr sz="3600" b="0">
-                <a:solidFill>
-                  <a:srgbClr val="303437"/>
-                </a:solidFill>
-                <a:latin typeface="Noto Sans"/>
-              </a:defRPr>
-            </a:pPr>
-            <a:r>
-              <a:rPr sz="3600" b="1" lang="ja-JP" altLang="en-US">
-                <a:solidFill>
-                  <a:srgbClr val="303437"/>
-                </a:solidFill>
-                <a:latin typeface="Noto Sans"/>
-                <a:ea typeface="Noto Sans CJK JP"/>
-                <a:cs typeface="Noto Sans"/>
-              </a:rPr>
-              <a:t>文章に合う成語を、候補から選ぶ</a:t>
-            </a:r>
-          </a:p>
-        </p:txBody>
-      </p:sp>
-      <p:sp>
-        <p:nvSpPr>
-          <p:cNvPr id="3" name="Title 2"/>
-          <p:cNvSpPr>
-            <a:spLocks noGrp="1"/>
-          </p:cNvSpPr>
-          <p:nvPr>
-            <p:ph type="title" idx="2"/>
-          </p:nvPr>
-        </p:nvSpPr>
-        <p:spPr>
-          <a:xfrm>
-            <a:off x="75895" y="0"/>
-            <a:ext cx="8115300" cy="480060"/>
-          </a:xfrm>
-        </p:spPr>
-        <p:txBody>
-          <a:bodyPr wrap="square" lIns="0" rIns="0" tIns="0" bIns="0" anchor="ctr">
-            <a:noAutofit/>
-          </a:bodyPr>
-          <a:lstStyle/>
-          <a:p>
-            <a:pPr algn="l">
-              <a:lnSpc>
-                <a:spcPct val="110000"/>
-              </a:lnSpc>
-              <a:buNone/>
-              <a:defRPr sz="1400" b="0">
-                <a:solidFill>
-                  <a:srgbClr val="303437"/>
-                </a:solidFill>
-                <a:latin typeface="Noto Sans"/>
-              </a:defRPr>
-            </a:pPr>
-            <a:r>
-              <a:rPr sz="1400" b="1" lang="ja-JP" altLang="en-US">
-                <a:solidFill>
-                  <a:srgbClr val="FFFEF8"/>
-                </a:solidFill>
-                <a:latin typeface="Noto Sans"/>
-                <a:ea typeface="Noto Sans CJK JP"/>
-                <a:cs typeface="Noto Sans"/>
-              </a:rPr>
-              <a:t>1. 文章に合う成語を、候補から選ぶ</a:t>
-            </a:r>
-          </a:p>
-        </p:txBody>
-      </p:sp>
-    </p:spTree>
-  </p:cSld>
-  <p:clrMapOvr>
-    <a:masterClrMapping/>
-  </p:clrMapOvr>
-</p:sld>
-</file>
-
-<file path=ppt/slides/slide40.xml><?xml version="1.0" encoding="utf-8"?>
+<file path=ppt/slides/slide38.xml><?xml version="1.0" encoding="utf-8"?>
 <p:sld xmlns:a="http://schemas.openxmlformats.org/drawingml/2006/main" xmlns:p="http://schemas.openxmlformats.org/presentationml/2006/main" xmlns:r="http://schemas.openxmlformats.org/officeDocument/2006/relationships">
   <p:cSld>
     <p:spTree>
@@ -24304,7 +23629,7 @@
 </p:sld>
 </file>
 
-<file path=ppt/slides/slide41.xml><?xml version="1.0" encoding="utf-8"?>
+<file path=ppt/slides/slide39.xml><?xml version="1.0" encoding="utf-8"?>
 <p:sld xmlns:a="http://schemas.openxmlformats.org/drawingml/2006/main" xmlns:p="http://schemas.openxmlformats.org/presentationml/2006/main" xmlns:r="http://schemas.openxmlformats.org/officeDocument/2006/relationships">
   <p:cSld>
     <p:spTree>
@@ -24946,7 +24271,121 @@
 </p:sld>
 </file>
 
-<file path=ppt/slides/slide42.xml><?xml version="1.0" encoding="utf-8"?>
+<file path=ppt/slides/slide4.xml><?xml version="1.0" encoding="utf-8"?>
+<p:sld xmlns:a="http://schemas.openxmlformats.org/drawingml/2006/main" xmlns:p="http://schemas.openxmlformats.org/presentationml/2006/main" xmlns:r="http://schemas.openxmlformats.org/officeDocument/2006/relationships">
+  <p:cSld>
+    <p:spTree>
+      <p:nvGrpSpPr>
+        <p:cNvPr id="1" name=""/>
+        <p:cNvGrpSpPr/>
+        <p:nvPr/>
+      </p:nvGrpSpPr>
+      <p:grpSpPr/>
+      <p:sp>
+        <p:nvSpPr>
+          <p:cNvPr id="2" name="Title 1"/>
+          <p:cNvSpPr>
+            <a:spLocks noGrp="1"/>
+          </p:cNvSpPr>
+          <p:nvPr>
+            <p:ph type="title"/>
+          </p:nvPr>
+        </p:nvSpPr>
+        <p:spPr>
+          <a:xfrm>
+            <a:off x="548640" y="2506875"/>
+            <a:ext cx="8046720" cy="585216"/>
+          </a:xfrm>
+        </p:spPr>
+        <p:txBody>
+          <a:bodyPr wrap="square" lIns="0" rIns="0" tIns="0" bIns="0" anchor="ctr">
+            <a:noAutofit/>
+          </a:bodyPr>
+          <a:lstStyle/>
+          <a:p>
+            <a:pPr algn="ctr">
+              <a:lnSpc>
+                <a:spcPct val="110000"/>
+              </a:lnSpc>
+              <a:buNone/>
+              <a:defRPr sz="3600" b="0">
+                <a:solidFill>
+                  <a:srgbClr val="303437"/>
+                </a:solidFill>
+                <a:latin typeface="Noto Sans"/>
+              </a:defRPr>
+            </a:pPr>
+            <a:r>
+              <a:rPr sz="3600" b="1" lang="ja-JP" altLang="en-US">
+                <a:solidFill>
+                  <a:srgbClr val="303437"/>
+                </a:solidFill>
+                <a:latin typeface="Noto Sans"/>
+                <a:ea typeface="Noto Sans CJK JP"/>
+                <a:cs typeface="Noto Sans"/>
+              </a:rPr>
+              <a:t>文章に合う成語を、候補から選ぶ</a:t>
+            </a:r>
+          </a:p>
+        </p:txBody>
+      </p:sp>
+      <p:sp>
+        <p:nvSpPr>
+          <p:cNvPr id="3" name="Title 2"/>
+          <p:cNvSpPr>
+            <a:spLocks noGrp="1"/>
+          </p:cNvSpPr>
+          <p:nvPr>
+            <p:ph type="title" idx="2"/>
+          </p:nvPr>
+        </p:nvSpPr>
+        <p:spPr>
+          <a:xfrm>
+            <a:off x="75895" y="0"/>
+            <a:ext cx="8115300" cy="480060"/>
+          </a:xfrm>
+        </p:spPr>
+        <p:txBody>
+          <a:bodyPr wrap="square" lIns="0" rIns="0" tIns="0" bIns="0" anchor="ctr">
+            <a:noAutofit/>
+          </a:bodyPr>
+          <a:lstStyle/>
+          <a:p>
+            <a:pPr algn="l">
+              <a:lnSpc>
+                <a:spcPct val="110000"/>
+              </a:lnSpc>
+              <a:buNone/>
+              <a:defRPr sz="1400" b="0">
+                <a:solidFill>
+                  <a:srgbClr val="303437"/>
+                </a:solidFill>
+                <a:latin typeface="Noto Sans"/>
+              </a:defRPr>
+            </a:pPr>
+            <a:r>
+              <a:rPr sz="1400" b="1" lang="ja-JP" altLang="en-US">
+                <a:solidFill>
+                  <a:srgbClr val="FFFEF8"/>
+                </a:solidFill>
+                <a:latin typeface="Noto Sans"/>
+                <a:ea typeface="Noto Sans CJK JP"/>
+                <a:cs typeface="Noto Sans"/>
+              </a:rPr>
+              <a:t>1. 文章に合う成語を、候補から選ぶ</a:t>
+            </a:r>
+          </a:p>
+        </p:txBody>
+      </p:sp>
+    </p:spTree>
+  </p:cSld>
+  <p:clrMapOvr>
+    <a:masterClrMapping/>
+  </p:clrMapOvr>
+</p:sld>
+</file>
+
+<file path=ppt/slides/slide40.xml><?xml version="1.0" encoding="utf-8"?>
 <p:sld xmlns:a="http://schemas.openxmlformats.org/drawingml/2006/main" xmlns:p="http://schemas.openxmlformats.org/presentationml/2006/main" xmlns:r="http://schemas.openxmlformats.org/officeDocument/2006/relationships">
   <p:cSld>
     <p:spTree>
@@ -25588,7 +25027,7 @@
 </p:sld>
 </file>
 
-<file path=ppt/slides/slide43.xml><?xml version="1.0" encoding="utf-8"?>
+<file path=ppt/slides/slide41.xml><?xml version="1.0" encoding="utf-8"?>
 <p:sld xmlns:a="http://schemas.openxmlformats.org/drawingml/2006/main" xmlns:p="http://schemas.openxmlformats.org/presentationml/2006/main" xmlns:r="http://schemas.openxmlformats.org/officeDocument/2006/relationships">
   <p:cSld>
     <p:spTree>
@@ -26478,7 +25917,7 @@
 </p:sld>
 </file>
 
-<file path=ppt/slides/slide44.xml><?xml version="1.0" encoding="utf-8"?>
+<file path=ppt/slides/slide42.xml><?xml version="1.0" encoding="utf-8"?>
 <p:sld xmlns:a="http://schemas.openxmlformats.org/drawingml/2006/main" xmlns:p="http://schemas.openxmlformats.org/presentationml/2006/main" xmlns:r="http://schemas.openxmlformats.org/officeDocument/2006/relationships">
   <p:cSld>
     <p:spTree>
@@ -27368,7 +26807,7 @@
 </p:sld>
 </file>
 
-<file path=ppt/slides/slide45.xml><?xml version="1.0" encoding="utf-8"?>
+<file path=ppt/slides/slide43.xml><?xml version="1.0" encoding="utf-8"?>
 <p:sld xmlns:a="http://schemas.openxmlformats.org/drawingml/2006/main" xmlns:p="http://schemas.openxmlformats.org/presentationml/2006/main" xmlns:r="http://schemas.openxmlformats.org/officeDocument/2006/relationships">
   <p:cSld>
     <p:spTree>
@@ -27482,7 +26921,7 @@
 </p:sld>
 </file>
 
-<file path=ppt/slides/slide48.xml><?xml version="1.0" encoding="utf-8"?>
+<file path=ppt/slides/slide44.xml><?xml version="1.0" encoding="utf-8"?>
 <p:sld xmlns:a="http://schemas.openxmlformats.org/drawingml/2006/main" xmlns:p="http://schemas.openxmlformats.org/presentationml/2006/main" xmlns:r="http://schemas.openxmlformats.org/officeDocument/2006/relationships">
   <p:cSld>
     <p:spTree>
@@ -27745,7 +27184,7 @@
 </p:sld>
 </file>
 
-<file path=ppt/slides/slide49.xml><?xml version="1.0" encoding="utf-8"?>
+<file path=ppt/slides/slide45.xml><?xml version="1.0" encoding="utf-8"?>
 <p:sld xmlns:a="http://schemas.openxmlformats.org/drawingml/2006/main" xmlns:p="http://schemas.openxmlformats.org/presentationml/2006/main" xmlns:r="http://schemas.openxmlformats.org/officeDocument/2006/relationships">
   <p:cSld>
     <p:spTree>
@@ -27851,7 +27290,7 @@
                 <a:ea typeface="Noto Sans CJK JP"/>
                 <a:cs typeface="Noto Sans"/>
               </a:rPr>
-              <a:t>候補選びの前に、ベクトル類似度0.5〜0.9を八つの区間に分け、各区間200対、計1,600対を五人が評価した。同義、近義、無関係または反対の三種類で判断する。</a:t>
+              <a:t>候補選びの前に、ベクトル類似度0.5〜0.9を八つの区間に分け、各区間200対、計1,600対を五人が評価した。同義、類義、無関係または反対の三種類で判断する。</a:t>
             </a:r>
           </a:p>
           <a:p>
@@ -28019,281 +27458,7 @@
 </p:sld>
 </file>
 
-<file path=ppt/slides/slide5.xml><?xml version="1.0" encoding="utf-8"?>
-<p:sld xmlns:a="http://schemas.openxmlformats.org/drawingml/2006/main" xmlns:p="http://schemas.openxmlformats.org/presentationml/2006/main" xmlns:r="http://schemas.openxmlformats.org/officeDocument/2006/relationships">
-  <p:cSld>
-    <p:spTree>
-      <p:nvGrpSpPr>
-        <p:cNvPr id="1" name=""/>
-        <p:cNvGrpSpPr/>
-        <p:nvPr/>
-      </p:nvGrpSpPr>
-      <p:grpSpPr/>
-      <p:sp>
-        <p:nvSpPr>
-          <p:cNvPr id="2" name="Title 1"/>
-          <p:cNvSpPr>
-            <a:spLocks noGrp="1"/>
-          </p:cNvSpPr>
-          <p:nvPr>
-            <p:ph type="title"/>
-          </p:nvPr>
-        </p:nvSpPr>
-        <p:spPr>
-          <a:xfrm>
-            <a:off x="468172" y="650138"/>
-            <a:ext cx="8206740" cy="616305"/>
-          </a:xfrm>
-        </p:spPr>
-        <p:txBody>
-          <a:bodyPr wrap="square" lIns="0" rIns="0" tIns="0" bIns="0">
-            <a:noAutofit/>
-          </a:bodyPr>
-          <a:lstStyle/>
-          <a:p>
-            <a:pPr algn="l">
-              <a:lnSpc>
-                <a:spcPct val="110000"/>
-              </a:lnSpc>
-              <a:buNone/>
-              <a:defRPr sz="2800" b="0">
-                <a:solidFill>
-                  <a:srgbClr val="303437"/>
-                </a:solidFill>
-                <a:latin typeface="Noto Sans"/>
-              </a:defRPr>
-            </a:pPr>
-            <a:r>
-              <a:rPr sz="2800" b="1" lang="ja-JP" altLang="en-US">
-                <a:solidFill>
-                  <a:srgbClr val="303437"/>
-                </a:solidFill>
-                <a:latin typeface="Noto Sans"/>
-                <a:ea typeface="Noto Sans CJK JP"/>
-                <a:cs typeface="Noto Sans"/>
-              </a:rPr>
-              <a:t>文章の空欄に、もっとも合う成語を入れる</a:t>
-            </a:r>
-          </a:p>
-        </p:txBody>
-      </p:sp>
-      <p:sp>
-        <p:nvSpPr>
-          <p:cNvPr id="3" name="Text Placeholder 2"/>
-          <p:cNvSpPr>
-            <a:spLocks noGrp="1"/>
-          </p:cNvSpPr>
-          <p:nvPr>
-            <p:ph type="body" idx="1"/>
-          </p:nvPr>
-        </p:nvSpPr>
-        <p:spPr>
-          <a:xfrm>
-            <a:off x="594360" y="1463040"/>
-            <a:ext cx="7955279" cy="3044952"/>
-          </a:xfrm>
-        </p:spPr>
-        <p:txBody>
-          <a:bodyPr wrap="square" tIns="91440" bIns="91440">
-            <a:noAutofit/>
-          </a:bodyPr>
-          <a:lstStyle/>
-          <a:p>
-            <a:pPr marL="457200" indent="-355600">
-              <a:lnSpc>
-                <a:spcPts val="2379"/>
-              </a:lnSpc>
-              <a:spcAft>
-                <a:spcPts val="700"/>
-              </a:spcAft>
-              <a:buSzPct val="66500"/>
-              <a:buFont typeface="Noto Sans CJK JP"/>
-              <a:buChar char="●"/>
-              <a:defRPr sz="2000" b="0">
-                <a:solidFill>
-                  <a:srgbClr val="303437"/>
-                </a:solidFill>
-                <a:latin typeface="Noto Sans"/>
-              </a:defRPr>
-            </a:pPr>
-            <a:r>
-              <a:rPr sz="2000" b="0" lang="ja-JP" altLang="en-US">
-                <a:solidFill>
-                  <a:srgbClr val="303437"/>
-                </a:solidFill>
-                <a:latin typeface="Noto Sans"/>
-                <a:ea typeface="Noto Sans CJK JP"/>
-                <a:cs typeface="Noto Sans"/>
-              </a:rPr>
-              <a:t>ChIDは、中国語の成語を選ぶ穴埋め読解データ。成語は、短い形に意味が凝縮された慣用表現で、このデータでは四字の成語を対象とする。</a:t>
-            </a:r>
-          </a:p>
-          <a:p>
-            <a:pPr marL="457200" indent="-355600">
-              <a:lnSpc>
-                <a:spcPts val="2379"/>
-              </a:lnSpc>
-              <a:spcAft>
-                <a:spcPts val="0"/>
-              </a:spcAft>
-              <a:buSzPct val="66500"/>
-              <a:buFont typeface="Noto Sans CJK JP"/>
-              <a:buChar char="●"/>
-              <a:defRPr sz="2000" b="0">
-                <a:solidFill>
-                  <a:srgbClr val="303437"/>
-                </a:solidFill>
-                <a:latin typeface="Noto Sans"/>
-              </a:defRPr>
-            </a:pPr>
-            <a:r>
-              <a:rPr sz="2000" b="0" lang="ja-JP" altLang="en-US">
-                <a:solidFill>
-                  <a:srgbClr val="303437"/>
-                </a:solidFill>
-                <a:latin typeface="Noto Sans"/>
-                <a:ea typeface="Noto Sans CJK JP"/>
-                <a:cs typeface="Noto Sans"/>
-              </a:rPr>
-              <a:t>文章内の成語を空欄記号に置き換え、もとの成語を選ぶ。原論文版では、各空欄に七つの候補が付く。</a:t>
-            </a:r>
-          </a:p>
-        </p:txBody>
-      </p:sp>
-      <p:sp>
-        <p:nvSpPr>
-          <p:cNvPr id="4" name="Title 3"/>
-          <p:cNvSpPr>
-            <a:spLocks noGrp="1"/>
-          </p:cNvSpPr>
-          <p:nvPr>
-            <p:ph type="title" idx="2"/>
-          </p:nvPr>
-        </p:nvSpPr>
-        <p:spPr>
-          <a:xfrm>
-            <a:off x="75895" y="0"/>
-            <a:ext cx="8115300" cy="480060"/>
-          </a:xfrm>
-        </p:spPr>
-        <p:txBody>
-          <a:bodyPr wrap="square" lIns="0" rIns="0" tIns="0" bIns="0" anchor="ctr">
-            <a:noAutofit/>
-          </a:bodyPr>
-          <a:lstStyle/>
-          <a:p>
-            <a:pPr algn="l">
-              <a:lnSpc>
-                <a:spcPct val="110000"/>
-              </a:lnSpc>
-              <a:buNone/>
-              <a:defRPr sz="1400" b="0">
-                <a:solidFill>
-                  <a:srgbClr val="303437"/>
-                </a:solidFill>
-                <a:latin typeface="Noto Sans"/>
-              </a:defRPr>
-            </a:pPr>
-            <a:r>
-              <a:rPr sz="1400" b="1" lang="ja-JP" altLang="en-US">
-                <a:solidFill>
-                  <a:srgbClr val="FFFEF8"/>
-                </a:solidFill>
-                <a:latin typeface="Noto Sans"/>
-                <a:ea typeface="Noto Sans CJK JP"/>
-                <a:cs typeface="Noto Sans"/>
-              </a:rPr>
-              <a:t>1. 文章に合う成語を、候補から選ぶ</a:t>
-            </a:r>
-          </a:p>
-        </p:txBody>
-      </p:sp>
-      <p:sp>
-        <p:nvSpPr>
-          <p:cNvPr id="5" name="sources"/>
-          <p:cNvSpPr txBox="1"/>
-          <p:nvPr/>
-        </p:nvSpPr>
-        <p:spPr>
-          <a:xfrm>
-            <a:off x="502920" y="4700016"/>
-            <a:ext cx="8183879" cy="530352"/>
-          </a:xfrm>
-          <a:prstGeom prst="rect">
-            <a:avLst/>
-          </a:prstGeom>
-          <a:noFill/>
-        </p:spPr>
-        <p:txBody>
-          <a:bodyPr wrap="square" lIns="0" rIns="0" tIns="0" bIns="0">
-            <a:noAutofit/>
-          </a:bodyPr>
-          <a:lstStyle/>
-          <a:p>
-            <a:pPr algn="l">
-              <a:lnSpc>
-                <a:spcPts val="940"/>
-              </a:lnSpc>
-              <a:spcBef>
-                <a:spcPts val="0"/>
-              </a:spcBef>
-              <a:spcAft>
-                <a:spcPts val="140"/>
-              </a:spcAft>
-              <a:buNone/>
-              <a:defRPr sz="810" b="0">
-                <a:solidFill>
-                  <a:srgbClr val="303437"/>
-                </a:solidFill>
-                <a:latin typeface="Noto Sans"/>
-              </a:defRPr>
-            </a:pPr>
-            <a:r>
-              <a:rPr sz="810" b="0" lang="ja-JP" altLang="en-US">
-                <a:solidFill>
-                  <a:srgbClr val="626669"/>
-                </a:solidFill>
-                <a:latin typeface="Noto Sans"/>
-                <a:ea typeface="Noto Sans CJK JP"/>
-                <a:cs typeface="Noto Sans"/>
-              </a:rPr>
-              <a:t>[1] Zheng, Huang &amp; Sun (2019). ChID: A Large-scale Chinese IDiom Dataset for Cloze Test. ACL, pp.778–787.</a:t>
-            </a:r>
-            <a:r>
-              <a:rPr sz="810" b="0" lang="ja-JP" altLang="en-US">
-                <a:solidFill>
-                  <a:srgbClr val="626669"/>
-                </a:solidFill>
-                <a:latin typeface="Noto Sans"/>
-                <a:ea typeface="Noto Sans CJK JP"/>
-                <a:cs typeface="Noto Sans"/>
-              </a:rPr>
-              <a:t>  </a:t>
-            </a:r>
-            <a:r>
-              <a:rPr sz="810" b="0" lang="ja-JP" altLang="en-US">
-                <a:solidFill>
-                  <a:srgbClr val="626669"/>
-                </a:solidFill>
-                <a:latin typeface="Noto Sans"/>
-                <a:ea typeface="Noto Sans CJK JP"/>
-                <a:cs typeface="Noto Sans"/>
-                <a:hlinkClick r:id="rId2"/>
-              </a:rPr>
-              <a:t>https://aclanthology.org/P19-1075/</a:t>
-            </a:r>
-          </a:p>
-        </p:txBody>
-      </p:sp>
-    </p:spTree>
-  </p:cSld>
-  <p:clrMapOvr>
-    <a:masterClrMapping/>
-  </p:clrMapOvr>
-</p:sld>
-</file>
-
-<file path=ppt/slides/slide50.xml><?xml version="1.0" encoding="utf-8"?>
+<file path=ppt/slides/slide46.xml><?xml version="1.0" encoding="utf-8"?>
 <p:sld xmlns:a="http://schemas.openxmlformats.org/drawingml/2006/main" xmlns:p="http://schemas.openxmlformats.org/presentationml/2006/main" xmlns:r="http://schemas.openxmlformats.org/officeDocument/2006/relationships">
   <p:cSld>
     <p:spTree>
@@ -28785,7 +27950,7 @@
 </p:sld>
 </file>
 
-<file path=ppt/slides/slide51.xml><?xml version="1.0" encoding="utf-8"?>
+<file path=ppt/slides/slide47.xml><?xml version="1.0" encoding="utf-8"?>
 <p:sld xmlns:a="http://schemas.openxmlformats.org/drawingml/2006/main" xmlns:p="http://schemas.openxmlformats.org/presentationml/2006/main" xmlns:r="http://schemas.openxmlformats.org/officeDocument/2006/relationships">
   <p:cSld>
     <p:spTree>
@@ -29725,7 +28890,7 @@
 </p:sld>
 </file>
 
-<file path=ppt/slides/slide52.xml><?xml version="1.0" encoding="utf-8"?>
+<file path=ppt/slides/slide48.xml><?xml version="1.0" encoding="utf-8"?>
 <p:sld xmlns:a="http://schemas.openxmlformats.org/drawingml/2006/main" xmlns:p="http://schemas.openxmlformats.org/presentationml/2006/main" xmlns:r="http://schemas.openxmlformats.org/officeDocument/2006/relationships">
   <p:cSld>
     <p:spTree>
@@ -29839,7 +29004,7 @@
 </p:sld>
 </file>
 
-<file path=ppt/slides/slide53.xml><?xml version="1.0" encoding="utf-8"?>
+<file path=ppt/slides/slide49.xml><?xml version="1.0" encoding="utf-8"?>
 <p:sld xmlns:a="http://schemas.openxmlformats.org/drawingml/2006/main" xmlns:p="http://schemas.openxmlformats.org/presentationml/2006/main" xmlns:r="http://schemas.openxmlformats.org/officeDocument/2006/relationships">
   <p:cSld>
     <p:spTree>
@@ -30173,7 +29338,7 @@
                 <a:ea typeface="Noto Sans CJK JP"/>
                 <a:cs typeface="Noto Sans"/>
               </a:rPr>
-              <a:t>Chujie Zheng, Minlie Huang, Aixin Sun · 公式リポジトリ</a:t>
+              <a:t>Chujie Zheng, Minlie Huang, Aixin Sun (n.d.). 公式リポジトリ。参照2026-10-19。</a:t>
             </a:r>
           </a:p>
           <a:p>
@@ -30237,6 +29402,1510 @@
                 <a:hlinkClick r:id="rId3"/>
               </a:rPr>
               <a:t>https://github.com/chujiezheng/ChID-Dataset</a:t>
+            </a:r>
+          </a:p>
+        </p:txBody>
+      </p:sp>
+    </p:spTree>
+  </p:cSld>
+  <p:clrMapOvr>
+    <a:masterClrMapping/>
+  </p:clrMapOvr>
+</p:sld>
+</file>
+
+<file path=ppt/slides/slide5.xml><?xml version="1.0" encoding="utf-8"?>
+<p:sld xmlns:a="http://schemas.openxmlformats.org/drawingml/2006/main" xmlns:p="http://schemas.openxmlformats.org/presentationml/2006/main" xmlns:r="http://schemas.openxmlformats.org/officeDocument/2006/relationships">
+  <p:cSld>
+    <p:spTree>
+      <p:nvGrpSpPr>
+        <p:cNvPr id="1" name=""/>
+        <p:cNvGrpSpPr/>
+        <p:nvPr/>
+      </p:nvGrpSpPr>
+      <p:grpSpPr/>
+      <p:sp>
+        <p:nvSpPr>
+          <p:cNvPr id="2" name="Title 1"/>
+          <p:cNvSpPr>
+            <a:spLocks noGrp="1"/>
+          </p:cNvSpPr>
+          <p:nvPr>
+            <p:ph type="title"/>
+          </p:nvPr>
+        </p:nvSpPr>
+        <p:spPr>
+          <a:xfrm>
+            <a:off x="468172" y="650138"/>
+            <a:ext cx="8206740" cy="616305"/>
+          </a:xfrm>
+        </p:spPr>
+        <p:txBody>
+          <a:bodyPr wrap="square" lIns="0" rIns="0" tIns="0" bIns="0">
+            <a:noAutofit/>
+          </a:bodyPr>
+          <a:lstStyle/>
+          <a:p>
+            <a:pPr algn="l">
+              <a:lnSpc>
+                <a:spcPct val="110000"/>
+              </a:lnSpc>
+              <a:buNone/>
+              <a:defRPr sz="2800" b="0">
+                <a:solidFill>
+                  <a:srgbClr val="303437"/>
+                </a:solidFill>
+                <a:latin typeface="Noto Sans"/>
+              </a:defRPr>
+            </a:pPr>
+            <a:r>
+              <a:rPr sz="2800" b="1" lang="ja-JP" altLang="en-US">
+                <a:solidFill>
+                  <a:srgbClr val="303437"/>
+                </a:solidFill>
+                <a:latin typeface="Noto Sans"/>
+                <a:ea typeface="Noto Sans CJK JP"/>
+                <a:cs typeface="Noto Sans"/>
+              </a:rPr>
+              <a:t>文章の空欄に、もっとも合う成語を入れる</a:t>
+            </a:r>
+          </a:p>
+        </p:txBody>
+      </p:sp>
+      <p:sp>
+        <p:nvSpPr>
+          <p:cNvPr id="3" name="Text Placeholder 2"/>
+          <p:cNvSpPr>
+            <a:spLocks noGrp="1"/>
+          </p:cNvSpPr>
+          <p:nvPr>
+            <p:ph type="body" idx="1"/>
+          </p:nvPr>
+        </p:nvSpPr>
+        <p:spPr>
+          <a:xfrm>
+            <a:off x="594360" y="1463040"/>
+            <a:ext cx="7955279" cy="3044952"/>
+          </a:xfrm>
+        </p:spPr>
+        <p:txBody>
+          <a:bodyPr wrap="square" tIns="91440" bIns="91440">
+            <a:noAutofit/>
+          </a:bodyPr>
+          <a:lstStyle/>
+          <a:p>
+            <a:pPr marL="457200" indent="-355600">
+              <a:lnSpc>
+                <a:spcPts val="2379"/>
+              </a:lnSpc>
+              <a:spcAft>
+                <a:spcPts val="700"/>
+              </a:spcAft>
+              <a:buSzPct val="66500"/>
+              <a:buFont typeface="Noto Sans CJK JP"/>
+              <a:buChar char="●"/>
+              <a:defRPr sz="2000" b="0">
+                <a:solidFill>
+                  <a:srgbClr val="303437"/>
+                </a:solidFill>
+                <a:latin typeface="Noto Sans"/>
+              </a:defRPr>
+            </a:pPr>
+            <a:r>
+              <a:rPr sz="2000" b="0" lang="ja-JP" altLang="en-US">
+                <a:solidFill>
+                  <a:srgbClr val="303437"/>
+                </a:solidFill>
+                <a:latin typeface="Noto Sans"/>
+                <a:ea typeface="Noto Sans CJK JP"/>
+                <a:cs typeface="Noto Sans"/>
+              </a:rPr>
+              <a:t>ChIDは、中国語の成語を選ぶ穴埋め読解データ。成語は、短い形に意味が凝縮された慣用表現で、このデータでは四字の成語を対象とする。</a:t>
+            </a:r>
+          </a:p>
+          <a:p>
+            <a:pPr marL="457200" indent="-355600">
+              <a:lnSpc>
+                <a:spcPts val="2379"/>
+              </a:lnSpc>
+              <a:spcAft>
+                <a:spcPts val="0"/>
+              </a:spcAft>
+              <a:buSzPct val="66500"/>
+              <a:buFont typeface="Noto Sans CJK JP"/>
+              <a:buChar char="●"/>
+              <a:defRPr sz="2000" b="0">
+                <a:solidFill>
+                  <a:srgbClr val="303437"/>
+                </a:solidFill>
+                <a:latin typeface="Noto Sans"/>
+              </a:defRPr>
+            </a:pPr>
+            <a:r>
+              <a:rPr sz="2000" b="0" lang="ja-JP" altLang="en-US">
+                <a:solidFill>
+                  <a:srgbClr val="303437"/>
+                </a:solidFill>
+                <a:latin typeface="Noto Sans"/>
+                <a:ea typeface="Noto Sans CJK JP"/>
+                <a:cs typeface="Noto Sans"/>
+              </a:rPr>
+              <a:t>文章内の成語を空欄記号に置き換え、もとの成語を選ぶ。原論文版では、各空欄に七つの候補が付く。</a:t>
+            </a:r>
+          </a:p>
+        </p:txBody>
+      </p:sp>
+      <p:sp>
+        <p:nvSpPr>
+          <p:cNvPr id="4" name="Title 3"/>
+          <p:cNvSpPr>
+            <a:spLocks noGrp="1"/>
+          </p:cNvSpPr>
+          <p:nvPr>
+            <p:ph type="title" idx="2"/>
+          </p:nvPr>
+        </p:nvSpPr>
+        <p:spPr>
+          <a:xfrm>
+            <a:off x="75895" y="0"/>
+            <a:ext cx="8115300" cy="480060"/>
+          </a:xfrm>
+        </p:spPr>
+        <p:txBody>
+          <a:bodyPr wrap="square" lIns="0" rIns="0" tIns="0" bIns="0" anchor="ctr">
+            <a:noAutofit/>
+          </a:bodyPr>
+          <a:lstStyle/>
+          <a:p>
+            <a:pPr algn="l">
+              <a:lnSpc>
+                <a:spcPct val="110000"/>
+              </a:lnSpc>
+              <a:buNone/>
+              <a:defRPr sz="1400" b="0">
+                <a:solidFill>
+                  <a:srgbClr val="303437"/>
+                </a:solidFill>
+                <a:latin typeface="Noto Sans"/>
+              </a:defRPr>
+            </a:pPr>
+            <a:r>
+              <a:rPr sz="1400" b="1" lang="ja-JP" altLang="en-US">
+                <a:solidFill>
+                  <a:srgbClr val="FFFEF8"/>
+                </a:solidFill>
+                <a:latin typeface="Noto Sans"/>
+                <a:ea typeface="Noto Sans CJK JP"/>
+                <a:cs typeface="Noto Sans"/>
+              </a:rPr>
+              <a:t>1. 文章に合う成語を、候補から選ぶ</a:t>
+            </a:r>
+          </a:p>
+        </p:txBody>
+      </p:sp>
+      <p:sp>
+        <p:nvSpPr>
+          <p:cNvPr id="5" name="sources"/>
+          <p:cNvSpPr txBox="1"/>
+          <p:nvPr/>
+        </p:nvSpPr>
+        <p:spPr>
+          <a:xfrm>
+            <a:off x="502920" y="4700016"/>
+            <a:ext cx="8183879" cy="530352"/>
+          </a:xfrm>
+          <a:prstGeom prst="rect">
+            <a:avLst/>
+          </a:prstGeom>
+          <a:noFill/>
+        </p:spPr>
+        <p:txBody>
+          <a:bodyPr wrap="square" lIns="0" rIns="0" tIns="0" bIns="0">
+            <a:noAutofit/>
+          </a:bodyPr>
+          <a:lstStyle/>
+          <a:p>
+            <a:pPr algn="l">
+              <a:lnSpc>
+                <a:spcPts val="940"/>
+              </a:lnSpc>
+              <a:spcBef>
+                <a:spcPts val="0"/>
+              </a:spcBef>
+              <a:spcAft>
+                <a:spcPts val="140"/>
+              </a:spcAft>
+              <a:buNone/>
+              <a:defRPr sz="810" b="0">
+                <a:solidFill>
+                  <a:srgbClr val="303437"/>
+                </a:solidFill>
+                <a:latin typeface="Noto Sans"/>
+              </a:defRPr>
+            </a:pPr>
+            <a:r>
+              <a:rPr sz="810" b="0" lang="ja-JP" altLang="en-US">
+                <a:solidFill>
+                  <a:srgbClr val="626669"/>
+                </a:solidFill>
+                <a:latin typeface="Noto Sans"/>
+                <a:ea typeface="Noto Sans CJK JP"/>
+                <a:cs typeface="Noto Sans"/>
+              </a:rPr>
+              <a:t>[1] Zheng, Huang &amp; Sun (2019). ChID: A Large-scale Chinese IDiom Dataset for Cloze Test. ACL, pp.778–787.</a:t>
+            </a:r>
+            <a:r>
+              <a:rPr sz="810" b="0" lang="ja-JP" altLang="en-US">
+                <a:solidFill>
+                  <a:srgbClr val="626669"/>
+                </a:solidFill>
+                <a:latin typeface="Noto Sans"/>
+                <a:ea typeface="Noto Sans CJK JP"/>
+                <a:cs typeface="Noto Sans"/>
+              </a:rPr>
+              <a:t>  </a:t>
+            </a:r>
+            <a:r>
+              <a:rPr sz="810" b="0" lang="ja-JP" altLang="en-US">
+                <a:solidFill>
+                  <a:srgbClr val="626669"/>
+                </a:solidFill>
+                <a:latin typeface="Noto Sans"/>
+                <a:ea typeface="Noto Sans CJK JP"/>
+                <a:cs typeface="Noto Sans"/>
+                <a:hlinkClick r:id="rId2"/>
+              </a:rPr>
+              <a:t>https://aclanthology.org/P19-1075/</a:t>
+            </a:r>
+          </a:p>
+        </p:txBody>
+      </p:sp>
+    </p:spTree>
+  </p:cSld>
+  <p:clrMapOvr>
+    <a:masterClrMapping/>
+  </p:clrMapOvr>
+</p:sld>
+</file>
+
+<file path=ppt/slides/slide50.xml><?xml version="1.0" encoding="utf-8"?>
+<p:sld xmlns:a="http://schemas.openxmlformats.org/drawingml/2006/main" xmlns:p="http://schemas.openxmlformats.org/presentationml/2006/main" xmlns:r="http://schemas.openxmlformats.org/officeDocument/2006/relationships">
+  <p:cSld>
+    <p:spTree>
+      <p:nvGrpSpPr>
+        <p:cNvPr id="1" name=""/>
+        <p:cNvGrpSpPr/>
+        <p:nvPr/>
+      </p:nvGrpSpPr>
+      <p:grpSpPr/>
+      <p:sp>
+        <p:nvSpPr>
+          <p:cNvPr id="2" name="Title 1"/>
+          <p:cNvSpPr>
+            <a:spLocks noGrp="1"/>
+          </p:cNvSpPr>
+          <p:nvPr>
+            <p:ph type="title"/>
+          </p:nvPr>
+        </p:nvSpPr>
+        <p:spPr>
+          <a:xfrm>
+            <a:off x="468172" y="650138"/>
+            <a:ext cx="8206740" cy="616305"/>
+          </a:xfrm>
+        </p:spPr>
+        <p:txBody>
+          <a:bodyPr wrap="square" lIns="0" rIns="0" tIns="0" bIns="0">
+            <a:noAutofit/>
+          </a:bodyPr>
+          <a:lstStyle/>
+          <a:p>
+            <a:pPr algn="l">
+              <a:lnSpc>
+                <a:spcPct val="110000"/>
+              </a:lnSpc>
+              <a:buNone/>
+              <a:defRPr sz="2800" b="0">
+                <a:solidFill>
+                  <a:srgbClr val="303437"/>
+                </a:solidFill>
+                <a:latin typeface="Noto Sans"/>
+              </a:defRPr>
+            </a:pPr>
+            <a:r>
+              <a:rPr sz="2800" b="1" lang="ja-JP" altLang="en-US">
+                <a:solidFill>
+                  <a:srgbClr val="303437"/>
+                </a:solidFill>
+                <a:latin typeface="Noto Sans"/>
+                <a:ea typeface="Noto Sans CJK JP"/>
+                <a:cs typeface="Noto Sans"/>
+              </a:rPr>
+              <a:t>参考文献</a:t>
+            </a:r>
+          </a:p>
+        </p:txBody>
+      </p:sp>
+      <p:sp>
+        <p:nvSpPr>
+          <p:cNvPr id="3" name="Title 2"/>
+          <p:cNvSpPr>
+            <a:spLocks noGrp="1"/>
+          </p:cNvSpPr>
+          <p:nvPr>
+            <p:ph type="title" idx="2"/>
+          </p:nvPr>
+        </p:nvSpPr>
+        <p:spPr>
+          <a:xfrm>
+            <a:off x="75895" y="0"/>
+            <a:ext cx="8115300" cy="480060"/>
+          </a:xfrm>
+        </p:spPr>
+        <p:txBody>
+          <a:bodyPr wrap="square" lIns="0" rIns="0" tIns="0" bIns="0" anchor="ctr">
+            <a:noAutofit/>
+          </a:bodyPr>
+          <a:lstStyle/>
+          <a:p>
+            <a:pPr algn="l">
+              <a:lnSpc>
+                <a:spcPct val="110000"/>
+              </a:lnSpc>
+              <a:buNone/>
+              <a:defRPr sz="1400" b="0">
+                <a:solidFill>
+                  <a:srgbClr val="303437"/>
+                </a:solidFill>
+                <a:latin typeface="Noto Sans"/>
+              </a:defRPr>
+            </a:pPr>
+            <a:r>
+              <a:rPr sz="1400" b="1" lang="ja-JP" altLang="en-US">
+                <a:solidFill>
+                  <a:srgbClr val="FFFEF8"/>
+                </a:solidFill>
+                <a:latin typeface="Noto Sans"/>
+                <a:ea typeface="Noto Sans CJK JP"/>
+                <a:cs typeface="Noto Sans"/>
+              </a:rPr>
+              <a:t>Appendix: 3. 参考文献</a:t>
+            </a:r>
+          </a:p>
+        </p:txBody>
+      </p:sp>
+      <p:sp>
+        <p:nvSpPr>
+          <p:cNvPr id="4" name="文献 1: ChID — Original Data Distribution"/>
+          <p:cNvSpPr txBox="1"/>
+          <p:nvPr/>
+        </p:nvSpPr>
+        <p:spPr>
+          <a:xfrm>
+            <a:off x="548640" y="1463040"/>
+            <a:ext cx="8046720" cy="1574419"/>
+          </a:xfrm>
+          <a:prstGeom prst="rect">
+            <a:avLst/>
+          </a:prstGeom>
+          <a:noFill/>
+        </p:spPr>
+        <p:txBody>
+          <a:bodyPr wrap="square" lIns="0" rIns="0" tIns="0" bIns="0">
+            <a:noAutofit/>
+          </a:bodyPr>
+          <a:lstStyle/>
+          <a:p>
+            <a:pPr algn="l">
+              <a:lnSpc>
+                <a:spcPct val="114000"/>
+              </a:lnSpc>
+              <a:spcBef>
+                <a:spcPts val="0"/>
+              </a:spcBef>
+              <a:spcAft>
+                <a:spcPts val="400"/>
+              </a:spcAft>
+              <a:buNone/>
+              <a:defRPr sz="1850" b="0">
+                <a:solidFill>
+                  <a:srgbClr val="303437"/>
+                </a:solidFill>
+                <a:latin typeface="Noto Sans"/>
+              </a:defRPr>
+            </a:pPr>
+            <a:r>
+              <a:rPr sz="1850" b="1" lang="ja-JP" altLang="en-US">
+                <a:solidFill>
+                  <a:srgbClr val="303437"/>
+                </a:solidFill>
+                <a:latin typeface="Noto Sans"/>
+                <a:ea typeface="Noto Sans CJK JP"/>
+                <a:cs typeface="Noto Sans"/>
+              </a:rPr>
+              <a:t>ChID — Original Data Distribution</a:t>
+            </a:r>
+          </a:p>
+          <a:p>
+            <a:pPr algn="l">
+              <a:lnSpc>
+                <a:spcPct val="114000"/>
+              </a:lnSpc>
+              <a:spcBef>
+                <a:spcPts val="0"/>
+              </a:spcBef>
+              <a:spcAft>
+                <a:spcPts val="500"/>
+              </a:spcAft>
+              <a:buNone/>
+              <a:defRPr sz="1250" b="0">
+                <a:solidFill>
+                  <a:srgbClr val="303437"/>
+                </a:solidFill>
+                <a:latin typeface="Noto Sans"/>
+              </a:defRPr>
+            </a:pPr>
+            <a:r>
+              <a:rPr sz="1250" b="0" lang="ja-JP" altLang="en-US">
+                <a:solidFill>
+                  <a:srgbClr val="626669"/>
+                </a:solidFill>
+                <a:latin typeface="Noto Sans"/>
+                <a:ea typeface="Noto Sans CJK JP"/>
+                <a:cs typeface="Noto Sans"/>
+              </a:rPr>
+              <a:t>thu-coai (n.d.). 作者が案内する配布。参照2026-10-19。</a:t>
+            </a:r>
+          </a:p>
+          <a:p>
+            <a:pPr algn="l">
+              <a:lnSpc>
+                <a:spcPct val="114000"/>
+              </a:lnSpc>
+              <a:spcBef>
+                <a:spcPts val="0"/>
+              </a:spcBef>
+              <a:spcAft>
+                <a:spcPts val="400"/>
+              </a:spcAft>
+              <a:buNone/>
+              <a:defRPr sz="1750" b="0">
+                <a:solidFill>
+                  <a:srgbClr val="303437"/>
+                </a:solidFill>
+                <a:latin typeface="Noto Sans"/>
+              </a:defRPr>
+            </a:pPr>
+            <a:r>
+              <a:rPr sz="1750" b="0" lang="ja-JP" altLang="en-US">
+                <a:solidFill>
+                  <a:srgbClr val="303437"/>
+                </a:solidFill>
+                <a:latin typeface="Noto Sans"/>
+                <a:ea typeface="Noto Sans CJK JP"/>
+                <a:cs typeface="Noto Sans"/>
+              </a:rPr>
+              <a:t>学習・開発・Test・Outと、同じTestの候補を変えたRan/Simを、正解付きの行形式で公開する。</a:t>
+            </a:r>
+          </a:p>
+          <a:p>
+            <a:pPr algn="l">
+              <a:lnSpc>
+                <a:spcPct val="114000"/>
+              </a:lnSpc>
+              <a:spcBef>
+                <a:spcPts val="0"/>
+              </a:spcBef>
+              <a:spcAft>
+                <a:spcPts val="0"/>
+              </a:spcAft>
+              <a:buNone/>
+              <a:defRPr sz="1050" b="0">
+                <a:solidFill>
+                  <a:srgbClr val="303437"/>
+                </a:solidFill>
+                <a:latin typeface="Noto Sans"/>
+              </a:defRPr>
+            </a:pPr>
+            <a:r>
+              <a:rPr sz="1050" b="0" lang="ja-JP" altLang="en-US">
+                <a:solidFill>
+                  <a:srgbClr val="626669"/>
+                </a:solidFill>
+                <a:latin typeface="Noto Sans"/>
+                <a:ea typeface="Noto Sans CJK JP"/>
+                <a:cs typeface="Noto Sans"/>
+                <a:hlinkClick r:id="rId2"/>
+              </a:rPr>
+              <a:t>https://huggingface.co/datasets/thu-coai/chid/tree/main/original</a:t>
+            </a:r>
+          </a:p>
+        </p:txBody>
+      </p:sp>
+      <p:sp>
+        <p:nvSpPr>
+          <p:cNvPr id="5" name="文献 2: ChID-Adapt — Competition Data"/>
+          <p:cNvSpPr txBox="1"/>
+          <p:nvPr/>
+        </p:nvSpPr>
+        <p:spPr>
+          <a:xfrm>
+            <a:off x="548640" y="3040507"/>
+            <a:ext cx="8046720" cy="1497838"/>
+          </a:xfrm>
+          <a:prstGeom prst="rect">
+            <a:avLst/>
+          </a:prstGeom>
+          <a:noFill/>
+        </p:spPr>
+        <p:txBody>
+          <a:bodyPr wrap="square" lIns="0" rIns="0" tIns="0" bIns="0">
+            <a:noAutofit/>
+          </a:bodyPr>
+          <a:lstStyle/>
+          <a:p>
+            <a:pPr algn="l">
+              <a:lnSpc>
+                <a:spcPct val="114000"/>
+              </a:lnSpc>
+              <a:spcBef>
+                <a:spcPts val="0"/>
+              </a:spcBef>
+              <a:spcAft>
+                <a:spcPts val="400"/>
+              </a:spcAft>
+              <a:buNone/>
+              <a:defRPr sz="1850" b="0">
+                <a:solidFill>
+                  <a:srgbClr val="303437"/>
+                </a:solidFill>
+                <a:latin typeface="Noto Sans"/>
+              </a:defRPr>
+            </a:pPr>
+            <a:r>
+              <a:rPr sz="1850" b="1" lang="ja-JP" altLang="en-US">
+                <a:solidFill>
+                  <a:srgbClr val="303437"/>
+                </a:solidFill>
+                <a:latin typeface="Noto Sans"/>
+                <a:ea typeface="Noto Sans CJK JP"/>
+                <a:cs typeface="Noto Sans"/>
+              </a:rPr>
+              <a:t>ChID-Adapt — Competition Data</a:t>
+            </a:r>
+          </a:p>
+          <a:p>
+            <a:pPr algn="l">
+              <a:lnSpc>
+                <a:spcPct val="114000"/>
+              </a:lnSpc>
+              <a:spcBef>
+                <a:spcPts val="0"/>
+              </a:spcBef>
+              <a:spcAft>
+                <a:spcPts val="500"/>
+              </a:spcAft>
+              <a:buNone/>
+              <a:defRPr sz="1250" b="0">
+                <a:solidFill>
+                  <a:srgbClr val="303437"/>
+                </a:solidFill>
+                <a:latin typeface="Noto Sans"/>
+              </a:defRPr>
+            </a:pPr>
+            <a:r>
+              <a:rPr sz="1250" b="0" lang="ja-JP" altLang="en-US">
+                <a:solidFill>
+                  <a:srgbClr val="626669"/>
+                </a:solidFill>
+                <a:latin typeface="Noto Sans"/>
+                <a:ea typeface="Noto Sans CJK JP"/>
+                <a:cs typeface="Noto Sans"/>
+              </a:rPr>
+              <a:t>Chujie Zheng et al. · 2019年コンテスト向け公式説明</a:t>
+            </a:r>
+          </a:p>
+          <a:p>
+            <a:pPr algn="l">
+              <a:lnSpc>
+                <a:spcPct val="114000"/>
+              </a:lnSpc>
+              <a:spcBef>
+                <a:spcPts val="0"/>
+              </a:spcBef>
+              <a:spcAft>
+                <a:spcPts val="400"/>
+              </a:spcAft>
+              <a:buNone/>
+              <a:defRPr sz="1750" b="0">
+                <a:solidFill>
+                  <a:srgbClr val="303437"/>
+                </a:solidFill>
+                <a:latin typeface="Noto Sans"/>
+              </a:defRPr>
+            </a:pPr>
+            <a:r>
+              <a:rPr sz="1750" b="0" lang="ja-JP" altLang="en-US">
+                <a:solidFill>
+                  <a:srgbClr val="303437"/>
+                </a:solidFill>
+                <a:latin typeface="Noto Sans"/>
+                <a:ea typeface="Noto Sans CJK JP"/>
+                <a:cs typeface="Noto Sans"/>
+              </a:rPr>
+              <a:t>複数文章が十候補を共有し、文脈間の比較を利用して空欄を埋める形式。データとRNN/BERTベースラインを案内する。</a:t>
+            </a:r>
+          </a:p>
+          <a:p>
+            <a:pPr algn="l">
+              <a:lnSpc>
+                <a:spcPct val="114000"/>
+              </a:lnSpc>
+              <a:spcBef>
+                <a:spcPts val="0"/>
+              </a:spcBef>
+              <a:spcAft>
+                <a:spcPts val="0"/>
+              </a:spcAft>
+              <a:buNone/>
+              <a:defRPr sz="1050" b="0">
+                <a:solidFill>
+                  <a:srgbClr val="303437"/>
+                </a:solidFill>
+                <a:latin typeface="Noto Sans"/>
+              </a:defRPr>
+            </a:pPr>
+            <a:r>
+              <a:rPr sz="1050" b="0" lang="ja-JP" altLang="en-US">
+                <a:solidFill>
+                  <a:srgbClr val="626669"/>
+                </a:solidFill>
+                <a:latin typeface="Noto Sans"/>
+                <a:ea typeface="Noto Sans CJK JP"/>
+                <a:cs typeface="Noto Sans"/>
+                <a:hlinkClick r:id="rId3"/>
+              </a:rPr>
+              <a:t>https://github.com/chujiezheng/ChID-Dataset/blob/master/Competition/README.md</a:t>
+            </a:r>
+          </a:p>
+        </p:txBody>
+      </p:sp>
+    </p:spTree>
+  </p:cSld>
+  <p:clrMapOvr>
+    <a:masterClrMapping/>
+  </p:clrMapOvr>
+</p:sld>
+</file>
+
+<file path=ppt/slides/slide51.xml><?xml version="1.0" encoding="utf-8"?>
+<p:sld xmlns:a="http://schemas.openxmlformats.org/drawingml/2006/main" xmlns:p="http://schemas.openxmlformats.org/presentationml/2006/main" xmlns:r="http://schemas.openxmlformats.org/officeDocument/2006/relationships">
+  <p:cSld>
+    <p:spTree>
+      <p:nvGrpSpPr>
+        <p:cNvPr id="1" name=""/>
+        <p:cNvGrpSpPr/>
+        <p:nvPr/>
+      </p:nvGrpSpPr>
+      <p:grpSpPr/>
+      <p:sp>
+        <p:nvSpPr>
+          <p:cNvPr id="2" name="Title 1"/>
+          <p:cNvSpPr>
+            <a:spLocks noGrp="1"/>
+          </p:cNvSpPr>
+          <p:nvPr>
+            <p:ph type="title"/>
+          </p:nvPr>
+        </p:nvSpPr>
+        <p:spPr>
+          <a:xfrm>
+            <a:off x="468172" y="650138"/>
+            <a:ext cx="8206740" cy="616305"/>
+          </a:xfrm>
+        </p:spPr>
+        <p:txBody>
+          <a:bodyPr wrap="square" lIns="0" rIns="0" tIns="0" bIns="0">
+            <a:noAutofit/>
+          </a:bodyPr>
+          <a:lstStyle/>
+          <a:p>
+            <a:pPr algn="l">
+              <a:lnSpc>
+                <a:spcPct val="110000"/>
+              </a:lnSpc>
+              <a:buNone/>
+              <a:defRPr sz="2800" b="0">
+                <a:solidFill>
+                  <a:srgbClr val="303437"/>
+                </a:solidFill>
+                <a:latin typeface="Noto Sans"/>
+              </a:defRPr>
+            </a:pPr>
+            <a:r>
+              <a:rPr sz="2800" b="1" lang="ja-JP" altLang="en-US">
+                <a:solidFill>
+                  <a:srgbClr val="303437"/>
+                </a:solidFill>
+                <a:latin typeface="Noto Sans"/>
+                <a:ea typeface="Noto Sans CJK JP"/>
+                <a:cs typeface="Noto Sans"/>
+              </a:rPr>
+              <a:t>参考文献</a:t>
+            </a:r>
+          </a:p>
+        </p:txBody>
+      </p:sp>
+      <p:sp>
+        <p:nvSpPr>
+          <p:cNvPr id="3" name="Title 2"/>
+          <p:cNvSpPr>
+            <a:spLocks noGrp="1"/>
+          </p:cNvSpPr>
+          <p:nvPr>
+            <p:ph type="title" idx="2"/>
+          </p:nvPr>
+        </p:nvSpPr>
+        <p:spPr>
+          <a:xfrm>
+            <a:off x="75895" y="0"/>
+            <a:ext cx="8115300" cy="480060"/>
+          </a:xfrm>
+        </p:spPr>
+        <p:txBody>
+          <a:bodyPr wrap="square" lIns="0" rIns="0" tIns="0" bIns="0" anchor="ctr">
+            <a:noAutofit/>
+          </a:bodyPr>
+          <a:lstStyle/>
+          <a:p>
+            <a:pPr algn="l">
+              <a:lnSpc>
+                <a:spcPct val="110000"/>
+              </a:lnSpc>
+              <a:buNone/>
+              <a:defRPr sz="1400" b="0">
+                <a:solidFill>
+                  <a:srgbClr val="303437"/>
+                </a:solidFill>
+                <a:latin typeface="Noto Sans"/>
+              </a:defRPr>
+            </a:pPr>
+            <a:r>
+              <a:rPr sz="1400" b="1" lang="ja-JP" altLang="en-US">
+                <a:solidFill>
+                  <a:srgbClr val="FFFEF8"/>
+                </a:solidFill>
+                <a:latin typeface="Noto Sans"/>
+                <a:ea typeface="Noto Sans CJK JP"/>
+                <a:cs typeface="Noto Sans"/>
+              </a:rPr>
+              <a:t>Appendix: 3. 参考文献</a:t>
+            </a:r>
+          </a:p>
+        </p:txBody>
+      </p:sp>
+      <p:sp>
+        <p:nvSpPr>
+          <p:cNvPr id="4" name="文献 1: CLUE: A Chinese Language Understanding Evaluation Benchmark"/>
+          <p:cNvSpPr txBox="1"/>
+          <p:nvPr/>
+        </p:nvSpPr>
+        <p:spPr>
+          <a:xfrm>
+            <a:off x="548640" y="1463040"/>
+            <a:ext cx="8046720" cy="1574419"/>
+          </a:xfrm>
+          <a:prstGeom prst="rect">
+            <a:avLst/>
+          </a:prstGeom>
+          <a:noFill/>
+        </p:spPr>
+        <p:txBody>
+          <a:bodyPr wrap="square" lIns="0" rIns="0" tIns="0" bIns="0">
+            <a:noAutofit/>
+          </a:bodyPr>
+          <a:lstStyle/>
+          <a:p>
+            <a:pPr algn="l">
+              <a:lnSpc>
+                <a:spcPct val="114000"/>
+              </a:lnSpc>
+              <a:spcBef>
+                <a:spcPts val="0"/>
+              </a:spcBef>
+              <a:spcAft>
+                <a:spcPts val="400"/>
+              </a:spcAft>
+              <a:buNone/>
+              <a:defRPr sz="1850" b="0">
+                <a:solidFill>
+                  <a:srgbClr val="303437"/>
+                </a:solidFill>
+                <a:latin typeface="Noto Sans"/>
+              </a:defRPr>
+            </a:pPr>
+            <a:r>
+              <a:rPr sz="1850" b="1" lang="ja-JP" altLang="en-US">
+                <a:solidFill>
+                  <a:srgbClr val="303437"/>
+                </a:solidFill>
+                <a:latin typeface="Noto Sans"/>
+                <a:ea typeface="Noto Sans CJK JP"/>
+                <a:cs typeface="Noto Sans"/>
+              </a:rPr>
+              <a:t>CLUE: A Chinese Language Understanding Evaluation Benchmark</a:t>
+            </a:r>
+          </a:p>
+          <a:p>
+            <a:pPr algn="l">
+              <a:lnSpc>
+                <a:spcPct val="114000"/>
+              </a:lnSpc>
+              <a:spcBef>
+                <a:spcPts val="0"/>
+              </a:spcBef>
+              <a:spcAft>
+                <a:spcPts val="500"/>
+              </a:spcAft>
+              <a:buNone/>
+              <a:defRPr sz="1250" b="0">
+                <a:solidFill>
+                  <a:srgbClr val="303437"/>
+                </a:solidFill>
+                <a:latin typeface="Noto Sans"/>
+              </a:defRPr>
+            </a:pPr>
+            <a:r>
+              <a:rPr sz="1250" b="0" lang="ja-JP" altLang="en-US">
+                <a:solidFill>
+                  <a:srgbClr val="626669"/>
+                </a:solidFill>
+                <a:latin typeface="Noto Sans"/>
+                <a:ea typeface="Noto Sans CJK JP"/>
+                <a:cs typeface="Noto Sans"/>
+              </a:rPr>
+              <a:t>Liang Xu et al. · 2020 · COLING, pp.4762–4772</a:t>
+            </a:r>
+          </a:p>
+          <a:p>
+            <a:pPr algn="l">
+              <a:lnSpc>
+                <a:spcPct val="114000"/>
+              </a:lnSpc>
+              <a:spcBef>
+                <a:spcPts val="0"/>
+              </a:spcBef>
+              <a:spcAft>
+                <a:spcPts val="400"/>
+              </a:spcAft>
+              <a:buNone/>
+              <a:defRPr sz="1750" b="0">
+                <a:solidFill>
+                  <a:srgbClr val="303437"/>
+                </a:solidFill>
+                <a:latin typeface="Noto Sans"/>
+              </a:defRPr>
+            </a:pPr>
+            <a:r>
+              <a:rPr sz="1750" b="0" lang="ja-JP" altLang="en-US">
+                <a:solidFill>
+                  <a:srgbClr val="303437"/>
+                </a:solidFill>
+                <a:latin typeface="Noto Sans"/>
+                <a:ea typeface="Noto Sans CJK JP"/>
+                <a:cs typeface="Noto Sans"/>
+              </a:rPr>
+              <a:t>中国語の共通評価基盤。ChIDを含む課題でモデルを微調整し、テスト性能と人間評価を報告する。</a:t>
+            </a:r>
+          </a:p>
+          <a:p>
+            <a:pPr algn="l">
+              <a:lnSpc>
+                <a:spcPct val="114000"/>
+              </a:lnSpc>
+              <a:spcBef>
+                <a:spcPts val="0"/>
+              </a:spcBef>
+              <a:spcAft>
+                <a:spcPts val="0"/>
+              </a:spcAft>
+              <a:buNone/>
+              <a:defRPr sz="1050" b="0">
+                <a:solidFill>
+                  <a:srgbClr val="303437"/>
+                </a:solidFill>
+                <a:latin typeface="Noto Sans"/>
+              </a:defRPr>
+            </a:pPr>
+            <a:r>
+              <a:rPr sz="1050" b="0" lang="ja-JP" altLang="en-US">
+                <a:solidFill>
+                  <a:srgbClr val="626669"/>
+                </a:solidFill>
+                <a:latin typeface="Noto Sans"/>
+                <a:ea typeface="Noto Sans CJK JP"/>
+                <a:cs typeface="Noto Sans"/>
+                <a:hlinkClick r:id="rId2"/>
+              </a:rPr>
+              <a:t>https://aclanthology.org/2020.coling-main.419/</a:t>
+            </a:r>
+          </a:p>
+        </p:txBody>
+      </p:sp>
+      <p:sp>
+        <p:nvSpPr>
+          <p:cNvPr id="5" name="文献 2: ChID — CLUE Public Release"/>
+          <p:cNvSpPr txBox="1"/>
+          <p:nvPr/>
+        </p:nvSpPr>
+        <p:spPr>
+          <a:xfrm>
+            <a:off x="548640" y="3040507"/>
+            <a:ext cx="8046720" cy="1574419"/>
+          </a:xfrm>
+          <a:prstGeom prst="rect">
+            <a:avLst/>
+          </a:prstGeom>
+          <a:noFill/>
+        </p:spPr>
+        <p:txBody>
+          <a:bodyPr wrap="square" lIns="0" rIns="0" tIns="0" bIns="0">
+            <a:noAutofit/>
+          </a:bodyPr>
+          <a:lstStyle/>
+          <a:p>
+            <a:pPr algn="l">
+              <a:lnSpc>
+                <a:spcPct val="114000"/>
+              </a:lnSpc>
+              <a:spcBef>
+                <a:spcPts val="0"/>
+              </a:spcBef>
+              <a:spcAft>
+                <a:spcPts val="400"/>
+              </a:spcAft>
+              <a:buNone/>
+              <a:defRPr sz="1850" b="0">
+                <a:solidFill>
+                  <a:srgbClr val="303437"/>
+                </a:solidFill>
+                <a:latin typeface="Noto Sans"/>
+              </a:defRPr>
+            </a:pPr>
+            <a:r>
+              <a:rPr sz="1850" b="1" lang="ja-JP" altLang="en-US">
+                <a:solidFill>
+                  <a:srgbClr val="303437"/>
+                </a:solidFill>
+                <a:latin typeface="Noto Sans"/>
+                <a:ea typeface="Noto Sans CJK JP"/>
+                <a:cs typeface="Noto Sans"/>
+              </a:rPr>
+              <a:t>ChID — CLUE Public Release</a:t>
+            </a:r>
+          </a:p>
+          <a:p>
+            <a:pPr algn="l">
+              <a:lnSpc>
+                <a:spcPct val="114000"/>
+              </a:lnSpc>
+              <a:spcBef>
+                <a:spcPts val="0"/>
+              </a:spcBef>
+              <a:spcAft>
+                <a:spcPts val="500"/>
+              </a:spcAft>
+              <a:buNone/>
+              <a:defRPr sz="1250" b="0">
+                <a:solidFill>
+                  <a:srgbClr val="303437"/>
+                </a:solidFill>
+                <a:latin typeface="Noto Sans"/>
+              </a:defRPr>
+            </a:pPr>
+            <a:r>
+              <a:rPr sz="1250" b="0" lang="ja-JP" altLang="en-US">
+                <a:solidFill>
+                  <a:srgbClr val="626669"/>
+                </a:solidFill>
+                <a:latin typeface="Noto Sans"/>
+                <a:ea typeface="Noto Sans CJK JP"/>
+                <a:cs typeface="Noto Sans"/>
+              </a:rPr>
+              <a:t>CLUE team (n.d.). 公開ZIP、test 1.0 / 1.1。参照2026-10-19。</a:t>
+            </a:r>
+          </a:p>
+          <a:p>
+            <a:pPr algn="l">
+              <a:lnSpc>
+                <a:spcPct val="114000"/>
+              </a:lnSpc>
+              <a:spcBef>
+                <a:spcPts val="0"/>
+              </a:spcBef>
+              <a:spcAft>
+                <a:spcPts val="400"/>
+              </a:spcAft>
+              <a:buNone/>
+              <a:defRPr sz="1750" b="0">
+                <a:solidFill>
+                  <a:srgbClr val="303437"/>
+                </a:solidFill>
+                <a:latin typeface="Noto Sans"/>
+              </a:defRPr>
+            </a:pPr>
+            <a:r>
+              <a:rPr sz="1750" b="0" lang="ja-JP" altLang="en-US">
+                <a:solidFill>
+                  <a:srgbClr val="303437"/>
+                </a:solidFill>
+                <a:latin typeface="Noto Sans"/>
+                <a:ea typeface="Noto Sans CJK JP"/>
+                <a:cs typeface="Noto Sans"/>
+              </a:rPr>
+              <a:t>学習・開発と新旧テスト、空欄IDの正解対応を配布し、CLUE 1.1へのテスト切替えを説明する。</a:t>
+            </a:r>
+          </a:p>
+          <a:p>
+            <a:pPr algn="l">
+              <a:lnSpc>
+                <a:spcPct val="114000"/>
+              </a:lnSpc>
+              <a:spcBef>
+                <a:spcPts val="0"/>
+              </a:spcBef>
+              <a:spcAft>
+                <a:spcPts val="0"/>
+              </a:spcAft>
+              <a:buNone/>
+              <a:defRPr sz="1050" b="0">
+                <a:solidFill>
+                  <a:srgbClr val="303437"/>
+                </a:solidFill>
+                <a:latin typeface="Noto Sans"/>
+              </a:defRPr>
+            </a:pPr>
+            <a:r>
+              <a:rPr sz="1050" b="0" lang="ja-JP" altLang="en-US">
+                <a:solidFill>
+                  <a:srgbClr val="626669"/>
+                </a:solidFill>
+                <a:latin typeface="Noto Sans"/>
+                <a:ea typeface="Noto Sans CJK JP"/>
+                <a:cs typeface="Noto Sans"/>
+                <a:hlinkClick r:id="rId3"/>
+              </a:rPr>
+              <a:t>https://storage.googleapis.com/cluebenchmark/tasks/chid_public.zip</a:t>
+            </a:r>
+          </a:p>
+        </p:txBody>
+      </p:sp>
+    </p:spTree>
+  </p:cSld>
+  <p:clrMapOvr>
+    <a:masterClrMapping/>
+  </p:clrMapOvr>
+</p:sld>
+</file>
+
+<file path=ppt/slides/slide52.xml><?xml version="1.0" encoding="utf-8"?>
+<p:sld xmlns:a="http://schemas.openxmlformats.org/drawingml/2006/main" xmlns:p="http://schemas.openxmlformats.org/presentationml/2006/main" xmlns:r="http://schemas.openxmlformats.org/officeDocument/2006/relationships">
+  <p:cSld>
+    <p:spTree>
+      <p:nvGrpSpPr>
+        <p:cNvPr id="1" name=""/>
+        <p:cNvGrpSpPr/>
+        <p:nvPr/>
+      </p:nvGrpSpPr>
+      <p:grpSpPr/>
+      <p:sp>
+        <p:nvSpPr>
+          <p:cNvPr id="2" name="Title 1"/>
+          <p:cNvSpPr>
+            <a:spLocks noGrp="1"/>
+          </p:cNvSpPr>
+          <p:nvPr>
+            <p:ph type="title"/>
+          </p:nvPr>
+        </p:nvSpPr>
+        <p:spPr>
+          <a:xfrm>
+            <a:off x="468172" y="650138"/>
+            <a:ext cx="8206740" cy="616305"/>
+          </a:xfrm>
+        </p:spPr>
+        <p:txBody>
+          <a:bodyPr wrap="square" lIns="0" rIns="0" tIns="0" bIns="0">
+            <a:noAutofit/>
+          </a:bodyPr>
+          <a:lstStyle/>
+          <a:p>
+            <a:pPr algn="l">
+              <a:lnSpc>
+                <a:spcPct val="110000"/>
+              </a:lnSpc>
+              <a:buNone/>
+              <a:defRPr sz="2800" b="0">
+                <a:solidFill>
+                  <a:srgbClr val="303437"/>
+                </a:solidFill>
+                <a:latin typeface="Noto Sans"/>
+              </a:defRPr>
+            </a:pPr>
+            <a:r>
+              <a:rPr sz="2800" b="1" lang="ja-JP" altLang="en-US">
+                <a:solidFill>
+                  <a:srgbClr val="303437"/>
+                </a:solidFill>
+                <a:latin typeface="Noto Sans"/>
+                <a:ea typeface="Noto Sans CJK JP"/>
+                <a:cs typeface="Noto Sans"/>
+              </a:rPr>
+              <a:t>参考文献</a:t>
+            </a:r>
+          </a:p>
+        </p:txBody>
+      </p:sp>
+      <p:sp>
+        <p:nvSpPr>
+          <p:cNvPr id="3" name="Title 2"/>
+          <p:cNvSpPr>
+            <a:spLocks noGrp="1"/>
+          </p:cNvSpPr>
+          <p:nvPr>
+            <p:ph type="title" idx="2"/>
+          </p:nvPr>
+        </p:nvSpPr>
+        <p:spPr>
+          <a:xfrm>
+            <a:off x="75895" y="0"/>
+            <a:ext cx="8115300" cy="480060"/>
+          </a:xfrm>
+        </p:spPr>
+        <p:txBody>
+          <a:bodyPr wrap="square" lIns="0" rIns="0" tIns="0" bIns="0" anchor="ctr">
+            <a:noAutofit/>
+          </a:bodyPr>
+          <a:lstStyle/>
+          <a:p>
+            <a:pPr algn="l">
+              <a:lnSpc>
+                <a:spcPct val="110000"/>
+              </a:lnSpc>
+              <a:buNone/>
+              <a:defRPr sz="1400" b="0">
+                <a:solidFill>
+                  <a:srgbClr val="303437"/>
+                </a:solidFill>
+                <a:latin typeface="Noto Sans"/>
+              </a:defRPr>
+            </a:pPr>
+            <a:r>
+              <a:rPr sz="1400" b="1" lang="ja-JP" altLang="en-US">
+                <a:solidFill>
+                  <a:srgbClr val="FFFEF8"/>
+                </a:solidFill>
+                <a:latin typeface="Noto Sans"/>
+                <a:ea typeface="Noto Sans CJK JP"/>
+                <a:cs typeface="Noto Sans"/>
+              </a:rPr>
+              <a:t>Appendix: 3. 参考文献</a:t>
+            </a:r>
+          </a:p>
+        </p:txBody>
+      </p:sp>
+      <p:sp>
+        <p:nvSpPr>
+          <p:cNvPr id="4" name="文献 1: FewCLUE: A Chinese Few-shot Learning Evaluation Benchmark"/>
+          <p:cNvSpPr txBox="1"/>
+          <p:nvPr/>
+        </p:nvSpPr>
+        <p:spPr>
+          <a:xfrm>
+            <a:off x="548640" y="1463040"/>
+            <a:ext cx="8046720" cy="1574419"/>
+          </a:xfrm>
+          <a:prstGeom prst="rect">
+            <a:avLst/>
+          </a:prstGeom>
+          <a:noFill/>
+        </p:spPr>
+        <p:txBody>
+          <a:bodyPr wrap="square" lIns="0" rIns="0" tIns="0" bIns="0">
+            <a:noAutofit/>
+          </a:bodyPr>
+          <a:lstStyle/>
+          <a:p>
+            <a:pPr algn="l">
+              <a:lnSpc>
+                <a:spcPct val="114000"/>
+              </a:lnSpc>
+              <a:spcBef>
+                <a:spcPts val="0"/>
+              </a:spcBef>
+              <a:spcAft>
+                <a:spcPts val="400"/>
+              </a:spcAft>
+              <a:buNone/>
+              <a:defRPr sz="1850" b="0">
+                <a:solidFill>
+                  <a:srgbClr val="303437"/>
+                </a:solidFill>
+                <a:latin typeface="Noto Sans"/>
+              </a:defRPr>
+            </a:pPr>
+            <a:r>
+              <a:rPr sz="1850" b="1" lang="ja-JP" altLang="en-US">
+                <a:solidFill>
+                  <a:srgbClr val="303437"/>
+                </a:solidFill>
+                <a:latin typeface="Noto Sans"/>
+                <a:ea typeface="Noto Sans CJK JP"/>
+                <a:cs typeface="Noto Sans"/>
+              </a:rPr>
+              <a:t>FewCLUE: A Chinese Few-shot Learning Evaluation Benchmark</a:t>
+            </a:r>
+          </a:p>
+          <a:p>
+            <a:pPr algn="l">
+              <a:lnSpc>
+                <a:spcPct val="114000"/>
+              </a:lnSpc>
+              <a:spcBef>
+                <a:spcPts val="0"/>
+              </a:spcBef>
+              <a:spcAft>
+                <a:spcPts val="500"/>
+              </a:spcAft>
+              <a:buNone/>
+              <a:defRPr sz="1250" b="0">
+                <a:solidFill>
+                  <a:srgbClr val="303437"/>
+                </a:solidFill>
+                <a:latin typeface="Noto Sans"/>
+              </a:defRPr>
+            </a:pPr>
+            <a:r>
+              <a:rPr sz="1250" b="0" lang="ja-JP" altLang="en-US">
+                <a:solidFill>
+                  <a:srgbClr val="626669"/>
+                </a:solidFill>
+                <a:latin typeface="Noto Sans"/>
+                <a:ea typeface="Noto Sans CJK JP"/>
+                <a:cs typeface="Noto Sans"/>
+              </a:rPr>
+              <a:t>Liang Xu et al. · 2021 · arXiv:2107.07498v2</a:t>
+            </a:r>
+          </a:p>
+          <a:p>
+            <a:pPr algn="l">
+              <a:lnSpc>
+                <a:spcPct val="114000"/>
+              </a:lnSpc>
+              <a:spcBef>
+                <a:spcPts val="0"/>
+              </a:spcBef>
+              <a:spcAft>
+                <a:spcPts val="400"/>
+              </a:spcAft>
+              <a:buNone/>
+              <a:defRPr sz="1750" b="0">
+                <a:solidFill>
+                  <a:srgbClr val="303437"/>
+                </a:solidFill>
+                <a:latin typeface="Noto Sans"/>
+              </a:defRPr>
+            </a:pPr>
+            <a:r>
+              <a:rPr sz="1750" b="0" lang="ja-JP" altLang="en-US">
+                <a:solidFill>
+                  <a:srgbClr val="303437"/>
+                </a:solidFill>
+                <a:latin typeface="Noto Sans"/>
+                <a:ea typeface="Noto Sans CJK JP"/>
+                <a:cs typeface="Noto Sans"/>
+              </a:rPr>
+              <a:t>九つの中国語課題による少数例学習評価。ChIDには正解位置ごとに六問、合計42問の学習・開発組を用意する。</a:t>
+            </a:r>
+          </a:p>
+          <a:p>
+            <a:pPr algn="l">
+              <a:lnSpc>
+                <a:spcPct val="114000"/>
+              </a:lnSpc>
+              <a:spcBef>
+                <a:spcPts val="0"/>
+              </a:spcBef>
+              <a:spcAft>
+                <a:spcPts val="0"/>
+              </a:spcAft>
+              <a:buNone/>
+              <a:defRPr sz="1050" b="0">
+                <a:solidFill>
+                  <a:srgbClr val="303437"/>
+                </a:solidFill>
+                <a:latin typeface="Noto Sans"/>
+              </a:defRPr>
+            </a:pPr>
+            <a:r>
+              <a:rPr sz="1050" b="0" lang="ja-JP" altLang="en-US">
+                <a:solidFill>
+                  <a:srgbClr val="626669"/>
+                </a:solidFill>
+                <a:latin typeface="Noto Sans"/>
+                <a:ea typeface="Noto Sans CJK JP"/>
+                <a:cs typeface="Noto Sans"/>
+                <a:hlinkClick r:id="rId2"/>
+              </a:rPr>
+              <a:t>https://arxiv.org/abs/2107.07498</a:t>
+            </a:r>
+          </a:p>
+        </p:txBody>
+      </p:sp>
+      <p:sp>
+        <p:nvSpPr>
+          <p:cNvPr id="5" name="文献 2: FewCLUE — ChID Data"/>
+          <p:cNvSpPr txBox="1"/>
+          <p:nvPr/>
+        </p:nvSpPr>
+        <p:spPr>
+          <a:xfrm>
+            <a:off x="548640" y="3040507"/>
+            <a:ext cx="8046720" cy="1574419"/>
+          </a:xfrm>
+          <a:prstGeom prst="rect">
+            <a:avLst/>
+          </a:prstGeom>
+          <a:noFill/>
+        </p:spPr>
+        <p:txBody>
+          <a:bodyPr wrap="square" lIns="0" rIns="0" tIns="0" bIns="0">
+            <a:noAutofit/>
+          </a:bodyPr>
+          <a:lstStyle/>
+          <a:p>
+            <a:pPr algn="l">
+              <a:lnSpc>
+                <a:spcPct val="114000"/>
+              </a:lnSpc>
+              <a:spcBef>
+                <a:spcPts val="0"/>
+              </a:spcBef>
+              <a:spcAft>
+                <a:spcPts val="400"/>
+              </a:spcAft>
+              <a:buNone/>
+              <a:defRPr sz="1850" b="0">
+                <a:solidFill>
+                  <a:srgbClr val="303437"/>
+                </a:solidFill>
+                <a:latin typeface="Noto Sans"/>
+              </a:defRPr>
+            </a:pPr>
+            <a:r>
+              <a:rPr sz="1850" b="1" lang="ja-JP" altLang="en-US">
+                <a:solidFill>
+                  <a:srgbClr val="303437"/>
+                </a:solidFill>
+                <a:latin typeface="Noto Sans"/>
+                <a:ea typeface="Noto Sans CJK JP"/>
+                <a:cs typeface="Noto Sans"/>
+              </a:rPr>
+              <a:t>FewCLUE — ChID Data</a:t>
+            </a:r>
+          </a:p>
+          <a:p>
+            <a:pPr algn="l">
+              <a:lnSpc>
+                <a:spcPct val="114000"/>
+              </a:lnSpc>
+              <a:spcBef>
+                <a:spcPts val="0"/>
+              </a:spcBef>
+              <a:spcAft>
+                <a:spcPts val="500"/>
+              </a:spcAft>
+              <a:buNone/>
+              <a:defRPr sz="1250" b="0">
+                <a:solidFill>
+                  <a:srgbClr val="303437"/>
+                </a:solidFill>
+                <a:latin typeface="Noto Sans"/>
+              </a:defRPr>
+            </a:pPr>
+            <a:r>
+              <a:rPr sz="1250" b="0" lang="ja-JP" altLang="en-US">
+                <a:solidFill>
+                  <a:srgbClr val="626669"/>
+                </a:solidFill>
+                <a:latin typeface="Noto Sans"/>
+                <a:ea typeface="Noto Sans CJK JP"/>
+                <a:cs typeface="Noto Sans"/>
+              </a:rPr>
+              <a:t>CLUE team (n.d.). 公式配布。参照2026-10-19。</a:t>
+            </a:r>
+          </a:p>
+          <a:p>
+            <a:pPr algn="l">
+              <a:lnSpc>
+                <a:spcPct val="114000"/>
+              </a:lnSpc>
+              <a:spcBef>
+                <a:spcPts val="0"/>
+              </a:spcBef>
+              <a:spcAft>
+                <a:spcPts val="400"/>
+              </a:spcAft>
+              <a:buNone/>
+              <a:defRPr sz="1750" b="0">
+                <a:solidFill>
+                  <a:srgbClr val="303437"/>
+                </a:solidFill>
+                <a:latin typeface="Noto Sans"/>
+              </a:defRPr>
+            </a:pPr>
+            <a:r>
+              <a:rPr sz="1750" b="0" lang="ja-JP" altLang="en-US">
+                <a:solidFill>
+                  <a:srgbClr val="303437"/>
+                </a:solidFill>
+                <a:latin typeface="Noto Sans"/>
+                <a:ea typeface="Noto Sans CJK JP"/>
+                <a:cs typeface="Noto Sans"/>
+              </a:rPr>
+              <a:t>一空欄・七候補の15ファイルを公開する。</a:t>
+            </a:r>
+          </a:p>
+          <a:p>
+            <a:pPr algn="l">
+              <a:lnSpc>
+                <a:spcPct val="114000"/>
+              </a:lnSpc>
+              <a:spcBef>
+                <a:spcPts val="0"/>
+              </a:spcBef>
+              <a:spcAft>
+                <a:spcPts val="0"/>
+              </a:spcAft>
+              <a:buNone/>
+              <a:defRPr sz="1050" b="0">
+                <a:solidFill>
+                  <a:srgbClr val="303437"/>
+                </a:solidFill>
+                <a:latin typeface="Noto Sans"/>
+              </a:defRPr>
+            </a:pPr>
+            <a:r>
+              <a:rPr sz="1050" b="0" lang="ja-JP" altLang="en-US">
+                <a:solidFill>
+                  <a:srgbClr val="626669"/>
+                </a:solidFill>
+                <a:latin typeface="Noto Sans"/>
+                <a:ea typeface="Noto Sans CJK JP"/>
+                <a:cs typeface="Noto Sans"/>
+                <a:hlinkClick r:id="rId3"/>
+              </a:rPr>
+              <a:t>https://github.com/CLUEbenchmark/FewCLUE/tree/main/datasets/chid</a:t>
             </a:r>
           </a:p>
         </p:txBody>
@@ -30357,1646 +31026,6 @@
       </p:sp>
       <p:sp>
         <p:nvSpPr>
-          <p:cNvPr id="4" name="文献 1: ChID — Original Data Distribution"/>
-          <p:cNvSpPr txBox="1"/>
-          <p:nvPr/>
-        </p:nvSpPr>
-        <p:spPr>
-          <a:xfrm>
-            <a:off x="548640" y="1463040"/>
-            <a:ext cx="8046720" cy="1574419"/>
-          </a:xfrm>
-          <a:prstGeom prst="rect">
-            <a:avLst/>
-          </a:prstGeom>
-          <a:noFill/>
-        </p:spPr>
-        <p:txBody>
-          <a:bodyPr wrap="square" lIns="0" rIns="0" tIns="0" bIns="0">
-            <a:noAutofit/>
-          </a:bodyPr>
-          <a:lstStyle/>
-          <a:p>
-            <a:pPr algn="l">
-              <a:lnSpc>
-                <a:spcPct val="114000"/>
-              </a:lnSpc>
-              <a:spcBef>
-                <a:spcPts val="0"/>
-              </a:spcBef>
-              <a:spcAft>
-                <a:spcPts val="400"/>
-              </a:spcAft>
-              <a:buNone/>
-              <a:defRPr sz="1850" b="0">
-                <a:solidFill>
-                  <a:srgbClr val="303437"/>
-                </a:solidFill>
-                <a:latin typeface="Noto Sans"/>
-              </a:defRPr>
-            </a:pPr>
-            <a:r>
-              <a:rPr sz="1850" b="1" lang="ja-JP" altLang="en-US">
-                <a:solidFill>
-                  <a:srgbClr val="303437"/>
-                </a:solidFill>
-                <a:latin typeface="Noto Sans"/>
-                <a:ea typeface="Noto Sans CJK JP"/>
-                <a:cs typeface="Noto Sans"/>
-              </a:rPr>
-              <a:t>ChID — Original Data Distribution</a:t>
-            </a:r>
-          </a:p>
-          <a:p>
-            <a:pPr algn="l">
-              <a:lnSpc>
-                <a:spcPct val="114000"/>
-              </a:lnSpc>
-              <a:spcBef>
-                <a:spcPts val="0"/>
-              </a:spcBef>
-              <a:spcAft>
-                <a:spcPts val="500"/>
-              </a:spcAft>
-              <a:buNone/>
-              <a:defRPr sz="1250" b="0">
-                <a:solidFill>
-                  <a:srgbClr val="303437"/>
-                </a:solidFill>
-                <a:latin typeface="Noto Sans"/>
-              </a:defRPr>
-            </a:pPr>
-            <a:r>
-              <a:rPr sz="1250" b="0" lang="ja-JP" altLang="en-US">
-                <a:solidFill>
-                  <a:srgbClr val="626669"/>
-                </a:solidFill>
-                <a:latin typeface="Noto Sans"/>
-                <a:ea typeface="Noto Sans CJK JP"/>
-                <a:cs typeface="Noto Sans"/>
-              </a:rPr>
-              <a:t>thu-coai · 作者が案内する配布</a:t>
-            </a:r>
-          </a:p>
-          <a:p>
-            <a:pPr algn="l">
-              <a:lnSpc>
-                <a:spcPct val="114000"/>
-              </a:lnSpc>
-              <a:spcBef>
-                <a:spcPts val="0"/>
-              </a:spcBef>
-              <a:spcAft>
-                <a:spcPts val="400"/>
-              </a:spcAft>
-              <a:buNone/>
-              <a:defRPr sz="1750" b="0">
-                <a:solidFill>
-                  <a:srgbClr val="303437"/>
-                </a:solidFill>
-                <a:latin typeface="Noto Sans"/>
-              </a:defRPr>
-            </a:pPr>
-            <a:r>
-              <a:rPr sz="1750" b="0" lang="ja-JP" altLang="en-US">
-                <a:solidFill>
-                  <a:srgbClr val="303437"/>
-                </a:solidFill>
-                <a:latin typeface="Noto Sans"/>
-                <a:ea typeface="Noto Sans CJK JP"/>
-                <a:cs typeface="Noto Sans"/>
-              </a:rPr>
-              <a:t>学習・開発・Test・Outと、同じTestの候補を変えたRan/Simを、正解付きの行形式で公開する。</a:t>
-            </a:r>
-          </a:p>
-          <a:p>
-            <a:pPr algn="l">
-              <a:lnSpc>
-                <a:spcPct val="114000"/>
-              </a:lnSpc>
-              <a:spcBef>
-                <a:spcPts val="0"/>
-              </a:spcBef>
-              <a:spcAft>
-                <a:spcPts val="0"/>
-              </a:spcAft>
-              <a:buNone/>
-              <a:defRPr sz="1050" b="0">
-                <a:solidFill>
-                  <a:srgbClr val="303437"/>
-                </a:solidFill>
-                <a:latin typeface="Noto Sans"/>
-              </a:defRPr>
-            </a:pPr>
-            <a:r>
-              <a:rPr sz="1050" b="0" lang="ja-JP" altLang="en-US">
-                <a:solidFill>
-                  <a:srgbClr val="626669"/>
-                </a:solidFill>
-                <a:latin typeface="Noto Sans"/>
-                <a:ea typeface="Noto Sans CJK JP"/>
-                <a:cs typeface="Noto Sans"/>
-                <a:hlinkClick r:id="rId2"/>
-              </a:rPr>
-              <a:t>https://huggingface.co/datasets/thu-coai/chid/tree/main/original</a:t>
-            </a:r>
-          </a:p>
-        </p:txBody>
-      </p:sp>
-      <p:sp>
-        <p:nvSpPr>
-          <p:cNvPr id="5" name="文献 2: ChID-Adapt — Competition Data"/>
-          <p:cNvSpPr txBox="1"/>
-          <p:nvPr/>
-        </p:nvSpPr>
-        <p:spPr>
-          <a:xfrm>
-            <a:off x="548640" y="3040507"/>
-            <a:ext cx="8046720" cy="1497838"/>
-          </a:xfrm>
-          <a:prstGeom prst="rect">
-            <a:avLst/>
-          </a:prstGeom>
-          <a:noFill/>
-        </p:spPr>
-        <p:txBody>
-          <a:bodyPr wrap="square" lIns="0" rIns="0" tIns="0" bIns="0">
-            <a:noAutofit/>
-          </a:bodyPr>
-          <a:lstStyle/>
-          <a:p>
-            <a:pPr algn="l">
-              <a:lnSpc>
-                <a:spcPct val="114000"/>
-              </a:lnSpc>
-              <a:spcBef>
-                <a:spcPts val="0"/>
-              </a:spcBef>
-              <a:spcAft>
-                <a:spcPts val="400"/>
-              </a:spcAft>
-              <a:buNone/>
-              <a:defRPr sz="1850" b="0">
-                <a:solidFill>
-                  <a:srgbClr val="303437"/>
-                </a:solidFill>
-                <a:latin typeface="Noto Sans"/>
-              </a:defRPr>
-            </a:pPr>
-            <a:r>
-              <a:rPr sz="1850" b="1" lang="ja-JP" altLang="en-US">
-                <a:solidFill>
-                  <a:srgbClr val="303437"/>
-                </a:solidFill>
-                <a:latin typeface="Noto Sans"/>
-                <a:ea typeface="Noto Sans CJK JP"/>
-                <a:cs typeface="Noto Sans"/>
-              </a:rPr>
-              <a:t>ChID-Adapt — Competition Data</a:t>
-            </a:r>
-          </a:p>
-          <a:p>
-            <a:pPr algn="l">
-              <a:lnSpc>
-                <a:spcPct val="114000"/>
-              </a:lnSpc>
-              <a:spcBef>
-                <a:spcPts val="0"/>
-              </a:spcBef>
-              <a:spcAft>
-                <a:spcPts val="500"/>
-              </a:spcAft>
-              <a:buNone/>
-              <a:defRPr sz="1250" b="0">
-                <a:solidFill>
-                  <a:srgbClr val="303437"/>
-                </a:solidFill>
-                <a:latin typeface="Noto Sans"/>
-              </a:defRPr>
-            </a:pPr>
-            <a:r>
-              <a:rPr sz="1250" b="0" lang="ja-JP" altLang="en-US">
-                <a:solidFill>
-                  <a:srgbClr val="626669"/>
-                </a:solidFill>
-                <a:latin typeface="Noto Sans"/>
-                <a:ea typeface="Noto Sans CJK JP"/>
-                <a:cs typeface="Noto Sans"/>
-              </a:rPr>
-              <a:t>Chujie Zheng et al. · 2019年コンテスト向け公式説明</a:t>
-            </a:r>
-          </a:p>
-          <a:p>
-            <a:pPr algn="l">
-              <a:lnSpc>
-                <a:spcPct val="114000"/>
-              </a:lnSpc>
-              <a:spcBef>
-                <a:spcPts val="0"/>
-              </a:spcBef>
-              <a:spcAft>
-                <a:spcPts val="400"/>
-              </a:spcAft>
-              <a:buNone/>
-              <a:defRPr sz="1750" b="0">
-                <a:solidFill>
-                  <a:srgbClr val="303437"/>
-                </a:solidFill>
-                <a:latin typeface="Noto Sans"/>
-              </a:defRPr>
-            </a:pPr>
-            <a:r>
-              <a:rPr sz="1750" b="0" lang="ja-JP" altLang="en-US">
-                <a:solidFill>
-                  <a:srgbClr val="303437"/>
-                </a:solidFill>
-                <a:latin typeface="Noto Sans"/>
-                <a:ea typeface="Noto Sans CJK JP"/>
-                <a:cs typeface="Noto Sans"/>
-              </a:rPr>
-              <a:t>複数文章が十候補を共有し、文脈間の比較を利用して空欄を埋める形式。データとRNN/BERTベースラインを案内する。</a:t>
-            </a:r>
-          </a:p>
-          <a:p>
-            <a:pPr algn="l">
-              <a:lnSpc>
-                <a:spcPct val="114000"/>
-              </a:lnSpc>
-              <a:spcBef>
-                <a:spcPts val="0"/>
-              </a:spcBef>
-              <a:spcAft>
-                <a:spcPts val="0"/>
-              </a:spcAft>
-              <a:buNone/>
-              <a:defRPr sz="1050" b="0">
-                <a:solidFill>
-                  <a:srgbClr val="303437"/>
-                </a:solidFill>
-                <a:latin typeface="Noto Sans"/>
-              </a:defRPr>
-            </a:pPr>
-            <a:r>
-              <a:rPr sz="1050" b="0" lang="ja-JP" altLang="en-US">
-                <a:solidFill>
-                  <a:srgbClr val="626669"/>
-                </a:solidFill>
-                <a:latin typeface="Noto Sans"/>
-                <a:ea typeface="Noto Sans CJK JP"/>
-                <a:cs typeface="Noto Sans"/>
-                <a:hlinkClick r:id="rId3"/>
-              </a:rPr>
-              <a:t>https://github.com/chujiezheng/ChID-Dataset/blob/master/Competition/README.md</a:t>
-            </a:r>
-          </a:p>
-        </p:txBody>
-      </p:sp>
-    </p:spTree>
-  </p:cSld>
-  <p:clrMapOvr>
-    <a:masterClrMapping/>
-  </p:clrMapOvr>
-</p:sld>
-</file>
-
-<file path=ppt/slides/slide55.xml><?xml version="1.0" encoding="utf-8"?>
-<p:sld xmlns:a="http://schemas.openxmlformats.org/drawingml/2006/main" xmlns:p="http://schemas.openxmlformats.org/presentationml/2006/main" xmlns:r="http://schemas.openxmlformats.org/officeDocument/2006/relationships">
-  <p:cSld>
-    <p:spTree>
-      <p:nvGrpSpPr>
-        <p:cNvPr id="1" name=""/>
-        <p:cNvGrpSpPr/>
-        <p:nvPr/>
-      </p:nvGrpSpPr>
-      <p:grpSpPr/>
-      <p:sp>
-        <p:nvSpPr>
-          <p:cNvPr id="2" name="Title 1"/>
-          <p:cNvSpPr>
-            <a:spLocks noGrp="1"/>
-          </p:cNvSpPr>
-          <p:nvPr>
-            <p:ph type="title"/>
-          </p:nvPr>
-        </p:nvSpPr>
-        <p:spPr>
-          <a:xfrm>
-            <a:off x="468172" y="650138"/>
-            <a:ext cx="8206740" cy="616305"/>
-          </a:xfrm>
-        </p:spPr>
-        <p:txBody>
-          <a:bodyPr wrap="square" lIns="0" rIns="0" tIns="0" bIns="0">
-            <a:noAutofit/>
-          </a:bodyPr>
-          <a:lstStyle/>
-          <a:p>
-            <a:pPr algn="l">
-              <a:lnSpc>
-                <a:spcPct val="110000"/>
-              </a:lnSpc>
-              <a:buNone/>
-              <a:defRPr sz="2800" b="0">
-                <a:solidFill>
-                  <a:srgbClr val="303437"/>
-                </a:solidFill>
-                <a:latin typeface="Noto Sans"/>
-              </a:defRPr>
-            </a:pPr>
-            <a:r>
-              <a:rPr sz="2800" b="1" lang="ja-JP" altLang="en-US">
-                <a:solidFill>
-                  <a:srgbClr val="303437"/>
-                </a:solidFill>
-                <a:latin typeface="Noto Sans"/>
-                <a:ea typeface="Noto Sans CJK JP"/>
-                <a:cs typeface="Noto Sans"/>
-              </a:rPr>
-              <a:t>参考文献</a:t>
-            </a:r>
-          </a:p>
-        </p:txBody>
-      </p:sp>
-      <p:sp>
-        <p:nvSpPr>
-          <p:cNvPr id="3" name="Title 2"/>
-          <p:cNvSpPr>
-            <a:spLocks noGrp="1"/>
-          </p:cNvSpPr>
-          <p:nvPr>
-            <p:ph type="title" idx="2"/>
-          </p:nvPr>
-        </p:nvSpPr>
-        <p:spPr>
-          <a:xfrm>
-            <a:off x="75895" y="0"/>
-            <a:ext cx="8115300" cy="480060"/>
-          </a:xfrm>
-        </p:spPr>
-        <p:txBody>
-          <a:bodyPr wrap="square" lIns="0" rIns="0" tIns="0" bIns="0" anchor="ctr">
-            <a:noAutofit/>
-          </a:bodyPr>
-          <a:lstStyle/>
-          <a:p>
-            <a:pPr algn="l">
-              <a:lnSpc>
-                <a:spcPct val="110000"/>
-              </a:lnSpc>
-              <a:buNone/>
-              <a:defRPr sz="1400" b="0">
-                <a:solidFill>
-                  <a:srgbClr val="303437"/>
-                </a:solidFill>
-                <a:latin typeface="Noto Sans"/>
-              </a:defRPr>
-            </a:pPr>
-            <a:r>
-              <a:rPr sz="1400" b="1" lang="ja-JP" altLang="en-US">
-                <a:solidFill>
-                  <a:srgbClr val="FFFEF8"/>
-                </a:solidFill>
-                <a:latin typeface="Noto Sans"/>
-                <a:ea typeface="Noto Sans CJK JP"/>
-                <a:cs typeface="Noto Sans"/>
-              </a:rPr>
-              <a:t>Appendix: 3. 参考文献</a:t>
-            </a:r>
-          </a:p>
-        </p:txBody>
-      </p:sp>
-      <p:sp>
-        <p:nvSpPr>
-          <p:cNvPr id="4" name="文献 1: CLUE: A Chinese Language Understanding Evaluation Benchmark"/>
-          <p:cNvSpPr txBox="1"/>
-          <p:nvPr/>
-        </p:nvSpPr>
-        <p:spPr>
-          <a:xfrm>
-            <a:off x="548640" y="1463040"/>
-            <a:ext cx="8046720" cy="1574419"/>
-          </a:xfrm>
-          <a:prstGeom prst="rect">
-            <a:avLst/>
-          </a:prstGeom>
-          <a:noFill/>
-        </p:spPr>
-        <p:txBody>
-          <a:bodyPr wrap="square" lIns="0" rIns="0" tIns="0" bIns="0">
-            <a:noAutofit/>
-          </a:bodyPr>
-          <a:lstStyle/>
-          <a:p>
-            <a:pPr algn="l">
-              <a:lnSpc>
-                <a:spcPct val="114000"/>
-              </a:lnSpc>
-              <a:spcBef>
-                <a:spcPts val="0"/>
-              </a:spcBef>
-              <a:spcAft>
-                <a:spcPts val="400"/>
-              </a:spcAft>
-              <a:buNone/>
-              <a:defRPr sz="1850" b="0">
-                <a:solidFill>
-                  <a:srgbClr val="303437"/>
-                </a:solidFill>
-                <a:latin typeface="Noto Sans"/>
-              </a:defRPr>
-            </a:pPr>
-            <a:r>
-              <a:rPr sz="1850" b="1" lang="ja-JP" altLang="en-US">
-                <a:solidFill>
-                  <a:srgbClr val="303437"/>
-                </a:solidFill>
-                <a:latin typeface="Noto Sans"/>
-                <a:ea typeface="Noto Sans CJK JP"/>
-                <a:cs typeface="Noto Sans"/>
-              </a:rPr>
-              <a:t>CLUE: A Chinese Language Understanding Evaluation Benchmark</a:t>
-            </a:r>
-          </a:p>
-          <a:p>
-            <a:pPr algn="l">
-              <a:lnSpc>
-                <a:spcPct val="114000"/>
-              </a:lnSpc>
-              <a:spcBef>
-                <a:spcPts val="0"/>
-              </a:spcBef>
-              <a:spcAft>
-                <a:spcPts val="500"/>
-              </a:spcAft>
-              <a:buNone/>
-              <a:defRPr sz="1250" b="0">
-                <a:solidFill>
-                  <a:srgbClr val="303437"/>
-                </a:solidFill>
-                <a:latin typeface="Noto Sans"/>
-              </a:defRPr>
-            </a:pPr>
-            <a:r>
-              <a:rPr sz="1250" b="0" lang="ja-JP" altLang="en-US">
-                <a:solidFill>
-                  <a:srgbClr val="626669"/>
-                </a:solidFill>
-                <a:latin typeface="Noto Sans"/>
-                <a:ea typeface="Noto Sans CJK JP"/>
-                <a:cs typeface="Noto Sans"/>
-              </a:rPr>
-              <a:t>Liang Xu et al. · 2020 · COLING, pp.4762–4772</a:t>
-            </a:r>
-          </a:p>
-          <a:p>
-            <a:pPr algn="l">
-              <a:lnSpc>
-                <a:spcPct val="114000"/>
-              </a:lnSpc>
-              <a:spcBef>
-                <a:spcPts val="0"/>
-              </a:spcBef>
-              <a:spcAft>
-                <a:spcPts val="400"/>
-              </a:spcAft>
-              <a:buNone/>
-              <a:defRPr sz="1750" b="0">
-                <a:solidFill>
-                  <a:srgbClr val="303437"/>
-                </a:solidFill>
-                <a:latin typeface="Noto Sans"/>
-              </a:defRPr>
-            </a:pPr>
-            <a:r>
-              <a:rPr sz="1750" b="0" lang="ja-JP" altLang="en-US">
-                <a:solidFill>
-                  <a:srgbClr val="303437"/>
-                </a:solidFill>
-                <a:latin typeface="Noto Sans"/>
-                <a:ea typeface="Noto Sans CJK JP"/>
-                <a:cs typeface="Noto Sans"/>
-              </a:rPr>
-              <a:t>中国語の共通評価基盤。ChIDを含む課題でモデルを微調整し、テスト性能と人間評価を報告する。</a:t>
-            </a:r>
-          </a:p>
-          <a:p>
-            <a:pPr algn="l">
-              <a:lnSpc>
-                <a:spcPct val="114000"/>
-              </a:lnSpc>
-              <a:spcBef>
-                <a:spcPts val="0"/>
-              </a:spcBef>
-              <a:spcAft>
-                <a:spcPts val="0"/>
-              </a:spcAft>
-              <a:buNone/>
-              <a:defRPr sz="1050" b="0">
-                <a:solidFill>
-                  <a:srgbClr val="303437"/>
-                </a:solidFill>
-                <a:latin typeface="Noto Sans"/>
-              </a:defRPr>
-            </a:pPr>
-            <a:r>
-              <a:rPr sz="1050" b="0" lang="ja-JP" altLang="en-US">
-                <a:solidFill>
-                  <a:srgbClr val="626669"/>
-                </a:solidFill>
-                <a:latin typeface="Noto Sans"/>
-                <a:ea typeface="Noto Sans CJK JP"/>
-                <a:cs typeface="Noto Sans"/>
-                <a:hlinkClick r:id="rId2"/>
-              </a:rPr>
-              <a:t>https://aclanthology.org/2020.coling-main.419/</a:t>
-            </a:r>
-          </a:p>
-        </p:txBody>
-      </p:sp>
-      <p:sp>
-        <p:nvSpPr>
-          <p:cNvPr id="5" name="文献 2: ChID — CLUE Public Release"/>
-          <p:cNvSpPr txBox="1"/>
-          <p:nvPr/>
-        </p:nvSpPr>
-        <p:spPr>
-          <a:xfrm>
-            <a:off x="548640" y="3040507"/>
-            <a:ext cx="8046720" cy="1574419"/>
-          </a:xfrm>
-          <a:prstGeom prst="rect">
-            <a:avLst/>
-          </a:prstGeom>
-          <a:noFill/>
-        </p:spPr>
-        <p:txBody>
-          <a:bodyPr wrap="square" lIns="0" rIns="0" tIns="0" bIns="0">
-            <a:noAutofit/>
-          </a:bodyPr>
-          <a:lstStyle/>
-          <a:p>
-            <a:pPr algn="l">
-              <a:lnSpc>
-                <a:spcPct val="114000"/>
-              </a:lnSpc>
-              <a:spcBef>
-                <a:spcPts val="0"/>
-              </a:spcBef>
-              <a:spcAft>
-                <a:spcPts val="400"/>
-              </a:spcAft>
-              <a:buNone/>
-              <a:defRPr sz="1850" b="0">
-                <a:solidFill>
-                  <a:srgbClr val="303437"/>
-                </a:solidFill>
-                <a:latin typeface="Noto Sans"/>
-              </a:defRPr>
-            </a:pPr>
-            <a:r>
-              <a:rPr sz="1850" b="1" lang="ja-JP" altLang="en-US">
-                <a:solidFill>
-                  <a:srgbClr val="303437"/>
-                </a:solidFill>
-                <a:latin typeface="Noto Sans"/>
-                <a:ea typeface="Noto Sans CJK JP"/>
-                <a:cs typeface="Noto Sans"/>
-              </a:rPr>
-              <a:t>ChID — CLUE Public Release</a:t>
-            </a:r>
-          </a:p>
-          <a:p>
-            <a:pPr algn="l">
-              <a:lnSpc>
-                <a:spcPct val="114000"/>
-              </a:lnSpc>
-              <a:spcBef>
-                <a:spcPts val="0"/>
-              </a:spcBef>
-              <a:spcAft>
-                <a:spcPts val="500"/>
-              </a:spcAft>
-              <a:buNone/>
-              <a:defRPr sz="1250" b="0">
-                <a:solidFill>
-                  <a:srgbClr val="303437"/>
-                </a:solidFill>
-                <a:latin typeface="Noto Sans"/>
-              </a:defRPr>
-            </a:pPr>
-            <a:r>
-              <a:rPr sz="1250" b="0" lang="ja-JP" altLang="en-US">
-                <a:solidFill>
-                  <a:srgbClr val="626669"/>
-                </a:solidFill>
-                <a:latin typeface="Noto Sans"/>
-                <a:ea typeface="Noto Sans CJK JP"/>
-                <a:cs typeface="Noto Sans"/>
-              </a:rPr>
-              <a:t>CLUE team · 公開ZIP · test 1.0 / 1.1</a:t>
-            </a:r>
-          </a:p>
-          <a:p>
-            <a:pPr algn="l">
-              <a:lnSpc>
-                <a:spcPct val="114000"/>
-              </a:lnSpc>
-              <a:spcBef>
-                <a:spcPts val="0"/>
-              </a:spcBef>
-              <a:spcAft>
-                <a:spcPts val="400"/>
-              </a:spcAft>
-              <a:buNone/>
-              <a:defRPr sz="1750" b="0">
-                <a:solidFill>
-                  <a:srgbClr val="303437"/>
-                </a:solidFill>
-                <a:latin typeface="Noto Sans"/>
-              </a:defRPr>
-            </a:pPr>
-            <a:r>
-              <a:rPr sz="1750" b="0" lang="ja-JP" altLang="en-US">
-                <a:solidFill>
-                  <a:srgbClr val="303437"/>
-                </a:solidFill>
-                <a:latin typeface="Noto Sans"/>
-                <a:ea typeface="Noto Sans CJK JP"/>
-                <a:cs typeface="Noto Sans"/>
-              </a:rPr>
-              <a:t>学習・開発と新旧テスト、空欄IDの正解対応を配布し、CLUE 1.1へのテスト切替えを説明する。</a:t>
-            </a:r>
-          </a:p>
-          <a:p>
-            <a:pPr algn="l">
-              <a:lnSpc>
-                <a:spcPct val="114000"/>
-              </a:lnSpc>
-              <a:spcBef>
-                <a:spcPts val="0"/>
-              </a:spcBef>
-              <a:spcAft>
-                <a:spcPts val="0"/>
-              </a:spcAft>
-              <a:buNone/>
-              <a:defRPr sz="1050" b="0">
-                <a:solidFill>
-                  <a:srgbClr val="303437"/>
-                </a:solidFill>
-                <a:latin typeface="Noto Sans"/>
-              </a:defRPr>
-            </a:pPr>
-            <a:r>
-              <a:rPr sz="1050" b="0" lang="ja-JP" altLang="en-US">
-                <a:solidFill>
-                  <a:srgbClr val="626669"/>
-                </a:solidFill>
-                <a:latin typeface="Noto Sans"/>
-                <a:ea typeface="Noto Sans CJK JP"/>
-                <a:cs typeface="Noto Sans"/>
-                <a:hlinkClick r:id="rId3"/>
-              </a:rPr>
-              <a:t>https://storage.googleapis.com/cluebenchmark/tasks/chid_public.zip</a:t>
-            </a:r>
-          </a:p>
-        </p:txBody>
-      </p:sp>
-    </p:spTree>
-  </p:cSld>
-  <p:clrMapOvr>
-    <a:masterClrMapping/>
-  </p:clrMapOvr>
-</p:sld>
-</file>
-
-<file path=ppt/slides/slide56.xml><?xml version="1.0" encoding="utf-8"?>
-<p:sld xmlns:a="http://schemas.openxmlformats.org/drawingml/2006/main" xmlns:p="http://schemas.openxmlformats.org/presentationml/2006/main" xmlns:r="http://schemas.openxmlformats.org/officeDocument/2006/relationships">
-  <p:cSld>
-    <p:spTree>
-      <p:nvGrpSpPr>
-        <p:cNvPr id="1" name=""/>
-        <p:cNvGrpSpPr/>
-        <p:nvPr/>
-      </p:nvGrpSpPr>
-      <p:grpSpPr/>
-      <p:sp>
-        <p:nvSpPr>
-          <p:cNvPr id="2" name="Title 1"/>
-          <p:cNvSpPr>
-            <a:spLocks noGrp="1"/>
-          </p:cNvSpPr>
-          <p:nvPr>
-            <p:ph type="title"/>
-          </p:nvPr>
-        </p:nvSpPr>
-        <p:spPr>
-          <a:xfrm>
-            <a:off x="468172" y="650138"/>
-            <a:ext cx="8206740" cy="616305"/>
-          </a:xfrm>
-        </p:spPr>
-        <p:txBody>
-          <a:bodyPr wrap="square" lIns="0" rIns="0" tIns="0" bIns="0">
-            <a:noAutofit/>
-          </a:bodyPr>
-          <a:lstStyle/>
-          <a:p>
-            <a:pPr algn="l">
-              <a:lnSpc>
-                <a:spcPct val="110000"/>
-              </a:lnSpc>
-              <a:buNone/>
-              <a:defRPr sz="2800" b="0">
-                <a:solidFill>
-                  <a:srgbClr val="303437"/>
-                </a:solidFill>
-                <a:latin typeface="Noto Sans"/>
-              </a:defRPr>
-            </a:pPr>
-            <a:r>
-              <a:rPr sz="2800" b="1" lang="ja-JP" altLang="en-US">
-                <a:solidFill>
-                  <a:srgbClr val="303437"/>
-                </a:solidFill>
-                <a:latin typeface="Noto Sans"/>
-                <a:ea typeface="Noto Sans CJK JP"/>
-                <a:cs typeface="Noto Sans"/>
-              </a:rPr>
-              <a:t>参考文献</a:t>
-            </a:r>
-          </a:p>
-        </p:txBody>
-      </p:sp>
-      <p:sp>
-        <p:nvSpPr>
-          <p:cNvPr id="3" name="Title 2"/>
-          <p:cNvSpPr>
-            <a:spLocks noGrp="1"/>
-          </p:cNvSpPr>
-          <p:nvPr>
-            <p:ph type="title" idx="2"/>
-          </p:nvPr>
-        </p:nvSpPr>
-        <p:spPr>
-          <a:xfrm>
-            <a:off x="75895" y="0"/>
-            <a:ext cx="8115300" cy="480060"/>
-          </a:xfrm>
-        </p:spPr>
-        <p:txBody>
-          <a:bodyPr wrap="square" lIns="0" rIns="0" tIns="0" bIns="0" anchor="ctr">
-            <a:noAutofit/>
-          </a:bodyPr>
-          <a:lstStyle/>
-          <a:p>
-            <a:pPr algn="l">
-              <a:lnSpc>
-                <a:spcPct val="110000"/>
-              </a:lnSpc>
-              <a:buNone/>
-              <a:defRPr sz="1400" b="0">
-                <a:solidFill>
-                  <a:srgbClr val="303437"/>
-                </a:solidFill>
-                <a:latin typeface="Noto Sans"/>
-              </a:defRPr>
-            </a:pPr>
-            <a:r>
-              <a:rPr sz="1400" b="1" lang="ja-JP" altLang="en-US">
-                <a:solidFill>
-                  <a:srgbClr val="FFFEF8"/>
-                </a:solidFill>
-                <a:latin typeface="Noto Sans"/>
-                <a:ea typeface="Noto Sans CJK JP"/>
-                <a:cs typeface="Noto Sans"/>
-              </a:rPr>
-              <a:t>Appendix: 3. 参考文献</a:t>
-            </a:r>
-          </a:p>
-        </p:txBody>
-      </p:sp>
-      <p:sp>
-        <p:nvSpPr>
-          <p:cNvPr id="4" name="文献 1: FewCLUE: A Chinese Few-shot Learning Evaluation Benchmark"/>
-          <p:cNvSpPr txBox="1"/>
-          <p:nvPr/>
-        </p:nvSpPr>
-        <p:spPr>
-          <a:xfrm>
-            <a:off x="548640" y="1463040"/>
-            <a:ext cx="8046720" cy="1574419"/>
-          </a:xfrm>
-          <a:prstGeom prst="rect">
-            <a:avLst/>
-          </a:prstGeom>
-          <a:noFill/>
-        </p:spPr>
-        <p:txBody>
-          <a:bodyPr wrap="square" lIns="0" rIns="0" tIns="0" bIns="0">
-            <a:noAutofit/>
-          </a:bodyPr>
-          <a:lstStyle/>
-          <a:p>
-            <a:pPr algn="l">
-              <a:lnSpc>
-                <a:spcPct val="114000"/>
-              </a:lnSpc>
-              <a:spcBef>
-                <a:spcPts val="0"/>
-              </a:spcBef>
-              <a:spcAft>
-                <a:spcPts val="400"/>
-              </a:spcAft>
-              <a:buNone/>
-              <a:defRPr sz="1850" b="0">
-                <a:solidFill>
-                  <a:srgbClr val="303437"/>
-                </a:solidFill>
-                <a:latin typeface="Noto Sans"/>
-              </a:defRPr>
-            </a:pPr>
-            <a:r>
-              <a:rPr sz="1850" b="1" lang="ja-JP" altLang="en-US">
-                <a:solidFill>
-                  <a:srgbClr val="303437"/>
-                </a:solidFill>
-                <a:latin typeface="Noto Sans"/>
-                <a:ea typeface="Noto Sans CJK JP"/>
-                <a:cs typeface="Noto Sans"/>
-              </a:rPr>
-              <a:t>FewCLUE: A Chinese Few-shot Learning Evaluation Benchmark</a:t>
-            </a:r>
-          </a:p>
-          <a:p>
-            <a:pPr algn="l">
-              <a:lnSpc>
-                <a:spcPct val="114000"/>
-              </a:lnSpc>
-              <a:spcBef>
-                <a:spcPts val="0"/>
-              </a:spcBef>
-              <a:spcAft>
-                <a:spcPts val="500"/>
-              </a:spcAft>
-              <a:buNone/>
-              <a:defRPr sz="1250" b="0">
-                <a:solidFill>
-                  <a:srgbClr val="303437"/>
-                </a:solidFill>
-                <a:latin typeface="Noto Sans"/>
-              </a:defRPr>
-            </a:pPr>
-            <a:r>
-              <a:rPr sz="1250" b="0" lang="ja-JP" altLang="en-US">
-                <a:solidFill>
-                  <a:srgbClr val="626669"/>
-                </a:solidFill>
-                <a:latin typeface="Noto Sans"/>
-                <a:ea typeface="Noto Sans CJK JP"/>
-                <a:cs typeface="Noto Sans"/>
-              </a:rPr>
-              <a:t>Liang Xu et al. · 2021 · arXiv:2107.07498v2</a:t>
-            </a:r>
-          </a:p>
-          <a:p>
-            <a:pPr algn="l">
-              <a:lnSpc>
-                <a:spcPct val="114000"/>
-              </a:lnSpc>
-              <a:spcBef>
-                <a:spcPts val="0"/>
-              </a:spcBef>
-              <a:spcAft>
-                <a:spcPts val="400"/>
-              </a:spcAft>
-              <a:buNone/>
-              <a:defRPr sz="1750" b="0">
-                <a:solidFill>
-                  <a:srgbClr val="303437"/>
-                </a:solidFill>
-                <a:latin typeface="Noto Sans"/>
-              </a:defRPr>
-            </a:pPr>
-            <a:r>
-              <a:rPr sz="1750" b="0" lang="ja-JP" altLang="en-US">
-                <a:solidFill>
-                  <a:srgbClr val="303437"/>
-                </a:solidFill>
-                <a:latin typeface="Noto Sans"/>
-                <a:ea typeface="Noto Sans CJK JP"/>
-                <a:cs typeface="Noto Sans"/>
-              </a:rPr>
-              <a:t>九つの中国語課題による少数例学習評価。ChIDには正解位置ごとに六問、合計42問の学習・開発組を用意する。</a:t>
-            </a:r>
-          </a:p>
-          <a:p>
-            <a:pPr algn="l">
-              <a:lnSpc>
-                <a:spcPct val="114000"/>
-              </a:lnSpc>
-              <a:spcBef>
-                <a:spcPts val="0"/>
-              </a:spcBef>
-              <a:spcAft>
-                <a:spcPts val="0"/>
-              </a:spcAft>
-              <a:buNone/>
-              <a:defRPr sz="1050" b="0">
-                <a:solidFill>
-                  <a:srgbClr val="303437"/>
-                </a:solidFill>
-                <a:latin typeface="Noto Sans"/>
-              </a:defRPr>
-            </a:pPr>
-            <a:r>
-              <a:rPr sz="1050" b="0" lang="ja-JP" altLang="en-US">
-                <a:solidFill>
-                  <a:srgbClr val="626669"/>
-                </a:solidFill>
-                <a:latin typeface="Noto Sans"/>
-                <a:ea typeface="Noto Sans CJK JP"/>
-                <a:cs typeface="Noto Sans"/>
-                <a:hlinkClick r:id="rId2"/>
-              </a:rPr>
-              <a:t>https://arxiv.org/abs/2107.07498</a:t>
-            </a:r>
-          </a:p>
-        </p:txBody>
-      </p:sp>
-      <p:sp>
-        <p:nvSpPr>
-          <p:cNvPr id="5" name="文献 2: FewCLUE — ChID Data"/>
-          <p:cNvSpPr txBox="1"/>
-          <p:nvPr/>
-        </p:nvSpPr>
-        <p:spPr>
-          <a:xfrm>
-            <a:off x="548640" y="3040507"/>
-            <a:ext cx="8046720" cy="1574419"/>
-          </a:xfrm>
-          <a:prstGeom prst="rect">
-            <a:avLst/>
-          </a:prstGeom>
-          <a:noFill/>
-        </p:spPr>
-        <p:txBody>
-          <a:bodyPr wrap="square" lIns="0" rIns="0" tIns="0" bIns="0">
-            <a:noAutofit/>
-          </a:bodyPr>
-          <a:lstStyle/>
-          <a:p>
-            <a:pPr algn="l">
-              <a:lnSpc>
-                <a:spcPct val="114000"/>
-              </a:lnSpc>
-              <a:spcBef>
-                <a:spcPts val="0"/>
-              </a:spcBef>
-              <a:spcAft>
-                <a:spcPts val="400"/>
-              </a:spcAft>
-              <a:buNone/>
-              <a:defRPr sz="1850" b="0">
-                <a:solidFill>
-                  <a:srgbClr val="303437"/>
-                </a:solidFill>
-                <a:latin typeface="Noto Sans"/>
-              </a:defRPr>
-            </a:pPr>
-            <a:r>
-              <a:rPr sz="1850" b="1" lang="ja-JP" altLang="en-US">
-                <a:solidFill>
-                  <a:srgbClr val="303437"/>
-                </a:solidFill>
-                <a:latin typeface="Noto Sans"/>
-                <a:ea typeface="Noto Sans CJK JP"/>
-                <a:cs typeface="Noto Sans"/>
-              </a:rPr>
-              <a:t>FewCLUE — ChID Data</a:t>
-            </a:r>
-          </a:p>
-          <a:p>
-            <a:pPr algn="l">
-              <a:lnSpc>
-                <a:spcPct val="114000"/>
-              </a:lnSpc>
-              <a:spcBef>
-                <a:spcPts val="0"/>
-              </a:spcBef>
-              <a:spcAft>
-                <a:spcPts val="500"/>
-              </a:spcAft>
-              <a:buNone/>
-              <a:defRPr sz="1250" b="0">
-                <a:solidFill>
-                  <a:srgbClr val="303437"/>
-                </a:solidFill>
-                <a:latin typeface="Noto Sans"/>
-              </a:defRPr>
-            </a:pPr>
-            <a:r>
-              <a:rPr sz="1250" b="0" lang="ja-JP" altLang="en-US">
-                <a:solidFill>
-                  <a:srgbClr val="626669"/>
-                </a:solidFill>
-                <a:latin typeface="Noto Sans"/>
-                <a:ea typeface="Noto Sans CJK JP"/>
-                <a:cs typeface="Noto Sans"/>
-              </a:rPr>
-              <a:t>CLUE team</a:t>
-            </a:r>
-          </a:p>
-          <a:p>
-            <a:pPr algn="l">
-              <a:lnSpc>
-                <a:spcPct val="114000"/>
-              </a:lnSpc>
-              <a:spcBef>
-                <a:spcPts val="0"/>
-              </a:spcBef>
-              <a:spcAft>
-                <a:spcPts val="400"/>
-              </a:spcAft>
-              <a:buNone/>
-              <a:defRPr sz="1750" b="0">
-                <a:solidFill>
-                  <a:srgbClr val="303437"/>
-                </a:solidFill>
-                <a:latin typeface="Noto Sans"/>
-              </a:defRPr>
-            </a:pPr>
-            <a:r>
-              <a:rPr sz="1750" b="0" lang="ja-JP" altLang="en-US">
-                <a:solidFill>
-                  <a:srgbClr val="303437"/>
-                </a:solidFill>
-                <a:latin typeface="Noto Sans"/>
-                <a:ea typeface="Noto Sans CJK JP"/>
-                <a:cs typeface="Noto Sans"/>
-              </a:rPr>
-              <a:t>一空欄・七候補の15ファイル。CLEVA紙面とHELM説明に一致する公開問題を含む。</a:t>
-            </a:r>
-          </a:p>
-          <a:p>
-            <a:pPr algn="l">
-              <a:lnSpc>
-                <a:spcPct val="114000"/>
-              </a:lnSpc>
-              <a:spcBef>
-                <a:spcPts val="0"/>
-              </a:spcBef>
-              <a:spcAft>
-                <a:spcPts val="0"/>
-              </a:spcAft>
-              <a:buNone/>
-              <a:defRPr sz="1050" b="0">
-                <a:solidFill>
-                  <a:srgbClr val="303437"/>
-                </a:solidFill>
-                <a:latin typeface="Noto Sans"/>
-              </a:defRPr>
-            </a:pPr>
-            <a:r>
-              <a:rPr sz="1050" b="0" lang="ja-JP" altLang="en-US">
-                <a:solidFill>
-                  <a:srgbClr val="626669"/>
-                </a:solidFill>
-                <a:latin typeface="Noto Sans"/>
-                <a:ea typeface="Noto Sans CJK JP"/>
-                <a:cs typeface="Noto Sans"/>
-                <a:hlinkClick r:id="rId3"/>
-              </a:rPr>
-              <a:t>https://github.com/CLUEbenchmark/FewCLUE/tree/main/datasets/chid</a:t>
-            </a:r>
-          </a:p>
-        </p:txBody>
-      </p:sp>
-    </p:spTree>
-  </p:cSld>
-  <p:clrMapOvr>
-    <a:masterClrMapping/>
-  </p:clrMapOvr>
-</p:sld>
-</file>
-
-<file path=ppt/slides/slide57.xml><?xml version="1.0" encoding="utf-8"?>
-<p:sld xmlns:a="http://schemas.openxmlformats.org/drawingml/2006/main" xmlns:p="http://schemas.openxmlformats.org/presentationml/2006/main" xmlns:r="http://schemas.openxmlformats.org/officeDocument/2006/relationships">
-  <p:cSld>
-    <p:spTree>
-      <p:nvGrpSpPr>
-        <p:cNvPr id="1" name=""/>
-        <p:cNvGrpSpPr/>
-        <p:nvPr/>
-      </p:nvGrpSpPr>
-      <p:grpSpPr/>
-      <p:sp>
-        <p:nvSpPr>
-          <p:cNvPr id="2" name="Title 1"/>
-          <p:cNvSpPr>
-            <a:spLocks noGrp="1"/>
-          </p:cNvSpPr>
-          <p:nvPr>
-            <p:ph type="title"/>
-          </p:nvPr>
-        </p:nvSpPr>
-        <p:spPr>
-          <a:xfrm>
-            <a:off x="468172" y="650138"/>
-            <a:ext cx="8206740" cy="616305"/>
-          </a:xfrm>
-        </p:spPr>
-        <p:txBody>
-          <a:bodyPr wrap="square" lIns="0" rIns="0" tIns="0" bIns="0">
-            <a:noAutofit/>
-          </a:bodyPr>
-          <a:lstStyle/>
-          <a:p>
-            <a:pPr algn="l">
-              <a:lnSpc>
-                <a:spcPct val="110000"/>
-              </a:lnSpc>
-              <a:buNone/>
-              <a:defRPr sz="2800" b="0">
-                <a:solidFill>
-                  <a:srgbClr val="303437"/>
-                </a:solidFill>
-                <a:latin typeface="Noto Sans"/>
-              </a:defRPr>
-            </a:pPr>
-            <a:r>
-              <a:rPr sz="2800" b="1" lang="ja-JP" altLang="en-US">
-                <a:solidFill>
-                  <a:srgbClr val="303437"/>
-                </a:solidFill>
-                <a:latin typeface="Noto Sans"/>
-                <a:ea typeface="Noto Sans CJK JP"/>
-                <a:cs typeface="Noto Sans"/>
-              </a:rPr>
-              <a:t>参考文献</a:t>
-            </a:r>
-          </a:p>
-        </p:txBody>
-      </p:sp>
-      <p:sp>
-        <p:nvSpPr>
-          <p:cNvPr id="3" name="Title 2"/>
-          <p:cNvSpPr>
-            <a:spLocks noGrp="1"/>
-          </p:cNvSpPr>
-          <p:nvPr>
-            <p:ph type="title" idx="2"/>
-          </p:nvPr>
-        </p:nvSpPr>
-        <p:spPr>
-          <a:xfrm>
-            <a:off x="75895" y="0"/>
-            <a:ext cx="8115300" cy="480060"/>
-          </a:xfrm>
-        </p:spPr>
-        <p:txBody>
-          <a:bodyPr wrap="square" lIns="0" rIns="0" tIns="0" bIns="0" anchor="ctr">
-            <a:noAutofit/>
-          </a:bodyPr>
-          <a:lstStyle/>
-          <a:p>
-            <a:pPr algn="l">
-              <a:lnSpc>
-                <a:spcPct val="110000"/>
-              </a:lnSpc>
-              <a:buNone/>
-              <a:defRPr sz="1400" b="0">
-                <a:solidFill>
-                  <a:srgbClr val="303437"/>
-                </a:solidFill>
-                <a:latin typeface="Noto Sans"/>
-              </a:defRPr>
-            </a:pPr>
-            <a:r>
-              <a:rPr sz="1400" b="1" lang="ja-JP" altLang="en-US">
-                <a:solidFill>
-                  <a:srgbClr val="FFFEF8"/>
-                </a:solidFill>
-                <a:latin typeface="Noto Sans"/>
-                <a:ea typeface="Noto Sans CJK JP"/>
-                <a:cs typeface="Noto Sans"/>
-              </a:rPr>
-              <a:t>Appendix: 3. 参考文献</a:t>
-            </a:r>
-          </a:p>
-        </p:txBody>
-      </p:sp>
-      <p:sp>
-        <p:nvSpPr>
-          <p:cNvPr id="4" name="文献 1: CLEVA: Chinese Language Models EVAluation Platform"/>
-          <p:cNvSpPr txBox="1"/>
-          <p:nvPr/>
-        </p:nvSpPr>
-        <p:spPr>
-          <a:xfrm>
-            <a:off x="548640" y="1463040"/>
-            <a:ext cx="8046720" cy="1574419"/>
-          </a:xfrm>
-          <a:prstGeom prst="rect">
-            <a:avLst/>
-          </a:prstGeom>
-          <a:noFill/>
-        </p:spPr>
-        <p:txBody>
-          <a:bodyPr wrap="square" lIns="0" rIns="0" tIns="0" bIns="0">
-            <a:noAutofit/>
-          </a:bodyPr>
-          <a:lstStyle/>
-          <a:p>
-            <a:pPr algn="l">
-              <a:lnSpc>
-                <a:spcPct val="114000"/>
-              </a:lnSpc>
-              <a:spcBef>
-                <a:spcPts val="0"/>
-              </a:spcBef>
-              <a:spcAft>
-                <a:spcPts val="400"/>
-              </a:spcAft>
-              <a:buNone/>
-              <a:defRPr sz="1850" b="0">
-                <a:solidFill>
-                  <a:srgbClr val="303437"/>
-                </a:solidFill>
-                <a:latin typeface="Noto Sans"/>
-              </a:defRPr>
-            </a:pPr>
-            <a:r>
-              <a:rPr sz="1850" b="1" lang="ja-JP" altLang="en-US">
-                <a:solidFill>
-                  <a:srgbClr val="303437"/>
-                </a:solidFill>
-                <a:latin typeface="Noto Sans"/>
-                <a:ea typeface="Noto Sans CJK JP"/>
-                <a:cs typeface="Noto Sans"/>
-              </a:rPr>
-              <a:t>CLEVA: Chinese Language Models EVAluation Platform</a:t>
-            </a:r>
-          </a:p>
-          <a:p>
-            <a:pPr algn="l">
-              <a:lnSpc>
-                <a:spcPct val="114000"/>
-              </a:lnSpc>
-              <a:spcBef>
-                <a:spcPts val="0"/>
-              </a:spcBef>
-              <a:spcAft>
-                <a:spcPts val="500"/>
-              </a:spcAft>
-              <a:buNone/>
-              <a:defRPr sz="1250" b="0">
-                <a:solidFill>
-                  <a:srgbClr val="303437"/>
-                </a:solidFill>
-                <a:latin typeface="Noto Sans"/>
-              </a:defRPr>
-            </a:pPr>
-            <a:r>
-              <a:rPr sz="1250" b="0" lang="ja-JP" altLang="en-US">
-                <a:solidFill>
-                  <a:srgbClr val="626669"/>
-                </a:solidFill>
-                <a:latin typeface="Noto Sans"/>
-                <a:ea typeface="Noto Sans CJK JP"/>
-                <a:cs typeface="Noto Sans"/>
-              </a:rPr>
-              <a:t>Yanyang Li et al. · 2023 · EMNLP: System Demonstrations</a:t>
-            </a:r>
-          </a:p>
-          <a:p>
-            <a:pPr algn="l">
-              <a:lnSpc>
-                <a:spcPct val="114000"/>
-              </a:lnSpc>
-              <a:spcBef>
-                <a:spcPts val="0"/>
-              </a:spcBef>
-              <a:spcAft>
-                <a:spcPts val="400"/>
-              </a:spcAft>
-              <a:buNone/>
-              <a:defRPr sz="1750" b="0">
-                <a:solidFill>
-                  <a:srgbClr val="303437"/>
-                </a:solidFill>
-                <a:latin typeface="Noto Sans"/>
-              </a:defRPr>
-            </a:pPr>
-            <a:r>
-              <a:rPr sz="1750" b="0" lang="ja-JP" altLang="en-US">
-                <a:solidFill>
-                  <a:srgbClr val="303437"/>
-                </a:solidFill>
-                <a:latin typeface="Noto Sans"/>
-                <a:ea typeface="Noto Sans CJK JP"/>
-                <a:cs typeface="Noto Sans"/>
-              </a:rPr>
-              <a:t>文化知識の課題にChIDの成語問題を採用する。公開紙面は三候補の問題例と正解を示す。</a:t>
-            </a:r>
-          </a:p>
-          <a:p>
-            <a:pPr algn="l">
-              <a:lnSpc>
-                <a:spcPct val="114000"/>
-              </a:lnSpc>
-              <a:spcBef>
-                <a:spcPts val="0"/>
-              </a:spcBef>
-              <a:spcAft>
-                <a:spcPts val="0"/>
-              </a:spcAft>
-              <a:buNone/>
-              <a:defRPr sz="1050" b="0">
-                <a:solidFill>
-                  <a:srgbClr val="303437"/>
-                </a:solidFill>
-                <a:latin typeface="Noto Sans"/>
-              </a:defRPr>
-            </a:pPr>
-            <a:r>
-              <a:rPr sz="1050" b="0" lang="ja-JP" altLang="en-US">
-                <a:solidFill>
-                  <a:srgbClr val="626669"/>
-                </a:solidFill>
-                <a:latin typeface="Noto Sans"/>
-                <a:ea typeface="Noto Sans CJK JP"/>
-                <a:cs typeface="Noto Sans"/>
-                <a:hlinkClick r:id="rId2"/>
-              </a:rPr>
-              <a:t>https://aclanthology.org/2023.emnlp-demo.17/</a:t>
-            </a:r>
-          </a:p>
-        </p:txBody>
-      </p:sp>
-      <p:sp>
-        <p:nvSpPr>
-          <p:cNvPr id="5" name="文献 2: CLEVACulturalKnowledgeScenario / Converter"/>
-          <p:cNvSpPr txBox="1"/>
-          <p:nvPr/>
-        </p:nvSpPr>
-        <p:spPr>
-          <a:xfrm>
-            <a:off x="548640" y="3040507"/>
-            <a:ext cx="8046720" cy="1574419"/>
-          </a:xfrm>
-          <a:prstGeom prst="rect">
-            <a:avLst/>
-          </a:prstGeom>
-          <a:noFill/>
-        </p:spPr>
-        <p:txBody>
-          <a:bodyPr wrap="square" lIns="0" rIns="0" tIns="0" bIns="0">
-            <a:noAutofit/>
-          </a:bodyPr>
-          <a:lstStyle/>
-          <a:p>
-            <a:pPr algn="l">
-              <a:lnSpc>
-                <a:spcPct val="114000"/>
-              </a:lnSpc>
-              <a:spcBef>
-                <a:spcPts val="0"/>
-              </a:spcBef>
-              <a:spcAft>
-                <a:spcPts val="400"/>
-              </a:spcAft>
-              <a:buNone/>
-              <a:defRPr sz="1850" b="0">
-                <a:solidFill>
-                  <a:srgbClr val="303437"/>
-                </a:solidFill>
-                <a:latin typeface="Noto Sans"/>
-              </a:defRPr>
-            </a:pPr>
-            <a:r>
-              <a:rPr sz="1850" b="1" lang="ja-JP" altLang="en-US">
-                <a:solidFill>
-                  <a:srgbClr val="303437"/>
-                </a:solidFill>
-                <a:latin typeface="Noto Sans"/>
-                <a:ea typeface="Noto Sans CJK JP"/>
-                <a:cs typeface="Noto Sans"/>
-              </a:rPr>
-              <a:t>CLEVACulturalKnowledgeScenario / Converter</a:t>
-            </a:r>
-          </a:p>
-          <a:p>
-            <a:pPr algn="l">
-              <a:lnSpc>
-                <a:spcPct val="114000"/>
-              </a:lnSpc>
-              <a:spcBef>
-                <a:spcPts val="0"/>
-              </a:spcBef>
-              <a:spcAft>
-                <a:spcPts val="500"/>
-              </a:spcAft>
-              <a:buNone/>
-              <a:defRPr sz="1250" b="0">
-                <a:solidFill>
-                  <a:srgbClr val="303437"/>
-                </a:solidFill>
-                <a:latin typeface="Noto Sans"/>
-              </a:defRPr>
-            </a:pPr>
-            <a:r>
-              <a:rPr sz="1250" b="0" lang="ja-JP" altLang="en-US">
-                <a:solidFill>
-                  <a:srgbClr val="626669"/>
-                </a:solidFill>
-                <a:latin typeface="Noto Sans"/>
-                <a:ea typeface="Noto Sans CJK JP"/>
-                <a:cs typeface="Noto Sans"/>
-              </a:rPr>
-              <a:t>Stanford CRFM · HELM v0.4.0 · Python実装</a:t>
-            </a:r>
-          </a:p>
-          <a:p>
-            <a:pPr algn="l">
-              <a:lnSpc>
-                <a:spcPct val="114000"/>
-              </a:lnSpc>
-              <a:spcBef>
-                <a:spcPts val="0"/>
-              </a:spcBef>
-              <a:spcAft>
-                <a:spcPts val="400"/>
-              </a:spcAft>
-              <a:buNone/>
-              <a:defRPr sz="1750" b="0">
-                <a:solidFill>
-                  <a:srgbClr val="303437"/>
-                </a:solidFill>
-                <a:latin typeface="Noto Sans"/>
-              </a:defRPr>
-            </a:pPr>
-            <a:r>
-              <a:rPr sz="1750" b="0" lang="ja-JP" altLang="en-US">
-                <a:solidFill>
-                  <a:srgbClr val="303437"/>
-                </a:solidFill>
-                <a:latin typeface="Noto Sans"/>
-                <a:ea typeface="Noto Sans CJK JP"/>
-                <a:cs typeface="Noto Sans"/>
-              </a:rPr>
-              <a:t>文化知識の課題に対し、外部データとテンプレートを読み、入力・選択肢・正解参照へ変換する。</a:t>
-            </a:r>
-          </a:p>
-          <a:p>
-            <a:pPr algn="l">
-              <a:lnSpc>
-                <a:spcPct val="114000"/>
-              </a:lnSpc>
-              <a:spcBef>
-                <a:spcPts val="0"/>
-              </a:spcBef>
-              <a:spcAft>
-                <a:spcPts val="0"/>
-              </a:spcAft>
-              <a:buNone/>
-              <a:defRPr sz="1050" b="0">
-                <a:solidFill>
-                  <a:srgbClr val="303437"/>
-                </a:solidFill>
-                <a:latin typeface="Noto Sans"/>
-              </a:defRPr>
-            </a:pPr>
-            <a:r>
-              <a:rPr sz="1050" b="0" lang="ja-JP" altLang="en-US">
-                <a:solidFill>
-                  <a:srgbClr val="626669"/>
-                </a:solidFill>
-                <a:latin typeface="Noto Sans"/>
-                <a:ea typeface="Noto Sans CJK JP"/>
-                <a:cs typeface="Noto Sans"/>
-                <a:hlinkClick r:id="rId3"/>
-              </a:rPr>
-              <a:t>https://github.com/stanford-crfm/helm/blob/v0.4.0/src/helm/benchmark/scenarios/cleva_scenario.py</a:t>
-            </a:r>
-          </a:p>
-        </p:txBody>
-      </p:sp>
-    </p:spTree>
-  </p:cSld>
-  <p:clrMapOvr>
-    <a:masterClrMapping/>
-  </p:clrMapOvr>
-</p:sld>
-</file>
-
-<file path=ppt/slides/slide58.xml><?xml version="1.0" encoding="utf-8"?>
-<p:sld xmlns:a="http://schemas.openxmlformats.org/drawingml/2006/main" xmlns:p="http://schemas.openxmlformats.org/presentationml/2006/main" xmlns:r="http://schemas.openxmlformats.org/officeDocument/2006/relationships">
-  <p:cSld>
-    <p:spTree>
-      <p:nvGrpSpPr>
-        <p:cNvPr id="1" name=""/>
-        <p:cNvGrpSpPr/>
-        <p:nvPr/>
-      </p:nvGrpSpPr>
-      <p:grpSpPr/>
-      <p:sp>
-        <p:nvSpPr>
-          <p:cNvPr id="2" name="Title 1"/>
-          <p:cNvSpPr>
-            <a:spLocks noGrp="1"/>
-          </p:cNvSpPr>
-          <p:nvPr>
-            <p:ph type="title"/>
-          </p:nvPr>
-        </p:nvSpPr>
-        <p:spPr>
-          <a:xfrm>
-            <a:off x="468172" y="650138"/>
-            <a:ext cx="8206740" cy="616305"/>
-          </a:xfrm>
-        </p:spPr>
-        <p:txBody>
-          <a:bodyPr wrap="square" lIns="0" rIns="0" tIns="0" bIns="0">
-            <a:noAutofit/>
-          </a:bodyPr>
-          <a:lstStyle/>
-          <a:p>
-            <a:pPr algn="l">
-              <a:lnSpc>
-                <a:spcPct val="110000"/>
-              </a:lnSpc>
-              <a:buNone/>
-              <a:defRPr sz="2800" b="0">
-                <a:solidFill>
-                  <a:srgbClr val="303437"/>
-                </a:solidFill>
-                <a:latin typeface="Noto Sans"/>
-              </a:defRPr>
-            </a:pPr>
-            <a:r>
-              <a:rPr sz="2800" b="1" lang="ja-JP" altLang="en-US">
-                <a:solidFill>
-                  <a:srgbClr val="303437"/>
-                </a:solidFill>
-                <a:latin typeface="Noto Sans"/>
-                <a:ea typeface="Noto Sans CJK JP"/>
-                <a:cs typeface="Noto Sans"/>
-              </a:rPr>
-              <a:t>参考文献</a:t>
-            </a:r>
-          </a:p>
-        </p:txBody>
-      </p:sp>
-      <p:sp>
-        <p:nvSpPr>
-          <p:cNvPr id="3" name="Title 2"/>
-          <p:cNvSpPr>
-            <a:spLocks noGrp="1"/>
-          </p:cNvSpPr>
-          <p:nvPr>
-            <p:ph type="title" idx="2"/>
-          </p:nvPr>
-        </p:nvSpPr>
-        <p:spPr>
-          <a:xfrm>
-            <a:off x="75895" y="0"/>
-            <a:ext cx="8115300" cy="480060"/>
-          </a:xfrm>
-        </p:spPr>
-        <p:txBody>
-          <a:bodyPr wrap="square" lIns="0" rIns="0" tIns="0" bIns="0" anchor="ctr">
-            <a:noAutofit/>
-          </a:bodyPr>
-          <a:lstStyle/>
-          <a:p>
-            <a:pPr algn="l">
-              <a:lnSpc>
-                <a:spcPct val="110000"/>
-              </a:lnSpc>
-              <a:buNone/>
-              <a:defRPr sz="1400" b="0">
-                <a:solidFill>
-                  <a:srgbClr val="303437"/>
-                </a:solidFill>
-                <a:latin typeface="Noto Sans"/>
-              </a:defRPr>
-            </a:pPr>
-            <a:r>
-              <a:rPr sz="1400" b="1" lang="ja-JP" altLang="en-US">
-                <a:solidFill>
-                  <a:srgbClr val="FFFEF8"/>
-                </a:solidFill>
-                <a:latin typeface="Noto Sans"/>
-                <a:ea typeface="Noto Sans CJK JP"/>
-                <a:cs typeface="Noto Sans"/>
-              </a:rPr>
-              <a:t>Appendix: 3. 参考文献</a:t>
-            </a:r>
-          </a:p>
-        </p:txBody>
-      </p:sp>
-      <p:sp>
-        <p:nvSpPr>
           <p:cNvPr id="5" name="文献 2: Apache License, Version 2.0"/>
           <p:cNvSpPr txBox="1"/>
           <p:nvPr/>
@@ -32075,7 +31104,7 @@
                 <a:ea typeface="Noto Sans CJK JP"/>
                 <a:cs typeface="Noto Sans"/>
               </a:rPr>
-              <a:t>ChID-Dataset · LICENSE</a:t>
+              <a:t>ChID-Dataset (n.d.). LICENSE。参照2026-10-19。</a:t>
             </a:r>
           </a:p>
           <a:p>
